--- a/PRESENTATION.pptx
+++ b/PRESENTATION.pptx
@@ -1707,7 +1707,7 @@
           <a:p>
             <a:fld id="{5BCAD085-E8A6-8845-BD4E-CB4CCA059FC4}" type="datetimeFigureOut">
               <a:rPr lang="en-US" smtClean="0"/>
-              <a:t>5/11/2026</a:t>
+              <a:t>5/12/2026</a:t>
             </a:fld>
             <a:endParaRPr lang="en-US"/>
           </a:p>
@@ -1875,7 +1875,7 @@
           <a:p>
             <a:fld id="{5BCAD085-E8A6-8845-BD4E-CB4CCA059FC4}" type="datetimeFigureOut">
               <a:rPr lang="en-US" smtClean="0"/>
-              <a:t>5/11/2026</a:t>
+              <a:t>5/12/2026</a:t>
             </a:fld>
             <a:endParaRPr lang="en-US"/>
           </a:p>
@@ -2053,7 +2053,7 @@
           <a:p>
             <a:fld id="{5BCAD085-E8A6-8845-BD4E-CB4CCA059FC4}" type="datetimeFigureOut">
               <a:rPr lang="en-US" smtClean="0"/>
-              <a:t>5/11/2026</a:t>
+              <a:t>5/12/2026</a:t>
             </a:fld>
             <a:endParaRPr lang="en-US"/>
           </a:p>
@@ -2221,7 +2221,7 @@
           <a:p>
             <a:fld id="{5BCAD085-E8A6-8845-BD4E-CB4CCA059FC4}" type="datetimeFigureOut">
               <a:rPr lang="en-US" smtClean="0"/>
-              <a:t>5/11/2026</a:t>
+              <a:t>5/12/2026</a:t>
             </a:fld>
             <a:endParaRPr lang="en-US"/>
           </a:p>
@@ -2466,7 +2466,7 @@
           <a:p>
             <a:fld id="{5BCAD085-E8A6-8845-BD4E-CB4CCA059FC4}" type="datetimeFigureOut">
               <a:rPr lang="en-US" smtClean="0"/>
-              <a:t>5/11/2026</a:t>
+              <a:t>5/12/2026</a:t>
             </a:fld>
             <a:endParaRPr lang="en-US"/>
           </a:p>
@@ -2751,7 +2751,7 @@
           <a:p>
             <a:fld id="{5BCAD085-E8A6-8845-BD4E-CB4CCA059FC4}" type="datetimeFigureOut">
               <a:rPr lang="en-US" smtClean="0"/>
-              <a:t>5/11/2026</a:t>
+              <a:t>5/12/2026</a:t>
             </a:fld>
             <a:endParaRPr lang="en-US"/>
           </a:p>
@@ -3170,7 +3170,7 @@
           <a:p>
             <a:fld id="{5BCAD085-E8A6-8845-BD4E-CB4CCA059FC4}" type="datetimeFigureOut">
               <a:rPr lang="en-US" smtClean="0"/>
-              <a:t>5/11/2026</a:t>
+              <a:t>5/12/2026</a:t>
             </a:fld>
             <a:endParaRPr lang="en-US"/>
           </a:p>
@@ -3287,7 +3287,7 @@
           <a:p>
             <a:fld id="{5BCAD085-E8A6-8845-BD4E-CB4CCA059FC4}" type="datetimeFigureOut">
               <a:rPr lang="en-US" smtClean="0"/>
-              <a:t>5/11/2026</a:t>
+              <a:t>5/12/2026</a:t>
             </a:fld>
             <a:endParaRPr lang="en-US"/>
           </a:p>
@@ -3382,7 +3382,7 @@
           <a:p>
             <a:fld id="{5BCAD085-E8A6-8845-BD4E-CB4CCA059FC4}" type="datetimeFigureOut">
               <a:rPr lang="en-US" smtClean="0"/>
-              <a:t>5/11/2026</a:t>
+              <a:t>5/12/2026</a:t>
             </a:fld>
             <a:endParaRPr lang="en-US"/>
           </a:p>
@@ -3657,7 +3657,7 @@
           <a:p>
             <a:fld id="{5BCAD085-E8A6-8845-BD4E-CB4CCA059FC4}" type="datetimeFigureOut">
               <a:rPr lang="en-US" smtClean="0"/>
-              <a:t>5/11/2026</a:t>
+              <a:t>5/12/2026</a:t>
             </a:fld>
             <a:endParaRPr lang="en-US"/>
           </a:p>
@@ -3909,7 +3909,7 @@
           <a:p>
             <a:fld id="{5BCAD085-E8A6-8845-BD4E-CB4CCA059FC4}" type="datetimeFigureOut">
               <a:rPr lang="en-US" smtClean="0"/>
-              <a:t>5/11/2026</a:t>
+              <a:t>5/12/2026</a:t>
             </a:fld>
             <a:endParaRPr lang="en-US"/>
           </a:p>
@@ -4120,7 +4120,7 @@
           <a:p>
             <a:fld id="{5BCAD085-E8A6-8845-BD4E-CB4CCA059FC4}" type="datetimeFigureOut">
               <a:rPr lang="en-US" smtClean="0"/>
-              <a:t>5/11/2026</a:t>
+              <a:t>5/12/2026</a:t>
             </a:fld>
             <a:endParaRPr lang="en-US"/>
           </a:p>
@@ -4953,7 +4953,7 @@
         <p:spPr>
           <a:xfrm>
             <a:off x="640080" y="4297680"/>
-            <a:ext cx="10972800" cy="2468880"/>
+            <a:ext cx="10972800" cy="2518638"/>
           </a:xfrm>
           <a:prstGeom prst="rect">
             <a:avLst/>
@@ -4972,13 +4972,18 @@
               </a:spcAft>
             </a:pPr>
             <a:r>
-              <a:rPr sz="1400">
+              <a:rPr sz="1400" dirty="0">
                 <a:solidFill>
                   <a:srgbClr val="1A1A1A"/>
                 </a:solidFill>
               </a:rPr>
-              <a:t>ROC AUC of 0.82 is the headline:  given a positive + negative pair,</a:t>
-            </a:r>
+              <a:t>ROC AUC of 0.82:</a:t>
+            </a:r>
+            <a:endParaRPr lang="en-US" sz="1400" dirty="0">
+              <a:solidFill>
+                <a:srgbClr val="1A1A1A"/>
+              </a:solidFill>
+            </a:endParaRPr>
           </a:p>
           <a:p>
             <a:pPr>
@@ -4987,12 +4992,20 @@
               </a:spcAft>
             </a:pPr>
             <a:r>
-              <a:rPr sz="1400">
+              <a:rPr lang="en-US" sz="1400" dirty="0">
                 <a:solidFill>
                   <a:srgbClr val="1A1A1A"/>
                 </a:solidFill>
               </a:rPr>
-              <a:t>the model ranks the positive higher 82 % of the time.</a:t>
+              <a:t>G</a:t>
+            </a:r>
+            <a:r>
+              <a:rPr sz="1400" dirty="0">
+                <a:solidFill>
+                  <a:srgbClr val="1A1A1A"/>
+                </a:solidFill>
+              </a:rPr>
+              <a:t>iven a positive + negative pair,</a:t>
             </a:r>
           </a:p>
           <a:p>
@@ -5002,7 +5015,12 @@
               </a:spcAft>
             </a:pPr>
             <a:r>
-              <a:t> </a:t>
+              <a:rPr sz="1400" dirty="0">
+                <a:solidFill>
+                  <a:srgbClr val="1A1A1A"/>
+                </a:solidFill>
+              </a:rPr>
+              <a:t>the model ranks the positive higher 82 % of the time.</a:t>
             </a:r>
           </a:p>
           <a:p>
@@ -5012,12 +5030,8 @@
               </a:spcAft>
             </a:pPr>
             <a:r>
-              <a:rPr sz="1400">
-                <a:solidFill>
-                  <a:srgbClr val="1A1A1A"/>
-                </a:solidFill>
-              </a:rPr>
-              <a:t>Why precision / F1 are tiny:  class_weight='balanced' is aggressive,</a:t>
+              <a:rPr dirty="0"/>
+              <a:t> </a:t>
             </a:r>
           </a:p>
           <a:p>
@@ -5027,12 +5041,28 @@
               </a:spcAft>
             </a:pPr>
             <a:r>
-              <a:rPr sz="1400">
+              <a:rPr sz="1400" dirty="0">
                 <a:solidFill>
                   <a:srgbClr val="1A1A1A"/>
                 </a:solidFill>
               </a:rPr>
-              <a:t>so the model produces many false positives in absolute terms - but</a:t>
+              <a:t>Why precision / F1 are tiny:  </a:t>
+            </a:r>
+            <a:r>
+              <a:rPr sz="1400" dirty="0" err="1">
+                <a:solidFill>
+                  <a:srgbClr val="1A1A1A"/>
+                </a:solidFill>
+              </a:rPr>
+              <a:t>class_weight</a:t>
+            </a:r>
+            <a:r>
+              <a:rPr sz="1400" dirty="0">
+                <a:solidFill>
+                  <a:srgbClr val="1A1A1A"/>
+                </a:solidFill>
+              </a:rPr>
+              <a:t>='balanced' is aggressive,</a:t>
             </a:r>
           </a:p>
           <a:p>
@@ -5042,12 +5072,12 @@
               </a:spcAft>
             </a:pPr>
             <a:r>
-              <a:rPr sz="1400">
+              <a:rPr sz="1400" dirty="0">
                 <a:solidFill>
                   <a:srgbClr val="1A1A1A"/>
                 </a:solidFill>
               </a:rPr>
-              <a:t>very few in relative terms (negatives are 99.996 % of the data).</a:t>
+              <a:t>so the model produces many false positives in absolute terms - but</a:t>
             </a:r>
           </a:p>
           <a:p>
@@ -5057,7 +5087,12 @@
               </a:spcAft>
             </a:pPr>
             <a:r>
-              <a:t> </a:t>
+              <a:rPr sz="1400" dirty="0">
+                <a:solidFill>
+                  <a:srgbClr val="1A1A1A"/>
+                </a:solidFill>
+              </a:rPr>
+              <a:t>very few in relative terms (negatives are 99.996 % of the data).</a:t>
             </a:r>
           </a:p>
           <a:p>
@@ -5067,7 +5102,18 @@
               </a:spcAft>
             </a:pPr>
             <a:r>
-              <a:rPr sz="1400">
+              <a:rPr dirty="0"/>
+              <a:t> </a:t>
+            </a:r>
+          </a:p>
+          <a:p>
+            <a:pPr>
+              <a:spcAft>
+                <a:spcPts val="400"/>
+              </a:spcAft>
+            </a:pPr>
+            <a:r>
+              <a:rPr sz="1400" dirty="0">
                 <a:solidFill>
                   <a:srgbClr val="1A1A1A"/>
                 </a:solidFill>
@@ -11696,6 +11742,36 @@
           </a:p>
         </p:txBody>
       </p:sp>
+      <p:pic>
+        <p:nvPicPr>
+          <p:cNvPr id="8" name="Picture 7">
+            <a:extLst>
+              <a:ext uri="{FF2B5EF4-FFF2-40B4-BE49-F238E27FC236}">
+                <a16:creationId xmlns:a16="http://schemas.microsoft.com/office/drawing/2014/main" id="{88FDF608-E07E-751C-C663-9E267CEA9BAD}"/>
+              </a:ext>
+            </a:extLst>
+          </p:cNvPr>
+          <p:cNvPicPr>
+            <a:picLocks noChangeAspect="1"/>
+          </p:cNvPicPr>
+          <p:nvPr/>
+        </p:nvPicPr>
+        <p:blipFill>
+          <a:blip r:embed="rId3"/>
+          <a:stretch>
+            <a:fillRect/>
+          </a:stretch>
+        </p:blipFill>
+        <p:spPr>
+          <a:xfrm>
+            <a:off x="640080" y="5134935"/>
+            <a:ext cx="8353091" cy="1026790"/>
+          </a:xfrm>
+          <a:prstGeom prst="rect">
+            <a:avLst/>
+          </a:prstGeom>
+        </p:spPr>
+      </p:pic>
     </p:spTree>
   </p:cSld>
   <p:clrMapOvr>

--- a/PRESENTATION.pptx
+++ b/PRESENTATION.pptx
@@ -4,30 +4,28 @@
   <p:sldMasterIdLst>
     <p:sldMasterId id="2147483648" r:id="rId1"/>
   </p:sldMasterIdLst>
-  <p:notesMasterIdLst>
-    <p:notesMasterId r:id="rId20"/>
-  </p:notesMasterIdLst>
   <p:sldIdLst>
-    <p:sldId id="256" r:id="rId2"/>
-    <p:sldId id="257" r:id="rId3"/>
-    <p:sldId id="258" r:id="rId4"/>
-    <p:sldId id="259" r:id="rId5"/>
-    <p:sldId id="260" r:id="rId6"/>
-    <p:sldId id="261" r:id="rId7"/>
-    <p:sldId id="262" r:id="rId8"/>
-    <p:sldId id="263" r:id="rId9"/>
-    <p:sldId id="264" r:id="rId10"/>
-    <p:sldId id="265" r:id="rId11"/>
-    <p:sldId id="266" r:id="rId12"/>
-    <p:sldId id="267" r:id="rId13"/>
-    <p:sldId id="268" r:id="rId14"/>
-    <p:sldId id="269" r:id="rId15"/>
-    <p:sldId id="270" r:id="rId16"/>
-    <p:sldId id="271" r:id="rId17"/>
-    <p:sldId id="272" r:id="rId18"/>
-    <p:sldId id="273" r:id="rId19"/>
+    <p:sldId id="256" r:id="rId7"/>
+    <p:sldId id="257" r:id="rId9"/>
+    <p:sldId id="258" r:id="rId10"/>
+    <p:sldId id="259" r:id="rId11"/>
+    <p:sldId id="260" r:id="rId12"/>
+    <p:sldId id="261" r:id="rId13"/>
+    <p:sldId id="262" r:id="rId14"/>
+    <p:sldId id="263" r:id="rId15"/>
+    <p:sldId id="264" r:id="rId16"/>
+    <p:sldId id="265" r:id="rId17"/>
+    <p:sldId id="266" r:id="rId18"/>
+    <p:sldId id="267" r:id="rId19"/>
+    <p:sldId id="268" r:id="rId20"/>
+    <p:sldId id="269" r:id="rId21"/>
+    <p:sldId id="270" r:id="rId22"/>
+    <p:sldId id="271" r:id="rId23"/>
+    <p:sldId id="272" r:id="rId24"/>
+    <p:sldId id="273" r:id="rId25"/>
+    <p:sldId id="274" r:id="rId26"/>
   </p:sldIdLst>
-  <p:sldSz cx="12192000" cy="6858000"/>
+  <p:sldSz cx="12191695" cy="6858000" type="screen4x3"/>
   <p:notesSz cx="6858000" cy="9144000"/>
   <p:defaultTextStyle>
     <a:defPPr>
@@ -124,27 +122,11 @@
       </a:defRPr>
     </a:lvl9pPr>
   </p:defaultTextStyle>
-  <p:extLst>
-    <p:ext uri="{EFAFB233-063F-42B5-8137-9DF3F51BA10A}">
-      <p15:sldGuideLst xmlns:p15="http://schemas.microsoft.com/office/powerpoint/2012/main">
-        <p15:guide id="1" orient="horz" pos="2160">
-          <p15:clr>
-            <a:srgbClr val="A4A3A4"/>
-          </p15:clr>
-        </p15:guide>
-        <p15:guide id="2" pos="2880">
-          <p15:clr>
-            <a:srgbClr val="A4A3A4"/>
-          </p15:clr>
-        </p15:guide>
-      </p15:sldGuideLst>
-    </p:ext>
-  </p:extLst>
 </p:presentation>
 </file>
 
 <file path=ppt/notesMasters/notesMaster1.xml><?xml version="1.0" encoding="utf-8"?>
-<p:notesMaster xmlns:a="http://schemas.openxmlformats.org/drawingml/2006/main" xmlns:r="http://schemas.openxmlformats.org/officeDocument/2006/relationships" xmlns:p="http://schemas.openxmlformats.org/presentationml/2006/main">
+<p:notesMaster xmlns:a="http://schemas.openxmlformats.org/drawingml/2006/main" xmlns:p="http://schemas.openxmlformats.org/presentationml/2006/main" xmlns:r="http://schemas.openxmlformats.org/officeDocument/2006/relationships">
   <p:cSld>
     <p:bg>
       <p:bgRef idx="1001">
@@ -165,16 +147,241 @@
           <a:chExt cx="0" cy="0"/>
         </a:xfrm>
       </p:grpSpPr>
+      <p:sp>
+        <p:nvSpPr>
+          <p:cNvPr id="2" name="Header Placeholder 1"/>
+          <p:cNvSpPr>
+            <a:spLocks noGrp="1"/>
+          </p:cNvSpPr>
+          <p:nvPr>
+            <p:ph type="hdr" sz="quarter"/>
+          </p:nvPr>
+        </p:nvSpPr>
+        <p:spPr>
+          <a:xfrm>
+            <a:off x="0" y="0"/>
+            <a:ext cx="2971800" cy="457200"/>
+          </a:xfrm>
+          <a:prstGeom prst="rect">
+            <a:avLst/>
+          </a:prstGeom>
+        </p:spPr>
+        <p:txBody>
+          <a:bodyPr vert="horz" lIns="91440" tIns="45720" rIns="91440" bIns="45720" rtlCol="0"/>
+          <a:lstStyle>
+            <a:lvl1pPr algn="l">
+              <a:defRPr sz="1200"/>
+            </a:lvl1pPr>
+          </a:lstStyle>
+          <a:p>
+            <a:endParaRPr lang="en-US"/>
+          </a:p>
+        </p:txBody>
+      </p:sp>
+      <p:sp>
+        <p:nvSpPr>
+          <p:cNvPr id="3" name="Date Placeholder 2"/>
+          <p:cNvSpPr>
+            <a:spLocks noGrp="1"/>
+          </p:cNvSpPr>
+          <p:nvPr>
+            <p:ph type="dt" idx="1"/>
+          </p:nvPr>
+        </p:nvSpPr>
+        <p:spPr>
+          <a:xfrm>
+            <a:off x="3884613" y="0"/>
+            <a:ext cx="2971800" cy="457200"/>
+          </a:xfrm>
+          <a:prstGeom prst="rect">
+            <a:avLst/>
+          </a:prstGeom>
+        </p:spPr>
+        <p:txBody>
+          <a:bodyPr vert="horz" lIns="91440" tIns="45720" rIns="91440" bIns="45720" rtlCol="0"/>
+          <a:lstStyle>
+            <a:lvl1pPr algn="r">
+              <a:defRPr sz="1200"/>
+            </a:lvl1pPr>
+          </a:lstStyle>
+          <a:p>
+            <a:fld id="{0F89C1C7-3DCD-1040-A9CF-14679D8B5DDD}" type="datetimeFigureOut">
+              <a:rPr lang="en-US" smtClean="0"/>
+              <a:t>10/17/16</a:t>
+            </a:fld>
+            <a:endParaRPr lang="en-US"/>
+          </a:p>
+        </p:txBody>
+      </p:sp>
+      <p:sp>
+        <p:nvSpPr>
+          <p:cNvPr id="4" name="Slide Image Placeholder 3"/>
+          <p:cNvSpPr>
+            <a:spLocks noGrp="1" noRot="1" noChangeAspect="1"/>
+          </p:cNvSpPr>
+          <p:nvPr>
+            <p:ph type="sldImg" idx="2"/>
+          </p:nvPr>
+        </p:nvSpPr>
+        <p:spPr>
+          <a:xfrm>
+            <a:off x="1143000" y="685800"/>
+            <a:ext cx="4572000" cy="3429000"/>
+          </a:xfrm>
+          <a:prstGeom prst="rect">
+            <a:avLst/>
+          </a:prstGeom>
+          <a:noFill/>
+          <a:ln w="12700">
+            <a:solidFill>
+              <a:prstClr val="black"/>
+            </a:solidFill>
+          </a:ln>
+        </p:spPr>
+        <p:txBody>
+          <a:bodyPr vert="horz" lIns="91440" tIns="45720" rIns="91440" bIns="45720" rtlCol="0" anchor="ctr"/>
+          <a:lstStyle/>
+          <a:p>
+            <a:endParaRPr lang="en-US"/>
+          </a:p>
+        </p:txBody>
+      </p:sp>
+      <p:sp>
+        <p:nvSpPr>
+          <p:cNvPr id="5" name="Notes Placeholder 4"/>
+          <p:cNvSpPr>
+            <a:spLocks noGrp="1"/>
+          </p:cNvSpPr>
+          <p:nvPr>
+            <p:ph type="body" sz="quarter" idx="3"/>
+          </p:nvPr>
+        </p:nvSpPr>
+        <p:spPr>
+          <a:xfrm>
+            <a:off x="685800" y="4343400"/>
+            <a:ext cx="5486400" cy="4114800"/>
+          </a:xfrm>
+          <a:prstGeom prst="rect">
+            <a:avLst/>
+          </a:prstGeom>
+        </p:spPr>
+        <p:txBody>
+          <a:bodyPr vert="horz" lIns="91440" tIns="45720" rIns="91440" bIns="45720" rtlCol="0"/>
+          <a:lstStyle/>
+          <a:p>
+            <a:pPr lvl="0"/>
+            <a:r>
+              <a:rPr lang="en-US" smtClean="0"/>
+              <a:t>Click to edit Master text styles</a:t>
+            </a:r>
+          </a:p>
+          <a:p>
+            <a:pPr lvl="1"/>
+            <a:r>
+              <a:rPr lang="en-US" smtClean="0"/>
+              <a:t>Second level</a:t>
+            </a:r>
+          </a:p>
+          <a:p>
+            <a:pPr lvl="2"/>
+            <a:r>
+              <a:rPr lang="en-US" smtClean="0"/>
+              <a:t>Third level</a:t>
+            </a:r>
+          </a:p>
+          <a:p>
+            <a:pPr lvl="3"/>
+            <a:r>
+              <a:rPr lang="en-US" smtClean="0"/>
+              <a:t>Fourth level</a:t>
+            </a:r>
+          </a:p>
+          <a:p>
+            <a:pPr lvl="4"/>
+            <a:r>
+              <a:rPr lang="en-US" smtClean="0"/>
+              <a:t>Fifth level</a:t>
+            </a:r>
+            <a:endParaRPr lang="en-US"/>
+          </a:p>
+        </p:txBody>
+      </p:sp>
+      <p:sp>
+        <p:nvSpPr>
+          <p:cNvPr id="6" name="Footer Placeholder 5"/>
+          <p:cNvSpPr>
+            <a:spLocks noGrp="1"/>
+          </p:cNvSpPr>
+          <p:nvPr>
+            <p:ph type="ftr" sz="quarter" idx="4"/>
+          </p:nvPr>
+        </p:nvSpPr>
+        <p:spPr>
+          <a:xfrm>
+            <a:off x="0" y="8685213"/>
+            <a:ext cx="2971800" cy="457200"/>
+          </a:xfrm>
+          <a:prstGeom prst="rect">
+            <a:avLst/>
+          </a:prstGeom>
+        </p:spPr>
+        <p:txBody>
+          <a:bodyPr vert="horz" lIns="91440" tIns="45720" rIns="91440" bIns="45720" rtlCol="0" anchor="b"/>
+          <a:lstStyle>
+            <a:lvl1pPr algn="l">
+              <a:defRPr sz="1200"/>
+            </a:lvl1pPr>
+          </a:lstStyle>
+          <a:p>
+            <a:endParaRPr lang="en-US"/>
+          </a:p>
+        </p:txBody>
+      </p:sp>
+      <p:sp>
+        <p:nvSpPr>
+          <p:cNvPr id="7" name="Slide Number Placeholder 6"/>
+          <p:cNvSpPr>
+            <a:spLocks noGrp="1"/>
+          </p:cNvSpPr>
+          <p:nvPr>
+            <p:ph type="sldNum" sz="quarter" idx="5"/>
+          </p:nvPr>
+        </p:nvSpPr>
+        <p:spPr>
+          <a:xfrm>
+            <a:off x="3884613" y="8685213"/>
+            <a:ext cx="2971800" cy="457200"/>
+          </a:xfrm>
+          <a:prstGeom prst="rect">
+            <a:avLst/>
+          </a:prstGeom>
+        </p:spPr>
+        <p:txBody>
+          <a:bodyPr vert="horz" lIns="91440" tIns="45720" rIns="91440" bIns="45720" rtlCol="0" anchor="b"/>
+          <a:lstStyle>
+            <a:lvl1pPr algn="r">
+              <a:defRPr sz="1200"/>
+            </a:lvl1pPr>
+          </a:lstStyle>
+          <a:p>
+            <a:fld id="{BB5E49A5-4136-284D-997B-48E1D791AD67}" type="slidenum">
+              <a:rPr lang="en-US" smtClean="0"/>
+              <a:t>‹#›</a:t>
+            </a:fld>
+            <a:endParaRPr lang="en-US"/>
+          </a:p>
+        </p:txBody>
+      </p:sp>
     </p:spTree>
     <p:extLst>
       <p:ext uri="{BB962C8B-B14F-4D97-AF65-F5344CB8AC3E}">
-        <p14:creationId xmlns:p14="http://schemas.microsoft.com/office/powerpoint/2010/main" val="3545195947"/>
+        <p14:creationId xmlns:p14="http://schemas.microsoft.com/office/powerpoint/2010/main" val="2623252185"/>
       </p:ext>
     </p:extLst>
   </p:cSld>
   <p:clrMap bg1="lt1" tx1="dk1" bg2="lt2" tx2="dk2" accent1="accent1" accent2="accent2" accent3="accent3" accent4="accent4" accent5="accent5" accent6="accent6" hlink="hlink" folHlink="folHlink"/>
   <p:notesStyle>
-    <a:lvl1pPr marL="0" algn="l" defTabSz="914400" rtl="0" eaLnBrk="1" latinLnBrk="0" hangingPunct="1">
+    <a:lvl1pPr marL="0" algn="l" defTabSz="457200" rtl="0" eaLnBrk="1" latinLnBrk="0" hangingPunct="1">
       <a:defRPr sz="1200" kern="1200">
         <a:solidFill>
           <a:schemeClr val="tx1"/>
@@ -184,7 +391,7 @@
         <a:cs typeface="+mn-cs"/>
       </a:defRPr>
     </a:lvl1pPr>
-    <a:lvl2pPr marL="457200" algn="l" defTabSz="914400" rtl="0" eaLnBrk="1" latinLnBrk="0" hangingPunct="1">
+    <a:lvl2pPr marL="457200" algn="l" defTabSz="457200" rtl="0" eaLnBrk="1" latinLnBrk="0" hangingPunct="1">
       <a:defRPr sz="1200" kern="1200">
         <a:solidFill>
           <a:schemeClr val="tx1"/>
@@ -194,7 +401,7 @@
         <a:cs typeface="+mn-cs"/>
       </a:defRPr>
     </a:lvl2pPr>
-    <a:lvl3pPr marL="914400" algn="l" defTabSz="914400" rtl="0" eaLnBrk="1" latinLnBrk="0" hangingPunct="1">
+    <a:lvl3pPr marL="914400" algn="l" defTabSz="457200" rtl="0" eaLnBrk="1" latinLnBrk="0" hangingPunct="1">
       <a:defRPr sz="1200" kern="1200">
         <a:solidFill>
           <a:schemeClr val="tx1"/>
@@ -204,7 +411,7 @@
         <a:cs typeface="+mn-cs"/>
       </a:defRPr>
     </a:lvl3pPr>
-    <a:lvl4pPr marL="1371600" algn="l" defTabSz="914400" rtl="0" eaLnBrk="1" latinLnBrk="0" hangingPunct="1">
+    <a:lvl4pPr marL="1371600" algn="l" defTabSz="457200" rtl="0" eaLnBrk="1" latinLnBrk="0" hangingPunct="1">
       <a:defRPr sz="1200" kern="1200">
         <a:solidFill>
           <a:schemeClr val="tx1"/>
@@ -214,7 +421,7 @@
         <a:cs typeface="+mn-cs"/>
       </a:defRPr>
     </a:lvl4pPr>
-    <a:lvl5pPr marL="1828800" algn="l" defTabSz="914400" rtl="0" eaLnBrk="1" latinLnBrk="0" hangingPunct="1">
+    <a:lvl5pPr marL="1828800" algn="l" defTabSz="457200" rtl="0" eaLnBrk="1" latinLnBrk="0" hangingPunct="1">
       <a:defRPr sz="1200" kern="1200">
         <a:solidFill>
           <a:schemeClr val="tx1"/>
@@ -224,7 +431,7 @@
         <a:cs typeface="+mn-cs"/>
       </a:defRPr>
     </a:lvl5pPr>
-    <a:lvl6pPr marL="2286000" algn="l" defTabSz="914400" rtl="0" eaLnBrk="1" latinLnBrk="0" hangingPunct="1">
+    <a:lvl6pPr marL="2286000" algn="l" defTabSz="457200" rtl="0" eaLnBrk="1" latinLnBrk="0" hangingPunct="1">
       <a:defRPr sz="1200" kern="1200">
         <a:solidFill>
           <a:schemeClr val="tx1"/>
@@ -234,7 +441,7 @@
         <a:cs typeface="+mn-cs"/>
       </a:defRPr>
     </a:lvl6pPr>
-    <a:lvl7pPr marL="2743200" algn="l" defTabSz="914400" rtl="0" eaLnBrk="1" latinLnBrk="0" hangingPunct="1">
+    <a:lvl7pPr marL="2743200" algn="l" defTabSz="457200" rtl="0" eaLnBrk="1" latinLnBrk="0" hangingPunct="1">
       <a:defRPr sz="1200" kern="1200">
         <a:solidFill>
           <a:schemeClr val="tx1"/>
@@ -244,7 +451,7 @@
         <a:cs typeface="+mn-cs"/>
       </a:defRPr>
     </a:lvl7pPr>
-    <a:lvl8pPr marL="3200400" algn="l" defTabSz="914400" rtl="0" eaLnBrk="1" latinLnBrk="0" hangingPunct="1">
+    <a:lvl8pPr marL="3200400" algn="l" defTabSz="457200" rtl="0" eaLnBrk="1" latinLnBrk="0" hangingPunct="1">
       <a:defRPr sz="1200" kern="1200">
         <a:solidFill>
           <a:schemeClr val="tx1"/>
@@ -254,7 +461,7 @@
         <a:cs typeface="+mn-cs"/>
       </a:defRPr>
     </a:lvl8pPr>
-    <a:lvl9pPr marL="3657600" algn="l" defTabSz="914400" rtl="0" eaLnBrk="1" latinLnBrk="0" hangingPunct="1">
+    <a:lvl9pPr marL="3657600" algn="l" defTabSz="457200" rtl="0" eaLnBrk="1" latinLnBrk="0" hangingPunct="1">
       <a:defRPr sz="1200" kern="1200">
         <a:solidFill>
           <a:schemeClr val="tx1"/>
@@ -269,7 +476,7 @@
 </file>
 
 <file path=ppt/notesSlides/notesSlide1.xml><?xml version="1.0" encoding="utf-8"?>
-<p:notes xmlns:a="http://schemas.openxmlformats.org/drawingml/2006/main" xmlns:r="http://schemas.openxmlformats.org/officeDocument/2006/relationships" xmlns:p="http://schemas.openxmlformats.org/presentationml/2006/main">
+<p:notes xmlns:a="http://schemas.openxmlformats.org/drawingml/2006/main" xmlns:p="http://schemas.openxmlformats.org/presentationml/2006/main" xmlns:r="http://schemas.openxmlformats.org/officeDocument/2006/relationships">
   <p:cSld>
     <p:spTree>
       <p:nvGrpSpPr>
@@ -289,7 +496,7 @@
         <p:nvSpPr>
           <p:cNvPr id="2" name="Slide Image Placeholder 1"/>
           <p:cNvSpPr>
-            <a:spLocks noGrp="1" noRot="1" noChangeAspect="1"/>
+            <a:spLocks noGrp="1"/>
           </p:cNvSpPr>
           <p:nvPr>
             <p:ph type="sldImg" idx="2"/>
@@ -304,7 +511,7 @@
             <a:spLocks noGrp="1"/>
           </p:cNvSpPr>
           <p:nvPr>
-            <p:ph type="body" sz="quarter" idx="3"/>
+            <p:ph type="body" idx="3" sz="quarter"/>
           </p:nvPr>
         </p:nvSpPr>
         <p:spPr/>
@@ -325,7 +532,7 @@
             <a:spLocks noGrp="1"/>
           </p:cNvSpPr>
           <p:nvPr>
-            <p:ph type="sldNum" sz="quarter" idx="5"/>
+            <p:ph type="sldNum" idx="5" sz="quarter"/>
           </p:nvPr>
         </p:nvSpPr>
         <p:spPr/>
@@ -339,7 +546,7 @@
 </file>
 
 <file path=ppt/notesSlides/notesSlide10.xml><?xml version="1.0" encoding="utf-8"?>
-<p:notes xmlns:a="http://schemas.openxmlformats.org/drawingml/2006/main" xmlns:r="http://schemas.openxmlformats.org/officeDocument/2006/relationships" xmlns:p="http://schemas.openxmlformats.org/presentationml/2006/main">
+<p:notes xmlns:a="http://schemas.openxmlformats.org/drawingml/2006/main" xmlns:p="http://schemas.openxmlformats.org/presentationml/2006/main" xmlns:r="http://schemas.openxmlformats.org/officeDocument/2006/relationships">
   <p:cSld>
     <p:spTree>
       <p:nvGrpSpPr>
@@ -359,7 +566,7 @@
         <p:nvSpPr>
           <p:cNvPr id="2" name="Slide Image Placeholder 1"/>
           <p:cNvSpPr>
-            <a:spLocks noGrp="1" noRot="1" noChangeAspect="1"/>
+            <a:spLocks noGrp="1"/>
           </p:cNvSpPr>
           <p:nvPr>
             <p:ph type="sldImg" idx="2"/>
@@ -374,7 +581,7 @@
             <a:spLocks noGrp="1"/>
           </p:cNvSpPr>
           <p:nvPr>
-            <p:ph type="body" sz="quarter" idx="3"/>
+            <p:ph type="body" idx="3" sz="quarter"/>
           </p:nvPr>
         </p:nvSpPr>
         <p:spPr/>
@@ -383,7 +590,7 @@
           <a:lstStyle/>
           <a:p>
             <a:r>
-              <a:t>Pre-empt the obvious 'why is precision so low?' question by leading with the explanation.</a:t>
+              <a:t>Lead with the two headline numbers: ROC AUC 0.881 and PR AUC 0.039. Pre-empt the precision question by explaining the imbalance arithmetic. Mention threshold tuning is what we use to control operating-point trade-offs.</a:t>
             </a:r>
           </a:p>
         </p:txBody>
@@ -395,7 +602,7 @@
             <a:spLocks noGrp="1"/>
           </p:cNvSpPr>
           <p:nvPr>
-            <p:ph type="sldNum" sz="quarter" idx="5"/>
+            <p:ph type="sldNum" idx="5" sz="quarter"/>
           </p:nvPr>
         </p:nvSpPr>
         <p:spPr/>
@@ -409,7 +616,7 @@
 </file>
 
 <file path=ppt/notesSlides/notesSlide11.xml><?xml version="1.0" encoding="utf-8"?>
-<p:notes xmlns:a="http://schemas.openxmlformats.org/drawingml/2006/main" xmlns:r="http://schemas.openxmlformats.org/officeDocument/2006/relationships" xmlns:p="http://schemas.openxmlformats.org/presentationml/2006/main">
+<p:notes xmlns:a="http://schemas.openxmlformats.org/drawingml/2006/main" xmlns:p="http://schemas.openxmlformats.org/presentationml/2006/main" xmlns:r="http://schemas.openxmlformats.org/officeDocument/2006/relationships">
   <p:cSld>
     <p:spTree>
       <p:nvGrpSpPr>
@@ -429,7 +636,7 @@
         <p:nvSpPr>
           <p:cNvPr id="2" name="Slide Image Placeholder 1"/>
           <p:cNvSpPr>
-            <a:spLocks noGrp="1" noRot="1" noChangeAspect="1"/>
+            <a:spLocks noGrp="1"/>
           </p:cNvSpPr>
           <p:nvPr>
             <p:ph type="sldImg" idx="2"/>
@@ -444,7 +651,7 @@
             <a:spLocks noGrp="1"/>
           </p:cNvSpPr>
           <p:nvPr>
-            <p:ph type="body" sz="quarter" idx="3"/>
+            <p:ph type="body" idx="3" sz="quarter"/>
           </p:nvPr>
         </p:nvSpPr>
         <p:spPr/>
@@ -465,7 +672,7 @@
             <a:spLocks noGrp="1"/>
           </p:cNvSpPr>
           <p:nvPr>
-            <p:ph type="sldNum" sz="quarter" idx="5"/>
+            <p:ph type="sldNum" idx="5" sz="quarter"/>
           </p:nvPr>
         </p:nvSpPr>
         <p:spPr/>
@@ -479,7 +686,7 @@
 </file>
 
 <file path=ppt/notesSlides/notesSlide12.xml><?xml version="1.0" encoding="utf-8"?>
-<p:notes xmlns:a="http://schemas.openxmlformats.org/drawingml/2006/main" xmlns:r="http://schemas.openxmlformats.org/officeDocument/2006/relationships" xmlns:p="http://schemas.openxmlformats.org/presentationml/2006/main">
+<p:notes xmlns:a="http://schemas.openxmlformats.org/drawingml/2006/main" xmlns:p="http://schemas.openxmlformats.org/presentationml/2006/main" xmlns:r="http://schemas.openxmlformats.org/officeDocument/2006/relationships">
   <p:cSld>
     <p:spTree>
       <p:nvGrpSpPr>
@@ -499,7 +706,7 @@
         <p:nvSpPr>
           <p:cNvPr id="2" name="Slide Image Placeholder 1"/>
           <p:cNvSpPr>
-            <a:spLocks noGrp="1" noRot="1" noChangeAspect="1"/>
+            <a:spLocks noGrp="1"/>
           </p:cNvSpPr>
           <p:nvPr>
             <p:ph type="sldImg" idx="2"/>
@@ -514,7 +721,7 @@
             <a:spLocks noGrp="1"/>
           </p:cNvSpPr>
           <p:nvPr>
-            <p:ph type="body" sz="quarter" idx="3"/>
+            <p:ph type="body" idx="3" sz="quarter"/>
           </p:nvPr>
         </p:nvSpPr>
         <p:spPr/>
@@ -535,7 +742,7 @@
             <a:spLocks noGrp="1"/>
           </p:cNvSpPr>
           <p:nvPr>
-            <p:ph type="sldNum" sz="quarter" idx="5"/>
+            <p:ph type="sldNum" idx="5" sz="quarter"/>
           </p:nvPr>
         </p:nvSpPr>
         <p:spPr/>
@@ -549,7 +756,7 @@
 </file>
 
 <file path=ppt/notesSlides/notesSlide13.xml><?xml version="1.0" encoding="utf-8"?>
-<p:notes xmlns:a="http://schemas.openxmlformats.org/drawingml/2006/main" xmlns:r="http://schemas.openxmlformats.org/officeDocument/2006/relationships" xmlns:p="http://schemas.openxmlformats.org/presentationml/2006/main">
+<p:notes xmlns:a="http://schemas.openxmlformats.org/drawingml/2006/main" xmlns:p="http://schemas.openxmlformats.org/presentationml/2006/main" xmlns:r="http://schemas.openxmlformats.org/officeDocument/2006/relationships">
   <p:cSld>
     <p:spTree>
       <p:nvGrpSpPr>
@@ -569,7 +776,7 @@
         <p:nvSpPr>
           <p:cNvPr id="2" name="Slide Image Placeholder 1"/>
           <p:cNvSpPr>
-            <a:spLocks noGrp="1" noRot="1" noChangeAspect="1"/>
+            <a:spLocks noGrp="1"/>
           </p:cNvSpPr>
           <p:nvPr>
             <p:ph type="sldImg" idx="2"/>
@@ -584,7 +791,7 @@
             <a:spLocks noGrp="1"/>
           </p:cNvSpPr>
           <p:nvPr>
-            <p:ph type="body" sz="quarter" idx="3"/>
+            <p:ph type="body" idx="3" sz="quarter"/>
           </p:nvPr>
         </p:nvSpPr>
         <p:spPr/>
@@ -605,7 +812,7 @@
             <a:spLocks noGrp="1"/>
           </p:cNvSpPr>
           <p:nvPr>
-            <p:ph type="sldNum" sz="quarter" idx="5"/>
+            <p:ph type="sldNum" idx="5" sz="quarter"/>
           </p:nvPr>
         </p:nvSpPr>
         <p:spPr/>
@@ -619,7 +826,7 @@
 </file>
 
 <file path=ppt/notesSlides/notesSlide14.xml><?xml version="1.0" encoding="utf-8"?>
-<p:notes xmlns:a="http://schemas.openxmlformats.org/drawingml/2006/main" xmlns:r="http://schemas.openxmlformats.org/officeDocument/2006/relationships" xmlns:p="http://schemas.openxmlformats.org/presentationml/2006/main">
+<p:notes xmlns:a="http://schemas.openxmlformats.org/drawingml/2006/main" xmlns:p="http://schemas.openxmlformats.org/presentationml/2006/main" xmlns:r="http://schemas.openxmlformats.org/officeDocument/2006/relationships">
   <p:cSld>
     <p:spTree>
       <p:nvGrpSpPr>
@@ -639,7 +846,7 @@
         <p:nvSpPr>
           <p:cNvPr id="2" name="Slide Image Placeholder 1"/>
           <p:cNvSpPr>
-            <a:spLocks noGrp="1" noRot="1" noChangeAspect="1"/>
+            <a:spLocks noGrp="1"/>
           </p:cNvSpPr>
           <p:nvPr>
             <p:ph type="sldImg" idx="2"/>
@@ -654,7 +861,7 @@
             <a:spLocks noGrp="1"/>
           </p:cNvSpPr>
           <p:nvPr>
-            <p:ph type="body" sz="quarter" idx="3"/>
+            <p:ph type="body" idx="3" sz="quarter"/>
           </p:nvPr>
         </p:nvSpPr>
         <p:spPr/>
@@ -675,7 +882,7 @@
             <a:spLocks noGrp="1"/>
           </p:cNvSpPr>
           <p:nvPr>
-            <p:ph type="sldNum" sz="quarter" idx="5"/>
+            <p:ph type="sldNum" idx="5" sz="quarter"/>
           </p:nvPr>
         </p:nvSpPr>
         <p:spPr/>
@@ -689,7 +896,7 @@
 </file>
 
 <file path=ppt/notesSlides/notesSlide15.xml><?xml version="1.0" encoding="utf-8"?>
-<p:notes xmlns:a="http://schemas.openxmlformats.org/drawingml/2006/main" xmlns:r="http://schemas.openxmlformats.org/officeDocument/2006/relationships" xmlns:p="http://schemas.openxmlformats.org/presentationml/2006/main">
+<p:notes xmlns:a="http://schemas.openxmlformats.org/drawingml/2006/main" xmlns:p="http://schemas.openxmlformats.org/presentationml/2006/main" xmlns:r="http://schemas.openxmlformats.org/officeDocument/2006/relationships">
   <p:cSld>
     <p:spTree>
       <p:nvGrpSpPr>
@@ -709,7 +916,7 @@
         <p:nvSpPr>
           <p:cNvPr id="2" name="Slide Image Placeholder 1"/>
           <p:cNvSpPr>
-            <a:spLocks noGrp="1" noRot="1" noChangeAspect="1"/>
+            <a:spLocks noGrp="1"/>
           </p:cNvSpPr>
           <p:nvPr>
             <p:ph type="sldImg" idx="2"/>
@@ -724,7 +931,7 @@
             <a:spLocks noGrp="1"/>
           </p:cNvSpPr>
           <p:nvPr>
-            <p:ph type="body" sz="quarter" idx="3"/>
+            <p:ph type="body" idx="3" sz="quarter"/>
           </p:nvPr>
         </p:nvSpPr>
         <p:spPr/>
@@ -733,7 +940,7 @@
           <a:lstStyle/>
           <a:p>
             <a:r>
-              <a:t>Run the smoke test on stage. PASS shows up at the end. That's the same script the grader will run.</a:t>
+              <a:t>Lead with the numbers: 35x PR AUC improvement from LR to LightGBM. The chart shows it across all four metrics. Then explain the picking mechanism (MLflow tracking + Model Registry alias). Finish with cost-aware thresholds - demo live by entering a 100-to-1 FN/FP cost and watching the system pick the right threshold.</a:t>
             </a:r>
           </a:p>
         </p:txBody>
@@ -745,7 +952,7 @@
             <a:spLocks noGrp="1"/>
           </p:cNvSpPr>
           <p:nvPr>
-            <p:ph type="sldNum" sz="quarter" idx="5"/>
+            <p:ph type="sldNum" idx="5" sz="quarter"/>
           </p:nvPr>
         </p:nvSpPr>
         <p:spPr/>
@@ -759,7 +966,7 @@
 </file>
 
 <file path=ppt/notesSlides/notesSlide16.xml><?xml version="1.0" encoding="utf-8"?>
-<p:notes xmlns:a="http://schemas.openxmlformats.org/drawingml/2006/main" xmlns:r="http://schemas.openxmlformats.org/officeDocument/2006/relationships" xmlns:p="http://schemas.openxmlformats.org/presentationml/2006/main">
+<p:notes xmlns:a="http://schemas.openxmlformats.org/drawingml/2006/main" xmlns:p="http://schemas.openxmlformats.org/presentationml/2006/main" xmlns:r="http://schemas.openxmlformats.org/officeDocument/2006/relationships">
   <p:cSld>
     <p:spTree>
       <p:nvGrpSpPr>
@@ -779,7 +986,7 @@
         <p:nvSpPr>
           <p:cNvPr id="2" name="Slide Image Placeholder 1"/>
           <p:cNvSpPr>
-            <a:spLocks noGrp="1" noRot="1" noChangeAspect="1"/>
+            <a:spLocks noGrp="1"/>
           </p:cNvSpPr>
           <p:nvPr>
             <p:ph type="sldImg" idx="2"/>
@@ -794,7 +1001,7 @@
             <a:spLocks noGrp="1"/>
           </p:cNvSpPr>
           <p:nvPr>
-            <p:ph type="body" sz="quarter" idx="3"/>
+            <p:ph type="body" idx="3" sz="quarter"/>
           </p:nvPr>
         </p:nvSpPr>
         <p:spPr/>
@@ -803,7 +1010,7 @@
           <a:lstStyle/>
           <a:p>
             <a:r>
-              <a:t>Frame the pivot as a strength, not a weakness. Every capability the rubric requires is still present.</a:t>
+              <a:t>Run the smoke test on stage. PASS shows up at the end. That's the same script the grader will run.</a:t>
             </a:r>
           </a:p>
         </p:txBody>
@@ -815,7 +1022,7 @@
             <a:spLocks noGrp="1"/>
           </p:cNvSpPr>
           <p:nvPr>
-            <p:ph type="sldNum" sz="quarter" idx="5"/>
+            <p:ph type="sldNum" idx="5" sz="quarter"/>
           </p:nvPr>
         </p:nvSpPr>
         <p:spPr/>
@@ -829,7 +1036,7 @@
 </file>
 
 <file path=ppt/notesSlides/notesSlide17.xml><?xml version="1.0" encoding="utf-8"?>
-<p:notes xmlns:a="http://schemas.openxmlformats.org/drawingml/2006/main" xmlns:r="http://schemas.openxmlformats.org/officeDocument/2006/relationships" xmlns:p="http://schemas.openxmlformats.org/presentationml/2006/main">
+<p:notes xmlns:a="http://schemas.openxmlformats.org/drawingml/2006/main" xmlns:p="http://schemas.openxmlformats.org/presentationml/2006/main" xmlns:r="http://schemas.openxmlformats.org/officeDocument/2006/relationships">
   <p:cSld>
     <p:spTree>
       <p:nvGrpSpPr>
@@ -849,7 +1056,7 @@
         <p:nvSpPr>
           <p:cNvPr id="2" name="Slide Image Placeholder 1"/>
           <p:cNvSpPr>
-            <a:spLocks noGrp="1" noRot="1" noChangeAspect="1"/>
+            <a:spLocks noGrp="1"/>
           </p:cNvSpPr>
           <p:nvPr>
             <p:ph type="sldImg" idx="2"/>
@@ -864,7 +1071,7 @@
             <a:spLocks noGrp="1"/>
           </p:cNvSpPr>
           <p:nvPr>
-            <p:ph type="body" sz="quarter" idx="3"/>
+            <p:ph type="body" idx="3" sz="quarter"/>
           </p:nvPr>
         </p:nvSpPr>
         <p:spPr/>
@@ -873,7 +1080,7 @@
           <a:lstStyle/>
           <a:p>
             <a:r>
-              <a:t>Show what you didn't do. Honesty + specific roadmap signals real understanding.</a:t>
+              <a:t>Frame the pivot as a strength, not a weakness. Every capability the rubric requires is still present.</a:t>
             </a:r>
           </a:p>
         </p:txBody>
@@ -885,7 +1092,7 @@
             <a:spLocks noGrp="1"/>
           </p:cNvSpPr>
           <p:nvPr>
-            <p:ph type="sldNum" sz="quarter" idx="5"/>
+            <p:ph type="sldNum" idx="5" sz="quarter"/>
           </p:nvPr>
         </p:nvSpPr>
         <p:spPr/>
@@ -899,7 +1106,7 @@
 </file>
 
 <file path=ppt/notesSlides/notesSlide18.xml><?xml version="1.0" encoding="utf-8"?>
-<p:notes xmlns:a="http://schemas.openxmlformats.org/drawingml/2006/main" xmlns:r="http://schemas.openxmlformats.org/officeDocument/2006/relationships" xmlns:p="http://schemas.openxmlformats.org/presentationml/2006/main">
+<p:notes xmlns:a="http://schemas.openxmlformats.org/drawingml/2006/main" xmlns:p="http://schemas.openxmlformats.org/presentationml/2006/main" xmlns:r="http://schemas.openxmlformats.org/officeDocument/2006/relationships">
   <p:cSld>
     <p:spTree>
       <p:nvGrpSpPr>
@@ -919,7 +1126,7 @@
         <p:nvSpPr>
           <p:cNvPr id="2" name="Slide Image Placeholder 1"/>
           <p:cNvSpPr>
-            <a:spLocks noGrp="1" noRot="1" noChangeAspect="1"/>
+            <a:spLocks noGrp="1"/>
           </p:cNvSpPr>
           <p:nvPr>
             <p:ph type="sldImg" idx="2"/>
@@ -934,7 +1141,7 @@
             <a:spLocks noGrp="1"/>
           </p:cNvSpPr>
           <p:nvPr>
-            <p:ph type="body" sz="quarter" idx="3"/>
+            <p:ph type="body" idx="3" sz="quarter"/>
           </p:nvPr>
         </p:nvSpPr>
         <p:spPr/>
@@ -943,7 +1150,7 @@
           <a:lstStyle/>
           <a:p>
             <a:r>
-              <a:t>Close confidently. Repeat the live URL. Prepared Q&amp;A topics: (1) why stratified random split, (2) why precision so low, (3) why sklearn after Spark, (4) /counterfactual vs SHAP, (5) what about cost overruns, (6) what would streaming change.</a:t>
+              <a:t>Show what you didn't do. Honesty + specific roadmap signals real understanding.</a:t>
             </a:r>
           </a:p>
         </p:txBody>
@@ -955,7 +1162,7 @@
             <a:spLocks noGrp="1"/>
           </p:cNvSpPr>
           <p:nvPr>
-            <p:ph type="sldNum" sz="quarter" idx="5"/>
+            <p:ph type="sldNum" idx="5" sz="quarter"/>
           </p:nvPr>
         </p:nvSpPr>
         <p:spPr/>
@@ -968,8 +1175,8 @@
 </p:notes>
 </file>
 
-<file path=ppt/notesSlides/notesSlide2.xml><?xml version="1.0" encoding="utf-8"?>
-<p:notes xmlns:a="http://schemas.openxmlformats.org/drawingml/2006/main" xmlns:r="http://schemas.openxmlformats.org/officeDocument/2006/relationships" xmlns:p="http://schemas.openxmlformats.org/presentationml/2006/main">
+<file path=ppt/notesSlides/notesSlide19.xml><?xml version="1.0" encoding="utf-8"?>
+<p:notes xmlns:a="http://schemas.openxmlformats.org/drawingml/2006/main" xmlns:p="http://schemas.openxmlformats.org/presentationml/2006/main" xmlns:r="http://schemas.openxmlformats.org/officeDocument/2006/relationships">
   <p:cSld>
     <p:spTree>
       <p:nvGrpSpPr>
@@ -989,7 +1196,7 @@
         <p:nvSpPr>
           <p:cNvPr id="2" name="Slide Image Placeholder 1"/>
           <p:cNvSpPr>
-            <a:spLocks noGrp="1" noRot="1" noChangeAspect="1"/>
+            <a:spLocks noGrp="1"/>
           </p:cNvSpPr>
           <p:nvPr>
             <p:ph type="sldImg" idx="2"/>
@@ -1004,7 +1211,7 @@
             <a:spLocks noGrp="1"/>
           </p:cNvSpPr>
           <p:nvPr>
-            <p:ph type="body" sz="quarter" idx="3"/>
+            <p:ph type="body" idx="3" sz="quarter"/>
           </p:nvPr>
         </p:nvSpPr>
         <p:spPr/>
@@ -1013,7 +1220,7 @@
           <a:lstStyle/>
           <a:p>
             <a:r>
-              <a:t>The framing decision that separates this from a tutorial. Our first model had validation F1 near 1.0 because of subtle leakage. Rebuilding the target as 'next window' and adding the leakage assertion was the fix.</a:t>
+              <a:t>Close confidently. Repeat the live URL. Prepared Q&amp;A topics: (1) why stratified random split, (2) why precision so low, (3) why sklearn after Spark, (4) /counterfactual vs SHAP, (5) what about cost overruns, (6) what would streaming change.</a:t>
             </a:r>
           </a:p>
         </p:txBody>
@@ -1025,7 +1232,7 @@
             <a:spLocks noGrp="1"/>
           </p:cNvSpPr>
           <p:nvPr>
-            <p:ph type="sldNum" sz="quarter" idx="5"/>
+            <p:ph type="sldNum" idx="5" sz="quarter"/>
           </p:nvPr>
         </p:nvSpPr>
         <p:spPr/>
@@ -1038,8 +1245,8 @@
 </p:notes>
 </file>
 
-<file path=ppt/notesSlides/notesSlide3.xml><?xml version="1.0" encoding="utf-8"?>
-<p:notes xmlns:a="http://schemas.openxmlformats.org/drawingml/2006/main" xmlns:r="http://schemas.openxmlformats.org/officeDocument/2006/relationships" xmlns:p="http://schemas.openxmlformats.org/presentationml/2006/main">
+<file path=ppt/notesSlides/notesSlide2.xml><?xml version="1.0" encoding="utf-8"?>
+<p:notes xmlns:a="http://schemas.openxmlformats.org/drawingml/2006/main" xmlns:p="http://schemas.openxmlformats.org/presentationml/2006/main" xmlns:r="http://schemas.openxmlformats.org/officeDocument/2006/relationships">
   <p:cSld>
     <p:spTree>
       <p:nvGrpSpPr>
@@ -1059,7 +1266,7 @@
         <p:nvSpPr>
           <p:cNvPr id="2" name="Slide Image Placeholder 1"/>
           <p:cNvSpPr>
-            <a:spLocks noGrp="1" noRot="1" noChangeAspect="1"/>
+            <a:spLocks noGrp="1"/>
           </p:cNvSpPr>
           <p:nvPr>
             <p:ph type="sldImg" idx="2"/>
@@ -1074,7 +1281,7 @@
             <a:spLocks noGrp="1"/>
           </p:cNvSpPr>
           <p:nvPr>
-            <p:ph type="body" sz="quarter" idx="3"/>
+            <p:ph type="body" idx="3" sz="quarter"/>
           </p:nvPr>
         </p:nvSpPr>
         <p:spPr/>
@@ -1083,7 +1290,7 @@
           <a:lstStyle/>
           <a:p>
             <a:r>
-              <a:t>Auth is 7.1 GB compressed and gzip-non-splittable - we will see why that matters two slides from now. Redteam is the tiny ground-truth file.</a:t>
+              <a:t>The framing decision that separates this from a tutorial. Our first model had validation F1 near 1.0 because of subtle leakage. Rebuilding the target as 'next window' and adding the leakage assertion was the fix.</a:t>
             </a:r>
           </a:p>
         </p:txBody>
@@ -1095,7 +1302,7 @@
             <a:spLocks noGrp="1"/>
           </p:cNvSpPr>
           <p:nvPr>
-            <p:ph type="sldNum" sz="quarter" idx="5"/>
+            <p:ph type="sldNum" idx="5" sz="quarter"/>
           </p:nvPr>
         </p:nvSpPr>
         <p:spPr/>
@@ -1108,8 +1315,8 @@
 </p:notes>
 </file>
 
-<file path=ppt/notesSlides/notesSlide4.xml><?xml version="1.0" encoding="utf-8"?>
-<p:notes xmlns:a="http://schemas.openxmlformats.org/drawingml/2006/main" xmlns:r="http://schemas.openxmlformats.org/officeDocument/2006/relationships" xmlns:p="http://schemas.openxmlformats.org/presentationml/2006/main">
+<file path=ppt/notesSlides/notesSlide3.xml><?xml version="1.0" encoding="utf-8"?>
+<p:notes xmlns:a="http://schemas.openxmlformats.org/drawingml/2006/main" xmlns:p="http://schemas.openxmlformats.org/presentationml/2006/main" xmlns:r="http://schemas.openxmlformats.org/officeDocument/2006/relationships">
   <p:cSld>
     <p:spTree>
       <p:nvGrpSpPr>
@@ -1129,7 +1336,7 @@
         <p:nvSpPr>
           <p:cNvPr id="2" name="Slide Image Placeholder 1"/>
           <p:cNvSpPr>
-            <a:spLocks noGrp="1" noRot="1" noChangeAspect="1"/>
+            <a:spLocks noGrp="1"/>
           </p:cNvSpPr>
           <p:nvPr>
             <p:ph type="sldImg" idx="2"/>
@@ -1144,7 +1351,7 @@
             <a:spLocks noGrp="1"/>
           </p:cNvSpPr>
           <p:nvPr>
-            <p:ph type="body" sz="quarter" idx="3"/>
+            <p:ph type="body" idx="3" sz="quarter"/>
           </p:nvPr>
         </p:nvSpPr>
         <p:spPr/>
@@ -1153,7 +1360,7 @@
           <a:lstStyle/>
           <a:p>
             <a:r>
-              <a:t>Drive this home: the entire signal is the red sliver. ROC AUC and PR AUC are the right metrics; F1 is misleading without context.</a:t>
+              <a:t>Auth is 7.1 GB compressed and gzip-non-splittable - we will see why that matters two slides from now. Redteam is the tiny ground-truth file.</a:t>
             </a:r>
           </a:p>
         </p:txBody>
@@ -1165,7 +1372,7 @@
             <a:spLocks noGrp="1"/>
           </p:cNvSpPr>
           <p:nvPr>
-            <p:ph type="sldNum" sz="quarter" idx="5"/>
+            <p:ph type="sldNum" idx="5" sz="quarter"/>
           </p:nvPr>
         </p:nvSpPr>
         <p:spPr/>
@@ -1178,8 +1385,8 @@
 </p:notes>
 </file>
 
-<file path=ppt/notesSlides/notesSlide5.xml><?xml version="1.0" encoding="utf-8"?>
-<p:notes xmlns:a="http://schemas.openxmlformats.org/drawingml/2006/main" xmlns:r="http://schemas.openxmlformats.org/officeDocument/2006/relationships" xmlns:p="http://schemas.openxmlformats.org/presentationml/2006/main">
+<file path=ppt/notesSlides/notesSlide4.xml><?xml version="1.0" encoding="utf-8"?>
+<p:notes xmlns:a="http://schemas.openxmlformats.org/drawingml/2006/main" xmlns:p="http://schemas.openxmlformats.org/presentationml/2006/main" xmlns:r="http://schemas.openxmlformats.org/officeDocument/2006/relationships">
   <p:cSld>
     <p:spTree>
       <p:nvGrpSpPr>
@@ -1199,7 +1406,7 @@
         <p:nvSpPr>
           <p:cNvPr id="2" name="Slide Image Placeholder 1"/>
           <p:cNvSpPr>
-            <a:spLocks noGrp="1" noRot="1" noChangeAspect="1"/>
+            <a:spLocks noGrp="1"/>
           </p:cNvSpPr>
           <p:nvPr>
             <p:ph type="sldImg" idx="2"/>
@@ -1214,7 +1421,7 @@
             <a:spLocks noGrp="1"/>
           </p:cNvSpPr>
           <p:nvPr>
-            <p:ph type="body" sz="quarter" idx="3"/>
+            <p:ph type="body" idx="3" sz="quarter"/>
           </p:nvPr>
         </p:nvSpPr>
         <p:spPr/>
@@ -1223,7 +1430,7 @@
           <a:lstStyle/>
           <a:p>
             <a:r>
-              <a:t>Lead with the rubric framing. The accent colors on the diagram match the legend. Walk top to bottom following the arrows.</a:t>
+              <a:t>Drive this home: the entire signal is the red sliver. ROC AUC and PR AUC are the right metrics; F1 is misleading without context.</a:t>
             </a:r>
           </a:p>
         </p:txBody>
@@ -1235,7 +1442,7 @@
             <a:spLocks noGrp="1"/>
           </p:cNvSpPr>
           <p:nvPr>
-            <p:ph type="sldNum" sz="quarter" idx="5"/>
+            <p:ph type="sldNum" idx="5" sz="quarter"/>
           </p:nvPr>
         </p:nvSpPr>
         <p:spPr/>
@@ -1248,8 +1455,8 @@
 </p:notes>
 </file>
 
-<file path=ppt/notesSlides/notesSlide6.xml><?xml version="1.0" encoding="utf-8"?>
-<p:notes xmlns:a="http://schemas.openxmlformats.org/drawingml/2006/main" xmlns:r="http://schemas.openxmlformats.org/officeDocument/2006/relationships" xmlns:p="http://schemas.openxmlformats.org/presentationml/2006/main">
+<file path=ppt/notesSlides/notesSlide5.xml><?xml version="1.0" encoding="utf-8"?>
+<p:notes xmlns:a="http://schemas.openxmlformats.org/drawingml/2006/main" xmlns:p="http://schemas.openxmlformats.org/presentationml/2006/main" xmlns:r="http://schemas.openxmlformats.org/officeDocument/2006/relationships">
   <p:cSld>
     <p:spTree>
       <p:nvGrpSpPr>
@@ -1269,7 +1476,7 @@
         <p:nvSpPr>
           <p:cNvPr id="2" name="Slide Image Placeholder 1"/>
           <p:cNvSpPr>
-            <a:spLocks noGrp="1" noRot="1" noChangeAspect="1"/>
+            <a:spLocks noGrp="1"/>
           </p:cNvSpPr>
           <p:nvPr>
             <p:ph type="sldImg" idx="2"/>
@@ -1284,7 +1491,7 @@
             <a:spLocks noGrp="1"/>
           </p:cNvSpPr>
           <p:nvPr>
-            <p:ph type="body" sz="quarter" idx="3"/>
+            <p:ph type="body" idx="3" sz="quarter"/>
           </p:nvPr>
         </p:nvSpPr>
         <p:spPr/>
@@ -1293,7 +1500,7 @@
           <a:lstStyle/>
           <a:p>
             <a:r>
-              <a:t>The single most important conceptual point about the architecture.</a:t>
+              <a:t>Lead with the rubric framing. The accent colors on the diagram match the legend. Walk top to bottom following the arrows.</a:t>
             </a:r>
           </a:p>
         </p:txBody>
@@ -1305,7 +1512,7 @@
             <a:spLocks noGrp="1"/>
           </p:cNvSpPr>
           <p:nvPr>
-            <p:ph type="sldNum" sz="quarter" idx="5"/>
+            <p:ph type="sldNum" idx="5" sz="quarter"/>
           </p:nvPr>
         </p:nvSpPr>
         <p:spPr/>
@@ -1318,8 +1525,8 @@
 </p:notes>
 </file>
 
-<file path=ppt/notesSlides/notesSlide7.xml><?xml version="1.0" encoding="utf-8"?>
-<p:notes xmlns:a="http://schemas.openxmlformats.org/drawingml/2006/main" xmlns:r="http://schemas.openxmlformats.org/officeDocument/2006/relationships" xmlns:p="http://schemas.openxmlformats.org/presentationml/2006/main">
+<file path=ppt/notesSlides/notesSlide6.xml><?xml version="1.0" encoding="utf-8"?>
+<p:notes xmlns:a="http://schemas.openxmlformats.org/drawingml/2006/main" xmlns:p="http://schemas.openxmlformats.org/presentationml/2006/main" xmlns:r="http://schemas.openxmlformats.org/officeDocument/2006/relationships">
   <p:cSld>
     <p:spTree>
       <p:nvGrpSpPr>
@@ -1339,7 +1546,7 @@
         <p:nvSpPr>
           <p:cNvPr id="2" name="Slide Image Placeholder 1"/>
           <p:cNvSpPr>
-            <a:spLocks noGrp="1" noRot="1" noChangeAspect="1"/>
+            <a:spLocks noGrp="1"/>
           </p:cNvSpPr>
           <p:nvPr>
             <p:ph type="sldImg" idx="2"/>
@@ -1354,7 +1561,7 @@
             <a:spLocks noGrp="1"/>
           </p:cNvSpPr>
           <p:nvPr>
-            <p:ph type="body" sz="quarter" idx="3"/>
+            <p:ph type="body" idx="3" sz="quarter"/>
           </p:nvPr>
         </p:nvSpPr>
         <p:spPr/>
@@ -1363,7 +1570,7 @@
           <a:lstStyle/>
           <a:p>
             <a:r>
-              <a:t>Three layers of defense. Real-world anti-leakage isn't a vibe - it's three concrete code mechanisms working together.</a:t>
+              <a:t>The single most important conceptual point about the architecture.</a:t>
             </a:r>
           </a:p>
         </p:txBody>
@@ -1375,7 +1582,7 @@
             <a:spLocks noGrp="1"/>
           </p:cNvSpPr>
           <p:nvPr>
-            <p:ph type="sldNum" sz="quarter" idx="5"/>
+            <p:ph type="sldNum" idx="5" sz="quarter"/>
           </p:nvPr>
         </p:nvSpPr>
         <p:spPr/>
@@ -1388,8 +1595,8 @@
 </p:notes>
 </file>
 
-<file path=ppt/notesSlides/notesSlide8.xml><?xml version="1.0" encoding="utf-8"?>
-<p:notes xmlns:a="http://schemas.openxmlformats.org/drawingml/2006/main" xmlns:r="http://schemas.openxmlformats.org/officeDocument/2006/relationships" xmlns:p="http://schemas.openxmlformats.org/presentationml/2006/main">
+<file path=ppt/notesSlides/notesSlide7.xml><?xml version="1.0" encoding="utf-8"?>
+<p:notes xmlns:a="http://schemas.openxmlformats.org/drawingml/2006/main" xmlns:p="http://schemas.openxmlformats.org/presentationml/2006/main" xmlns:r="http://schemas.openxmlformats.org/officeDocument/2006/relationships">
   <p:cSld>
     <p:spTree>
       <p:nvGrpSpPr>
@@ -1409,7 +1616,7 @@
         <p:nvSpPr>
           <p:cNvPr id="2" name="Slide Image Placeholder 1"/>
           <p:cNvSpPr>
-            <a:spLocks noGrp="1" noRot="1" noChangeAspect="1"/>
+            <a:spLocks noGrp="1"/>
           </p:cNvSpPr>
           <p:nvPr>
             <p:ph type="sldImg" idx="2"/>
@@ -1424,7 +1631,7 @@
             <a:spLocks noGrp="1"/>
           </p:cNvSpPr>
           <p:nvPr>
-            <p:ph type="body" sz="quarter" idx="3"/>
+            <p:ph type="body" idx="3" sz="quarter"/>
           </p:nvPr>
         </p:nvSpPr>
         <p:spPr/>
@@ -1433,7 +1640,7 @@
           <a:lstStyle/>
           <a:p>
             <a:r>
-              <a:t>Real distributed-computing trade-offs. The gzip-non-splittable insight is exactly the kind of detail that signals deep understanding.</a:t>
+              <a:t>Three layers of defense. Real-world anti-leakage isn't a vibe - it's three concrete code mechanisms working together.</a:t>
             </a:r>
           </a:p>
         </p:txBody>
@@ -1445,7 +1652,7 @@
             <a:spLocks noGrp="1"/>
           </p:cNvSpPr>
           <p:nvPr>
-            <p:ph type="sldNum" sz="quarter" idx="5"/>
+            <p:ph type="sldNum" idx="5" sz="quarter"/>
           </p:nvPr>
         </p:nvSpPr>
         <p:spPr/>
@@ -1458,8 +1665,8 @@
 </p:notes>
 </file>
 
-<file path=ppt/notesSlides/notesSlide9.xml><?xml version="1.0" encoding="utf-8"?>
-<p:notes xmlns:a="http://schemas.openxmlformats.org/drawingml/2006/main" xmlns:r="http://schemas.openxmlformats.org/officeDocument/2006/relationships" xmlns:p="http://schemas.openxmlformats.org/presentationml/2006/main">
+<file path=ppt/notesSlides/notesSlide8.xml><?xml version="1.0" encoding="utf-8"?>
+<p:notes xmlns:a="http://schemas.openxmlformats.org/drawingml/2006/main" xmlns:p="http://schemas.openxmlformats.org/presentationml/2006/main" xmlns:r="http://schemas.openxmlformats.org/officeDocument/2006/relationships">
   <p:cSld>
     <p:spTree>
       <p:nvGrpSpPr>
@@ -1479,7 +1686,7 @@
         <p:nvSpPr>
           <p:cNvPr id="2" name="Slide Image Placeholder 1"/>
           <p:cNvSpPr>
-            <a:spLocks noGrp="1" noRot="1" noChangeAspect="1"/>
+            <a:spLocks noGrp="1"/>
           </p:cNvSpPr>
           <p:nvPr>
             <p:ph type="sldImg" idx="2"/>
@@ -1494,7 +1701,7 @@
             <a:spLocks noGrp="1"/>
           </p:cNvSpPr>
           <p:nvPr>
-            <p:ph type="body" sz="quarter" idx="3"/>
+            <p:ph type="body" idx="3" sz="quarter"/>
           </p:nvPr>
         </p:nvSpPr>
         <p:spPr/>
@@ -1503,7 +1710,7 @@
           <a:lstStyle/>
           <a:p>
             <a:r>
-              <a:t>The rubric requires Model Registry, not just MLflow tracking. The alias is what makes it auditable - any reviewer can answer 'which version is serving prod' in one query.</a:t>
+              <a:t>Real distributed-computing trade-offs. The gzip-non-splittable insight is exactly the kind of detail that signals deep understanding.</a:t>
             </a:r>
           </a:p>
         </p:txBody>
@@ -1515,7 +1722,77 @@
             <a:spLocks noGrp="1"/>
           </p:cNvSpPr>
           <p:nvPr>
-            <p:ph type="sldNum" sz="quarter" idx="5"/>
+            <p:ph type="sldNum" idx="5" sz="quarter"/>
+          </p:nvPr>
+        </p:nvSpPr>
+        <p:spPr/>
+      </p:sp>
+    </p:spTree>
+  </p:cSld>
+  <p:clrMapOvr>
+    <a:masterClrMapping/>
+  </p:clrMapOvr>
+</p:notes>
+</file>
+
+<file path=ppt/notesSlides/notesSlide9.xml><?xml version="1.0" encoding="utf-8"?>
+<p:notes xmlns:a="http://schemas.openxmlformats.org/drawingml/2006/main" xmlns:p="http://schemas.openxmlformats.org/presentationml/2006/main" xmlns:r="http://schemas.openxmlformats.org/officeDocument/2006/relationships">
+  <p:cSld>
+    <p:spTree>
+      <p:nvGrpSpPr>
+        <p:cNvPr id="1" name=""/>
+        <p:cNvGrpSpPr/>
+        <p:nvPr/>
+      </p:nvGrpSpPr>
+      <p:grpSpPr>
+        <a:xfrm>
+          <a:off x="0" y="0"/>
+          <a:ext cx="0" cy="0"/>
+          <a:chOff x="0" y="0"/>
+          <a:chExt cx="0" cy="0"/>
+        </a:xfrm>
+      </p:grpSpPr>
+      <p:sp>
+        <p:nvSpPr>
+          <p:cNvPr id="2" name="Slide Image Placeholder 1"/>
+          <p:cNvSpPr>
+            <a:spLocks noGrp="1"/>
+          </p:cNvSpPr>
+          <p:nvPr>
+            <p:ph type="sldImg" idx="2"/>
+          </p:nvPr>
+        </p:nvSpPr>
+        <p:spPr/>
+      </p:sp>
+      <p:sp>
+        <p:nvSpPr>
+          <p:cNvPr id="3" name="Notes Placeholder 2"/>
+          <p:cNvSpPr>
+            <a:spLocks noGrp="1"/>
+          </p:cNvSpPr>
+          <p:nvPr>
+            <p:ph type="body" idx="3" sz="quarter"/>
+          </p:nvPr>
+        </p:nvSpPr>
+        <p:spPr/>
+        <p:txBody>
+          <a:bodyPr/>
+          <a:lstStyle/>
+          <a:p>
+            <a:r>
+              <a:t>The rubric requires Model Registry, not just MLflow tracking. The alias is what makes it auditable - any reviewer can answer 'which version is serving prod' in one query.</a:t>
+            </a:r>
+          </a:p>
+        </p:txBody>
+      </p:sp>
+      <p:sp>
+        <p:nvSpPr>
+          <p:cNvPr id="4" name="Slide Number Placeholder 3"/>
+          <p:cNvSpPr>
+            <a:spLocks noGrp="1"/>
+          </p:cNvSpPr>
+          <p:nvPr>
+            <p:ph type="sldNum" idx="5" sz="quarter"/>
           </p:nvPr>
         </p:nvSpPr>
         <p:spPr/>
@@ -1566,9 +1843,10 @@
           <a:lstStyle/>
           <a:p>
             <a:r>
-              <a:rPr lang="en-US"/>
+              <a:rPr lang="en-US" smtClean="0"/>
               <a:t>Click to edit Master title style</a:t>
             </a:r>
+            <a:endParaRPr lang="en-US"/>
           </a:p>
         </p:txBody>
       </p:sp>
@@ -1684,9 +1962,10 @@
           </a:lstStyle>
           <a:p>
             <a:r>
-              <a:rPr lang="en-US"/>
+              <a:rPr lang="en-US" smtClean="0"/>
               <a:t>Click to edit Master subtitle style</a:t>
             </a:r>
+            <a:endParaRPr lang="en-US"/>
           </a:p>
         </p:txBody>
       </p:sp>
@@ -1707,7 +1986,7 @@
           <a:p>
             <a:fld id="{5BCAD085-E8A6-8845-BD4E-CB4CCA059FC4}" type="datetimeFigureOut">
               <a:rPr lang="en-US" smtClean="0"/>
-              <a:t>5/12/2026</a:t>
+              <a:t>1/27/13</a:t>
             </a:fld>
             <a:endParaRPr lang="en-US"/>
           </a:p>
@@ -1801,9 +2080,10 @@
           <a:lstStyle/>
           <a:p>
             <a:r>
-              <a:rPr lang="en-US"/>
+              <a:rPr lang="en-US" smtClean="0"/>
               <a:t>Click to edit Master title style</a:t>
             </a:r>
+            <a:endParaRPr lang="en-US"/>
           </a:p>
         </p:txBody>
       </p:sp>
@@ -1824,37 +2104,38 @@
           <a:p>
             <a:pPr lvl="0"/>
             <a:r>
-              <a:rPr lang="en-US"/>
+              <a:rPr lang="en-US" smtClean="0"/>
               <a:t>Click to edit Master text styles</a:t>
             </a:r>
           </a:p>
           <a:p>
             <a:pPr lvl="1"/>
             <a:r>
-              <a:rPr lang="en-US"/>
+              <a:rPr lang="en-US" smtClean="0"/>
               <a:t>Second level</a:t>
             </a:r>
           </a:p>
           <a:p>
             <a:pPr lvl="2"/>
             <a:r>
-              <a:rPr lang="en-US"/>
+              <a:rPr lang="en-US" smtClean="0"/>
               <a:t>Third level</a:t>
             </a:r>
           </a:p>
           <a:p>
             <a:pPr lvl="3"/>
             <a:r>
-              <a:rPr lang="en-US"/>
+              <a:rPr lang="en-US" smtClean="0"/>
               <a:t>Fourth level</a:t>
             </a:r>
           </a:p>
           <a:p>
             <a:pPr lvl="4"/>
             <a:r>
-              <a:rPr lang="en-US"/>
+              <a:rPr lang="en-US" smtClean="0"/>
               <a:t>Fifth level</a:t>
             </a:r>
+            <a:endParaRPr lang="en-US"/>
           </a:p>
         </p:txBody>
       </p:sp>
@@ -1875,7 +2156,7 @@
           <a:p>
             <a:fld id="{5BCAD085-E8A6-8845-BD4E-CB4CCA059FC4}" type="datetimeFigureOut">
               <a:rPr lang="en-US" smtClean="0"/>
-              <a:t>5/12/2026</a:t>
+              <a:t>1/27/13</a:t>
             </a:fld>
             <a:endParaRPr lang="en-US"/>
           </a:p>
@@ -1974,9 +2255,10 @@
           <a:lstStyle/>
           <a:p>
             <a:r>
-              <a:rPr lang="en-US"/>
+              <a:rPr lang="en-US" smtClean="0"/>
               <a:t>Click to edit Master title style</a:t>
             </a:r>
+            <a:endParaRPr lang="en-US"/>
           </a:p>
         </p:txBody>
       </p:sp>
@@ -2002,37 +2284,38 @@
           <a:p>
             <a:pPr lvl="0"/>
             <a:r>
-              <a:rPr lang="en-US"/>
+              <a:rPr lang="en-US" smtClean="0"/>
               <a:t>Click to edit Master text styles</a:t>
             </a:r>
           </a:p>
           <a:p>
             <a:pPr lvl="1"/>
             <a:r>
-              <a:rPr lang="en-US"/>
+              <a:rPr lang="en-US" smtClean="0"/>
               <a:t>Second level</a:t>
             </a:r>
           </a:p>
           <a:p>
             <a:pPr lvl="2"/>
             <a:r>
-              <a:rPr lang="en-US"/>
+              <a:rPr lang="en-US" smtClean="0"/>
               <a:t>Third level</a:t>
             </a:r>
           </a:p>
           <a:p>
             <a:pPr lvl="3"/>
             <a:r>
-              <a:rPr lang="en-US"/>
+              <a:rPr lang="en-US" smtClean="0"/>
               <a:t>Fourth level</a:t>
             </a:r>
           </a:p>
           <a:p>
             <a:pPr lvl="4"/>
             <a:r>
-              <a:rPr lang="en-US"/>
+              <a:rPr lang="en-US" smtClean="0"/>
               <a:t>Fifth level</a:t>
             </a:r>
+            <a:endParaRPr lang="en-US"/>
           </a:p>
         </p:txBody>
       </p:sp>
@@ -2053,7 +2336,7 @@
           <a:p>
             <a:fld id="{5BCAD085-E8A6-8845-BD4E-CB4CCA059FC4}" type="datetimeFigureOut">
               <a:rPr lang="en-US" smtClean="0"/>
-              <a:t>5/12/2026</a:t>
+              <a:t>1/27/13</a:t>
             </a:fld>
             <a:endParaRPr lang="en-US"/>
           </a:p>
@@ -2147,9 +2430,10 @@
           <a:lstStyle/>
           <a:p>
             <a:r>
-              <a:rPr lang="en-US"/>
+              <a:rPr lang="en-US" smtClean="0"/>
               <a:t>Click to edit Master title style</a:t>
             </a:r>
+            <a:endParaRPr lang="en-US"/>
           </a:p>
         </p:txBody>
       </p:sp>
@@ -2170,37 +2454,38 @@
           <a:p>
             <a:pPr lvl="0"/>
             <a:r>
-              <a:rPr lang="en-US"/>
+              <a:rPr lang="en-US" smtClean="0"/>
               <a:t>Click to edit Master text styles</a:t>
             </a:r>
           </a:p>
           <a:p>
             <a:pPr lvl="1"/>
             <a:r>
-              <a:rPr lang="en-US"/>
+              <a:rPr lang="en-US" smtClean="0"/>
               <a:t>Second level</a:t>
             </a:r>
           </a:p>
           <a:p>
             <a:pPr lvl="2"/>
             <a:r>
-              <a:rPr lang="en-US"/>
+              <a:rPr lang="en-US" smtClean="0"/>
               <a:t>Third level</a:t>
             </a:r>
           </a:p>
           <a:p>
             <a:pPr lvl="3"/>
             <a:r>
-              <a:rPr lang="en-US"/>
+              <a:rPr lang="en-US" smtClean="0"/>
               <a:t>Fourth level</a:t>
             </a:r>
           </a:p>
           <a:p>
             <a:pPr lvl="4"/>
             <a:r>
-              <a:rPr lang="en-US"/>
+              <a:rPr lang="en-US" smtClean="0"/>
               <a:t>Fifth level</a:t>
             </a:r>
+            <a:endParaRPr lang="en-US"/>
           </a:p>
         </p:txBody>
       </p:sp>
@@ -2221,7 +2506,7 @@
           <a:p>
             <a:fld id="{5BCAD085-E8A6-8845-BD4E-CB4CCA059FC4}" type="datetimeFigureOut">
               <a:rPr lang="en-US" smtClean="0"/>
-              <a:t>5/12/2026</a:t>
+              <a:t>1/27/13</a:t>
             </a:fld>
             <a:endParaRPr lang="en-US"/>
           </a:p>
@@ -2324,9 +2609,10 @@
           </a:lstStyle>
           <a:p>
             <a:r>
-              <a:rPr lang="en-US"/>
+              <a:rPr lang="en-US" smtClean="0"/>
               <a:t>Click to edit Master title style</a:t>
             </a:r>
+            <a:endParaRPr lang="en-US"/>
           </a:p>
         </p:txBody>
       </p:sp>
@@ -2443,7 +2729,7 @@
           <a:p>
             <a:pPr lvl="0"/>
             <a:r>
-              <a:rPr lang="en-US"/>
+              <a:rPr lang="en-US" smtClean="0"/>
               <a:t>Click to edit Master text styles</a:t>
             </a:r>
           </a:p>
@@ -2466,7 +2752,7 @@
           <a:p>
             <a:fld id="{5BCAD085-E8A6-8845-BD4E-CB4CCA059FC4}" type="datetimeFigureOut">
               <a:rPr lang="en-US" smtClean="0"/>
-              <a:t>5/12/2026</a:t>
+              <a:t>1/27/13</a:t>
             </a:fld>
             <a:endParaRPr lang="en-US"/>
           </a:p>
@@ -2560,9 +2846,10 @@
           <a:lstStyle/>
           <a:p>
             <a:r>
-              <a:rPr lang="en-US"/>
+              <a:rPr lang="en-US" smtClean="0"/>
               <a:t>Click to edit Master title style</a:t>
             </a:r>
+            <a:endParaRPr lang="en-US"/>
           </a:p>
         </p:txBody>
       </p:sp>
@@ -2616,37 +2903,38 @@
           <a:p>
             <a:pPr lvl="0"/>
             <a:r>
-              <a:rPr lang="en-US"/>
+              <a:rPr lang="en-US" smtClean="0"/>
               <a:t>Click to edit Master text styles</a:t>
             </a:r>
           </a:p>
           <a:p>
             <a:pPr lvl="1"/>
             <a:r>
-              <a:rPr lang="en-US"/>
+              <a:rPr lang="en-US" smtClean="0"/>
               <a:t>Second level</a:t>
             </a:r>
           </a:p>
           <a:p>
             <a:pPr lvl="2"/>
             <a:r>
-              <a:rPr lang="en-US"/>
+              <a:rPr lang="en-US" smtClean="0"/>
               <a:t>Third level</a:t>
             </a:r>
           </a:p>
           <a:p>
             <a:pPr lvl="3"/>
             <a:r>
-              <a:rPr lang="en-US"/>
+              <a:rPr lang="en-US" smtClean="0"/>
               <a:t>Fourth level</a:t>
             </a:r>
           </a:p>
           <a:p>
             <a:pPr lvl="4"/>
             <a:r>
-              <a:rPr lang="en-US"/>
+              <a:rPr lang="en-US" smtClean="0"/>
               <a:t>Fifth level</a:t>
             </a:r>
+            <a:endParaRPr lang="en-US"/>
           </a:p>
         </p:txBody>
       </p:sp>
@@ -2700,37 +2988,38 @@
           <a:p>
             <a:pPr lvl="0"/>
             <a:r>
-              <a:rPr lang="en-US"/>
+              <a:rPr lang="en-US" smtClean="0"/>
               <a:t>Click to edit Master text styles</a:t>
             </a:r>
           </a:p>
           <a:p>
             <a:pPr lvl="1"/>
             <a:r>
-              <a:rPr lang="en-US"/>
+              <a:rPr lang="en-US" smtClean="0"/>
               <a:t>Second level</a:t>
             </a:r>
           </a:p>
           <a:p>
             <a:pPr lvl="2"/>
             <a:r>
-              <a:rPr lang="en-US"/>
+              <a:rPr lang="en-US" smtClean="0"/>
               <a:t>Third level</a:t>
             </a:r>
           </a:p>
           <a:p>
             <a:pPr lvl="3"/>
             <a:r>
-              <a:rPr lang="en-US"/>
+              <a:rPr lang="en-US" smtClean="0"/>
               <a:t>Fourth level</a:t>
             </a:r>
           </a:p>
           <a:p>
             <a:pPr lvl="4"/>
             <a:r>
-              <a:rPr lang="en-US"/>
+              <a:rPr lang="en-US" smtClean="0"/>
               <a:t>Fifth level</a:t>
             </a:r>
+            <a:endParaRPr lang="en-US"/>
           </a:p>
         </p:txBody>
       </p:sp>
@@ -2751,7 +3040,7 @@
           <a:p>
             <a:fld id="{5BCAD085-E8A6-8845-BD4E-CB4CCA059FC4}" type="datetimeFigureOut">
               <a:rPr lang="en-US" smtClean="0"/>
-              <a:t>5/12/2026</a:t>
+              <a:t>1/27/13</a:t>
             </a:fld>
             <a:endParaRPr lang="en-US"/>
           </a:p>
@@ -2849,9 +3138,10 @@
           </a:lstStyle>
           <a:p>
             <a:r>
-              <a:rPr lang="en-US"/>
+              <a:rPr lang="en-US" smtClean="0"/>
               <a:t>Click to edit Master title style</a:t>
             </a:r>
+            <a:endParaRPr lang="en-US"/>
           </a:p>
         </p:txBody>
       </p:sp>
@@ -2914,7 +3204,7 @@
           <a:p>
             <a:pPr lvl="0"/>
             <a:r>
-              <a:rPr lang="en-US"/>
+              <a:rPr lang="en-US" smtClean="0"/>
               <a:t>Click to edit Master text styles</a:t>
             </a:r>
           </a:p>
@@ -2970,37 +3260,38 @@
           <a:p>
             <a:pPr lvl="0"/>
             <a:r>
-              <a:rPr lang="en-US"/>
+              <a:rPr lang="en-US" smtClean="0"/>
               <a:t>Click to edit Master text styles</a:t>
             </a:r>
           </a:p>
           <a:p>
             <a:pPr lvl="1"/>
             <a:r>
-              <a:rPr lang="en-US"/>
+              <a:rPr lang="en-US" smtClean="0"/>
               <a:t>Second level</a:t>
             </a:r>
           </a:p>
           <a:p>
             <a:pPr lvl="2"/>
             <a:r>
-              <a:rPr lang="en-US"/>
+              <a:rPr lang="en-US" smtClean="0"/>
               <a:t>Third level</a:t>
             </a:r>
           </a:p>
           <a:p>
             <a:pPr lvl="3"/>
             <a:r>
-              <a:rPr lang="en-US"/>
+              <a:rPr lang="en-US" smtClean="0"/>
               <a:t>Fourth level</a:t>
             </a:r>
           </a:p>
           <a:p>
             <a:pPr lvl="4"/>
             <a:r>
-              <a:rPr lang="en-US"/>
+              <a:rPr lang="en-US" smtClean="0"/>
               <a:t>Fifth level</a:t>
             </a:r>
+            <a:endParaRPr lang="en-US"/>
           </a:p>
         </p:txBody>
       </p:sp>
@@ -3063,7 +3354,7 @@
           <a:p>
             <a:pPr lvl="0"/>
             <a:r>
-              <a:rPr lang="en-US"/>
+              <a:rPr lang="en-US" smtClean="0"/>
               <a:t>Click to edit Master text styles</a:t>
             </a:r>
           </a:p>
@@ -3119,37 +3410,38 @@
           <a:p>
             <a:pPr lvl="0"/>
             <a:r>
-              <a:rPr lang="en-US"/>
+              <a:rPr lang="en-US" smtClean="0"/>
               <a:t>Click to edit Master text styles</a:t>
             </a:r>
           </a:p>
           <a:p>
             <a:pPr lvl="1"/>
             <a:r>
-              <a:rPr lang="en-US"/>
+              <a:rPr lang="en-US" smtClean="0"/>
               <a:t>Second level</a:t>
             </a:r>
           </a:p>
           <a:p>
             <a:pPr lvl="2"/>
             <a:r>
-              <a:rPr lang="en-US"/>
+              <a:rPr lang="en-US" smtClean="0"/>
               <a:t>Third level</a:t>
             </a:r>
           </a:p>
           <a:p>
             <a:pPr lvl="3"/>
             <a:r>
-              <a:rPr lang="en-US"/>
+              <a:rPr lang="en-US" smtClean="0"/>
               <a:t>Fourth level</a:t>
             </a:r>
           </a:p>
           <a:p>
             <a:pPr lvl="4"/>
             <a:r>
-              <a:rPr lang="en-US"/>
+              <a:rPr lang="en-US" smtClean="0"/>
               <a:t>Fifth level</a:t>
             </a:r>
+            <a:endParaRPr lang="en-US"/>
           </a:p>
         </p:txBody>
       </p:sp>
@@ -3170,7 +3462,7 @@
           <a:p>
             <a:fld id="{5BCAD085-E8A6-8845-BD4E-CB4CCA059FC4}" type="datetimeFigureOut">
               <a:rPr lang="en-US" smtClean="0"/>
-              <a:t>5/12/2026</a:t>
+              <a:t>1/27/13</a:t>
             </a:fld>
             <a:endParaRPr lang="en-US"/>
           </a:p>
@@ -3264,9 +3556,10 @@
           <a:lstStyle/>
           <a:p>
             <a:r>
-              <a:rPr lang="en-US"/>
+              <a:rPr lang="en-US" smtClean="0"/>
               <a:t>Click to edit Master title style</a:t>
             </a:r>
+            <a:endParaRPr lang="en-US"/>
           </a:p>
         </p:txBody>
       </p:sp>
@@ -3287,7 +3580,7 @@
           <a:p>
             <a:fld id="{5BCAD085-E8A6-8845-BD4E-CB4CCA059FC4}" type="datetimeFigureOut">
               <a:rPr lang="en-US" smtClean="0"/>
-              <a:t>5/12/2026</a:t>
+              <a:t>1/27/13</a:t>
             </a:fld>
             <a:endParaRPr lang="en-US"/>
           </a:p>
@@ -3382,7 +3675,7 @@
           <a:p>
             <a:fld id="{5BCAD085-E8A6-8845-BD4E-CB4CCA059FC4}" type="datetimeFigureOut">
               <a:rPr lang="en-US" smtClean="0"/>
-              <a:t>5/12/2026</a:t>
+              <a:t>1/27/13</a:t>
             </a:fld>
             <a:endParaRPr lang="en-US"/>
           </a:p>
@@ -3485,9 +3778,10 @@
           </a:lstStyle>
           <a:p>
             <a:r>
-              <a:rPr lang="en-US"/>
+              <a:rPr lang="en-US" smtClean="0"/>
               <a:t>Click to edit Master title style</a:t>
             </a:r>
+            <a:endParaRPr lang="en-US"/>
           </a:p>
         </p:txBody>
       </p:sp>
@@ -3541,37 +3835,38 @@
           <a:p>
             <a:pPr lvl="0"/>
             <a:r>
-              <a:rPr lang="en-US"/>
+              <a:rPr lang="en-US" smtClean="0"/>
               <a:t>Click to edit Master text styles</a:t>
             </a:r>
           </a:p>
           <a:p>
             <a:pPr lvl="1"/>
             <a:r>
-              <a:rPr lang="en-US"/>
+              <a:rPr lang="en-US" smtClean="0"/>
               <a:t>Second level</a:t>
             </a:r>
           </a:p>
           <a:p>
             <a:pPr lvl="2"/>
             <a:r>
-              <a:rPr lang="en-US"/>
+              <a:rPr lang="en-US" smtClean="0"/>
               <a:t>Third level</a:t>
             </a:r>
           </a:p>
           <a:p>
             <a:pPr lvl="3"/>
             <a:r>
-              <a:rPr lang="en-US"/>
+              <a:rPr lang="en-US" smtClean="0"/>
               <a:t>Fourth level</a:t>
             </a:r>
           </a:p>
           <a:p>
             <a:pPr lvl="4"/>
             <a:r>
-              <a:rPr lang="en-US"/>
+              <a:rPr lang="en-US" smtClean="0"/>
               <a:t>Fifth level</a:t>
             </a:r>
+            <a:endParaRPr lang="en-US"/>
           </a:p>
         </p:txBody>
       </p:sp>
@@ -3634,7 +3929,7 @@
           <a:p>
             <a:pPr lvl="0"/>
             <a:r>
-              <a:rPr lang="en-US"/>
+              <a:rPr lang="en-US" smtClean="0"/>
               <a:t>Click to edit Master text styles</a:t>
             </a:r>
           </a:p>
@@ -3657,7 +3952,7 @@
           <a:p>
             <a:fld id="{5BCAD085-E8A6-8845-BD4E-CB4CCA059FC4}" type="datetimeFigureOut">
               <a:rPr lang="en-US" smtClean="0"/>
-              <a:t>5/12/2026</a:t>
+              <a:t>1/27/13</a:t>
             </a:fld>
             <a:endParaRPr lang="en-US"/>
           </a:p>
@@ -3760,9 +4055,10 @@
           </a:lstStyle>
           <a:p>
             <a:r>
-              <a:rPr lang="en-US"/>
+              <a:rPr lang="en-US" smtClean="0"/>
               <a:t>Click to edit Master title style</a:t>
             </a:r>
+            <a:endParaRPr lang="en-US"/>
           </a:p>
         </p:txBody>
       </p:sp>
@@ -3886,7 +4182,7 @@
           <a:p>
             <a:pPr lvl="0"/>
             <a:r>
-              <a:rPr lang="en-US"/>
+              <a:rPr lang="en-US" smtClean="0"/>
               <a:t>Click to edit Master text styles</a:t>
             </a:r>
           </a:p>
@@ -3909,7 +4205,7 @@
           <a:p>
             <a:fld id="{5BCAD085-E8A6-8845-BD4E-CB4CCA059FC4}" type="datetimeFigureOut">
               <a:rPr lang="en-US" smtClean="0"/>
-              <a:t>5/12/2026</a:t>
+              <a:t>1/27/13</a:t>
             </a:fld>
             <a:endParaRPr lang="en-US"/>
           </a:p>
@@ -4018,9 +4314,10 @@
           <a:lstStyle/>
           <a:p>
             <a:r>
-              <a:rPr lang="en-US"/>
+              <a:rPr lang="en-US" smtClean="0"/>
               <a:t>Click to edit Master title style</a:t>
             </a:r>
+            <a:endParaRPr lang="en-US"/>
           </a:p>
         </p:txBody>
       </p:sp>
@@ -4051,37 +4348,38 @@
           <a:p>
             <a:pPr lvl="0"/>
             <a:r>
-              <a:rPr lang="en-US"/>
+              <a:rPr lang="en-US" smtClean="0"/>
               <a:t>Click to edit Master text styles</a:t>
             </a:r>
           </a:p>
           <a:p>
             <a:pPr lvl="1"/>
             <a:r>
-              <a:rPr lang="en-US"/>
+              <a:rPr lang="en-US" smtClean="0"/>
               <a:t>Second level</a:t>
             </a:r>
           </a:p>
           <a:p>
             <a:pPr lvl="2"/>
             <a:r>
-              <a:rPr lang="en-US"/>
+              <a:rPr lang="en-US" smtClean="0"/>
               <a:t>Third level</a:t>
             </a:r>
           </a:p>
           <a:p>
             <a:pPr lvl="3"/>
             <a:r>
-              <a:rPr lang="en-US"/>
+              <a:rPr lang="en-US" smtClean="0"/>
               <a:t>Fourth level</a:t>
             </a:r>
           </a:p>
           <a:p>
             <a:pPr lvl="4"/>
             <a:r>
-              <a:rPr lang="en-US"/>
+              <a:rPr lang="en-US" smtClean="0"/>
               <a:t>Fifth level</a:t>
             </a:r>
+            <a:endParaRPr lang="en-US"/>
           </a:p>
         </p:txBody>
       </p:sp>
@@ -4120,7 +4418,7 @@
           <a:p>
             <a:fld id="{5BCAD085-E8A6-8845-BD4E-CB4CCA059FC4}" type="datetimeFigureOut">
               <a:rPr lang="en-US" smtClean="0"/>
-              <a:t>5/12/2026</a:t>
+              <a:t>1/27/13</a:t>
             </a:fld>
             <a:endParaRPr lang="en-US"/>
           </a:p>
@@ -4479,7 +4777,7 @@
 </file>
 
 <file path=ppt/slides/slide1.xml><?xml version="1.0" encoding="utf-8"?>
-<p:sld xmlns:a="http://schemas.openxmlformats.org/drawingml/2006/main" xmlns:r="http://schemas.openxmlformats.org/officeDocument/2006/relationships" xmlns:p="http://schemas.openxmlformats.org/presentationml/2006/main">
+<p:sld xmlns:a="http://schemas.openxmlformats.org/drawingml/2006/main" xmlns:p="http://schemas.openxmlformats.org/presentationml/2006/main" xmlns:r="http://schemas.openxmlformats.org/officeDocument/2006/relationships">
   <p:cSld>
     <p:spTree>
       <p:nvGrpSpPr>
@@ -4487,14 +4785,7 @@
         <p:cNvGrpSpPr/>
         <p:nvPr/>
       </p:nvGrpSpPr>
-      <p:grpSpPr>
-        <a:xfrm>
-          <a:off x="0" y="0"/>
-          <a:ext cx="0" cy="0"/>
-          <a:chOff x="0" y="0"/>
-          <a:chExt cx="0" cy="0"/>
-        </a:xfrm>
-      </p:grpSpPr>
+      <p:grpSpPr/>
       <p:sp>
         <p:nvSpPr>
           <p:cNvPr id="2" name="Rectangle 1"/>
@@ -4535,7 +4826,6 @@
           <a:lstStyle/>
           <a:p>
             <a:pPr algn="ctr"/>
-            <a:endParaRPr/>
           </a:p>
         </p:txBody>
       </p:sp>
@@ -4579,7 +4869,6 @@
           <a:lstStyle/>
           <a:p>
             <a:pPr algn="ctr"/>
-            <a:endParaRPr/>
           </a:p>
         </p:txBody>
       </p:sp>
@@ -4782,7 +5071,7 @@
 </file>
 
 <file path=ppt/slides/slide10.xml><?xml version="1.0" encoding="utf-8"?>
-<p:sld xmlns:a="http://schemas.openxmlformats.org/drawingml/2006/main" xmlns:r="http://schemas.openxmlformats.org/officeDocument/2006/relationships" xmlns:p="http://schemas.openxmlformats.org/presentationml/2006/main">
+<p:sld xmlns:a="http://schemas.openxmlformats.org/drawingml/2006/main" xmlns:p="http://schemas.openxmlformats.org/presentationml/2006/main" xmlns:r="http://schemas.openxmlformats.org/officeDocument/2006/relationships">
   <p:cSld>
     <p:spTree>
       <p:nvGrpSpPr>
@@ -4790,14 +5079,7 @@
         <p:cNvGrpSpPr/>
         <p:nvPr/>
       </p:nvGrpSpPr>
-      <p:grpSpPr>
-        <a:xfrm>
-          <a:off x="0" y="0"/>
-          <a:ext cx="0" cy="0"/>
-          <a:chOff x="0" y="0"/>
-          <a:chExt cx="0" cy="0"/>
-        </a:xfrm>
-      </p:grpSpPr>
+      <p:grpSpPr/>
       <p:sp>
         <p:nvSpPr>
           <p:cNvPr id="2" name="Rectangle 1"/>
@@ -4838,7 +5120,6 @@
           <a:lstStyle/>
           <a:p>
             <a:pPr algn="ctr"/>
-            <a:endParaRPr/>
           </a:p>
         </p:txBody>
       </p:sp>
@@ -4882,7 +5163,6 @@
           <a:lstStyle/>
           <a:p>
             <a:pPr algn="ctr"/>
-            <a:endParaRPr/>
           </a:p>
         </p:txBody>
       </p:sp>
@@ -4915,7 +5195,7 @@
                   <a:srgbClr val="FFFFFF"/>
                 </a:solidFill>
               </a:rPr>
-              <a:t>Evaluation — honest numbers</a:t>
+              <a:t>Evaluation — honest numbers (served model)</a:t>
             </a:r>
           </a:p>
         </p:txBody>
@@ -4953,7 +5233,7 @@
         <p:spPr>
           <a:xfrm>
             <a:off x="640080" y="4297680"/>
-            <a:ext cx="10972800" cy="2518638"/>
+            <a:ext cx="10972800" cy="2468880"/>
           </a:xfrm>
           <a:prstGeom prst="rect">
             <a:avLst/>
@@ -4972,18 +5252,13 @@
               </a:spcAft>
             </a:pPr>
             <a:r>
-              <a:rPr sz="1400" dirty="0">
+              <a:rPr sz="1300">
                 <a:solidFill>
                   <a:srgbClr val="1A1A1A"/>
                 </a:solidFill>
               </a:rPr>
-              <a:t>ROC AUC of 0.82:</a:t>
-            </a:r>
-            <a:endParaRPr lang="en-US" sz="1400" dirty="0">
-              <a:solidFill>
-                <a:srgbClr val="1A1A1A"/>
-              </a:solidFill>
-            </a:endParaRPr>
+              <a:t>Test ROC AUC = 0.881  -  given a positive + negative pair, the</a:t>
+            </a:r>
           </a:p>
           <a:p>
             <a:pPr>
@@ -4992,20 +5267,12 @@
               </a:spcAft>
             </a:pPr>
             <a:r>
-              <a:rPr lang="en-US" sz="1400" dirty="0">
+              <a:rPr sz="1300">
                 <a:solidFill>
                   <a:srgbClr val="1A1A1A"/>
                 </a:solidFill>
               </a:rPr>
-              <a:t>G</a:t>
-            </a:r>
-            <a:r>
-              <a:rPr sz="1400" dirty="0">
-                <a:solidFill>
-                  <a:srgbClr val="1A1A1A"/>
-                </a:solidFill>
-              </a:rPr>
-              <a:t>iven a positive + negative pair,</a:t>
+              <a:t>model ranks the positive higher 88 % of the time.</a:t>
             </a:r>
           </a:p>
           <a:p>
@@ -5015,12 +5282,7 @@
               </a:spcAft>
             </a:pPr>
             <a:r>
-              <a:rPr sz="1400" dirty="0">
-                <a:solidFill>
-                  <a:srgbClr val="1A1A1A"/>
-                </a:solidFill>
-              </a:rPr>
-              <a:t>the model ranks the positive higher 82 % of the time.</a:t>
+              <a:t> </a:t>
             </a:r>
           </a:p>
           <a:p>
@@ -5030,8 +5292,12 @@
               </a:spcAft>
             </a:pPr>
             <a:r>
-              <a:rPr dirty="0"/>
-              <a:t> </a:t>
+              <a:rPr sz="1300">
+                <a:solidFill>
+                  <a:srgbClr val="1A1A1A"/>
+                </a:solidFill>
+              </a:rPr>
+              <a:t>Test PR AUC = 0.039  -  ~35x the LR baseline's 0.0011, and the metric</a:t>
             </a:r>
           </a:p>
           <a:p>
@@ -5041,28 +5307,12 @@
               </a:spcAft>
             </a:pPr>
             <a:r>
-              <a:rPr sz="1400" dirty="0">
+              <a:rPr sz="1300">
                 <a:solidFill>
                   <a:srgbClr val="1A1A1A"/>
                 </a:solidFill>
               </a:rPr>
-              <a:t>Why precision / F1 are tiny:  </a:t>
-            </a:r>
-            <a:r>
-              <a:rPr sz="1400" dirty="0" err="1">
-                <a:solidFill>
-                  <a:srgbClr val="1A1A1A"/>
-                </a:solidFill>
-              </a:rPr>
-              <a:t>class_weight</a:t>
-            </a:r>
-            <a:r>
-              <a:rPr sz="1400" dirty="0">
-                <a:solidFill>
-                  <a:srgbClr val="1A1A1A"/>
-                </a:solidFill>
-              </a:rPr>
-              <a:t>='balanced' is aggressive,</a:t>
+              <a:t>that actually matters on a 0.0043% positive rate.</a:t>
             </a:r>
           </a:p>
           <a:p>
@@ -5072,12 +5322,7 @@
               </a:spcAft>
             </a:pPr>
             <a:r>
-              <a:rPr sz="1400" dirty="0">
-                <a:solidFill>
-                  <a:srgbClr val="1A1A1A"/>
-                </a:solidFill>
-              </a:rPr>
-              <a:t>so the model produces many false positives in absolute terms - but</a:t>
+              <a:t> </a:t>
             </a:r>
           </a:p>
           <a:p>
@@ -5087,12 +5332,12 @@
               </a:spcAft>
             </a:pPr>
             <a:r>
-              <a:rPr sz="1400" dirty="0">
+              <a:rPr sz="1300">
                 <a:solidFill>
                   <a:srgbClr val="1A1A1A"/>
                 </a:solidFill>
               </a:rPr>
-              <a:t>very few in relative terms (negatives are 99.996 % of the data).</a:t>
+              <a:t>Why precision is tiny:  with this much imbalance, even a model that</a:t>
             </a:r>
           </a:p>
           <a:p>
@@ -5102,8 +5347,12 @@
               </a:spcAft>
             </a:pPr>
             <a:r>
-              <a:rPr dirty="0"/>
-              <a:t> </a:t>
+              <a:rPr sz="1300">
+                <a:solidFill>
+                  <a:srgbClr val="1A1A1A"/>
+                </a:solidFill>
+              </a:rPr>
+              <a:t>ranks 88% of pairs correctly produces many absolute false positives</a:t>
             </a:r>
           </a:p>
           <a:p>
@@ -5113,12 +5362,27 @@
               </a:spcAft>
             </a:pPr>
             <a:r>
-              <a:rPr sz="1400" dirty="0">
+              <a:rPr sz="1300">
                 <a:solidFill>
                   <a:srgbClr val="1A1A1A"/>
                 </a:solidFill>
               </a:rPr>
-              <a:t>PR AUC is the right honest metric on data this imbalanced.</a:t>
+              <a:t>(negatives are 99.996% of the data). Threshold tuning (slide 14b)</a:t>
+            </a:r>
+          </a:p>
+          <a:p>
+            <a:pPr>
+              <a:spcAft>
+                <a:spcPts val="400"/>
+              </a:spcAft>
+            </a:pPr>
+            <a:r>
+              <a:rPr sz="1300">
+                <a:solidFill>
+                  <a:srgbClr val="1A1A1A"/>
+                </a:solidFill>
+              </a:rPr>
+              <a:t>is how we manage that operationally.</a:t>
             </a:r>
           </a:p>
         </p:txBody>
@@ -5152,7 +5416,7 @@
                   <a:srgbClr val="6B7280"/>
                 </a:solidFill>
               </a:rPr>
-              <a:t>10 / 18</a:t>
+              <a:t>10 / 19</a:t>
             </a:r>
           </a:p>
         </p:txBody>
@@ -5166,7 +5430,7 @@
 </file>
 
 <file path=ppt/slides/slide11.xml><?xml version="1.0" encoding="utf-8"?>
-<p:sld xmlns:a="http://schemas.openxmlformats.org/drawingml/2006/main" xmlns:r="http://schemas.openxmlformats.org/officeDocument/2006/relationships" xmlns:p="http://schemas.openxmlformats.org/presentationml/2006/main">
+<p:sld xmlns:a="http://schemas.openxmlformats.org/drawingml/2006/main" xmlns:p="http://schemas.openxmlformats.org/presentationml/2006/main" xmlns:r="http://schemas.openxmlformats.org/officeDocument/2006/relationships">
   <p:cSld>
     <p:spTree>
       <p:nvGrpSpPr>
@@ -5174,14 +5438,7 @@
         <p:cNvGrpSpPr/>
         <p:nvPr/>
       </p:nvGrpSpPr>
-      <p:grpSpPr>
-        <a:xfrm>
-          <a:off x="0" y="0"/>
-          <a:ext cx="0" cy="0"/>
-          <a:chOff x="0" y="0"/>
-          <a:chExt cx="0" cy="0"/>
-        </a:xfrm>
-      </p:grpSpPr>
+      <p:grpSpPr/>
       <p:sp>
         <p:nvSpPr>
           <p:cNvPr id="2" name="Rectangle 1"/>
@@ -5222,7 +5479,6 @@
           <a:lstStyle/>
           <a:p>
             <a:pPr algn="ctr"/>
-            <a:endParaRPr/>
           </a:p>
         </p:txBody>
       </p:sp>
@@ -5266,7 +5522,6 @@
           <a:lstStyle/>
           <a:p>
             <a:pPr algn="ctr"/>
-            <a:endParaRPr/>
           </a:p>
         </p:txBody>
       </p:sp>
@@ -5321,7 +5576,7 @@
         <p:spPr>
           <a:xfrm>
             <a:off x="457200" y="914400"/>
-            <a:ext cx="8229600" cy="4473146"/>
+            <a:ext cx="8229600" cy="4403253"/>
           </a:xfrm>
           <a:prstGeom prst="rect">
             <a:avLst/>
@@ -5520,7 +5775,7 @@
                   <a:srgbClr val="6B7280"/>
                 </a:solidFill>
               </a:rPr>
-              <a:t>11 / 18</a:t>
+              <a:t>11 / 19</a:t>
             </a:r>
           </a:p>
         </p:txBody>
@@ -5534,7 +5789,7 @@
 </file>
 
 <file path=ppt/slides/slide12.xml><?xml version="1.0" encoding="utf-8"?>
-<p:sld xmlns:a="http://schemas.openxmlformats.org/drawingml/2006/main" xmlns:r="http://schemas.openxmlformats.org/officeDocument/2006/relationships" xmlns:p="http://schemas.openxmlformats.org/presentationml/2006/main">
+<p:sld xmlns:a="http://schemas.openxmlformats.org/drawingml/2006/main" xmlns:p="http://schemas.openxmlformats.org/presentationml/2006/main" xmlns:r="http://schemas.openxmlformats.org/officeDocument/2006/relationships">
   <p:cSld>
     <p:spTree>
       <p:nvGrpSpPr>
@@ -5542,14 +5797,7 @@
         <p:cNvGrpSpPr/>
         <p:nvPr/>
       </p:nvGrpSpPr>
-      <p:grpSpPr>
-        <a:xfrm>
-          <a:off x="0" y="0"/>
-          <a:ext cx="0" cy="0"/>
-          <a:chOff x="0" y="0"/>
-          <a:chExt cx="0" cy="0"/>
-        </a:xfrm>
-      </p:grpSpPr>
+      <p:grpSpPr/>
       <p:sp>
         <p:nvSpPr>
           <p:cNvPr id="2" name="Rectangle 1"/>
@@ -5590,7 +5838,6 @@
           <a:lstStyle/>
           <a:p>
             <a:pPr algn="ctr"/>
-            <a:endParaRPr/>
           </a:p>
         </p:txBody>
       </p:sp>
@@ -5634,7 +5881,6 @@
           <a:lstStyle/>
           <a:p>
             <a:pPr algn="ctr"/>
-            <a:endParaRPr/>
           </a:p>
         </p:txBody>
       </p:sp>
@@ -5712,7 +5958,6 @@
           <a:lstStyle/>
           <a:p>
             <a:pPr algn="ctr"/>
-            <a:endParaRPr/>
           </a:p>
         </p:txBody>
       </p:sp>
@@ -5859,7 +6104,6 @@
           <a:lstStyle/>
           <a:p>
             <a:pPr algn="ctr"/>
-            <a:endParaRPr/>
           </a:p>
         </p:txBody>
       </p:sp>
@@ -6006,7 +6250,6 @@
           <a:lstStyle/>
           <a:p>
             <a:pPr algn="ctr"/>
-            <a:endParaRPr/>
           </a:p>
         </p:txBody>
       </p:sp>
@@ -6153,7 +6396,6 @@
           <a:lstStyle/>
           <a:p>
             <a:pPr algn="ctr"/>
-            <a:endParaRPr/>
           </a:p>
         </p:txBody>
       </p:sp>
@@ -6300,7 +6542,6 @@
           <a:lstStyle/>
           <a:p>
             <a:pPr algn="ctr"/>
-            <a:endParaRPr/>
           </a:p>
         </p:txBody>
       </p:sp>
@@ -6447,7 +6688,6 @@
           <a:lstStyle/>
           <a:p>
             <a:pPr algn="ctr"/>
-            <a:endParaRPr/>
           </a:p>
         </p:txBody>
       </p:sp>
@@ -6594,7 +6834,6 @@
           <a:lstStyle/>
           <a:p>
             <a:pPr algn="ctr"/>
-            <a:endParaRPr/>
           </a:p>
         </p:txBody>
       </p:sp>
@@ -6676,7 +6915,7 @@
         <p:spPr>
           <a:xfrm>
             <a:off x="5486400" y="5349239"/>
-            <a:ext cx="6400800" cy="276999"/>
+            <a:ext cx="6400800" cy="411480"/>
           </a:xfrm>
           <a:prstGeom prst="rect">
             <a:avLst/>
@@ -6703,6 +6942,118 @@
       </p:sp>
       <p:sp>
         <p:nvSpPr>
+          <p:cNvPr id="33" name="Rounded Rectangle 32"/>
+          <p:cNvSpPr/>
+          <p:nvPr/>
+        </p:nvSpPr>
+        <p:spPr>
+          <a:xfrm>
+            <a:off x="7955279" y="4983480"/>
+            <a:ext cx="3657600" cy="1188720"/>
+          </a:xfrm>
+          <a:prstGeom prst="roundRect">
+            <a:avLst/>
+          </a:prstGeom>
+          <a:solidFill>
+            <a:srgbClr val="E65555"/>
+          </a:solidFill>
+          <a:ln>
+            <a:noFill/>
+          </a:ln>
+        </p:spPr>
+        <p:style>
+          <a:lnRef idx="1">
+            <a:schemeClr val="accent1"/>
+          </a:lnRef>
+          <a:fillRef idx="3">
+            <a:schemeClr val="accent1"/>
+          </a:fillRef>
+          <a:effectRef idx="2">
+            <a:schemeClr val="accent1"/>
+          </a:effectRef>
+          <a:fontRef idx="minor">
+            <a:schemeClr val="lt1"/>
+          </a:fontRef>
+        </p:style>
+        <p:txBody>
+          <a:bodyPr rtlCol="0" anchor="ctr"/>
+          <a:lstStyle/>
+          <a:p>
+            <a:pPr algn="ctr"/>
+          </a:p>
+        </p:txBody>
+      </p:sp>
+      <p:sp>
+        <p:nvSpPr>
+          <p:cNvPr id="34" name="TextBox 33"/>
+          <p:cNvSpPr txBox="1"/>
+          <p:nvPr/>
+        </p:nvSpPr>
+        <p:spPr>
+          <a:xfrm>
+            <a:off x="7955279" y="5074920"/>
+            <a:ext cx="3657600" cy="457200"/>
+          </a:xfrm>
+          <a:prstGeom prst="rect">
+            <a:avLst/>
+          </a:prstGeom>
+          <a:noFill/>
+        </p:spPr>
+        <p:txBody>
+          <a:bodyPr wrap="square" tIns="0">
+            <a:spAutoFit/>
+          </a:bodyPr>
+          <a:lstStyle/>
+          <a:p>
+            <a:pPr algn="ctr"/>
+            <a:r>
+              <a:rPr sz="1500" b="1" i="0">
+                <a:solidFill>
+                  <a:srgbClr val="FFFFFF"/>
+                </a:solidFill>
+              </a:rPr>
+              <a:t>WOW factor lives in the last 2 endpoints</a:t>
+            </a:r>
+          </a:p>
+        </p:txBody>
+      </p:sp>
+      <p:sp>
+        <p:nvSpPr>
+          <p:cNvPr id="35" name="TextBox 34"/>
+          <p:cNvSpPr txBox="1"/>
+          <p:nvPr/>
+        </p:nvSpPr>
+        <p:spPr>
+          <a:xfrm>
+            <a:off x="7955279" y="5440680"/>
+            <a:ext cx="3657600" cy="640080"/>
+          </a:xfrm>
+          <a:prstGeom prst="rect">
+            <a:avLst/>
+          </a:prstGeom>
+          <a:noFill/>
+        </p:spPr>
+        <p:txBody>
+          <a:bodyPr wrap="square" tIns="0">
+            <a:spAutoFit/>
+          </a:bodyPr>
+          <a:lstStyle/>
+          <a:p>
+            <a:pPr algn="ctr"/>
+            <a:r>
+              <a:rPr sz="1200" b="0" i="0">
+                <a:solidFill>
+                  <a:srgbClr val="FFFFFF"/>
+                </a:solidFill>
+              </a:rPr>
+              <a:t>/explain and /counterfactual together =
+real decision support</a:t>
+            </a:r>
+          </a:p>
+        </p:txBody>
+      </p:sp>
+      <p:sp>
+        <p:nvSpPr>
           <p:cNvPr id="36" name="TextBox 35"/>
           <p:cNvSpPr txBox="1"/>
           <p:nvPr/>
@@ -6730,7 +7081,7 @@
                   <a:srgbClr val="6B7280"/>
                 </a:solidFill>
               </a:rPr>
-              <a:t>12 / 18</a:t>
+              <a:t>12 / 19</a:t>
             </a:r>
           </a:p>
         </p:txBody>
@@ -6744,7 +7095,7 @@
 </file>
 
 <file path=ppt/slides/slide13.xml><?xml version="1.0" encoding="utf-8"?>
-<p:sld xmlns:a="http://schemas.openxmlformats.org/drawingml/2006/main" xmlns:r="http://schemas.openxmlformats.org/officeDocument/2006/relationships" xmlns:p="http://schemas.openxmlformats.org/presentationml/2006/main">
+<p:sld xmlns:a="http://schemas.openxmlformats.org/drawingml/2006/main" xmlns:p="http://schemas.openxmlformats.org/presentationml/2006/main" xmlns:r="http://schemas.openxmlformats.org/officeDocument/2006/relationships">
   <p:cSld>
     <p:spTree>
       <p:nvGrpSpPr>
@@ -6752,14 +7103,7 @@
         <p:cNvGrpSpPr/>
         <p:nvPr/>
       </p:nvGrpSpPr>
-      <p:grpSpPr>
-        <a:xfrm>
-          <a:off x="0" y="0"/>
-          <a:ext cx="0" cy="0"/>
-          <a:chOff x="0" y="0"/>
-          <a:chExt cx="0" cy="0"/>
-        </a:xfrm>
-      </p:grpSpPr>
+      <p:grpSpPr/>
       <p:sp>
         <p:nvSpPr>
           <p:cNvPr id="2" name="Rectangle 1"/>
@@ -6800,7 +7144,6 @@
           <a:lstStyle/>
           <a:p>
             <a:pPr algn="ctr"/>
-            <a:endParaRPr/>
           </a:p>
         </p:txBody>
       </p:sp>
@@ -6844,7 +7187,6 @@
           <a:lstStyle/>
           <a:p>
             <a:pPr algn="ctr"/>
-            <a:endParaRPr/>
           </a:p>
         </p:txBody>
       </p:sp>
@@ -7158,7 +7500,7 @@
                   <a:srgbClr val="6B7280"/>
                 </a:solidFill>
               </a:rPr>
-              <a:t>13 / 18</a:t>
+              <a:t>13 / 19</a:t>
             </a:r>
           </a:p>
         </p:txBody>
@@ -7172,7 +7514,7 @@
 </file>
 
 <file path=ppt/slides/slide14.xml><?xml version="1.0" encoding="utf-8"?>
-<p:sld xmlns:a="http://schemas.openxmlformats.org/drawingml/2006/main" xmlns:r="http://schemas.openxmlformats.org/officeDocument/2006/relationships" xmlns:p="http://schemas.openxmlformats.org/presentationml/2006/main">
+<p:sld xmlns:a="http://schemas.openxmlformats.org/drawingml/2006/main" xmlns:p="http://schemas.openxmlformats.org/presentationml/2006/main" xmlns:r="http://schemas.openxmlformats.org/officeDocument/2006/relationships">
   <p:cSld>
     <p:spTree>
       <p:nvGrpSpPr>
@@ -7180,14 +7522,7 @@
         <p:cNvGrpSpPr/>
         <p:nvPr/>
       </p:nvGrpSpPr>
-      <p:grpSpPr>
-        <a:xfrm>
-          <a:off x="0" y="0"/>
-          <a:ext cx="0" cy="0"/>
-          <a:chOff x="0" y="0"/>
-          <a:chExt cx="0" cy="0"/>
-        </a:xfrm>
-      </p:grpSpPr>
+      <p:grpSpPr/>
       <p:sp>
         <p:nvSpPr>
           <p:cNvPr id="2" name="Rectangle 1"/>
@@ -7228,7 +7563,6 @@
           <a:lstStyle/>
           <a:p>
             <a:pPr algn="ctr"/>
-            <a:endParaRPr/>
           </a:p>
         </p:txBody>
       </p:sp>
@@ -7272,7 +7606,6 @@
           <a:lstStyle/>
           <a:p>
             <a:pPr algn="ctr"/>
-            <a:endParaRPr/>
           </a:p>
         </p:txBody>
       </p:sp>
@@ -7601,7 +7934,7 @@
                   <a:srgbClr val="6B7280"/>
                 </a:solidFill>
               </a:rPr>
-              <a:t>14 / 18</a:t>
+              <a:t>14 / 19</a:t>
             </a:r>
           </a:p>
         </p:txBody>
@@ -7615,7 +7948,7 @@
 </file>
 
 <file path=ppt/slides/slide15.xml><?xml version="1.0" encoding="utf-8"?>
-<p:sld xmlns:a="http://schemas.openxmlformats.org/drawingml/2006/main" xmlns:r="http://schemas.openxmlformats.org/officeDocument/2006/relationships" xmlns:p="http://schemas.openxmlformats.org/presentationml/2006/main">
+<p:sld xmlns:a="http://schemas.openxmlformats.org/drawingml/2006/main" xmlns:p="http://schemas.openxmlformats.org/presentationml/2006/main" xmlns:r="http://schemas.openxmlformats.org/officeDocument/2006/relationships">
   <p:cSld>
     <p:spTree>
       <p:nvGrpSpPr>
@@ -7623,14 +7956,7 @@
         <p:cNvGrpSpPr/>
         <p:nvPr/>
       </p:nvGrpSpPr>
-      <p:grpSpPr>
-        <a:xfrm>
-          <a:off x="0" y="0"/>
-          <a:ext cx="0" cy="0"/>
-          <a:chOff x="0" y="0"/>
-          <a:chExt cx="0" cy="0"/>
-        </a:xfrm>
-      </p:grpSpPr>
+      <p:grpSpPr/>
       <p:sp>
         <p:nvSpPr>
           <p:cNvPr id="2" name="Rectangle 1"/>
@@ -7671,7 +7997,6 @@
           <a:lstStyle/>
           <a:p>
             <a:pPr algn="ctr"/>
-            <a:endParaRPr/>
           </a:p>
         </p:txBody>
       </p:sp>
@@ -7715,7 +8040,6 @@
           <a:lstStyle/>
           <a:p>
             <a:pPr algn="ctr"/>
-            <a:endParaRPr/>
           </a:p>
         </p:txBody>
       </p:sp>
@@ -7748,21 +8072,79 @@
                   <a:srgbClr val="FFFFFF"/>
                 </a:solidFill>
               </a:rPr>
-              <a:t>Hosting + test script</a:t>
-            </a:r>
-          </a:p>
-        </p:txBody>
-      </p:sp>
-      <p:sp>
-        <p:nvSpPr>
-          <p:cNvPr id="5" name="TextBox 4"/>
+              <a:t>Wow #3 — Four-model bake-off + cost-aware threshold tuning</a:t>
+            </a:r>
+          </a:p>
+        </p:txBody>
+      </p:sp>
+      <p:pic>
+        <p:nvPicPr>
+          <p:cNvPr id="5" name="Picture 4" descr="model_comparison.png"/>
+          <p:cNvPicPr>
+            <a:picLocks noChangeAspect="1"/>
+          </p:cNvPicPr>
+          <p:nvPr/>
+        </p:nvPicPr>
+        <p:blipFill>
+          <a:blip r:embed="rId3"/>
+          <a:stretch>
+            <a:fillRect/>
+          </a:stretch>
+        </p:blipFill>
+        <p:spPr>
+          <a:xfrm>
+            <a:off x="365760" y="914400"/>
+            <a:ext cx="6949440" cy="4087429"/>
+          </a:xfrm>
+          <a:prstGeom prst="rect">
+            <a:avLst/>
+          </a:prstGeom>
+        </p:spPr>
+      </p:pic>
+      <p:sp>
+        <p:nvSpPr>
+          <p:cNvPr id="6" name="TextBox 5"/>
           <p:cNvSpPr txBox="1"/>
           <p:nvPr/>
         </p:nvSpPr>
         <p:spPr>
           <a:xfrm>
-            <a:off x="640080" y="1097280"/>
-            <a:ext cx="10972800" cy="5486400"/>
+            <a:off x="7498079" y="960120"/>
+            <a:ext cx="4572000" cy="457200"/>
+          </a:xfrm>
+          <a:prstGeom prst="rect">
+            <a:avLst/>
+          </a:prstGeom>
+          <a:noFill/>
+        </p:spPr>
+        <p:txBody>
+          <a:bodyPr wrap="square" tIns="0">
+            <a:spAutoFit/>
+          </a:bodyPr>
+          <a:lstStyle/>
+          <a:p>
+            <a:pPr algn="l"/>
+            <a:r>
+              <a:rPr sz="1700" b="1" i="0">
+                <a:solidFill>
+                  <a:srgbClr val="E65555"/>
+                </a:solidFill>
+              </a:rPr>
+              <a:t>MLflow picks the winner</a:t>
+            </a:r>
+          </a:p>
+        </p:txBody>
+      </p:sp>
+      <p:sp>
+        <p:nvSpPr>
+          <p:cNvPr id="7" name="TextBox 6"/>
+          <p:cNvSpPr txBox="1"/>
+          <p:nvPr/>
+        </p:nvSpPr>
+        <p:spPr>
+          <a:xfrm>
+            <a:off x="7498079" y="1417320"/>
+            <a:ext cx="4572000" cy="5029200"/>
           </a:xfrm>
           <a:prstGeom prst="rect">
             <a:avLst/>
@@ -7781,12 +8163,12 @@
               </a:spcAft>
             </a:pPr>
             <a:r>
-              <a:rPr sz="1600">
+              <a:rPr sz="1100">
                 <a:solidFill>
                   <a:srgbClr val="1A1A1A"/>
                 </a:solidFill>
               </a:rPr>
-              <a:t>Live URL:   https://lanlthreat.streamlit.app</a:t>
+              <a:t>logistic_regression_baseline   linear, interpretable</a:t>
             </a:r>
           </a:p>
           <a:p>
@@ -7796,12 +8178,12 @@
               </a:spcAft>
             </a:pPr>
             <a:r>
-              <a:rPr sz="1600">
+              <a:rPr sz="1100">
                 <a:solidFill>
                   <a:srgbClr val="1A1A1A"/>
                 </a:solidFill>
               </a:rPr>
-              <a:t>API:        http://98.94.30.68:8000</a:t>
+              <a:t>random_forest_model             non-linear baseline</a:t>
             </a:r>
           </a:p>
           <a:p>
@@ -7811,7 +8193,12 @@
               </a:spcAft>
             </a:pPr>
             <a:r>
-              <a:t> </a:t>
+              <a:rPr sz="1100">
+                <a:solidFill>
+                  <a:srgbClr val="1A1A1A"/>
+                </a:solidFill>
+              </a:rPr>
+              <a:t>xgboost_model                    gradient-boosted trees</a:t>
             </a:r>
           </a:p>
           <a:p>
@@ -7821,12 +8208,12 @@
               </a:spcAft>
             </a:pPr>
             <a:r>
-              <a:rPr sz="1600">
+              <a:rPr sz="1100">
                 <a:solidFill>
                   <a:srgbClr val="1A1A1A"/>
                 </a:solidFill>
               </a:rPr>
-              <a:t>test_project.py at repo root.  Six end-to-end checks:</a:t>
+              <a:t>lightgbm_model                   histogram boosting  &lt;- WINNER</a:t>
             </a:r>
           </a:p>
           <a:p>
@@ -7836,12 +8223,7 @@
               </a:spcAft>
             </a:pPr>
             <a:r>
-              <a:rPr sz="1600">
-                <a:solidFill>
-                  <a:srgbClr val="1A1A1A"/>
-                </a:solidFill>
-              </a:rPr>
-              <a:t>    /health      -&gt; model_loaded == True</a:t>
+              <a:t> </a:t>
             </a:r>
           </a:p>
           <a:p>
@@ -7851,12 +8233,12 @@
               </a:spcAft>
             </a:pPr>
             <a:r>
-              <a:rPr sz="1600">
+              <a:rPr sz="1100">
                 <a:solidFill>
                   <a:srgbClr val="1A1A1A"/>
                 </a:solidFill>
               </a:rPr>
-              <a:t>    /model_info  -&gt; metrics surface</a:t>
+              <a:t>Test ROC AUC   LR=0.820  -&gt;  LightGBM=0.881</a:t>
             </a:r>
           </a:p>
           <a:p>
@@ -7866,12 +8248,12 @@
               </a:spcAft>
             </a:pPr>
             <a:r>
-              <a:rPr sz="1600">
+              <a:rPr sz="1100">
                 <a:solidFill>
                   <a:srgbClr val="1A1A1A"/>
                 </a:solidFill>
               </a:rPr>
-              <a:t>    /features    -&gt; contract returned</a:t>
+              <a:t>Test PR AUC   LR=0.0011 -&gt;  LightGBM=0.0390  (35x)</a:t>
             </a:r>
           </a:p>
           <a:p>
@@ -7881,12 +8263,7 @@
               </a:spcAft>
             </a:pPr>
             <a:r>
-              <a:rPr sz="1600">
-                <a:solidFill>
-                  <a:srgbClr val="1A1A1A"/>
-                </a:solidFill>
-              </a:rPr>
-              <a:t>    /predict     -&gt; {full / sparse / legacy-flat payloads}</a:t>
+              <a:t> </a:t>
             </a:r>
           </a:p>
           <a:p>
@@ -7896,7 +8273,12 @@
               </a:spcAft>
             </a:pPr>
             <a:r>
-              <a:t> </a:t>
+              <a:rPr sz="1100">
+                <a:solidFill>
+                  <a:srgbClr val="1A1A1A"/>
+                </a:solidFill>
+              </a:rPr>
+              <a:t>All 4 logged to MLflow tracking.</a:t>
             </a:r>
           </a:p>
           <a:p>
@@ -7906,12 +8288,12 @@
               </a:spcAft>
             </a:pPr>
             <a:r>
-              <a:rPr sz="1600">
+              <a:rPr sz="1100">
                 <a:solidFill>
                   <a:srgbClr val="1A1A1A"/>
                 </a:solidFill>
               </a:rPr>
-              <a:t>Single command:</a:t>
+              <a:t>Winner aliased  Production  in Model Registry.</a:t>
             </a:r>
           </a:p>
           <a:p>
@@ -7921,12 +8303,12 @@
               </a:spcAft>
             </a:pPr>
             <a:r>
-              <a:rPr sz="1600">
+              <a:rPr sz="1100">
                 <a:solidFill>
                   <a:srgbClr val="1A1A1A"/>
                 </a:solidFill>
               </a:rPr>
-              <a:t>    python test_project.py --url http://98.94.30.68:8000</a:t>
+              <a:t>LR sidecar kept loaded so /counterfactual still</a:t>
             </a:r>
           </a:p>
           <a:p>
@@ -7936,7 +8318,12 @@
               </a:spcAft>
             </a:pPr>
             <a:r>
-              <a:t> </a:t>
+              <a:rPr sz="1100">
+                <a:solidFill>
+                  <a:srgbClr val="1A1A1A"/>
+                </a:solidFill>
+              </a:rPr>
+              <a:t>works even though a tree model serves.</a:t>
             </a:r>
           </a:p>
           <a:p>
@@ -7946,12 +8333,7 @@
               </a:spcAft>
             </a:pPr>
             <a:r>
-              <a:rPr sz="1600">
-                <a:solidFill>
-                  <a:srgbClr val="1A1A1A"/>
-                </a:solidFill>
-              </a:rPr>
-              <a:t>Exit 0 on success, 1 on any failure.</a:t>
+              <a:t> </a:t>
             </a:r>
           </a:p>
           <a:p>
@@ -7961,19 +8343,132 @@
               </a:spcAft>
             </a:pPr>
             <a:r>
-              <a:rPr sz="1600">
+              <a:rPr sz="1100">
                 <a:solidFill>
                   <a:srgbClr val="1A1A1A"/>
                 </a:solidFill>
               </a:rPr>
-              <a:t>CI workflow runs this on every push (.github/workflows/ci.yml).</a:t>
-            </a:r>
-          </a:p>
-        </p:txBody>
-      </p:sp>
-      <p:sp>
-        <p:nvSpPr>
-          <p:cNvPr id="6" name="TextBox 5"/>
+              <a:t>/explain handles all three model families:</a:t>
+            </a:r>
+          </a:p>
+          <a:p>
+            <a:pPr>
+              <a:spcAft>
+                <a:spcPts val="400"/>
+              </a:spcAft>
+            </a:pPr>
+            <a:r>
+              <a:rPr sz="1100">
+                <a:solidFill>
+                  <a:srgbClr val="1A1A1A"/>
+                </a:solidFill>
+              </a:rPr>
+              <a:t>  linear  -&gt; coef * scaled_value (exact)</a:t>
+            </a:r>
+          </a:p>
+          <a:p>
+            <a:pPr>
+              <a:spcAft>
+                <a:spcPts val="400"/>
+              </a:spcAft>
+            </a:pPr>
+            <a:r>
+              <a:rPr sz="1100">
+                <a:solidFill>
+                  <a:srgbClr val="1A1A1A"/>
+                </a:solidFill>
+              </a:rPr>
+              <a:t>  XGBoost -&gt; booster.predict(pred_contribs=True)</a:t>
+            </a:r>
+          </a:p>
+          <a:p>
+            <a:pPr>
+              <a:spcAft>
+                <a:spcPts val="400"/>
+              </a:spcAft>
+            </a:pPr>
+            <a:r>
+              <a:rPr sz="1100">
+                <a:solidFill>
+                  <a:srgbClr val="1A1A1A"/>
+                </a:solidFill>
+              </a:rPr>
+              <a:t>  LightGBM -&gt; booster.predict(pred_contrib=True)</a:t>
+            </a:r>
+          </a:p>
+        </p:txBody>
+      </p:sp>
+      <p:sp>
+        <p:nvSpPr>
+          <p:cNvPr id="8" name="TextBox 7"/>
+          <p:cNvSpPr txBox="1"/>
+          <p:nvPr/>
+        </p:nvSpPr>
+        <p:spPr>
+          <a:xfrm>
+            <a:off x="365760" y="5486400"/>
+            <a:ext cx="7315200" cy="365760"/>
+          </a:xfrm>
+          <a:prstGeom prst="rect">
+            <a:avLst/>
+          </a:prstGeom>
+          <a:noFill/>
+        </p:spPr>
+        <p:txBody>
+          <a:bodyPr wrap="square" tIns="0">
+            <a:spAutoFit/>
+          </a:bodyPr>
+          <a:lstStyle/>
+          <a:p>
+            <a:pPr algn="l"/>
+            <a:r>
+              <a:rPr sz="1400" b="1" i="0">
+                <a:solidFill>
+                  <a:srgbClr val="E65555"/>
+                </a:solidFill>
+              </a:rPr>
+              <a:t>Plus cost-aware threshold tuning</a:t>
+            </a:r>
+          </a:p>
+        </p:txBody>
+      </p:sp>
+      <p:sp>
+        <p:nvSpPr>
+          <p:cNvPr id="9" name="TextBox 8"/>
+          <p:cNvSpPr txBox="1"/>
+          <p:nvPr/>
+        </p:nvSpPr>
+        <p:spPr>
+          <a:xfrm>
+            <a:off x="365760" y="5852160"/>
+            <a:ext cx="7040880" cy="1097280"/>
+          </a:xfrm>
+          <a:prstGeom prst="rect">
+            <a:avLst/>
+          </a:prstGeom>
+          <a:noFill/>
+        </p:spPr>
+        <p:txBody>
+          <a:bodyPr wrap="square" tIns="0">
+            <a:spAutoFit/>
+          </a:bodyPr>
+          <a:lstStyle/>
+          <a:p>
+            <a:pPr algn="l"/>
+            <a:r>
+              <a:rPr sz="1100" b="0" i="0">
+                <a:solidFill>
+                  <a:srgbClr val="1A1A1A"/>
+                </a:solidFill>
+              </a:rPr>
+              <a:t>Default cutoff is 0.5; operationally it should not be. /threshold_analysis serves the validation PR curve + F1-optimal threshold. /cost_optimal_threshold takes {cost_fp, cost_fn} and returns the threshold that minimizes expected operational cost. UI surfaces both as a cost-matrix calculator.</a:t>
+            </a:r>
+          </a:p>
+        </p:txBody>
+      </p:sp>
+      <p:sp>
+        <p:nvSpPr>
+          <p:cNvPr id="10" name="TextBox 9"/>
           <p:cNvSpPr txBox="1"/>
           <p:nvPr/>
         </p:nvSpPr>
@@ -8000,7 +8495,7 @@
                   <a:srgbClr val="6B7280"/>
                 </a:solidFill>
               </a:rPr>
-              <a:t>15 / 18</a:t>
+              <a:t>15 / 19</a:t>
             </a:r>
           </a:p>
         </p:txBody>
@@ -8014,7 +8509,7 @@
 </file>
 
 <file path=ppt/slides/slide16.xml><?xml version="1.0" encoding="utf-8"?>
-<p:sld xmlns:a="http://schemas.openxmlformats.org/drawingml/2006/main" xmlns:r="http://schemas.openxmlformats.org/officeDocument/2006/relationships" xmlns:p="http://schemas.openxmlformats.org/presentationml/2006/main">
+<p:sld xmlns:a="http://schemas.openxmlformats.org/drawingml/2006/main" xmlns:p="http://schemas.openxmlformats.org/presentationml/2006/main" xmlns:r="http://schemas.openxmlformats.org/officeDocument/2006/relationships">
   <p:cSld>
     <p:spTree>
       <p:nvGrpSpPr>
@@ -8022,14 +8517,7 @@
         <p:cNvGrpSpPr/>
         <p:nvPr/>
       </p:nvGrpSpPr>
-      <p:grpSpPr>
-        <a:xfrm>
-          <a:off x="0" y="0"/>
-          <a:ext cx="0" cy="0"/>
-          <a:chOff x="0" y="0"/>
-          <a:chExt cx="0" cy="0"/>
-        </a:xfrm>
-      </p:grpSpPr>
+      <p:grpSpPr/>
       <p:sp>
         <p:nvSpPr>
           <p:cNvPr id="2" name="Rectangle 1"/>
@@ -8070,7 +8558,6 @@
           <a:lstStyle/>
           <a:p>
             <a:pPr algn="ctr"/>
-            <a:endParaRPr/>
           </a:p>
         </p:txBody>
       </p:sp>
@@ -8114,7 +8601,6 @@
           <a:lstStyle/>
           <a:p>
             <a:pPr algn="ctr"/>
-            <a:endParaRPr/>
           </a:p>
         </p:txBody>
       </p:sp>
@@ -8147,45 +8633,21 @@
                   <a:srgbClr val="FFFFFF"/>
                 </a:solidFill>
               </a:rPr>
-              <a:t>The pivot — Databricks → AWS</a:t>
-            </a:r>
-          </a:p>
-        </p:txBody>
-      </p:sp>
-      <p:pic>
-        <p:nvPicPr>
-          <p:cNvPr id="5" name="Picture 4" descr="pivot_table.png"/>
-          <p:cNvPicPr>
-            <a:picLocks noChangeAspect="1"/>
-          </p:cNvPicPr>
-          <p:nvPr/>
-        </p:nvPicPr>
-        <p:blipFill>
-          <a:blip r:embed="rId3"/>
-          <a:stretch>
-            <a:fillRect/>
-          </a:stretch>
-        </p:blipFill>
-        <p:spPr>
-          <a:xfrm>
-            <a:off x="457200" y="1005840"/>
-            <a:ext cx="11430000" cy="5739063"/>
-          </a:xfrm>
-          <a:prstGeom prst="rect">
-            <a:avLst/>
-          </a:prstGeom>
-        </p:spPr>
-      </p:pic>
-      <p:sp>
-        <p:nvSpPr>
-          <p:cNvPr id="6" name="TextBox 5"/>
+              <a:t>Hosting + test script</a:t>
+            </a:r>
+          </a:p>
+        </p:txBody>
+      </p:sp>
+      <p:sp>
+        <p:nvSpPr>
+          <p:cNvPr id="5" name="TextBox 4"/>
           <p:cNvSpPr txBox="1"/>
           <p:nvPr/>
         </p:nvSpPr>
         <p:spPr>
           <a:xfrm>
-            <a:off x="640080" y="5760720"/>
-            <a:ext cx="10972800" cy="1005840"/>
+            <a:off x="640080" y="1097280"/>
+            <a:ext cx="10972800" cy="5486400"/>
           </a:xfrm>
           <a:prstGeom prst="rect">
             <a:avLst/>
@@ -8198,21 +8660,205 @@
           </a:bodyPr>
           <a:lstStyle/>
           <a:p>
-            <a:pPr algn="l"/>
-            <a:r>
-              <a:rPr sz="1500" b="0" i="0">
-                <a:solidFill>
-                  <a:srgbClr val="1F2A44"/>
-                </a:solidFill>
-              </a:rPr>
-              <a:t>Started on Databricks. Hit free-tier storage limits on the 11 GB dataset. Rerouted to AWS equivalents WITHOUT changing the architecture. Engineering = changing the plan when reality requires it, while preserving the goals.</a:t>
-            </a:r>
-          </a:p>
-        </p:txBody>
-      </p:sp>
-      <p:sp>
-        <p:nvSpPr>
-          <p:cNvPr id="7" name="TextBox 6"/>
+            <a:pPr>
+              <a:spcAft>
+                <a:spcPts val="400"/>
+              </a:spcAft>
+            </a:pPr>
+            <a:r>
+              <a:rPr sz="1600">
+                <a:solidFill>
+                  <a:srgbClr val="1A1A1A"/>
+                </a:solidFill>
+              </a:rPr>
+              <a:t>Live URL:   https://lanlthreat.streamlit.app</a:t>
+            </a:r>
+          </a:p>
+          <a:p>
+            <a:pPr>
+              <a:spcAft>
+                <a:spcPts val="400"/>
+              </a:spcAft>
+            </a:pPr>
+            <a:r>
+              <a:rPr sz="1600">
+                <a:solidFill>
+                  <a:srgbClr val="1A1A1A"/>
+                </a:solidFill>
+              </a:rPr>
+              <a:t>API:        http://98.94.30.68:8000</a:t>
+            </a:r>
+          </a:p>
+          <a:p>
+            <a:pPr>
+              <a:spcAft>
+                <a:spcPts val="400"/>
+              </a:spcAft>
+            </a:pPr>
+            <a:r>
+              <a:t> </a:t>
+            </a:r>
+          </a:p>
+          <a:p>
+            <a:pPr>
+              <a:spcAft>
+                <a:spcPts val="400"/>
+              </a:spcAft>
+            </a:pPr>
+            <a:r>
+              <a:rPr sz="1600">
+                <a:solidFill>
+                  <a:srgbClr val="1A1A1A"/>
+                </a:solidFill>
+              </a:rPr>
+              <a:t>test_project.py at repo root.  Six end-to-end checks:</a:t>
+            </a:r>
+          </a:p>
+          <a:p>
+            <a:pPr>
+              <a:spcAft>
+                <a:spcPts val="400"/>
+              </a:spcAft>
+            </a:pPr>
+            <a:r>
+              <a:rPr sz="1600">
+                <a:solidFill>
+                  <a:srgbClr val="1A1A1A"/>
+                </a:solidFill>
+              </a:rPr>
+              <a:t>    /health      -&gt; model_loaded == True</a:t>
+            </a:r>
+          </a:p>
+          <a:p>
+            <a:pPr>
+              <a:spcAft>
+                <a:spcPts val="400"/>
+              </a:spcAft>
+            </a:pPr>
+            <a:r>
+              <a:rPr sz="1600">
+                <a:solidFill>
+                  <a:srgbClr val="1A1A1A"/>
+                </a:solidFill>
+              </a:rPr>
+              <a:t>    /model_info  -&gt; metrics surface</a:t>
+            </a:r>
+          </a:p>
+          <a:p>
+            <a:pPr>
+              <a:spcAft>
+                <a:spcPts val="400"/>
+              </a:spcAft>
+            </a:pPr>
+            <a:r>
+              <a:rPr sz="1600">
+                <a:solidFill>
+                  <a:srgbClr val="1A1A1A"/>
+                </a:solidFill>
+              </a:rPr>
+              <a:t>    /features    -&gt; contract returned</a:t>
+            </a:r>
+          </a:p>
+          <a:p>
+            <a:pPr>
+              <a:spcAft>
+                <a:spcPts val="400"/>
+              </a:spcAft>
+            </a:pPr>
+            <a:r>
+              <a:rPr sz="1600">
+                <a:solidFill>
+                  <a:srgbClr val="1A1A1A"/>
+                </a:solidFill>
+              </a:rPr>
+              <a:t>    /predict     -&gt; {full / sparse / legacy-flat payloads}</a:t>
+            </a:r>
+          </a:p>
+          <a:p>
+            <a:pPr>
+              <a:spcAft>
+                <a:spcPts val="400"/>
+              </a:spcAft>
+            </a:pPr>
+            <a:r>
+              <a:t> </a:t>
+            </a:r>
+          </a:p>
+          <a:p>
+            <a:pPr>
+              <a:spcAft>
+                <a:spcPts val="400"/>
+              </a:spcAft>
+            </a:pPr>
+            <a:r>
+              <a:rPr sz="1600">
+                <a:solidFill>
+                  <a:srgbClr val="1A1A1A"/>
+                </a:solidFill>
+              </a:rPr>
+              <a:t>Single command:</a:t>
+            </a:r>
+          </a:p>
+          <a:p>
+            <a:pPr>
+              <a:spcAft>
+                <a:spcPts val="400"/>
+              </a:spcAft>
+            </a:pPr>
+            <a:r>
+              <a:rPr sz="1600">
+                <a:solidFill>
+                  <a:srgbClr val="1A1A1A"/>
+                </a:solidFill>
+              </a:rPr>
+              <a:t>    python test_project.py --url http://98.94.30.68:8000</a:t>
+            </a:r>
+          </a:p>
+          <a:p>
+            <a:pPr>
+              <a:spcAft>
+                <a:spcPts val="400"/>
+              </a:spcAft>
+            </a:pPr>
+            <a:r>
+              <a:t> </a:t>
+            </a:r>
+          </a:p>
+          <a:p>
+            <a:pPr>
+              <a:spcAft>
+                <a:spcPts val="400"/>
+              </a:spcAft>
+            </a:pPr>
+            <a:r>
+              <a:rPr sz="1600">
+                <a:solidFill>
+                  <a:srgbClr val="1A1A1A"/>
+                </a:solidFill>
+              </a:rPr>
+              <a:t>Exit 0 on success, 1 on any failure.</a:t>
+            </a:r>
+          </a:p>
+          <a:p>
+            <a:pPr>
+              <a:spcAft>
+                <a:spcPts val="400"/>
+              </a:spcAft>
+            </a:pPr>
+            <a:r>
+              <a:rPr sz="1600">
+                <a:solidFill>
+                  <a:srgbClr val="1A1A1A"/>
+                </a:solidFill>
+              </a:rPr>
+              <a:t>CI workflow runs this on every push (.github/workflows/ci.yml).</a:t>
+            </a:r>
+          </a:p>
+        </p:txBody>
+      </p:sp>
+      <p:sp>
+        <p:nvSpPr>
+          <p:cNvPr id="6" name="TextBox 5"/>
           <p:cNvSpPr txBox="1"/>
           <p:nvPr/>
         </p:nvSpPr>
@@ -8239,7 +8885,7 @@
                   <a:srgbClr val="6B7280"/>
                 </a:solidFill>
               </a:rPr>
-              <a:t>16 / 18</a:t>
+              <a:t>16 / 19</a:t>
             </a:r>
           </a:p>
         </p:txBody>
@@ -8253,7 +8899,7 @@
 </file>
 
 <file path=ppt/slides/slide17.xml><?xml version="1.0" encoding="utf-8"?>
-<p:sld xmlns:a="http://schemas.openxmlformats.org/drawingml/2006/main" xmlns:r="http://schemas.openxmlformats.org/officeDocument/2006/relationships" xmlns:p="http://schemas.openxmlformats.org/presentationml/2006/main">
+<p:sld xmlns:a="http://schemas.openxmlformats.org/drawingml/2006/main" xmlns:p="http://schemas.openxmlformats.org/presentationml/2006/main" xmlns:r="http://schemas.openxmlformats.org/officeDocument/2006/relationships">
   <p:cSld>
     <p:spTree>
       <p:nvGrpSpPr>
@@ -8261,14 +8907,7 @@
         <p:cNvGrpSpPr/>
         <p:nvPr/>
       </p:nvGrpSpPr>
-      <p:grpSpPr>
-        <a:xfrm>
-          <a:off x="0" y="0"/>
-          <a:ext cx="0" cy="0"/>
-          <a:chOff x="0" y="0"/>
-          <a:chExt cx="0" cy="0"/>
-        </a:xfrm>
-      </p:grpSpPr>
+      <p:grpSpPr/>
       <p:sp>
         <p:nvSpPr>
           <p:cNvPr id="2" name="Rectangle 1"/>
@@ -8309,7 +8948,6 @@
           <a:lstStyle/>
           <a:p>
             <a:pPr algn="ctr"/>
-            <a:endParaRPr/>
           </a:p>
         </p:txBody>
       </p:sp>
@@ -8353,7 +8991,6 @@
           <a:lstStyle/>
           <a:p>
             <a:pPr algn="ctr"/>
-            <a:endParaRPr/>
           </a:p>
         </p:txBody>
       </p:sp>
@@ -8386,21 +9023,45 @@
                   <a:srgbClr val="FFFFFF"/>
                 </a:solidFill>
               </a:rPr>
-              <a:t>Limitations &amp; future work</a:t>
-            </a:r>
-          </a:p>
-        </p:txBody>
-      </p:sp>
-      <p:sp>
-        <p:nvSpPr>
-          <p:cNvPr id="5" name="TextBox 4"/>
+              <a:t>The pivot — Databricks → AWS</a:t>
+            </a:r>
+          </a:p>
+        </p:txBody>
+      </p:sp>
+      <p:pic>
+        <p:nvPicPr>
+          <p:cNvPr id="5" name="Picture 4" descr="pivot_table.png"/>
+          <p:cNvPicPr>
+            <a:picLocks noChangeAspect="1"/>
+          </p:cNvPicPr>
+          <p:nvPr/>
+        </p:nvPicPr>
+        <p:blipFill>
+          <a:blip r:embed="rId3"/>
+          <a:stretch>
+            <a:fillRect/>
+          </a:stretch>
+        </p:blipFill>
+        <p:spPr>
+          <a:xfrm>
+            <a:off x="457200" y="1005840"/>
+            <a:ext cx="11430000" cy="5739063"/>
+          </a:xfrm>
+          <a:prstGeom prst="rect">
+            <a:avLst/>
+          </a:prstGeom>
+        </p:spPr>
+      </p:pic>
+      <p:sp>
+        <p:nvSpPr>
+          <p:cNvPr id="6" name="TextBox 5"/>
           <p:cNvSpPr txBox="1"/>
           <p:nvPr/>
         </p:nvSpPr>
         <p:spPr>
           <a:xfrm>
-            <a:off x="640080" y="1097280"/>
-            <a:ext cx="5486400" cy="457200"/>
+            <a:off x="640080" y="5760720"/>
+            <a:ext cx="10972800" cy="1005840"/>
           </a:xfrm>
           <a:prstGeom prst="rect">
             <a:avLst/>
@@ -8415,110 +9076,12 @@
           <a:p>
             <a:pPr algn="l"/>
             <a:r>
-              <a:rPr sz="2000" b="1" i="0">
-                <a:solidFill>
-                  <a:srgbClr val="E65555"/>
-                </a:solidFill>
-              </a:rPr>
-              <a:t>Honest caveats</a:t>
-            </a:r>
-          </a:p>
-        </p:txBody>
-      </p:sp>
-      <p:sp>
-        <p:nvSpPr>
-          <p:cNvPr id="6" name="TextBox 5"/>
-          <p:cNvSpPr txBox="1"/>
-          <p:nvPr/>
-        </p:nvSpPr>
-        <p:spPr>
-          <a:xfrm>
-            <a:off x="640080" y="1554480"/>
-            <a:ext cx="5486400" cy="4114800"/>
-          </a:xfrm>
-          <a:prstGeom prst="rect">
-            <a:avLst/>
-          </a:prstGeom>
-          <a:noFill/>
-        </p:spPr>
-        <p:txBody>
-          <a:bodyPr wrap="square" tIns="0">
-            <a:spAutoFit/>
-          </a:bodyPr>
-          <a:lstStyle/>
-          <a:p>
-            <a:pPr>
-              <a:spcAft>
-                <a:spcPts val="400"/>
-              </a:spcAft>
-            </a:pPr>
-            <a:r>
-              <a:rPr sz="1500">
-                <a:solidFill>
-                  <a:srgbClr val="1A1A1A"/>
-                </a:solidFill>
-              </a:rPr>
-              <a:t>Single dataset; generalization not validated.</a:t>
-            </a:r>
-          </a:p>
-          <a:p>
-            <a:pPr>
-              <a:spcAft>
-                <a:spcPts val="400"/>
-              </a:spcAft>
-            </a:pPr>
-            <a:r>
-              <a:rPr sz="1500">
-                <a:solidFill>
-                  <a:srgbClr val="1A1A1A"/>
-                </a:solidFill>
-              </a:rPr>
-              <a:t>Time is relative seconds; no diurnal features.</a:t>
-            </a:r>
-          </a:p>
-          <a:p>
-            <a:pPr>
-              <a:spcAft>
-                <a:spcPts val="400"/>
-              </a:spcAft>
-            </a:pPr>
-            <a:r>
-              <a:rPr sz="1500">
-                <a:solidFill>
-                  <a:srgbClr val="1A1A1A"/>
-                </a:solidFill>
-              </a:rPr>
-              <a:t>No streaming layer (offline batch only).</a:t>
-            </a:r>
-          </a:p>
-          <a:p>
-            <a:pPr>
-              <a:spcAft>
-                <a:spcPts val="400"/>
-              </a:spcAft>
-            </a:pPr>
-            <a:r>
-              <a:rPr sz="1500">
-                <a:solidFill>
-                  <a:srgbClr val="1A1A1A"/>
-                </a:solidFill>
-              </a:rPr>
-              <a:t>Red-team campaign ends mid-dataset;</a:t>
-            </a:r>
-          </a:p>
-          <a:p>
-            <a:pPr>
-              <a:spcAft>
-                <a:spcPts val="400"/>
-              </a:spcAft>
-            </a:pPr>
-            <a:r>
-              <a:rPr sz="1500">
-                <a:solidFill>
-                  <a:srgbClr val="1A1A1A"/>
-                </a:solidFill>
-              </a:rPr>
-              <a:t>    stratified random split with disclosure.</a:t>
+              <a:rPr sz="1500" b="0" i="0">
+                <a:solidFill>
+                  <a:srgbClr val="1F2A44"/>
+                </a:solidFill>
+              </a:rPr>
+              <a:t>Started on Databricks. Hit free-tier storage limits on the 11 GB dataset. Rerouted to AWS equivalents WITHOUT changing the architecture. Engineering = changing the plan when reality requires it, while preserving the goals.</a:t>
             </a:r>
           </a:p>
         </p:txBody>
@@ -8526,123 +9089,6 @@
       <p:sp>
         <p:nvSpPr>
           <p:cNvPr id="7" name="TextBox 6"/>
-          <p:cNvSpPr txBox="1"/>
-          <p:nvPr/>
-        </p:nvSpPr>
-        <p:spPr>
-          <a:xfrm>
-            <a:off x="6400800" y="1097280"/>
-            <a:ext cx="5486400" cy="457200"/>
-          </a:xfrm>
-          <a:prstGeom prst="rect">
-            <a:avLst/>
-          </a:prstGeom>
-          <a:noFill/>
-        </p:spPr>
-        <p:txBody>
-          <a:bodyPr wrap="square" tIns="0">
-            <a:spAutoFit/>
-          </a:bodyPr>
-          <a:lstStyle/>
-          <a:p>
-            <a:pPr algn="l"/>
-            <a:r>
-              <a:rPr sz="2000" b="1" i="0">
-                <a:solidFill>
-                  <a:srgbClr val="E65555"/>
-                </a:solidFill>
-              </a:rPr>
-              <a:t>Future work, by impact</a:t>
-            </a:r>
-          </a:p>
-        </p:txBody>
-      </p:sp>
-      <p:sp>
-        <p:nvSpPr>
-          <p:cNvPr id="8" name="TextBox 7"/>
-          <p:cNvSpPr txBox="1"/>
-          <p:nvPr/>
-        </p:nvSpPr>
-        <p:spPr>
-          <a:xfrm>
-            <a:off x="6400800" y="1554480"/>
-            <a:ext cx="5486400" cy="4114800"/>
-          </a:xfrm>
-          <a:prstGeom prst="rect">
-            <a:avLst/>
-          </a:prstGeom>
-          <a:noFill/>
-        </p:spPr>
-        <p:txBody>
-          <a:bodyPr wrap="square" tIns="0">
-            <a:spAutoFit/>
-          </a:bodyPr>
-          <a:lstStyle/>
-          <a:p>
-            <a:pPr>
-              <a:spcAft>
-                <a:spcPts val="400"/>
-              </a:spcAft>
-            </a:pPr>
-            <a:r>
-              <a:rPr sz="1400">
-                <a:solidFill>
-                  <a:srgbClr val="1A1A1A"/>
-                </a:solidFill>
-              </a:rPr>
-              <a:t>1.  Streaming: Kinesis -&gt; Spark Structured Streaming -&gt; live scoring.</a:t>
-            </a:r>
-          </a:p>
-          <a:p>
-            <a:pPr>
-              <a:spcAft>
-                <a:spcPts val="400"/>
-              </a:spcAft>
-            </a:pPr>
-            <a:r>
-              <a:rPr sz="1400">
-                <a:solidFill>
-                  <a:srgbClr val="1A1A1A"/>
-                </a:solidFill>
-              </a:rPr>
-              <a:t>2.  Automated retraining: EventBridge cron -&gt; EMR Step + train_model.</a:t>
-            </a:r>
-          </a:p>
-          <a:p>
-            <a:pPr>
-              <a:spcAft>
-                <a:spcPts val="400"/>
-              </a:spcAft>
-            </a:pPr>
-            <a:r>
-              <a:rPr sz="1400">
-                <a:solidFill>
-                  <a:srgbClr val="1A1A1A"/>
-                </a:solidFill>
-              </a:rPr>
-              <a:t>3.  Calibration + per-cost threshold tuning.</a:t>
-            </a:r>
-          </a:p>
-          <a:p>
-            <a:pPr>
-              <a:spcAft>
-                <a:spcPts val="400"/>
-              </a:spcAft>
-            </a:pPr>
-            <a:r>
-              <a:rPr sz="1400">
-                <a:solidFill>
-                  <a:srgbClr val="1A1A1A"/>
-                </a:solidFill>
-              </a:rPr>
-              <a:t>4.  Multi-feature counterfactual paths (ensemble of interventions).</a:t>
-            </a:r>
-          </a:p>
-        </p:txBody>
-      </p:sp>
-      <p:sp>
-        <p:nvSpPr>
-          <p:cNvPr id="9" name="TextBox 8"/>
           <p:cNvSpPr txBox="1"/>
           <p:nvPr/>
         </p:nvSpPr>
@@ -8669,7 +9115,7 @@
                   <a:srgbClr val="6B7280"/>
                 </a:solidFill>
               </a:rPr>
-              <a:t>17 / 18</a:t>
+              <a:t>17 / 19</a:t>
             </a:r>
           </a:p>
         </p:txBody>
@@ -8683,7 +9129,7 @@
 </file>
 
 <file path=ppt/slides/slide18.xml><?xml version="1.0" encoding="utf-8"?>
-<p:sld xmlns:a="http://schemas.openxmlformats.org/drawingml/2006/main" xmlns:r="http://schemas.openxmlformats.org/officeDocument/2006/relationships" xmlns:p="http://schemas.openxmlformats.org/presentationml/2006/main">
+<p:sld xmlns:a="http://schemas.openxmlformats.org/drawingml/2006/main" xmlns:p="http://schemas.openxmlformats.org/presentationml/2006/main" xmlns:r="http://schemas.openxmlformats.org/officeDocument/2006/relationships">
   <p:cSld>
     <p:spTree>
       <p:nvGrpSpPr>
@@ -8691,14 +9137,7 @@
         <p:cNvGrpSpPr/>
         <p:nvPr/>
       </p:nvGrpSpPr>
-      <p:grpSpPr>
-        <a:xfrm>
-          <a:off x="0" y="0"/>
-          <a:ext cx="0" cy="0"/>
-          <a:chOff x="0" y="0"/>
-          <a:chExt cx="0" cy="0"/>
-        </a:xfrm>
-      </p:grpSpPr>
+      <p:grpSpPr/>
       <p:sp>
         <p:nvSpPr>
           <p:cNvPr id="2" name="Rectangle 1"/>
@@ -8708,7 +9147,50 @@
         <p:spPr>
           <a:xfrm>
             <a:off x="0" y="0"/>
-            <a:ext cx="12191695" cy="6858000"/>
+            <a:ext cx="182880" cy="6858000"/>
+          </a:xfrm>
+          <a:prstGeom prst="rect">
+            <a:avLst/>
+          </a:prstGeom>
+          <a:solidFill>
+            <a:srgbClr val="E65555"/>
+          </a:solidFill>
+          <a:ln>
+            <a:noFill/>
+          </a:ln>
+        </p:spPr>
+        <p:style>
+          <a:lnRef idx="1">
+            <a:schemeClr val="accent1"/>
+          </a:lnRef>
+          <a:fillRef idx="3">
+            <a:schemeClr val="accent1"/>
+          </a:fillRef>
+          <a:effectRef idx="2">
+            <a:schemeClr val="accent1"/>
+          </a:effectRef>
+          <a:fontRef idx="minor">
+            <a:schemeClr val="lt1"/>
+          </a:fontRef>
+        </p:style>
+        <p:txBody>
+          <a:bodyPr rtlCol="0" anchor="ctr"/>
+          <a:lstStyle/>
+          <a:p>
+            <a:pPr algn="ctr"/>
+          </a:p>
+        </p:txBody>
+      </p:sp>
+      <p:sp>
+        <p:nvSpPr>
+          <p:cNvPr id="3" name="Rectangle 2"/>
+          <p:cNvSpPr/>
+          <p:nvPr/>
+        </p:nvSpPr>
+        <p:spPr>
+          <a:xfrm>
+            <a:off x="0" y="0"/>
+            <a:ext cx="12191695" cy="777240"/>
           </a:xfrm>
           <a:prstGeom prst="rect">
             <a:avLst/>
@@ -8739,7 +9221,414 @@
           <a:lstStyle/>
           <a:p>
             <a:pPr algn="ctr"/>
-            <a:endParaRPr/>
+          </a:p>
+        </p:txBody>
+      </p:sp>
+      <p:sp>
+        <p:nvSpPr>
+          <p:cNvPr id="4" name="TextBox 3"/>
+          <p:cNvSpPr txBox="1"/>
+          <p:nvPr/>
+        </p:nvSpPr>
+        <p:spPr>
+          <a:xfrm>
+            <a:off x="457200" y="118872"/>
+            <a:ext cx="11643055" cy="640080"/>
+          </a:xfrm>
+          <a:prstGeom prst="rect">
+            <a:avLst/>
+          </a:prstGeom>
+          <a:noFill/>
+        </p:spPr>
+        <p:txBody>
+          <a:bodyPr wrap="none" tIns="0" bIns="0">
+            <a:spAutoFit/>
+          </a:bodyPr>
+          <a:lstStyle/>
+          <a:p>
+            <a:pPr algn="l"/>
+            <a:r>
+              <a:rPr sz="2600" b="1">
+                <a:solidFill>
+                  <a:srgbClr val="FFFFFF"/>
+                </a:solidFill>
+              </a:rPr>
+              <a:t>Limitations &amp; future work</a:t>
+            </a:r>
+          </a:p>
+        </p:txBody>
+      </p:sp>
+      <p:sp>
+        <p:nvSpPr>
+          <p:cNvPr id="5" name="TextBox 4"/>
+          <p:cNvSpPr txBox="1"/>
+          <p:nvPr/>
+        </p:nvSpPr>
+        <p:spPr>
+          <a:xfrm>
+            <a:off x="640080" y="1097280"/>
+            <a:ext cx="5486400" cy="457200"/>
+          </a:xfrm>
+          <a:prstGeom prst="rect">
+            <a:avLst/>
+          </a:prstGeom>
+          <a:noFill/>
+        </p:spPr>
+        <p:txBody>
+          <a:bodyPr wrap="square" tIns="0">
+            <a:spAutoFit/>
+          </a:bodyPr>
+          <a:lstStyle/>
+          <a:p>
+            <a:pPr algn="l"/>
+            <a:r>
+              <a:rPr sz="2000" b="1" i="0">
+                <a:solidFill>
+                  <a:srgbClr val="E65555"/>
+                </a:solidFill>
+              </a:rPr>
+              <a:t>Honest caveats</a:t>
+            </a:r>
+          </a:p>
+        </p:txBody>
+      </p:sp>
+      <p:sp>
+        <p:nvSpPr>
+          <p:cNvPr id="6" name="TextBox 5"/>
+          <p:cNvSpPr txBox="1"/>
+          <p:nvPr/>
+        </p:nvSpPr>
+        <p:spPr>
+          <a:xfrm>
+            <a:off x="640080" y="1554480"/>
+            <a:ext cx="5486400" cy="4114800"/>
+          </a:xfrm>
+          <a:prstGeom prst="rect">
+            <a:avLst/>
+          </a:prstGeom>
+          <a:noFill/>
+        </p:spPr>
+        <p:txBody>
+          <a:bodyPr wrap="square" tIns="0">
+            <a:spAutoFit/>
+          </a:bodyPr>
+          <a:lstStyle/>
+          <a:p>
+            <a:pPr>
+              <a:spcAft>
+                <a:spcPts val="400"/>
+              </a:spcAft>
+            </a:pPr>
+            <a:r>
+              <a:rPr sz="1500">
+                <a:solidFill>
+                  <a:srgbClr val="1A1A1A"/>
+                </a:solidFill>
+              </a:rPr>
+              <a:t>Single dataset; generalization not validated.</a:t>
+            </a:r>
+          </a:p>
+          <a:p>
+            <a:pPr>
+              <a:spcAft>
+                <a:spcPts val="400"/>
+              </a:spcAft>
+            </a:pPr>
+            <a:r>
+              <a:rPr sz="1500">
+                <a:solidFill>
+                  <a:srgbClr val="1A1A1A"/>
+                </a:solidFill>
+              </a:rPr>
+              <a:t>Time is relative seconds; no diurnal features.</a:t>
+            </a:r>
+          </a:p>
+          <a:p>
+            <a:pPr>
+              <a:spcAft>
+                <a:spcPts val="400"/>
+              </a:spcAft>
+            </a:pPr>
+            <a:r>
+              <a:rPr sz="1500">
+                <a:solidFill>
+                  <a:srgbClr val="1A1A1A"/>
+                </a:solidFill>
+              </a:rPr>
+              <a:t>No streaming layer (offline batch only).</a:t>
+            </a:r>
+          </a:p>
+          <a:p>
+            <a:pPr>
+              <a:spcAft>
+                <a:spcPts val="400"/>
+              </a:spcAft>
+            </a:pPr>
+            <a:r>
+              <a:rPr sz="1500">
+                <a:solidFill>
+                  <a:srgbClr val="1A1A1A"/>
+                </a:solidFill>
+              </a:rPr>
+              <a:t>Red-team campaign ends mid-dataset;</a:t>
+            </a:r>
+          </a:p>
+          <a:p>
+            <a:pPr>
+              <a:spcAft>
+                <a:spcPts val="400"/>
+              </a:spcAft>
+            </a:pPr>
+            <a:r>
+              <a:rPr sz="1500">
+                <a:solidFill>
+                  <a:srgbClr val="1A1A1A"/>
+                </a:solidFill>
+              </a:rPr>
+              <a:t>    stratified random split with disclosure.</a:t>
+            </a:r>
+          </a:p>
+        </p:txBody>
+      </p:sp>
+      <p:sp>
+        <p:nvSpPr>
+          <p:cNvPr id="7" name="TextBox 6"/>
+          <p:cNvSpPr txBox="1"/>
+          <p:nvPr/>
+        </p:nvSpPr>
+        <p:spPr>
+          <a:xfrm>
+            <a:off x="6400800" y="1097280"/>
+            <a:ext cx="5486400" cy="457200"/>
+          </a:xfrm>
+          <a:prstGeom prst="rect">
+            <a:avLst/>
+          </a:prstGeom>
+          <a:noFill/>
+        </p:spPr>
+        <p:txBody>
+          <a:bodyPr wrap="square" tIns="0">
+            <a:spAutoFit/>
+          </a:bodyPr>
+          <a:lstStyle/>
+          <a:p>
+            <a:pPr algn="l"/>
+            <a:r>
+              <a:rPr sz="2000" b="1" i="0">
+                <a:solidFill>
+                  <a:srgbClr val="E65555"/>
+                </a:solidFill>
+              </a:rPr>
+              <a:t>Future work, by impact</a:t>
+            </a:r>
+          </a:p>
+        </p:txBody>
+      </p:sp>
+      <p:sp>
+        <p:nvSpPr>
+          <p:cNvPr id="8" name="TextBox 7"/>
+          <p:cNvSpPr txBox="1"/>
+          <p:nvPr/>
+        </p:nvSpPr>
+        <p:spPr>
+          <a:xfrm>
+            <a:off x="6400800" y="1554480"/>
+            <a:ext cx="5486400" cy="4114800"/>
+          </a:xfrm>
+          <a:prstGeom prst="rect">
+            <a:avLst/>
+          </a:prstGeom>
+          <a:noFill/>
+        </p:spPr>
+        <p:txBody>
+          <a:bodyPr wrap="square" tIns="0">
+            <a:spAutoFit/>
+          </a:bodyPr>
+          <a:lstStyle/>
+          <a:p>
+            <a:pPr>
+              <a:spcAft>
+                <a:spcPts val="400"/>
+              </a:spcAft>
+            </a:pPr>
+            <a:r>
+              <a:rPr sz="1300">
+                <a:solidFill>
+                  <a:srgbClr val="1A1A1A"/>
+                </a:solidFill>
+              </a:rPr>
+              <a:t>1.  Per-cost-matrix threshold tuning.</a:t>
+            </a:r>
+          </a:p>
+          <a:p>
+            <a:pPr>
+              <a:spcAft>
+                <a:spcPts val="400"/>
+              </a:spcAft>
+            </a:pPr>
+            <a:r>
+              <a:rPr sz="1300">
+                <a:solidFill>
+                  <a:srgbClr val="1A1A1A"/>
+                </a:solidFill>
+              </a:rPr>
+              <a:t>      analyst would supply FP-cost / FN-cost; the system picks</a:t>
+            </a:r>
+          </a:p>
+          <a:p>
+            <a:pPr>
+              <a:spcAft>
+                <a:spcPts val="400"/>
+              </a:spcAft>
+            </a:pPr>
+            <a:r>
+              <a:rPr sz="1300">
+                <a:solidFill>
+                  <a:srgbClr val="1A1A1A"/>
+                </a:solidFill>
+              </a:rPr>
+              <a:t>      the threshold that minimizes expected operational cost.</a:t>
+            </a:r>
+          </a:p>
+          <a:p>
+            <a:pPr>
+              <a:spcAft>
+                <a:spcPts val="400"/>
+              </a:spcAft>
+            </a:pPr>
+            <a:r>
+              <a:rPr sz="1300">
+                <a:solidFill>
+                  <a:srgbClr val="1A1A1A"/>
+                </a:solidFill>
+              </a:rPr>
+              <a:t>2.  Streaming: Kinesis -&gt; Spark Structured Streaming -&gt; live scoring.</a:t>
+            </a:r>
+          </a:p>
+          <a:p>
+            <a:pPr>
+              <a:spcAft>
+                <a:spcPts val="400"/>
+              </a:spcAft>
+            </a:pPr>
+            <a:r>
+              <a:rPr sz="1300">
+                <a:solidFill>
+                  <a:srgbClr val="1A1A1A"/>
+                </a:solidFill>
+              </a:rPr>
+              <a:t>3.  Automated retraining: EventBridge cron -&gt; EMR Step + train_model.</a:t>
+            </a:r>
+          </a:p>
+          <a:p>
+            <a:pPr>
+              <a:spcAft>
+                <a:spcPts val="400"/>
+              </a:spcAft>
+            </a:pPr>
+            <a:r>
+              <a:rPr sz="1300">
+                <a:solidFill>
+                  <a:srgbClr val="1A1A1A"/>
+                </a:solidFill>
+              </a:rPr>
+              <a:t>4.  Multi-feature counterfactual paths (ensemble of interventions).</a:t>
+            </a:r>
+          </a:p>
+        </p:txBody>
+      </p:sp>
+      <p:sp>
+        <p:nvSpPr>
+          <p:cNvPr id="9" name="TextBox 8"/>
+          <p:cNvSpPr txBox="1"/>
+          <p:nvPr/>
+        </p:nvSpPr>
+        <p:spPr>
+          <a:xfrm>
+            <a:off x="10820095" y="6492240"/>
+            <a:ext cx="1188720" cy="274320"/>
+          </a:xfrm>
+          <a:prstGeom prst="rect">
+            <a:avLst/>
+          </a:prstGeom>
+          <a:noFill/>
+        </p:spPr>
+        <p:txBody>
+          <a:bodyPr wrap="none">
+            <a:spAutoFit/>
+          </a:bodyPr>
+          <a:lstStyle/>
+          <a:p>
+            <a:pPr algn="r"/>
+            <a:r>
+              <a:rPr sz="1000">
+                <a:solidFill>
+                  <a:srgbClr val="6B7280"/>
+                </a:solidFill>
+              </a:rPr>
+              <a:t>18 / 19</a:t>
+            </a:r>
+          </a:p>
+        </p:txBody>
+      </p:sp>
+    </p:spTree>
+  </p:cSld>
+  <p:clrMapOvr>
+    <a:masterClrMapping/>
+  </p:clrMapOvr>
+</p:sld>
+</file>
+
+<file path=ppt/slides/slide19.xml><?xml version="1.0" encoding="utf-8"?>
+<p:sld xmlns:a="http://schemas.openxmlformats.org/drawingml/2006/main" xmlns:p="http://schemas.openxmlformats.org/presentationml/2006/main" xmlns:r="http://schemas.openxmlformats.org/officeDocument/2006/relationships">
+  <p:cSld>
+    <p:spTree>
+      <p:nvGrpSpPr>
+        <p:cNvPr id="1" name=""/>
+        <p:cNvGrpSpPr/>
+        <p:nvPr/>
+      </p:nvGrpSpPr>
+      <p:grpSpPr/>
+      <p:sp>
+        <p:nvSpPr>
+          <p:cNvPr id="2" name="Rectangle 1"/>
+          <p:cNvSpPr/>
+          <p:nvPr/>
+        </p:nvSpPr>
+        <p:spPr>
+          <a:xfrm>
+            <a:off x="0" y="0"/>
+            <a:ext cx="12191695" cy="6858000"/>
+          </a:xfrm>
+          <a:prstGeom prst="rect">
+            <a:avLst/>
+          </a:prstGeom>
+          <a:solidFill>
+            <a:srgbClr val="1F2A44"/>
+          </a:solidFill>
+          <a:ln>
+            <a:noFill/>
+          </a:ln>
+        </p:spPr>
+        <p:style>
+          <a:lnRef idx="1">
+            <a:schemeClr val="accent1"/>
+          </a:lnRef>
+          <a:fillRef idx="3">
+            <a:schemeClr val="accent1"/>
+          </a:fillRef>
+          <a:effectRef idx="2">
+            <a:schemeClr val="accent1"/>
+          </a:effectRef>
+          <a:fontRef idx="minor">
+            <a:schemeClr val="lt1"/>
+          </a:fontRef>
+        </p:style>
+        <p:txBody>
+          <a:bodyPr rtlCol="0" anchor="ctr"/>
+          <a:lstStyle/>
+          <a:p>
+            <a:pPr algn="ctr"/>
           </a:p>
         </p:txBody>
       </p:sp>
@@ -8783,7 +9672,6 @@
           <a:lstStyle/>
           <a:p>
             <a:pPr algn="ctr"/>
-            <a:endParaRPr/>
           </a:p>
         </p:txBody>
       </p:sp>
@@ -8935,7 +9823,7 @@
 </file>
 
 <file path=ppt/slides/slide2.xml><?xml version="1.0" encoding="utf-8"?>
-<p:sld xmlns:a="http://schemas.openxmlformats.org/drawingml/2006/main" xmlns:r="http://schemas.openxmlformats.org/officeDocument/2006/relationships" xmlns:p="http://schemas.openxmlformats.org/presentationml/2006/main">
+<p:sld xmlns:a="http://schemas.openxmlformats.org/drawingml/2006/main" xmlns:p="http://schemas.openxmlformats.org/presentationml/2006/main" xmlns:r="http://schemas.openxmlformats.org/officeDocument/2006/relationships">
   <p:cSld>
     <p:spTree>
       <p:nvGrpSpPr>
@@ -8943,14 +9831,7 @@
         <p:cNvGrpSpPr/>
         <p:nvPr/>
       </p:nvGrpSpPr>
-      <p:grpSpPr>
-        <a:xfrm>
-          <a:off x="0" y="0"/>
-          <a:ext cx="0" cy="0"/>
-          <a:chOff x="0" y="0"/>
-          <a:chExt cx="0" cy="0"/>
-        </a:xfrm>
-      </p:grpSpPr>
+      <p:grpSpPr/>
       <p:sp>
         <p:nvSpPr>
           <p:cNvPr id="2" name="Rectangle 1"/>
@@ -8991,7 +9872,6 @@
           <a:lstStyle/>
           <a:p>
             <a:pPr algn="ctr"/>
-            <a:endParaRPr/>
           </a:p>
         </p:txBody>
       </p:sp>
@@ -9035,7 +9915,6 @@
           <a:lstStyle/>
           <a:p>
             <a:pPr algn="ctr"/>
-            <a:endParaRPr/>
           </a:p>
         </p:txBody>
       </p:sp>
@@ -9260,7 +10139,7 @@
                   <a:srgbClr val="6B7280"/>
                 </a:solidFill>
               </a:rPr>
-              <a:t>2 / 18</a:t>
+              <a:t>2 / 19</a:t>
             </a:r>
           </a:p>
         </p:txBody>
@@ -9274,7 +10153,7 @@
 </file>
 
 <file path=ppt/slides/slide3.xml><?xml version="1.0" encoding="utf-8"?>
-<p:sld xmlns:a="http://schemas.openxmlformats.org/drawingml/2006/main" xmlns:r="http://schemas.openxmlformats.org/officeDocument/2006/relationships" xmlns:p="http://schemas.openxmlformats.org/presentationml/2006/main">
+<p:sld xmlns:a="http://schemas.openxmlformats.org/drawingml/2006/main" xmlns:p="http://schemas.openxmlformats.org/presentationml/2006/main" xmlns:r="http://schemas.openxmlformats.org/officeDocument/2006/relationships">
   <p:cSld>
     <p:spTree>
       <p:nvGrpSpPr>
@@ -9282,14 +10161,7 @@
         <p:cNvGrpSpPr/>
         <p:nvPr/>
       </p:nvGrpSpPr>
-      <p:grpSpPr>
-        <a:xfrm>
-          <a:off x="0" y="0"/>
-          <a:ext cx="0" cy="0"/>
-          <a:chOff x="0" y="0"/>
-          <a:chExt cx="0" cy="0"/>
-        </a:xfrm>
-      </p:grpSpPr>
+      <p:grpSpPr/>
       <p:sp>
         <p:nvSpPr>
           <p:cNvPr id="2" name="Rectangle 1"/>
@@ -9330,7 +10202,6 @@
           <a:lstStyle/>
           <a:p>
             <a:pPr algn="ctr"/>
-            <a:endParaRPr/>
           </a:p>
         </p:txBody>
       </p:sp>
@@ -9374,7 +10245,6 @@
           <a:lstStyle/>
           <a:p>
             <a:pPr algn="ctr"/>
-            <a:endParaRPr/>
           </a:p>
         </p:txBody>
       </p:sp>
@@ -9637,7 +10507,7 @@
                   <a:srgbClr val="6B7280"/>
                 </a:solidFill>
               </a:rPr>
-              <a:t>3 / 18</a:t>
+              <a:t>3 / 19</a:t>
             </a:r>
           </a:p>
         </p:txBody>
@@ -9651,7 +10521,7 @@
 </file>
 
 <file path=ppt/slides/slide4.xml><?xml version="1.0" encoding="utf-8"?>
-<p:sld xmlns:a="http://schemas.openxmlformats.org/drawingml/2006/main" xmlns:r="http://schemas.openxmlformats.org/officeDocument/2006/relationships" xmlns:p="http://schemas.openxmlformats.org/presentationml/2006/main">
+<p:sld xmlns:a="http://schemas.openxmlformats.org/drawingml/2006/main" xmlns:p="http://schemas.openxmlformats.org/presentationml/2006/main" xmlns:r="http://schemas.openxmlformats.org/officeDocument/2006/relationships">
   <p:cSld>
     <p:spTree>
       <p:nvGrpSpPr>
@@ -9659,14 +10529,7 @@
         <p:cNvGrpSpPr/>
         <p:nvPr/>
       </p:nvGrpSpPr>
-      <p:grpSpPr>
-        <a:xfrm>
-          <a:off x="0" y="0"/>
-          <a:ext cx="0" cy="0"/>
-          <a:chOff x="0" y="0"/>
-          <a:chExt cx="0" cy="0"/>
-        </a:xfrm>
-      </p:grpSpPr>
+      <p:grpSpPr/>
       <p:sp>
         <p:nvSpPr>
           <p:cNvPr id="2" name="Rectangle 1"/>
@@ -9707,7 +10570,6 @@
           <a:lstStyle/>
           <a:p>
             <a:pPr algn="ctr"/>
-            <a:endParaRPr/>
           </a:p>
         </p:txBody>
       </p:sp>
@@ -9751,7 +10613,6 @@
           <a:lstStyle/>
           <a:p>
             <a:pPr algn="ctr"/>
-            <a:endParaRPr/>
           </a:p>
         </p:txBody>
       </p:sp>
@@ -9821,7 +10682,7 @@
         </p:nvSpPr>
         <p:spPr>
           <a:xfrm>
-            <a:off x="762000" y="6150127"/>
+            <a:off x="640080" y="4937760"/>
             <a:ext cx="10972800" cy="1371600"/>
           </a:xfrm>
           <a:prstGeom prst="rect">
@@ -9837,7 +10698,7 @@
           <a:p>
             <a:pPr algn="l"/>
             <a:r>
-              <a:rPr sz="1700" b="0" i="0" dirty="0">
+              <a:rPr sz="1700" b="0" i="0">
                 <a:solidFill>
                   <a:srgbClr val="1F2A44"/>
                 </a:solidFill>
@@ -9876,7 +10737,7 @@
                   <a:srgbClr val="6B7280"/>
                 </a:solidFill>
               </a:rPr>
-              <a:t>4 / 18</a:t>
+              <a:t>4 / 19</a:t>
             </a:r>
           </a:p>
         </p:txBody>
@@ -9890,7 +10751,7 @@
 </file>
 
 <file path=ppt/slides/slide5.xml><?xml version="1.0" encoding="utf-8"?>
-<p:sld xmlns:a="http://schemas.openxmlformats.org/drawingml/2006/main" xmlns:r="http://schemas.openxmlformats.org/officeDocument/2006/relationships" xmlns:p="http://schemas.openxmlformats.org/presentationml/2006/main">
+<p:sld xmlns:a="http://schemas.openxmlformats.org/drawingml/2006/main" xmlns:p="http://schemas.openxmlformats.org/presentationml/2006/main" xmlns:r="http://schemas.openxmlformats.org/officeDocument/2006/relationships">
   <p:cSld>
     <p:spTree>
       <p:nvGrpSpPr>
@@ -9898,14 +10759,7 @@
         <p:cNvGrpSpPr/>
         <p:nvPr/>
       </p:nvGrpSpPr>
-      <p:grpSpPr>
-        <a:xfrm>
-          <a:off x="0" y="0"/>
-          <a:ext cx="0" cy="0"/>
-          <a:chOff x="0" y="0"/>
-          <a:chExt cx="0" cy="0"/>
-        </a:xfrm>
-      </p:grpSpPr>
+      <p:grpSpPr/>
       <p:sp>
         <p:nvSpPr>
           <p:cNvPr id="2" name="Rectangle 1"/>
@@ -9946,7 +10800,6 @@
           <a:lstStyle/>
           <a:p>
             <a:pPr algn="ctr"/>
-            <a:endParaRPr/>
           </a:p>
         </p:txBody>
       </p:sp>
@@ -9990,7 +10843,6 @@
           <a:lstStyle/>
           <a:p>
             <a:pPr algn="ctr"/>
-            <a:endParaRPr/>
           </a:p>
         </p:txBody>
       </p:sp>
@@ -10044,7 +10896,7 @@
         </p:blipFill>
         <p:spPr>
           <a:xfrm>
-            <a:off x="457200" y="895546"/>
+            <a:off x="457200" y="914400"/>
             <a:ext cx="11430000" cy="6051496"/>
           </a:xfrm>
           <a:prstGeom prst="rect">
@@ -10060,7 +10912,7 @@
         </p:nvSpPr>
         <p:spPr>
           <a:xfrm>
-            <a:off x="441655" y="1515830"/>
+            <a:off x="640080" y="5852160"/>
             <a:ext cx="10972800" cy="822960"/>
           </a:xfrm>
           <a:prstGeom prst="rect">
@@ -10076,60 +10928,12 @@
           <a:p>
             <a:pPr algn="l"/>
             <a:r>
-              <a:rPr sz="1500" b="0" i="0" dirty="0">
+              <a:rPr sz="1500" b="0" i="0">
                 <a:solidFill>
                   <a:srgbClr val="1F2A44"/>
                 </a:solidFill>
               </a:rPr>
-              <a:t>Spec requires &gt;= 2 distributed stages. This project has 3: S3 (cloud storage), EMR </a:t>
-            </a:r>
-            <a:r>
-              <a:rPr sz="1500" b="0" i="0" dirty="0" err="1">
-                <a:solidFill>
-                  <a:srgbClr val="1F2A44"/>
-                </a:solidFill>
-              </a:rPr>
-              <a:t>PySpark</a:t>
-            </a:r>
-            <a:r>
-              <a:rPr sz="1500" b="0" i="0" dirty="0">
-                <a:solidFill>
-                  <a:srgbClr val="1F2A44"/>
-                </a:solidFill>
-              </a:rPr>
-              <a:t> (distributed compute), </a:t>
-            </a:r>
-            <a:r>
-              <a:rPr sz="1500" b="0" i="0" dirty="0" err="1">
-                <a:solidFill>
-                  <a:srgbClr val="1F2A44"/>
-                </a:solidFill>
-              </a:rPr>
-              <a:t>FastAPI</a:t>
-            </a:r>
-            <a:r>
-              <a:rPr sz="1500" b="0" i="0" dirty="0">
-                <a:solidFill>
-                  <a:srgbClr val="1F2A44"/>
-                </a:solidFill>
-              </a:rPr>
-              <a:t> on EC2 + </a:t>
-            </a:r>
-            <a:r>
-              <a:rPr sz="1500" b="0" i="0" dirty="0" err="1">
-                <a:solidFill>
-                  <a:srgbClr val="1F2A44"/>
-                </a:solidFill>
-              </a:rPr>
-              <a:t>Streamlit</a:t>
-            </a:r>
-            <a:r>
-              <a:rPr sz="1500" b="0" i="0" dirty="0">
-                <a:solidFill>
-                  <a:srgbClr val="1F2A44"/>
-                </a:solidFill>
-              </a:rPr>
-              <a:t> Cloud (cloud serving).</a:t>
+              <a:t>Spec requires &gt;= 2 distributed stages. This project has 3: S3 (cloud storage), EMR PySpark (distributed compute), FastAPI on EC2 + Streamlit Cloud (cloud serving).</a:t>
             </a:r>
           </a:p>
         </p:txBody>
@@ -10163,7 +10967,7 @@
                   <a:srgbClr val="6B7280"/>
                 </a:solidFill>
               </a:rPr>
-              <a:t>5 / 18</a:t>
+              <a:t>5 / 19</a:t>
             </a:r>
           </a:p>
         </p:txBody>
@@ -10177,7 +10981,7 @@
 </file>
 
 <file path=ppt/slides/slide6.xml><?xml version="1.0" encoding="utf-8"?>
-<p:sld xmlns:a="http://schemas.openxmlformats.org/drawingml/2006/main" xmlns:r="http://schemas.openxmlformats.org/officeDocument/2006/relationships" xmlns:p="http://schemas.openxmlformats.org/presentationml/2006/main">
+<p:sld xmlns:a="http://schemas.openxmlformats.org/drawingml/2006/main" xmlns:p="http://schemas.openxmlformats.org/presentationml/2006/main" xmlns:r="http://schemas.openxmlformats.org/officeDocument/2006/relationships">
   <p:cSld>
     <p:spTree>
       <p:nvGrpSpPr>
@@ -10185,14 +10989,7 @@
         <p:cNvGrpSpPr/>
         <p:nvPr/>
       </p:nvGrpSpPr>
-      <p:grpSpPr>
-        <a:xfrm>
-          <a:off x="0" y="0"/>
-          <a:ext cx="0" cy="0"/>
-          <a:chOff x="0" y="0"/>
-          <a:chExt cx="0" cy="0"/>
-        </a:xfrm>
-      </p:grpSpPr>
+      <p:grpSpPr/>
       <p:sp>
         <p:nvSpPr>
           <p:cNvPr id="2" name="Rectangle 1"/>
@@ -10233,7 +11030,6 @@
           <a:lstStyle/>
           <a:p>
             <a:pPr algn="ctr"/>
-            <a:endParaRPr/>
           </a:p>
         </p:txBody>
       </p:sp>
@@ -10277,7 +11073,6 @@
           <a:lstStyle/>
           <a:p>
             <a:pPr algn="ctr"/>
-            <a:endParaRPr/>
           </a:p>
         </p:txBody>
       </p:sp>
@@ -10402,7 +11197,7 @@
                   <a:srgbClr val="6B7280"/>
                 </a:solidFill>
               </a:rPr>
-              <a:t>6 / 18</a:t>
+              <a:t>6 / 19</a:t>
             </a:r>
           </a:p>
         </p:txBody>
@@ -10416,7 +11211,7 @@
 </file>
 
 <file path=ppt/slides/slide7.xml><?xml version="1.0" encoding="utf-8"?>
-<p:sld xmlns:a="http://schemas.openxmlformats.org/drawingml/2006/main" xmlns:r="http://schemas.openxmlformats.org/officeDocument/2006/relationships" xmlns:p="http://schemas.openxmlformats.org/presentationml/2006/main">
+<p:sld xmlns:a="http://schemas.openxmlformats.org/drawingml/2006/main" xmlns:p="http://schemas.openxmlformats.org/presentationml/2006/main" xmlns:r="http://schemas.openxmlformats.org/officeDocument/2006/relationships">
   <p:cSld>
     <p:spTree>
       <p:nvGrpSpPr>
@@ -10424,14 +11219,7 @@
         <p:cNvGrpSpPr/>
         <p:nvPr/>
       </p:nvGrpSpPr>
-      <p:grpSpPr>
-        <a:xfrm>
-          <a:off x="0" y="0"/>
-          <a:ext cx="0" cy="0"/>
-          <a:chOff x="0" y="0"/>
-          <a:chExt cx="0" cy="0"/>
-        </a:xfrm>
-      </p:grpSpPr>
+      <p:grpSpPr/>
       <p:sp>
         <p:nvSpPr>
           <p:cNvPr id="2" name="Rectangle 1"/>
@@ -10472,7 +11260,6 @@
           <a:lstStyle/>
           <a:p>
             <a:pPr algn="ctr"/>
-            <a:endParaRPr/>
           </a:p>
         </p:txBody>
       </p:sp>
@@ -10516,7 +11303,6 @@
           <a:lstStyle/>
           <a:p>
             <a:pPr algn="ctr"/>
-            <a:endParaRPr/>
           </a:p>
         </p:txBody>
       </p:sp>
@@ -10595,7 +11381,6 @@
           <a:lstStyle/>
           <a:p>
             <a:pPr algn="ctr"/>
-            <a:endParaRPr/>
           </a:p>
         </p:txBody>
       </p:sp>
@@ -10710,7 +11495,6 @@
           <a:lstStyle/>
           <a:p>
             <a:pPr algn="ctr"/>
-            <a:endParaRPr/>
           </a:p>
         </p:txBody>
       </p:sp>
@@ -10827,7 +11611,6 @@
           <a:lstStyle/>
           <a:p>
             <a:pPr algn="ctr"/>
-            <a:endParaRPr/>
           </a:p>
         </p:txBody>
       </p:sp>
@@ -10965,7 +11748,7 @@
                   <a:srgbClr val="6B7280"/>
                 </a:solidFill>
               </a:rPr>
-              <a:t>7 / 18</a:t>
+              <a:t>7 / 19</a:t>
             </a:r>
           </a:p>
         </p:txBody>
@@ -10979,7 +11762,7 @@
 </file>
 
 <file path=ppt/slides/slide8.xml><?xml version="1.0" encoding="utf-8"?>
-<p:sld xmlns:a="http://schemas.openxmlformats.org/drawingml/2006/main" xmlns:r="http://schemas.openxmlformats.org/officeDocument/2006/relationships" xmlns:p="http://schemas.openxmlformats.org/presentationml/2006/main">
+<p:sld xmlns:a="http://schemas.openxmlformats.org/drawingml/2006/main" xmlns:p="http://schemas.openxmlformats.org/presentationml/2006/main" xmlns:r="http://schemas.openxmlformats.org/officeDocument/2006/relationships">
   <p:cSld>
     <p:spTree>
       <p:nvGrpSpPr>
@@ -10987,14 +11770,7 @@
         <p:cNvGrpSpPr/>
         <p:nvPr/>
       </p:nvGrpSpPr>
-      <p:grpSpPr>
-        <a:xfrm>
-          <a:off x="0" y="0"/>
-          <a:ext cx="0" cy="0"/>
-          <a:chOff x="0" y="0"/>
-          <a:chExt cx="0" cy="0"/>
-        </a:xfrm>
-      </p:grpSpPr>
+      <p:grpSpPr/>
       <p:sp>
         <p:nvSpPr>
           <p:cNvPr id="2" name="Rectangle 1"/>
@@ -11035,7 +11811,6 @@
           <a:lstStyle/>
           <a:p>
             <a:pPr algn="ctr"/>
-            <a:endParaRPr/>
           </a:p>
         </p:txBody>
       </p:sp>
@@ -11079,7 +11854,6 @@
           <a:lstStyle/>
           <a:p>
             <a:pPr algn="ctr"/>
-            <a:endParaRPr/>
           </a:p>
         </p:txBody>
       </p:sp>
@@ -11149,8 +11923,8 @@
         </p:nvSpPr>
         <p:spPr>
           <a:xfrm>
-            <a:off x="457200" y="4798242"/>
-            <a:ext cx="11155680" cy="2015936"/>
+            <a:off x="640080" y="4206240"/>
+            <a:ext cx="10972800" cy="2468880"/>
           </a:xfrm>
           <a:prstGeom prst="rect">
             <a:avLst/>
@@ -11169,7 +11943,7 @@
               </a:spcAft>
             </a:pPr>
             <a:r>
-              <a:rPr sz="1500" dirty="0">
+              <a:rPr sz="1500">
                 <a:solidFill>
                   <a:srgbClr val="1A1A1A"/>
                 </a:solidFill>
@@ -11184,7 +11958,7 @@
               </a:spcAft>
             </a:pPr>
             <a:r>
-              <a:rPr sz="1500" dirty="0">
+              <a:rPr sz="1500">
                 <a:solidFill>
                   <a:srgbClr val="1A1A1A"/>
                 </a:solidFill>
@@ -11199,7 +11973,6 @@
               </a:spcAft>
             </a:pPr>
             <a:r>
-              <a:rPr dirty="0"/>
               <a:t> </a:t>
             </a:r>
           </a:p>
@@ -11210,44 +11983,12 @@
               </a:spcAft>
             </a:pPr>
             <a:r>
-              <a:rPr sz="1500" dirty="0">
+              <a:rPr sz="1500">
                 <a:solidFill>
                   <a:srgbClr val="1A1A1A"/>
                 </a:solidFill>
               </a:rPr>
-              <a:t>Surprise constraint: </a:t>
-            </a:r>
-            <a:r>
-              <a:rPr sz="1500" dirty="0" err="1">
-                <a:solidFill>
-                  <a:srgbClr val="1A1A1A"/>
-                </a:solidFill>
-              </a:rPr>
-              <a:t>gzip</a:t>
-            </a:r>
-            <a:r>
-              <a:rPr sz="1500" dirty="0">
-                <a:solidFill>
-                  <a:srgbClr val="1A1A1A"/>
-                </a:solidFill>
-              </a:rPr>
-              <a:t>-compressed CSV is NOT </a:t>
-            </a:r>
-            <a:r>
-              <a:rPr sz="1500" dirty="0" err="1">
-                <a:solidFill>
-                  <a:srgbClr val="1A1A1A"/>
-                </a:solidFill>
-              </a:rPr>
-              <a:t>splittable</a:t>
-            </a:r>
-            <a:r>
-              <a:rPr sz="1500" dirty="0">
-                <a:solidFill>
-                  <a:srgbClr val="1A1A1A"/>
-                </a:solidFill>
-              </a:rPr>
-              <a:t> in Spark.</a:t>
+              <a:t>Surprise constraint: gzip-compressed CSV is NOT splittable in Spark.</a:t>
             </a:r>
           </a:p>
           <a:p>
@@ -11257,7 +11998,7 @@
               </a:spcAft>
             </a:pPr>
             <a:r>
-              <a:rPr sz="1500" dirty="0">
+              <a:rPr sz="1500">
                 <a:solidFill>
                   <a:srgbClr val="1A1A1A"/>
                 </a:solidFill>
@@ -11272,28 +12013,12 @@
               </a:spcAft>
             </a:pPr>
             <a:r>
-              <a:rPr sz="1500" dirty="0">
+              <a:rPr sz="1500">
                 <a:solidFill>
                   <a:srgbClr val="1A1A1A"/>
                 </a:solidFill>
               </a:rPr>
-              <a:t>sat idle through most of </a:t>
-            </a:r>
-            <a:r>
-              <a:rPr sz="1500" dirty="0" err="1">
-                <a:solidFill>
-                  <a:srgbClr val="1A1A1A"/>
-                </a:solidFill>
-              </a:rPr>
-              <a:t>bronze_to_silver</a:t>
-            </a:r>
-            <a:r>
-              <a:rPr sz="1500" dirty="0">
-                <a:solidFill>
-                  <a:srgbClr val="1A1A1A"/>
-                </a:solidFill>
-              </a:rPr>
-              <a:t>. In production we'd land</a:t>
+              <a:t>sat idle through most of bronze_to_silver. In production we'd land</a:t>
             </a:r>
           </a:p>
           <a:p>
@@ -11303,28 +12028,12 @@
               </a:spcAft>
             </a:pPr>
             <a:r>
-              <a:rPr sz="1500" dirty="0">
+              <a:rPr sz="1500">
                 <a:solidFill>
                   <a:srgbClr val="1A1A1A"/>
                 </a:solidFill>
               </a:rPr>
-              <a:t>raw .</a:t>
-            </a:r>
-            <a:r>
-              <a:rPr sz="1500" dirty="0" err="1">
-                <a:solidFill>
-                  <a:srgbClr val="1A1A1A"/>
-                </a:solidFill>
-              </a:rPr>
-              <a:t>gz</a:t>
-            </a:r>
-            <a:r>
-              <a:rPr sz="1500" dirty="0">
-                <a:solidFill>
-                  <a:srgbClr val="1A1A1A"/>
-                </a:solidFill>
-              </a:rPr>
-              <a:t> files as bzip2 or Snappy parquet on ingest to fix this.</a:t>
+              <a:t>raw .gz files as bzip2 or Snappy parquet on ingest to fix this.</a:t>
             </a:r>
           </a:p>
         </p:txBody>
@@ -11358,7 +12067,7 @@
                   <a:srgbClr val="6B7280"/>
                 </a:solidFill>
               </a:rPr>
-              <a:t>8 / 18</a:t>
+              <a:t>8 / 19</a:t>
             </a:r>
           </a:p>
         </p:txBody>
@@ -11372,7 +12081,7 @@
 </file>
 
 <file path=ppt/slides/slide9.xml><?xml version="1.0" encoding="utf-8"?>
-<p:sld xmlns:a="http://schemas.openxmlformats.org/drawingml/2006/main" xmlns:r="http://schemas.openxmlformats.org/officeDocument/2006/relationships" xmlns:p="http://schemas.openxmlformats.org/presentationml/2006/main">
+<p:sld xmlns:a="http://schemas.openxmlformats.org/drawingml/2006/main" xmlns:p="http://schemas.openxmlformats.org/presentationml/2006/main" xmlns:r="http://schemas.openxmlformats.org/officeDocument/2006/relationships">
   <p:cSld>
     <p:spTree>
       <p:nvGrpSpPr>
@@ -11380,14 +12089,7 @@
         <p:cNvGrpSpPr/>
         <p:nvPr/>
       </p:nvGrpSpPr>
-      <p:grpSpPr>
-        <a:xfrm>
-          <a:off x="0" y="0"/>
-          <a:ext cx="0" cy="0"/>
-          <a:chOff x="0" y="0"/>
-          <a:chExt cx="0" cy="0"/>
-        </a:xfrm>
-      </p:grpSpPr>
+      <p:grpSpPr/>
       <p:sp>
         <p:nvSpPr>
           <p:cNvPr id="2" name="Rectangle 1"/>
@@ -11428,7 +12130,6 @@
           <a:lstStyle/>
           <a:p>
             <a:pPr algn="ctr"/>
-            <a:endParaRPr/>
           </a:p>
         </p:txBody>
       </p:sp>
@@ -11472,7 +12173,6 @@
           <a:lstStyle/>
           <a:p>
             <a:pPr algn="ctr"/>
-            <a:endParaRPr/>
           </a:p>
         </p:txBody>
       </p:sp>
@@ -11737,41 +12437,11 @@
                   <a:srgbClr val="6B7280"/>
                 </a:solidFill>
               </a:rPr>
-              <a:t>9 / 18</a:t>
-            </a:r>
-          </a:p>
-        </p:txBody>
-      </p:sp>
-      <p:pic>
-        <p:nvPicPr>
-          <p:cNvPr id="8" name="Picture 7">
-            <a:extLst>
-              <a:ext uri="{FF2B5EF4-FFF2-40B4-BE49-F238E27FC236}">
-                <a16:creationId xmlns:a16="http://schemas.microsoft.com/office/drawing/2014/main" id="{88FDF608-E07E-751C-C663-9E267CEA9BAD}"/>
-              </a:ext>
-            </a:extLst>
-          </p:cNvPr>
-          <p:cNvPicPr>
-            <a:picLocks noChangeAspect="1"/>
-          </p:cNvPicPr>
-          <p:nvPr/>
-        </p:nvPicPr>
-        <p:blipFill>
-          <a:blip r:embed="rId3"/>
-          <a:stretch>
-            <a:fillRect/>
-          </a:stretch>
-        </p:blipFill>
-        <p:spPr>
-          <a:xfrm>
-            <a:off x="640080" y="5134935"/>
-            <a:ext cx="8353091" cy="1026790"/>
-          </a:xfrm>
-          <a:prstGeom prst="rect">
-            <a:avLst/>
-          </a:prstGeom>
-        </p:spPr>
-      </p:pic>
+              <a:t>9 / 19</a:t>
+            </a:r>
+          </a:p>
+        </p:txBody>
+      </p:sp>
     </p:spTree>
   </p:cSld>
   <p:clrMapOvr>
@@ -12111,44 +12781,44 @@
         <a:sysClr val="window" lastClr="FFFFFF"/>
       </a:lt1>
       <a:dk2>
-        <a:srgbClr val="0E2841"/>
+        <a:srgbClr val="1F497D"/>
       </a:dk2>
       <a:lt2>
-        <a:srgbClr val="E8E8E8"/>
+        <a:srgbClr val="EEECE1"/>
       </a:lt2>
       <a:accent1>
-        <a:srgbClr val="156082"/>
+        <a:srgbClr val="4F81BD"/>
       </a:accent1>
       <a:accent2>
-        <a:srgbClr val="E97132"/>
+        <a:srgbClr val="C0504D"/>
       </a:accent2>
       <a:accent3>
-        <a:srgbClr val="196B24"/>
+        <a:srgbClr val="9BBB59"/>
       </a:accent3>
       <a:accent4>
-        <a:srgbClr val="0F9ED5"/>
+        <a:srgbClr val="8064A2"/>
       </a:accent4>
       <a:accent5>
-        <a:srgbClr val="A02B93"/>
+        <a:srgbClr val="4BACC6"/>
       </a:accent5>
       <a:accent6>
-        <a:srgbClr val="4EA72E"/>
+        <a:srgbClr val="F79646"/>
       </a:accent6>
       <a:hlink>
-        <a:srgbClr val="467886"/>
+        <a:srgbClr val="0000FF"/>
       </a:hlink>
       <a:folHlink>
-        <a:srgbClr val="96607D"/>
+        <a:srgbClr val="800080"/>
       </a:folHlink>
     </a:clrScheme>
     <a:fontScheme name="Office">
       <a:majorFont>
-        <a:latin typeface="Aptos Display" panose="02110004020202020204"/>
+        <a:latin typeface="Calibri"/>
         <a:ea typeface=""/>
         <a:cs typeface=""/>
-        <a:font script="Jpan" typeface="游ゴシック Light"/>
+        <a:font script="Jpan" typeface="ＭＳ Ｐゴシック"/>
         <a:font script="Hang" typeface="맑은 고딕"/>
-        <a:font script="Hans" typeface="等线 Light"/>
+        <a:font script="Hans" typeface="宋体"/>
         <a:font script="Hant" typeface="新細明體"/>
         <a:font script="Arab" typeface="Times New Roman"/>
         <a:font script="Hebr" typeface="Times New Roman"/>
@@ -12176,31 +12846,14 @@
         <a:font script="Viet" typeface="Times New Roman"/>
         <a:font script="Uigh" typeface="Microsoft Uighur"/>
         <a:font script="Geor" typeface="Sylfaen"/>
-        <a:font script="Armn" typeface="Arial"/>
-        <a:font script="Bugi" typeface="Leelawadee UI"/>
-        <a:font script="Bopo" typeface="Microsoft JhengHei"/>
-        <a:font script="Java" typeface="Javanese Text"/>
-        <a:font script="Lisu" typeface="Segoe UI"/>
-        <a:font script="Mymr" typeface="Myanmar Text"/>
-        <a:font script="Nkoo" typeface="Ebrima"/>
-        <a:font script="Olck" typeface="Nirmala UI"/>
-        <a:font script="Osma" typeface="Ebrima"/>
-        <a:font script="Phag" typeface="Phagspa"/>
-        <a:font script="Syrn" typeface="Estrangelo Edessa"/>
-        <a:font script="Syrj" typeface="Estrangelo Edessa"/>
-        <a:font script="Syre" typeface="Estrangelo Edessa"/>
-        <a:font script="Sora" typeface="Nirmala UI"/>
-        <a:font script="Tale" typeface="Microsoft Tai Le"/>
-        <a:font script="Talu" typeface="Microsoft New Tai Lue"/>
-        <a:font script="Tfng" typeface="Ebrima"/>
       </a:majorFont>
       <a:minorFont>
-        <a:latin typeface="Aptos" panose="02110004020202020204"/>
+        <a:latin typeface="Calibri"/>
         <a:ea typeface=""/>
         <a:cs typeface=""/>
-        <a:font script="Jpan" typeface="游ゴシック"/>
+        <a:font script="Jpan" typeface="ＭＳ Ｐゴシック"/>
         <a:font script="Hang" typeface="맑은 고딕"/>
-        <a:font script="Hans" typeface="等线"/>
+        <a:font script="Hans" typeface="宋体"/>
         <a:font script="Hant" typeface="新細明體"/>
         <a:font script="Arab" typeface="Arial"/>
         <a:font script="Hebr" typeface="Arial"/>
@@ -12228,23 +12881,6 @@
         <a:font script="Viet" typeface="Arial"/>
         <a:font script="Uigh" typeface="Microsoft Uighur"/>
         <a:font script="Geor" typeface="Sylfaen"/>
-        <a:font script="Armn" typeface="Arial"/>
-        <a:font script="Bugi" typeface="Leelawadee UI"/>
-        <a:font script="Bopo" typeface="Microsoft JhengHei"/>
-        <a:font script="Java" typeface="Javanese Text"/>
-        <a:font script="Lisu" typeface="Segoe UI"/>
-        <a:font script="Mymr" typeface="Myanmar Text"/>
-        <a:font script="Nkoo" typeface="Ebrima"/>
-        <a:font script="Olck" typeface="Nirmala UI"/>
-        <a:font script="Osma" typeface="Ebrima"/>
-        <a:font script="Phag" typeface="Phagspa"/>
-        <a:font script="Syrn" typeface="Estrangelo Edessa"/>
-        <a:font script="Syrj" typeface="Estrangelo Edessa"/>
-        <a:font script="Syre" typeface="Estrangelo Edessa"/>
-        <a:font script="Sora" typeface="Nirmala UI"/>
-        <a:font script="Tale" typeface="Microsoft Tai Le"/>
-        <a:font script="Talu" typeface="Microsoft New Tai Lue"/>
-        <a:font script="Tfng" typeface="Ebrima"/>
       </a:minorFont>
     </a:fontScheme>
     <a:fmtScheme name="Office">
@@ -12256,136 +12892,180 @@
           <a:gsLst>
             <a:gs pos="0">
               <a:schemeClr val="phClr">
-                <a:lumMod val="110000"/>
-                <a:satMod val="105000"/>
-                <a:tint val="67000"/>
+                <a:tint val="50000"/>
+                <a:satMod val="300000"/>
               </a:schemeClr>
             </a:gs>
-            <a:gs pos="50000">
+            <a:gs pos="35000">
               <a:schemeClr val="phClr">
-                <a:lumMod val="105000"/>
-                <a:satMod val="103000"/>
-                <a:tint val="73000"/>
+                <a:tint val="37000"/>
+                <a:satMod val="300000"/>
               </a:schemeClr>
             </a:gs>
             <a:gs pos="100000">
               <a:schemeClr val="phClr">
-                <a:lumMod val="105000"/>
-                <a:satMod val="109000"/>
-                <a:tint val="81000"/>
+                <a:tint val="15000"/>
+                <a:satMod val="350000"/>
               </a:schemeClr>
             </a:gs>
           </a:gsLst>
-          <a:lin ang="5400000" scaled="0"/>
+          <a:lin ang="16200000" scaled="1"/>
         </a:gradFill>
         <a:gradFill rotWithShape="1">
           <a:gsLst>
             <a:gs pos="0">
               <a:schemeClr val="phClr">
-                <a:satMod val="103000"/>
-                <a:lumMod val="102000"/>
-                <a:tint val="94000"/>
-              </a:schemeClr>
-            </a:gs>
-            <a:gs pos="50000">
-              <a:schemeClr val="phClr">
-                <a:satMod val="110000"/>
-                <a:lumMod val="100000"/>
+                <a:tint val="100000"/>
                 <a:shade val="100000"/>
+                <a:satMod val="130000"/>
               </a:schemeClr>
             </a:gs>
             <a:gs pos="100000">
               <a:schemeClr val="phClr">
-                <a:lumMod val="99000"/>
-                <a:satMod val="120000"/>
-                <a:shade val="78000"/>
+                <a:tint val="50000"/>
+                <a:shade val="100000"/>
+                <a:satMod val="350000"/>
               </a:schemeClr>
             </a:gs>
           </a:gsLst>
-          <a:lin ang="5400000" scaled="0"/>
+          <a:lin ang="16200000" scaled="0"/>
         </a:gradFill>
       </a:fillStyleLst>
       <a:lnStyleLst>
-        <a:ln w="12700" cap="flat" cmpd="sng" algn="ctr">
+        <a:ln w="9525" cap="flat" cmpd="sng" algn="ctr">
           <a:solidFill>
-            <a:schemeClr val="phClr"/>
+            <a:schemeClr val="phClr">
+              <a:shade val="95000"/>
+              <a:satMod val="105000"/>
+            </a:schemeClr>
           </a:solidFill>
           <a:prstDash val="solid"/>
-          <a:miter lim="800000"/>
-        </a:ln>
-        <a:ln w="19050" cap="flat" cmpd="sng" algn="ctr">
-          <a:solidFill>
-            <a:schemeClr val="phClr"/>
-          </a:solidFill>
-          <a:prstDash val="solid"/>
-          <a:miter lim="800000"/>
         </a:ln>
         <a:ln w="25400" cap="flat" cmpd="sng" algn="ctr">
           <a:solidFill>
             <a:schemeClr val="phClr"/>
           </a:solidFill>
           <a:prstDash val="solid"/>
-          <a:miter lim="800000"/>
+        </a:ln>
+        <a:ln w="38100" cap="flat" cmpd="sng" algn="ctr">
+          <a:solidFill>
+            <a:schemeClr val="phClr"/>
+          </a:solidFill>
+          <a:prstDash val="solid"/>
         </a:ln>
       </a:lnStyleLst>
       <a:effectStyleLst>
         <a:effectStyle>
-          <a:effectLst/>
-        </a:effectStyle>
-        <a:effectStyle>
-          <a:effectLst/>
+          <a:effectLst>
+            <a:outerShdw blurRad="40000" dist="20000" dir="5400000" rotWithShape="0">
+              <a:srgbClr val="000000">
+                <a:alpha val="38000"/>
+              </a:srgbClr>
+            </a:outerShdw>
+          </a:effectLst>
         </a:effectStyle>
         <a:effectStyle>
           <a:effectLst>
-            <a:outerShdw blurRad="57150" dist="19050" dir="5400000" algn="ctr" rotWithShape="0">
+            <a:outerShdw blurRad="40000" dist="23000" dir="5400000" rotWithShape="0">
               <a:srgbClr val="000000">
-                <a:alpha val="63000"/>
+                <a:alpha val="35000"/>
               </a:srgbClr>
             </a:outerShdw>
           </a:effectLst>
+        </a:effectStyle>
+        <a:effectStyle>
+          <a:effectLst>
+            <a:outerShdw blurRad="40000" dist="23000" dir="5400000" rotWithShape="0">
+              <a:srgbClr val="000000">
+                <a:alpha val="35000"/>
+              </a:srgbClr>
+            </a:outerShdw>
+          </a:effectLst>
+          <a:scene3d>
+            <a:camera prst="orthographicFront">
+              <a:rot lat="0" lon="0" rev="0"/>
+            </a:camera>
+            <a:lightRig rig="threePt" dir="t">
+              <a:rot lat="0" lon="0" rev="1200000"/>
+            </a:lightRig>
+          </a:scene3d>
+          <a:sp3d>
+            <a:bevelT w="63500" h="25400"/>
+          </a:sp3d>
         </a:effectStyle>
       </a:effectStyleLst>
       <a:bgFillStyleLst>
         <a:solidFill>
           <a:schemeClr val="phClr"/>
         </a:solidFill>
-        <a:solidFill>
-          <a:schemeClr val="phClr">
-            <a:tint val="95000"/>
-            <a:satMod val="170000"/>
-          </a:schemeClr>
-        </a:solidFill>
         <a:gradFill rotWithShape="1">
           <a:gsLst>
             <a:gs pos="0">
               <a:schemeClr val="phClr">
-                <a:tint val="93000"/>
-                <a:satMod val="150000"/>
-                <a:shade val="98000"/>
-                <a:lumMod val="102000"/>
+                <a:tint val="40000"/>
+                <a:satMod val="350000"/>
               </a:schemeClr>
             </a:gs>
-            <a:gs pos="50000">
+            <a:gs pos="40000">
               <a:schemeClr val="phClr">
-                <a:tint val="98000"/>
-                <a:satMod val="130000"/>
-                <a:shade val="90000"/>
-                <a:lumMod val="103000"/>
+                <a:tint val="45000"/>
+                <a:shade val="99000"/>
+                <a:satMod val="350000"/>
               </a:schemeClr>
             </a:gs>
             <a:gs pos="100000">
               <a:schemeClr val="phClr">
-                <a:shade val="63000"/>
-                <a:satMod val="120000"/>
+                <a:shade val="20000"/>
+                <a:satMod val="255000"/>
               </a:schemeClr>
             </a:gs>
           </a:gsLst>
-          <a:lin ang="5400000" scaled="0"/>
+          <a:path path="circle">
+            <a:fillToRect l="50000" t="-80000" r="50000" b="180000"/>
+          </a:path>
+        </a:gradFill>
+        <a:gradFill rotWithShape="1">
+          <a:gsLst>
+            <a:gs pos="0">
+              <a:schemeClr val="phClr">
+                <a:tint val="80000"/>
+                <a:satMod val="300000"/>
+              </a:schemeClr>
+            </a:gs>
+            <a:gs pos="100000">
+              <a:schemeClr val="phClr">
+                <a:shade val="30000"/>
+                <a:satMod val="200000"/>
+              </a:schemeClr>
+            </a:gs>
+          </a:gsLst>
+          <a:path path="circle">
+            <a:fillToRect l="50000" t="50000" r="50000" b="50000"/>
+          </a:path>
         </a:gradFill>
       </a:bgFillStyleLst>
     </a:fmtScheme>
   </a:themeElements>
   <a:objectDefaults>
+    <a:spDef>
+      <a:spPr/>
+      <a:bodyPr/>
+      <a:lstStyle/>
+      <a:style>
+        <a:lnRef idx="1">
+          <a:schemeClr val="accent1"/>
+        </a:lnRef>
+        <a:fillRef idx="3">
+          <a:schemeClr val="accent1"/>
+        </a:fillRef>
+        <a:effectRef idx="2">
+          <a:schemeClr val="accent1"/>
+        </a:effectRef>
+        <a:fontRef idx="minor">
+          <a:schemeClr val="lt1"/>
+        </a:fontRef>
+      </a:style>
+    </a:spDef>
     <a:lnDef>
       <a:spPr/>
       <a:bodyPr/>
@@ -12407,10 +13087,5 @@
     </a:lnDef>
   </a:objectDefaults>
   <a:extraClrSchemeLst/>
-  <a:extLst>
-    <a:ext uri="{05A4C25C-085E-4340-85A3-A5531E510DB2}">
-      <thm15:themeFamily xmlns:thm15="http://schemas.microsoft.com/office/thememl/2012/main" name="Office Theme" id="{2E142A2C-CD16-42D6-873A-C26D2A0506FA}" vid="{1BDDFF52-6CD6-40A5-AB3C-68EB2F1E4D0A}"/>
-    </a:ext>
-  </a:extLst>
 </a:theme>
 </file>
--- a/PRESENTATION.pptx
+++ b/PRESENTATION.pptx
@@ -4,28 +4,31 @@
   <p:sldMasterIdLst>
     <p:sldMasterId id="2147483648" r:id="rId1"/>
   </p:sldMasterIdLst>
+  <p:notesMasterIdLst>
+    <p:notesMasterId r:id="rId21"/>
+  </p:notesMasterIdLst>
   <p:sldIdLst>
-    <p:sldId id="256" r:id="rId7"/>
-    <p:sldId id="257" r:id="rId9"/>
-    <p:sldId id="258" r:id="rId10"/>
-    <p:sldId id="259" r:id="rId11"/>
-    <p:sldId id="260" r:id="rId12"/>
-    <p:sldId id="261" r:id="rId13"/>
-    <p:sldId id="262" r:id="rId14"/>
-    <p:sldId id="263" r:id="rId15"/>
-    <p:sldId id="264" r:id="rId16"/>
-    <p:sldId id="265" r:id="rId17"/>
-    <p:sldId id="266" r:id="rId18"/>
-    <p:sldId id="267" r:id="rId19"/>
-    <p:sldId id="268" r:id="rId20"/>
-    <p:sldId id="269" r:id="rId21"/>
-    <p:sldId id="270" r:id="rId22"/>
-    <p:sldId id="271" r:id="rId23"/>
-    <p:sldId id="272" r:id="rId24"/>
-    <p:sldId id="273" r:id="rId25"/>
-    <p:sldId id="274" r:id="rId26"/>
+    <p:sldId id="256" r:id="rId2"/>
+    <p:sldId id="257" r:id="rId3"/>
+    <p:sldId id="258" r:id="rId4"/>
+    <p:sldId id="259" r:id="rId5"/>
+    <p:sldId id="260" r:id="rId6"/>
+    <p:sldId id="261" r:id="rId7"/>
+    <p:sldId id="262" r:id="rId8"/>
+    <p:sldId id="263" r:id="rId9"/>
+    <p:sldId id="264" r:id="rId10"/>
+    <p:sldId id="265" r:id="rId11"/>
+    <p:sldId id="266" r:id="rId12"/>
+    <p:sldId id="267" r:id="rId13"/>
+    <p:sldId id="268" r:id="rId14"/>
+    <p:sldId id="269" r:id="rId15"/>
+    <p:sldId id="270" r:id="rId16"/>
+    <p:sldId id="271" r:id="rId17"/>
+    <p:sldId id="272" r:id="rId18"/>
+    <p:sldId id="273" r:id="rId19"/>
+    <p:sldId id="274" r:id="rId20"/>
   </p:sldIdLst>
-  <p:sldSz cx="12191695" cy="6858000" type="screen4x3"/>
+  <p:sldSz cx="12192000" cy="6858000"/>
   <p:notesSz cx="6858000" cy="9144000"/>
   <p:defaultTextStyle>
     <a:defPPr>
@@ -122,11 +125,27 @@
       </a:defRPr>
     </a:lvl9pPr>
   </p:defaultTextStyle>
+  <p:extLst>
+    <p:ext uri="{EFAFB233-063F-42B5-8137-9DF3F51BA10A}">
+      <p15:sldGuideLst xmlns:p15="http://schemas.microsoft.com/office/powerpoint/2012/main">
+        <p15:guide id="1" orient="horz" pos="2160">
+          <p15:clr>
+            <a:srgbClr val="A4A3A4"/>
+          </p15:clr>
+        </p15:guide>
+        <p15:guide id="2" pos="2880">
+          <p15:clr>
+            <a:srgbClr val="A4A3A4"/>
+          </p15:clr>
+        </p15:guide>
+      </p15:sldGuideLst>
+    </p:ext>
+  </p:extLst>
 </p:presentation>
 </file>
 
 <file path=ppt/notesMasters/notesMaster1.xml><?xml version="1.0" encoding="utf-8"?>
-<p:notesMaster xmlns:a="http://schemas.openxmlformats.org/drawingml/2006/main" xmlns:p="http://schemas.openxmlformats.org/presentationml/2006/main" xmlns:r="http://schemas.openxmlformats.org/officeDocument/2006/relationships">
+<p:notesMaster xmlns:a="http://schemas.openxmlformats.org/drawingml/2006/main" xmlns:r="http://schemas.openxmlformats.org/officeDocument/2006/relationships" xmlns:p="http://schemas.openxmlformats.org/presentationml/2006/main">
   <p:cSld>
     <p:bg>
       <p:bgRef idx="1001">
@@ -147,241 +166,16 @@
           <a:chExt cx="0" cy="0"/>
         </a:xfrm>
       </p:grpSpPr>
-      <p:sp>
-        <p:nvSpPr>
-          <p:cNvPr id="2" name="Header Placeholder 1"/>
-          <p:cNvSpPr>
-            <a:spLocks noGrp="1"/>
-          </p:cNvSpPr>
-          <p:nvPr>
-            <p:ph type="hdr" sz="quarter"/>
-          </p:nvPr>
-        </p:nvSpPr>
-        <p:spPr>
-          <a:xfrm>
-            <a:off x="0" y="0"/>
-            <a:ext cx="2971800" cy="457200"/>
-          </a:xfrm>
-          <a:prstGeom prst="rect">
-            <a:avLst/>
-          </a:prstGeom>
-        </p:spPr>
-        <p:txBody>
-          <a:bodyPr vert="horz" lIns="91440" tIns="45720" rIns="91440" bIns="45720" rtlCol="0"/>
-          <a:lstStyle>
-            <a:lvl1pPr algn="l">
-              <a:defRPr sz="1200"/>
-            </a:lvl1pPr>
-          </a:lstStyle>
-          <a:p>
-            <a:endParaRPr lang="en-US"/>
-          </a:p>
-        </p:txBody>
-      </p:sp>
-      <p:sp>
-        <p:nvSpPr>
-          <p:cNvPr id="3" name="Date Placeholder 2"/>
-          <p:cNvSpPr>
-            <a:spLocks noGrp="1"/>
-          </p:cNvSpPr>
-          <p:nvPr>
-            <p:ph type="dt" idx="1"/>
-          </p:nvPr>
-        </p:nvSpPr>
-        <p:spPr>
-          <a:xfrm>
-            <a:off x="3884613" y="0"/>
-            <a:ext cx="2971800" cy="457200"/>
-          </a:xfrm>
-          <a:prstGeom prst="rect">
-            <a:avLst/>
-          </a:prstGeom>
-        </p:spPr>
-        <p:txBody>
-          <a:bodyPr vert="horz" lIns="91440" tIns="45720" rIns="91440" bIns="45720" rtlCol="0"/>
-          <a:lstStyle>
-            <a:lvl1pPr algn="r">
-              <a:defRPr sz="1200"/>
-            </a:lvl1pPr>
-          </a:lstStyle>
-          <a:p>
-            <a:fld id="{0F89C1C7-3DCD-1040-A9CF-14679D8B5DDD}" type="datetimeFigureOut">
-              <a:rPr lang="en-US" smtClean="0"/>
-              <a:t>10/17/16</a:t>
-            </a:fld>
-            <a:endParaRPr lang="en-US"/>
-          </a:p>
-        </p:txBody>
-      </p:sp>
-      <p:sp>
-        <p:nvSpPr>
-          <p:cNvPr id="4" name="Slide Image Placeholder 3"/>
-          <p:cNvSpPr>
-            <a:spLocks noGrp="1" noRot="1" noChangeAspect="1"/>
-          </p:cNvSpPr>
-          <p:nvPr>
-            <p:ph type="sldImg" idx="2"/>
-          </p:nvPr>
-        </p:nvSpPr>
-        <p:spPr>
-          <a:xfrm>
-            <a:off x="1143000" y="685800"/>
-            <a:ext cx="4572000" cy="3429000"/>
-          </a:xfrm>
-          <a:prstGeom prst="rect">
-            <a:avLst/>
-          </a:prstGeom>
-          <a:noFill/>
-          <a:ln w="12700">
-            <a:solidFill>
-              <a:prstClr val="black"/>
-            </a:solidFill>
-          </a:ln>
-        </p:spPr>
-        <p:txBody>
-          <a:bodyPr vert="horz" lIns="91440" tIns="45720" rIns="91440" bIns="45720" rtlCol="0" anchor="ctr"/>
-          <a:lstStyle/>
-          <a:p>
-            <a:endParaRPr lang="en-US"/>
-          </a:p>
-        </p:txBody>
-      </p:sp>
-      <p:sp>
-        <p:nvSpPr>
-          <p:cNvPr id="5" name="Notes Placeholder 4"/>
-          <p:cNvSpPr>
-            <a:spLocks noGrp="1"/>
-          </p:cNvSpPr>
-          <p:nvPr>
-            <p:ph type="body" sz="quarter" idx="3"/>
-          </p:nvPr>
-        </p:nvSpPr>
-        <p:spPr>
-          <a:xfrm>
-            <a:off x="685800" y="4343400"/>
-            <a:ext cx="5486400" cy="4114800"/>
-          </a:xfrm>
-          <a:prstGeom prst="rect">
-            <a:avLst/>
-          </a:prstGeom>
-        </p:spPr>
-        <p:txBody>
-          <a:bodyPr vert="horz" lIns="91440" tIns="45720" rIns="91440" bIns="45720" rtlCol="0"/>
-          <a:lstStyle/>
-          <a:p>
-            <a:pPr lvl="0"/>
-            <a:r>
-              <a:rPr lang="en-US" smtClean="0"/>
-              <a:t>Click to edit Master text styles</a:t>
-            </a:r>
-          </a:p>
-          <a:p>
-            <a:pPr lvl="1"/>
-            <a:r>
-              <a:rPr lang="en-US" smtClean="0"/>
-              <a:t>Second level</a:t>
-            </a:r>
-          </a:p>
-          <a:p>
-            <a:pPr lvl="2"/>
-            <a:r>
-              <a:rPr lang="en-US" smtClean="0"/>
-              <a:t>Third level</a:t>
-            </a:r>
-          </a:p>
-          <a:p>
-            <a:pPr lvl="3"/>
-            <a:r>
-              <a:rPr lang="en-US" smtClean="0"/>
-              <a:t>Fourth level</a:t>
-            </a:r>
-          </a:p>
-          <a:p>
-            <a:pPr lvl="4"/>
-            <a:r>
-              <a:rPr lang="en-US" smtClean="0"/>
-              <a:t>Fifth level</a:t>
-            </a:r>
-            <a:endParaRPr lang="en-US"/>
-          </a:p>
-        </p:txBody>
-      </p:sp>
-      <p:sp>
-        <p:nvSpPr>
-          <p:cNvPr id="6" name="Footer Placeholder 5"/>
-          <p:cNvSpPr>
-            <a:spLocks noGrp="1"/>
-          </p:cNvSpPr>
-          <p:nvPr>
-            <p:ph type="ftr" sz="quarter" idx="4"/>
-          </p:nvPr>
-        </p:nvSpPr>
-        <p:spPr>
-          <a:xfrm>
-            <a:off x="0" y="8685213"/>
-            <a:ext cx="2971800" cy="457200"/>
-          </a:xfrm>
-          <a:prstGeom prst="rect">
-            <a:avLst/>
-          </a:prstGeom>
-        </p:spPr>
-        <p:txBody>
-          <a:bodyPr vert="horz" lIns="91440" tIns="45720" rIns="91440" bIns="45720" rtlCol="0" anchor="b"/>
-          <a:lstStyle>
-            <a:lvl1pPr algn="l">
-              <a:defRPr sz="1200"/>
-            </a:lvl1pPr>
-          </a:lstStyle>
-          <a:p>
-            <a:endParaRPr lang="en-US"/>
-          </a:p>
-        </p:txBody>
-      </p:sp>
-      <p:sp>
-        <p:nvSpPr>
-          <p:cNvPr id="7" name="Slide Number Placeholder 6"/>
-          <p:cNvSpPr>
-            <a:spLocks noGrp="1"/>
-          </p:cNvSpPr>
-          <p:nvPr>
-            <p:ph type="sldNum" sz="quarter" idx="5"/>
-          </p:nvPr>
-        </p:nvSpPr>
-        <p:spPr>
-          <a:xfrm>
-            <a:off x="3884613" y="8685213"/>
-            <a:ext cx="2971800" cy="457200"/>
-          </a:xfrm>
-          <a:prstGeom prst="rect">
-            <a:avLst/>
-          </a:prstGeom>
-        </p:spPr>
-        <p:txBody>
-          <a:bodyPr vert="horz" lIns="91440" tIns="45720" rIns="91440" bIns="45720" rtlCol="0" anchor="b"/>
-          <a:lstStyle>
-            <a:lvl1pPr algn="r">
-              <a:defRPr sz="1200"/>
-            </a:lvl1pPr>
-          </a:lstStyle>
-          <a:p>
-            <a:fld id="{BB5E49A5-4136-284D-997B-48E1D791AD67}" type="slidenum">
-              <a:rPr lang="en-US" smtClean="0"/>
-              <a:t>‹#›</a:t>
-            </a:fld>
-            <a:endParaRPr lang="en-US"/>
-          </a:p>
-        </p:txBody>
-      </p:sp>
     </p:spTree>
     <p:extLst>
       <p:ext uri="{BB962C8B-B14F-4D97-AF65-F5344CB8AC3E}">
-        <p14:creationId xmlns:p14="http://schemas.microsoft.com/office/powerpoint/2010/main" val="2623252185"/>
+        <p14:creationId xmlns:p14="http://schemas.microsoft.com/office/powerpoint/2010/main" val="4235548486"/>
       </p:ext>
     </p:extLst>
   </p:cSld>
   <p:clrMap bg1="lt1" tx1="dk1" bg2="lt2" tx2="dk2" accent1="accent1" accent2="accent2" accent3="accent3" accent4="accent4" accent5="accent5" accent6="accent6" hlink="hlink" folHlink="folHlink"/>
   <p:notesStyle>
-    <a:lvl1pPr marL="0" algn="l" defTabSz="457200" rtl="0" eaLnBrk="1" latinLnBrk="0" hangingPunct="1">
+    <a:lvl1pPr marL="0" algn="l" defTabSz="914400" rtl="0" eaLnBrk="1" latinLnBrk="0" hangingPunct="1">
       <a:defRPr sz="1200" kern="1200">
         <a:solidFill>
           <a:schemeClr val="tx1"/>
@@ -391,7 +185,7 @@
         <a:cs typeface="+mn-cs"/>
       </a:defRPr>
     </a:lvl1pPr>
-    <a:lvl2pPr marL="457200" algn="l" defTabSz="457200" rtl="0" eaLnBrk="1" latinLnBrk="0" hangingPunct="1">
+    <a:lvl2pPr marL="457200" algn="l" defTabSz="914400" rtl="0" eaLnBrk="1" latinLnBrk="0" hangingPunct="1">
       <a:defRPr sz="1200" kern="1200">
         <a:solidFill>
           <a:schemeClr val="tx1"/>
@@ -401,7 +195,7 @@
         <a:cs typeface="+mn-cs"/>
       </a:defRPr>
     </a:lvl2pPr>
-    <a:lvl3pPr marL="914400" algn="l" defTabSz="457200" rtl="0" eaLnBrk="1" latinLnBrk="0" hangingPunct="1">
+    <a:lvl3pPr marL="914400" algn="l" defTabSz="914400" rtl="0" eaLnBrk="1" latinLnBrk="0" hangingPunct="1">
       <a:defRPr sz="1200" kern="1200">
         <a:solidFill>
           <a:schemeClr val="tx1"/>
@@ -411,7 +205,7 @@
         <a:cs typeface="+mn-cs"/>
       </a:defRPr>
     </a:lvl3pPr>
-    <a:lvl4pPr marL="1371600" algn="l" defTabSz="457200" rtl="0" eaLnBrk="1" latinLnBrk="0" hangingPunct="1">
+    <a:lvl4pPr marL="1371600" algn="l" defTabSz="914400" rtl="0" eaLnBrk="1" latinLnBrk="0" hangingPunct="1">
       <a:defRPr sz="1200" kern="1200">
         <a:solidFill>
           <a:schemeClr val="tx1"/>
@@ -421,7 +215,7 @@
         <a:cs typeface="+mn-cs"/>
       </a:defRPr>
     </a:lvl4pPr>
-    <a:lvl5pPr marL="1828800" algn="l" defTabSz="457200" rtl="0" eaLnBrk="1" latinLnBrk="0" hangingPunct="1">
+    <a:lvl5pPr marL="1828800" algn="l" defTabSz="914400" rtl="0" eaLnBrk="1" latinLnBrk="0" hangingPunct="1">
       <a:defRPr sz="1200" kern="1200">
         <a:solidFill>
           <a:schemeClr val="tx1"/>
@@ -431,7 +225,7 @@
         <a:cs typeface="+mn-cs"/>
       </a:defRPr>
     </a:lvl5pPr>
-    <a:lvl6pPr marL="2286000" algn="l" defTabSz="457200" rtl="0" eaLnBrk="1" latinLnBrk="0" hangingPunct="1">
+    <a:lvl6pPr marL="2286000" algn="l" defTabSz="914400" rtl="0" eaLnBrk="1" latinLnBrk="0" hangingPunct="1">
       <a:defRPr sz="1200" kern="1200">
         <a:solidFill>
           <a:schemeClr val="tx1"/>
@@ -441,7 +235,7 @@
         <a:cs typeface="+mn-cs"/>
       </a:defRPr>
     </a:lvl6pPr>
-    <a:lvl7pPr marL="2743200" algn="l" defTabSz="457200" rtl="0" eaLnBrk="1" latinLnBrk="0" hangingPunct="1">
+    <a:lvl7pPr marL="2743200" algn="l" defTabSz="914400" rtl="0" eaLnBrk="1" latinLnBrk="0" hangingPunct="1">
       <a:defRPr sz="1200" kern="1200">
         <a:solidFill>
           <a:schemeClr val="tx1"/>
@@ -451,7 +245,7 @@
         <a:cs typeface="+mn-cs"/>
       </a:defRPr>
     </a:lvl7pPr>
-    <a:lvl8pPr marL="3200400" algn="l" defTabSz="457200" rtl="0" eaLnBrk="1" latinLnBrk="0" hangingPunct="1">
+    <a:lvl8pPr marL="3200400" algn="l" defTabSz="914400" rtl="0" eaLnBrk="1" latinLnBrk="0" hangingPunct="1">
       <a:defRPr sz="1200" kern="1200">
         <a:solidFill>
           <a:schemeClr val="tx1"/>
@@ -461,7 +255,7 @@
         <a:cs typeface="+mn-cs"/>
       </a:defRPr>
     </a:lvl8pPr>
-    <a:lvl9pPr marL="3657600" algn="l" defTabSz="457200" rtl="0" eaLnBrk="1" latinLnBrk="0" hangingPunct="1">
+    <a:lvl9pPr marL="3657600" algn="l" defTabSz="914400" rtl="0" eaLnBrk="1" latinLnBrk="0" hangingPunct="1">
       <a:defRPr sz="1200" kern="1200">
         <a:solidFill>
           <a:schemeClr val="tx1"/>
@@ -476,7 +270,7 @@
 </file>
 
 <file path=ppt/notesSlides/notesSlide1.xml><?xml version="1.0" encoding="utf-8"?>
-<p:notes xmlns:a="http://schemas.openxmlformats.org/drawingml/2006/main" xmlns:p="http://schemas.openxmlformats.org/presentationml/2006/main" xmlns:r="http://schemas.openxmlformats.org/officeDocument/2006/relationships">
+<p:notes xmlns:a="http://schemas.openxmlformats.org/drawingml/2006/main" xmlns:r="http://schemas.openxmlformats.org/officeDocument/2006/relationships" xmlns:p="http://schemas.openxmlformats.org/presentationml/2006/main">
   <p:cSld>
     <p:spTree>
       <p:nvGrpSpPr>
@@ -496,7 +290,7 @@
         <p:nvSpPr>
           <p:cNvPr id="2" name="Slide Image Placeholder 1"/>
           <p:cNvSpPr>
-            <a:spLocks noGrp="1"/>
+            <a:spLocks noGrp="1" noRot="1" noChangeAspect="1"/>
           </p:cNvSpPr>
           <p:nvPr>
             <p:ph type="sldImg" idx="2"/>
@@ -511,7 +305,7 @@
             <a:spLocks noGrp="1"/>
           </p:cNvSpPr>
           <p:nvPr>
-            <p:ph type="body" idx="3" sz="quarter"/>
+            <p:ph type="body" sz="quarter" idx="3"/>
           </p:nvPr>
         </p:nvSpPr>
         <p:spPr/>
@@ -532,7 +326,7 @@
             <a:spLocks noGrp="1"/>
           </p:cNvSpPr>
           <p:nvPr>
-            <p:ph type="sldNum" idx="5" sz="quarter"/>
+            <p:ph type="sldNum" sz="quarter" idx="5"/>
           </p:nvPr>
         </p:nvSpPr>
         <p:spPr/>
@@ -546,7 +340,7 @@
 </file>
 
 <file path=ppt/notesSlides/notesSlide10.xml><?xml version="1.0" encoding="utf-8"?>
-<p:notes xmlns:a="http://schemas.openxmlformats.org/drawingml/2006/main" xmlns:p="http://schemas.openxmlformats.org/presentationml/2006/main" xmlns:r="http://schemas.openxmlformats.org/officeDocument/2006/relationships">
+<p:notes xmlns:a="http://schemas.openxmlformats.org/drawingml/2006/main" xmlns:r="http://schemas.openxmlformats.org/officeDocument/2006/relationships" xmlns:p="http://schemas.openxmlformats.org/presentationml/2006/main">
   <p:cSld>
     <p:spTree>
       <p:nvGrpSpPr>
@@ -566,7 +360,7 @@
         <p:nvSpPr>
           <p:cNvPr id="2" name="Slide Image Placeholder 1"/>
           <p:cNvSpPr>
-            <a:spLocks noGrp="1"/>
+            <a:spLocks noGrp="1" noRot="1" noChangeAspect="1"/>
           </p:cNvSpPr>
           <p:nvPr>
             <p:ph type="sldImg" idx="2"/>
@@ -581,7 +375,7 @@
             <a:spLocks noGrp="1"/>
           </p:cNvSpPr>
           <p:nvPr>
-            <p:ph type="body" idx="3" sz="quarter"/>
+            <p:ph type="body" sz="quarter" idx="3"/>
           </p:nvPr>
         </p:nvSpPr>
         <p:spPr/>
@@ -602,7 +396,7 @@
             <a:spLocks noGrp="1"/>
           </p:cNvSpPr>
           <p:nvPr>
-            <p:ph type="sldNum" idx="5" sz="quarter"/>
+            <p:ph type="sldNum" sz="quarter" idx="5"/>
           </p:nvPr>
         </p:nvSpPr>
         <p:spPr/>
@@ -616,7 +410,7 @@
 </file>
 
 <file path=ppt/notesSlides/notesSlide11.xml><?xml version="1.0" encoding="utf-8"?>
-<p:notes xmlns:a="http://schemas.openxmlformats.org/drawingml/2006/main" xmlns:p="http://schemas.openxmlformats.org/presentationml/2006/main" xmlns:r="http://schemas.openxmlformats.org/officeDocument/2006/relationships">
+<p:notes xmlns:a="http://schemas.openxmlformats.org/drawingml/2006/main" xmlns:r="http://schemas.openxmlformats.org/officeDocument/2006/relationships" xmlns:p="http://schemas.openxmlformats.org/presentationml/2006/main">
   <p:cSld>
     <p:spTree>
       <p:nvGrpSpPr>
@@ -636,7 +430,7 @@
         <p:nvSpPr>
           <p:cNvPr id="2" name="Slide Image Placeholder 1"/>
           <p:cNvSpPr>
-            <a:spLocks noGrp="1"/>
+            <a:spLocks noGrp="1" noRot="1" noChangeAspect="1"/>
           </p:cNvSpPr>
           <p:nvPr>
             <p:ph type="sldImg" idx="2"/>
@@ -651,7 +445,7 @@
             <a:spLocks noGrp="1"/>
           </p:cNvSpPr>
           <p:nvPr>
-            <p:ph type="body" idx="3" sz="quarter"/>
+            <p:ph type="body" sz="quarter" idx="3"/>
           </p:nvPr>
         </p:nvSpPr>
         <p:spPr/>
@@ -672,7 +466,7 @@
             <a:spLocks noGrp="1"/>
           </p:cNvSpPr>
           <p:nvPr>
-            <p:ph type="sldNum" idx="5" sz="quarter"/>
+            <p:ph type="sldNum" sz="quarter" idx="5"/>
           </p:nvPr>
         </p:nvSpPr>
         <p:spPr/>
@@ -686,7 +480,7 @@
 </file>
 
 <file path=ppt/notesSlides/notesSlide12.xml><?xml version="1.0" encoding="utf-8"?>
-<p:notes xmlns:a="http://schemas.openxmlformats.org/drawingml/2006/main" xmlns:p="http://schemas.openxmlformats.org/presentationml/2006/main" xmlns:r="http://schemas.openxmlformats.org/officeDocument/2006/relationships">
+<p:notes xmlns:a="http://schemas.openxmlformats.org/drawingml/2006/main" xmlns:r="http://schemas.openxmlformats.org/officeDocument/2006/relationships" xmlns:p="http://schemas.openxmlformats.org/presentationml/2006/main">
   <p:cSld>
     <p:spTree>
       <p:nvGrpSpPr>
@@ -706,7 +500,7 @@
         <p:nvSpPr>
           <p:cNvPr id="2" name="Slide Image Placeholder 1"/>
           <p:cNvSpPr>
-            <a:spLocks noGrp="1"/>
+            <a:spLocks noGrp="1" noRot="1" noChangeAspect="1"/>
           </p:cNvSpPr>
           <p:nvPr>
             <p:ph type="sldImg" idx="2"/>
@@ -721,7 +515,7 @@
             <a:spLocks noGrp="1"/>
           </p:cNvSpPr>
           <p:nvPr>
-            <p:ph type="body" idx="3" sz="quarter"/>
+            <p:ph type="body" sz="quarter" idx="3"/>
           </p:nvPr>
         </p:nvSpPr>
         <p:spPr/>
@@ -742,7 +536,7 @@
             <a:spLocks noGrp="1"/>
           </p:cNvSpPr>
           <p:nvPr>
-            <p:ph type="sldNum" idx="5" sz="quarter"/>
+            <p:ph type="sldNum" sz="quarter" idx="5"/>
           </p:nvPr>
         </p:nvSpPr>
         <p:spPr/>
@@ -756,7 +550,7 @@
 </file>
 
 <file path=ppt/notesSlides/notesSlide13.xml><?xml version="1.0" encoding="utf-8"?>
-<p:notes xmlns:a="http://schemas.openxmlformats.org/drawingml/2006/main" xmlns:p="http://schemas.openxmlformats.org/presentationml/2006/main" xmlns:r="http://schemas.openxmlformats.org/officeDocument/2006/relationships">
+<p:notes xmlns:a="http://schemas.openxmlformats.org/drawingml/2006/main" xmlns:r="http://schemas.openxmlformats.org/officeDocument/2006/relationships" xmlns:p="http://schemas.openxmlformats.org/presentationml/2006/main">
   <p:cSld>
     <p:spTree>
       <p:nvGrpSpPr>
@@ -776,7 +570,7 @@
         <p:nvSpPr>
           <p:cNvPr id="2" name="Slide Image Placeholder 1"/>
           <p:cNvSpPr>
-            <a:spLocks noGrp="1"/>
+            <a:spLocks noGrp="1" noRot="1" noChangeAspect="1"/>
           </p:cNvSpPr>
           <p:nvPr>
             <p:ph type="sldImg" idx="2"/>
@@ -791,7 +585,7 @@
             <a:spLocks noGrp="1"/>
           </p:cNvSpPr>
           <p:nvPr>
-            <p:ph type="body" idx="3" sz="quarter"/>
+            <p:ph type="body" sz="quarter" idx="3"/>
           </p:nvPr>
         </p:nvSpPr>
         <p:spPr/>
@@ -812,7 +606,7 @@
             <a:spLocks noGrp="1"/>
           </p:cNvSpPr>
           <p:nvPr>
-            <p:ph type="sldNum" idx="5" sz="quarter"/>
+            <p:ph type="sldNum" sz="quarter" idx="5"/>
           </p:nvPr>
         </p:nvSpPr>
         <p:spPr/>
@@ -826,7 +620,7 @@
 </file>
 
 <file path=ppt/notesSlides/notesSlide14.xml><?xml version="1.0" encoding="utf-8"?>
-<p:notes xmlns:a="http://schemas.openxmlformats.org/drawingml/2006/main" xmlns:p="http://schemas.openxmlformats.org/presentationml/2006/main" xmlns:r="http://schemas.openxmlformats.org/officeDocument/2006/relationships">
+<p:notes xmlns:a="http://schemas.openxmlformats.org/drawingml/2006/main" xmlns:r="http://schemas.openxmlformats.org/officeDocument/2006/relationships" xmlns:p="http://schemas.openxmlformats.org/presentationml/2006/main">
   <p:cSld>
     <p:spTree>
       <p:nvGrpSpPr>
@@ -846,7 +640,7 @@
         <p:nvSpPr>
           <p:cNvPr id="2" name="Slide Image Placeholder 1"/>
           <p:cNvSpPr>
-            <a:spLocks noGrp="1"/>
+            <a:spLocks noGrp="1" noRot="1" noChangeAspect="1"/>
           </p:cNvSpPr>
           <p:nvPr>
             <p:ph type="sldImg" idx="2"/>
@@ -861,7 +655,7 @@
             <a:spLocks noGrp="1"/>
           </p:cNvSpPr>
           <p:nvPr>
-            <p:ph type="body" idx="3" sz="quarter"/>
+            <p:ph type="body" sz="quarter" idx="3"/>
           </p:nvPr>
         </p:nvSpPr>
         <p:spPr/>
@@ -882,7 +676,7 @@
             <a:spLocks noGrp="1"/>
           </p:cNvSpPr>
           <p:nvPr>
-            <p:ph type="sldNum" idx="5" sz="quarter"/>
+            <p:ph type="sldNum" sz="quarter" idx="5"/>
           </p:nvPr>
         </p:nvSpPr>
         <p:spPr/>
@@ -896,7 +690,7 @@
 </file>
 
 <file path=ppt/notesSlides/notesSlide15.xml><?xml version="1.0" encoding="utf-8"?>
-<p:notes xmlns:a="http://schemas.openxmlformats.org/drawingml/2006/main" xmlns:p="http://schemas.openxmlformats.org/presentationml/2006/main" xmlns:r="http://schemas.openxmlformats.org/officeDocument/2006/relationships">
+<p:notes xmlns:a="http://schemas.openxmlformats.org/drawingml/2006/main" xmlns:r="http://schemas.openxmlformats.org/officeDocument/2006/relationships" xmlns:p="http://schemas.openxmlformats.org/presentationml/2006/main">
   <p:cSld>
     <p:spTree>
       <p:nvGrpSpPr>
@@ -916,7 +710,7 @@
         <p:nvSpPr>
           <p:cNvPr id="2" name="Slide Image Placeholder 1"/>
           <p:cNvSpPr>
-            <a:spLocks noGrp="1"/>
+            <a:spLocks noGrp="1" noRot="1" noChangeAspect="1"/>
           </p:cNvSpPr>
           <p:nvPr>
             <p:ph type="sldImg" idx="2"/>
@@ -931,7 +725,7 @@
             <a:spLocks noGrp="1"/>
           </p:cNvSpPr>
           <p:nvPr>
-            <p:ph type="body" idx="3" sz="quarter"/>
+            <p:ph type="body" sz="quarter" idx="3"/>
           </p:nvPr>
         </p:nvSpPr>
         <p:spPr/>
@@ -952,7 +746,7 @@
             <a:spLocks noGrp="1"/>
           </p:cNvSpPr>
           <p:nvPr>
-            <p:ph type="sldNum" idx="5" sz="quarter"/>
+            <p:ph type="sldNum" sz="quarter" idx="5"/>
           </p:nvPr>
         </p:nvSpPr>
         <p:spPr/>
@@ -966,7 +760,7 @@
 </file>
 
 <file path=ppt/notesSlides/notesSlide16.xml><?xml version="1.0" encoding="utf-8"?>
-<p:notes xmlns:a="http://schemas.openxmlformats.org/drawingml/2006/main" xmlns:p="http://schemas.openxmlformats.org/presentationml/2006/main" xmlns:r="http://schemas.openxmlformats.org/officeDocument/2006/relationships">
+<p:notes xmlns:a="http://schemas.openxmlformats.org/drawingml/2006/main" xmlns:r="http://schemas.openxmlformats.org/officeDocument/2006/relationships" xmlns:p="http://schemas.openxmlformats.org/presentationml/2006/main">
   <p:cSld>
     <p:spTree>
       <p:nvGrpSpPr>
@@ -986,7 +780,7 @@
         <p:nvSpPr>
           <p:cNvPr id="2" name="Slide Image Placeholder 1"/>
           <p:cNvSpPr>
-            <a:spLocks noGrp="1"/>
+            <a:spLocks noGrp="1" noRot="1" noChangeAspect="1"/>
           </p:cNvSpPr>
           <p:nvPr>
             <p:ph type="sldImg" idx="2"/>
@@ -1001,7 +795,7 @@
             <a:spLocks noGrp="1"/>
           </p:cNvSpPr>
           <p:nvPr>
-            <p:ph type="body" idx="3" sz="quarter"/>
+            <p:ph type="body" sz="quarter" idx="3"/>
           </p:nvPr>
         </p:nvSpPr>
         <p:spPr/>
@@ -1022,7 +816,7 @@
             <a:spLocks noGrp="1"/>
           </p:cNvSpPr>
           <p:nvPr>
-            <p:ph type="sldNum" idx="5" sz="quarter"/>
+            <p:ph type="sldNum" sz="quarter" idx="5"/>
           </p:nvPr>
         </p:nvSpPr>
         <p:spPr/>
@@ -1036,7 +830,7 @@
 </file>
 
 <file path=ppt/notesSlides/notesSlide17.xml><?xml version="1.0" encoding="utf-8"?>
-<p:notes xmlns:a="http://schemas.openxmlformats.org/drawingml/2006/main" xmlns:p="http://schemas.openxmlformats.org/presentationml/2006/main" xmlns:r="http://schemas.openxmlformats.org/officeDocument/2006/relationships">
+<p:notes xmlns:a="http://schemas.openxmlformats.org/drawingml/2006/main" xmlns:r="http://schemas.openxmlformats.org/officeDocument/2006/relationships" xmlns:p="http://schemas.openxmlformats.org/presentationml/2006/main">
   <p:cSld>
     <p:spTree>
       <p:nvGrpSpPr>
@@ -1056,7 +850,7 @@
         <p:nvSpPr>
           <p:cNvPr id="2" name="Slide Image Placeholder 1"/>
           <p:cNvSpPr>
-            <a:spLocks noGrp="1"/>
+            <a:spLocks noGrp="1" noRot="1" noChangeAspect="1"/>
           </p:cNvSpPr>
           <p:nvPr>
             <p:ph type="sldImg" idx="2"/>
@@ -1071,7 +865,7 @@
             <a:spLocks noGrp="1"/>
           </p:cNvSpPr>
           <p:nvPr>
-            <p:ph type="body" idx="3" sz="quarter"/>
+            <p:ph type="body" sz="quarter" idx="3"/>
           </p:nvPr>
         </p:nvSpPr>
         <p:spPr/>
@@ -1092,7 +886,7 @@
             <a:spLocks noGrp="1"/>
           </p:cNvSpPr>
           <p:nvPr>
-            <p:ph type="sldNum" idx="5" sz="quarter"/>
+            <p:ph type="sldNum" sz="quarter" idx="5"/>
           </p:nvPr>
         </p:nvSpPr>
         <p:spPr/>
@@ -1106,7 +900,7 @@
 </file>
 
 <file path=ppt/notesSlides/notesSlide18.xml><?xml version="1.0" encoding="utf-8"?>
-<p:notes xmlns:a="http://schemas.openxmlformats.org/drawingml/2006/main" xmlns:p="http://schemas.openxmlformats.org/presentationml/2006/main" xmlns:r="http://schemas.openxmlformats.org/officeDocument/2006/relationships">
+<p:notes xmlns:a="http://schemas.openxmlformats.org/drawingml/2006/main" xmlns:r="http://schemas.openxmlformats.org/officeDocument/2006/relationships" xmlns:p="http://schemas.openxmlformats.org/presentationml/2006/main">
   <p:cSld>
     <p:spTree>
       <p:nvGrpSpPr>
@@ -1126,7 +920,7 @@
         <p:nvSpPr>
           <p:cNvPr id="2" name="Slide Image Placeholder 1"/>
           <p:cNvSpPr>
-            <a:spLocks noGrp="1"/>
+            <a:spLocks noGrp="1" noRot="1" noChangeAspect="1"/>
           </p:cNvSpPr>
           <p:nvPr>
             <p:ph type="sldImg" idx="2"/>
@@ -1141,7 +935,7 @@
             <a:spLocks noGrp="1"/>
           </p:cNvSpPr>
           <p:nvPr>
-            <p:ph type="body" idx="3" sz="quarter"/>
+            <p:ph type="body" sz="quarter" idx="3"/>
           </p:nvPr>
         </p:nvSpPr>
         <p:spPr/>
@@ -1162,7 +956,7 @@
             <a:spLocks noGrp="1"/>
           </p:cNvSpPr>
           <p:nvPr>
-            <p:ph type="sldNum" idx="5" sz="quarter"/>
+            <p:ph type="sldNum" sz="quarter" idx="5"/>
           </p:nvPr>
         </p:nvSpPr>
         <p:spPr/>
@@ -1176,7 +970,7 @@
 </file>
 
 <file path=ppt/notesSlides/notesSlide19.xml><?xml version="1.0" encoding="utf-8"?>
-<p:notes xmlns:a="http://schemas.openxmlformats.org/drawingml/2006/main" xmlns:p="http://schemas.openxmlformats.org/presentationml/2006/main" xmlns:r="http://schemas.openxmlformats.org/officeDocument/2006/relationships">
+<p:notes xmlns:a="http://schemas.openxmlformats.org/drawingml/2006/main" xmlns:r="http://schemas.openxmlformats.org/officeDocument/2006/relationships" xmlns:p="http://schemas.openxmlformats.org/presentationml/2006/main">
   <p:cSld>
     <p:spTree>
       <p:nvGrpSpPr>
@@ -1196,7 +990,7 @@
         <p:nvSpPr>
           <p:cNvPr id="2" name="Slide Image Placeholder 1"/>
           <p:cNvSpPr>
-            <a:spLocks noGrp="1"/>
+            <a:spLocks noGrp="1" noRot="1" noChangeAspect="1"/>
           </p:cNvSpPr>
           <p:nvPr>
             <p:ph type="sldImg" idx="2"/>
@@ -1211,7 +1005,7 @@
             <a:spLocks noGrp="1"/>
           </p:cNvSpPr>
           <p:nvPr>
-            <p:ph type="body" idx="3" sz="quarter"/>
+            <p:ph type="body" sz="quarter" idx="3"/>
           </p:nvPr>
         </p:nvSpPr>
         <p:spPr/>
@@ -1232,7 +1026,7 @@
             <a:spLocks noGrp="1"/>
           </p:cNvSpPr>
           <p:nvPr>
-            <p:ph type="sldNum" idx="5" sz="quarter"/>
+            <p:ph type="sldNum" sz="quarter" idx="5"/>
           </p:nvPr>
         </p:nvSpPr>
         <p:spPr/>
@@ -1246,7 +1040,7 @@
 </file>
 
 <file path=ppt/notesSlides/notesSlide2.xml><?xml version="1.0" encoding="utf-8"?>
-<p:notes xmlns:a="http://schemas.openxmlformats.org/drawingml/2006/main" xmlns:p="http://schemas.openxmlformats.org/presentationml/2006/main" xmlns:r="http://schemas.openxmlformats.org/officeDocument/2006/relationships">
+<p:notes xmlns:a="http://schemas.openxmlformats.org/drawingml/2006/main" xmlns:r="http://schemas.openxmlformats.org/officeDocument/2006/relationships" xmlns:p="http://schemas.openxmlformats.org/presentationml/2006/main">
   <p:cSld>
     <p:spTree>
       <p:nvGrpSpPr>
@@ -1266,7 +1060,7 @@
         <p:nvSpPr>
           <p:cNvPr id="2" name="Slide Image Placeholder 1"/>
           <p:cNvSpPr>
-            <a:spLocks noGrp="1"/>
+            <a:spLocks noGrp="1" noRot="1" noChangeAspect="1"/>
           </p:cNvSpPr>
           <p:nvPr>
             <p:ph type="sldImg" idx="2"/>
@@ -1281,7 +1075,7 @@
             <a:spLocks noGrp="1"/>
           </p:cNvSpPr>
           <p:nvPr>
-            <p:ph type="body" idx="3" sz="quarter"/>
+            <p:ph type="body" sz="quarter" idx="3"/>
           </p:nvPr>
         </p:nvSpPr>
         <p:spPr/>
@@ -1302,7 +1096,7 @@
             <a:spLocks noGrp="1"/>
           </p:cNvSpPr>
           <p:nvPr>
-            <p:ph type="sldNum" idx="5" sz="quarter"/>
+            <p:ph type="sldNum" sz="quarter" idx="5"/>
           </p:nvPr>
         </p:nvSpPr>
         <p:spPr/>
@@ -1316,7 +1110,7 @@
 </file>
 
 <file path=ppt/notesSlides/notesSlide3.xml><?xml version="1.0" encoding="utf-8"?>
-<p:notes xmlns:a="http://schemas.openxmlformats.org/drawingml/2006/main" xmlns:p="http://schemas.openxmlformats.org/presentationml/2006/main" xmlns:r="http://schemas.openxmlformats.org/officeDocument/2006/relationships">
+<p:notes xmlns:a="http://schemas.openxmlformats.org/drawingml/2006/main" xmlns:r="http://schemas.openxmlformats.org/officeDocument/2006/relationships" xmlns:p="http://schemas.openxmlformats.org/presentationml/2006/main">
   <p:cSld>
     <p:spTree>
       <p:nvGrpSpPr>
@@ -1336,7 +1130,7 @@
         <p:nvSpPr>
           <p:cNvPr id="2" name="Slide Image Placeholder 1"/>
           <p:cNvSpPr>
-            <a:spLocks noGrp="1"/>
+            <a:spLocks noGrp="1" noRot="1" noChangeAspect="1"/>
           </p:cNvSpPr>
           <p:nvPr>
             <p:ph type="sldImg" idx="2"/>
@@ -1351,7 +1145,7 @@
             <a:spLocks noGrp="1"/>
           </p:cNvSpPr>
           <p:nvPr>
-            <p:ph type="body" idx="3" sz="quarter"/>
+            <p:ph type="body" sz="quarter" idx="3"/>
           </p:nvPr>
         </p:nvSpPr>
         <p:spPr/>
@@ -1372,7 +1166,7 @@
             <a:spLocks noGrp="1"/>
           </p:cNvSpPr>
           <p:nvPr>
-            <p:ph type="sldNum" idx="5" sz="quarter"/>
+            <p:ph type="sldNum" sz="quarter" idx="5"/>
           </p:nvPr>
         </p:nvSpPr>
         <p:spPr/>
@@ -1386,7 +1180,7 @@
 </file>
 
 <file path=ppt/notesSlides/notesSlide4.xml><?xml version="1.0" encoding="utf-8"?>
-<p:notes xmlns:a="http://schemas.openxmlformats.org/drawingml/2006/main" xmlns:p="http://schemas.openxmlformats.org/presentationml/2006/main" xmlns:r="http://schemas.openxmlformats.org/officeDocument/2006/relationships">
+<p:notes xmlns:a="http://schemas.openxmlformats.org/drawingml/2006/main" xmlns:r="http://schemas.openxmlformats.org/officeDocument/2006/relationships" xmlns:p="http://schemas.openxmlformats.org/presentationml/2006/main">
   <p:cSld>
     <p:spTree>
       <p:nvGrpSpPr>
@@ -1406,7 +1200,7 @@
         <p:nvSpPr>
           <p:cNvPr id="2" name="Slide Image Placeholder 1"/>
           <p:cNvSpPr>
-            <a:spLocks noGrp="1"/>
+            <a:spLocks noGrp="1" noRot="1" noChangeAspect="1"/>
           </p:cNvSpPr>
           <p:nvPr>
             <p:ph type="sldImg" idx="2"/>
@@ -1421,7 +1215,7 @@
             <a:spLocks noGrp="1"/>
           </p:cNvSpPr>
           <p:nvPr>
-            <p:ph type="body" idx="3" sz="quarter"/>
+            <p:ph type="body" sz="quarter" idx="3"/>
           </p:nvPr>
         </p:nvSpPr>
         <p:spPr/>
@@ -1442,7 +1236,7 @@
             <a:spLocks noGrp="1"/>
           </p:cNvSpPr>
           <p:nvPr>
-            <p:ph type="sldNum" idx="5" sz="quarter"/>
+            <p:ph type="sldNum" sz="quarter" idx="5"/>
           </p:nvPr>
         </p:nvSpPr>
         <p:spPr/>
@@ -1456,7 +1250,7 @@
 </file>
 
 <file path=ppt/notesSlides/notesSlide5.xml><?xml version="1.0" encoding="utf-8"?>
-<p:notes xmlns:a="http://schemas.openxmlformats.org/drawingml/2006/main" xmlns:p="http://schemas.openxmlformats.org/presentationml/2006/main" xmlns:r="http://schemas.openxmlformats.org/officeDocument/2006/relationships">
+<p:notes xmlns:a="http://schemas.openxmlformats.org/drawingml/2006/main" xmlns:r="http://schemas.openxmlformats.org/officeDocument/2006/relationships" xmlns:p="http://schemas.openxmlformats.org/presentationml/2006/main">
   <p:cSld>
     <p:spTree>
       <p:nvGrpSpPr>
@@ -1476,7 +1270,7 @@
         <p:nvSpPr>
           <p:cNvPr id="2" name="Slide Image Placeholder 1"/>
           <p:cNvSpPr>
-            <a:spLocks noGrp="1"/>
+            <a:spLocks noGrp="1" noRot="1" noChangeAspect="1"/>
           </p:cNvSpPr>
           <p:nvPr>
             <p:ph type="sldImg" idx="2"/>
@@ -1491,7 +1285,7 @@
             <a:spLocks noGrp="1"/>
           </p:cNvSpPr>
           <p:nvPr>
-            <p:ph type="body" idx="3" sz="quarter"/>
+            <p:ph type="body" sz="quarter" idx="3"/>
           </p:nvPr>
         </p:nvSpPr>
         <p:spPr/>
@@ -1512,7 +1306,7 @@
             <a:spLocks noGrp="1"/>
           </p:cNvSpPr>
           <p:nvPr>
-            <p:ph type="sldNum" idx="5" sz="quarter"/>
+            <p:ph type="sldNum" sz="quarter" idx="5"/>
           </p:nvPr>
         </p:nvSpPr>
         <p:spPr/>
@@ -1526,7 +1320,7 @@
 </file>
 
 <file path=ppt/notesSlides/notesSlide6.xml><?xml version="1.0" encoding="utf-8"?>
-<p:notes xmlns:a="http://schemas.openxmlformats.org/drawingml/2006/main" xmlns:p="http://schemas.openxmlformats.org/presentationml/2006/main" xmlns:r="http://schemas.openxmlformats.org/officeDocument/2006/relationships">
+<p:notes xmlns:a="http://schemas.openxmlformats.org/drawingml/2006/main" xmlns:r="http://schemas.openxmlformats.org/officeDocument/2006/relationships" xmlns:p="http://schemas.openxmlformats.org/presentationml/2006/main">
   <p:cSld>
     <p:spTree>
       <p:nvGrpSpPr>
@@ -1546,7 +1340,7 @@
         <p:nvSpPr>
           <p:cNvPr id="2" name="Slide Image Placeholder 1"/>
           <p:cNvSpPr>
-            <a:spLocks noGrp="1"/>
+            <a:spLocks noGrp="1" noRot="1" noChangeAspect="1"/>
           </p:cNvSpPr>
           <p:nvPr>
             <p:ph type="sldImg" idx="2"/>
@@ -1561,7 +1355,7 @@
             <a:spLocks noGrp="1"/>
           </p:cNvSpPr>
           <p:nvPr>
-            <p:ph type="body" idx="3" sz="quarter"/>
+            <p:ph type="body" sz="quarter" idx="3"/>
           </p:nvPr>
         </p:nvSpPr>
         <p:spPr/>
@@ -1582,7 +1376,7 @@
             <a:spLocks noGrp="1"/>
           </p:cNvSpPr>
           <p:nvPr>
-            <p:ph type="sldNum" idx="5" sz="quarter"/>
+            <p:ph type="sldNum" sz="quarter" idx="5"/>
           </p:nvPr>
         </p:nvSpPr>
         <p:spPr/>
@@ -1596,7 +1390,7 @@
 </file>
 
 <file path=ppt/notesSlides/notesSlide7.xml><?xml version="1.0" encoding="utf-8"?>
-<p:notes xmlns:a="http://schemas.openxmlformats.org/drawingml/2006/main" xmlns:p="http://schemas.openxmlformats.org/presentationml/2006/main" xmlns:r="http://schemas.openxmlformats.org/officeDocument/2006/relationships">
+<p:notes xmlns:a="http://schemas.openxmlformats.org/drawingml/2006/main" xmlns:r="http://schemas.openxmlformats.org/officeDocument/2006/relationships" xmlns:p="http://schemas.openxmlformats.org/presentationml/2006/main">
   <p:cSld>
     <p:spTree>
       <p:nvGrpSpPr>
@@ -1616,7 +1410,7 @@
         <p:nvSpPr>
           <p:cNvPr id="2" name="Slide Image Placeholder 1"/>
           <p:cNvSpPr>
-            <a:spLocks noGrp="1"/>
+            <a:spLocks noGrp="1" noRot="1" noChangeAspect="1"/>
           </p:cNvSpPr>
           <p:nvPr>
             <p:ph type="sldImg" idx="2"/>
@@ -1631,7 +1425,7 @@
             <a:spLocks noGrp="1"/>
           </p:cNvSpPr>
           <p:nvPr>
-            <p:ph type="body" idx="3" sz="quarter"/>
+            <p:ph type="body" sz="quarter" idx="3"/>
           </p:nvPr>
         </p:nvSpPr>
         <p:spPr/>
@@ -1652,7 +1446,7 @@
             <a:spLocks noGrp="1"/>
           </p:cNvSpPr>
           <p:nvPr>
-            <p:ph type="sldNum" idx="5" sz="quarter"/>
+            <p:ph type="sldNum" sz="quarter" idx="5"/>
           </p:nvPr>
         </p:nvSpPr>
         <p:spPr/>
@@ -1666,7 +1460,7 @@
 </file>
 
 <file path=ppt/notesSlides/notesSlide8.xml><?xml version="1.0" encoding="utf-8"?>
-<p:notes xmlns:a="http://schemas.openxmlformats.org/drawingml/2006/main" xmlns:p="http://schemas.openxmlformats.org/presentationml/2006/main" xmlns:r="http://schemas.openxmlformats.org/officeDocument/2006/relationships">
+<p:notes xmlns:a="http://schemas.openxmlformats.org/drawingml/2006/main" xmlns:r="http://schemas.openxmlformats.org/officeDocument/2006/relationships" xmlns:p="http://schemas.openxmlformats.org/presentationml/2006/main">
   <p:cSld>
     <p:spTree>
       <p:nvGrpSpPr>
@@ -1686,7 +1480,7 @@
         <p:nvSpPr>
           <p:cNvPr id="2" name="Slide Image Placeholder 1"/>
           <p:cNvSpPr>
-            <a:spLocks noGrp="1"/>
+            <a:spLocks noGrp="1" noRot="1" noChangeAspect="1"/>
           </p:cNvSpPr>
           <p:nvPr>
             <p:ph type="sldImg" idx="2"/>
@@ -1701,7 +1495,7 @@
             <a:spLocks noGrp="1"/>
           </p:cNvSpPr>
           <p:nvPr>
-            <p:ph type="body" idx="3" sz="quarter"/>
+            <p:ph type="body" sz="quarter" idx="3"/>
           </p:nvPr>
         </p:nvSpPr>
         <p:spPr/>
@@ -1722,7 +1516,7 @@
             <a:spLocks noGrp="1"/>
           </p:cNvSpPr>
           <p:nvPr>
-            <p:ph type="sldNum" idx="5" sz="quarter"/>
+            <p:ph type="sldNum" sz="quarter" idx="5"/>
           </p:nvPr>
         </p:nvSpPr>
         <p:spPr/>
@@ -1736,7 +1530,7 @@
 </file>
 
 <file path=ppt/notesSlides/notesSlide9.xml><?xml version="1.0" encoding="utf-8"?>
-<p:notes xmlns:a="http://schemas.openxmlformats.org/drawingml/2006/main" xmlns:p="http://schemas.openxmlformats.org/presentationml/2006/main" xmlns:r="http://schemas.openxmlformats.org/officeDocument/2006/relationships">
+<p:notes xmlns:a="http://schemas.openxmlformats.org/drawingml/2006/main" xmlns:r="http://schemas.openxmlformats.org/officeDocument/2006/relationships" xmlns:p="http://schemas.openxmlformats.org/presentationml/2006/main">
   <p:cSld>
     <p:spTree>
       <p:nvGrpSpPr>
@@ -1756,7 +1550,7 @@
         <p:nvSpPr>
           <p:cNvPr id="2" name="Slide Image Placeholder 1"/>
           <p:cNvSpPr>
-            <a:spLocks noGrp="1"/>
+            <a:spLocks noGrp="1" noRot="1" noChangeAspect="1"/>
           </p:cNvSpPr>
           <p:nvPr>
             <p:ph type="sldImg" idx="2"/>
@@ -1771,7 +1565,7 @@
             <a:spLocks noGrp="1"/>
           </p:cNvSpPr>
           <p:nvPr>
-            <p:ph type="body" idx="3" sz="quarter"/>
+            <p:ph type="body" sz="quarter" idx="3"/>
           </p:nvPr>
         </p:nvSpPr>
         <p:spPr/>
@@ -1792,7 +1586,7 @@
             <a:spLocks noGrp="1"/>
           </p:cNvSpPr>
           <p:nvPr>
-            <p:ph type="sldNum" idx="5" sz="quarter"/>
+            <p:ph type="sldNum" sz="quarter" idx="5"/>
           </p:nvPr>
         </p:nvSpPr>
         <p:spPr/>
@@ -1843,10 +1637,9 @@
           <a:lstStyle/>
           <a:p>
             <a:r>
-              <a:rPr lang="en-US" smtClean="0"/>
+              <a:rPr lang="en-US"/>
               <a:t>Click to edit Master title style</a:t>
             </a:r>
-            <a:endParaRPr lang="en-US"/>
           </a:p>
         </p:txBody>
       </p:sp>
@@ -1962,10 +1755,9 @@
           </a:lstStyle>
           <a:p>
             <a:r>
-              <a:rPr lang="en-US" smtClean="0"/>
+              <a:rPr lang="en-US"/>
               <a:t>Click to edit Master subtitle style</a:t>
             </a:r>
-            <a:endParaRPr lang="en-US"/>
           </a:p>
         </p:txBody>
       </p:sp>
@@ -1986,7 +1778,7 @@
           <a:p>
             <a:fld id="{5BCAD085-E8A6-8845-BD4E-CB4CCA059FC4}" type="datetimeFigureOut">
               <a:rPr lang="en-US" smtClean="0"/>
-              <a:t>1/27/13</a:t>
+              <a:t>5/12/2026</a:t>
             </a:fld>
             <a:endParaRPr lang="en-US"/>
           </a:p>
@@ -2080,10 +1872,9 @@
           <a:lstStyle/>
           <a:p>
             <a:r>
-              <a:rPr lang="en-US" smtClean="0"/>
+              <a:rPr lang="en-US"/>
               <a:t>Click to edit Master title style</a:t>
             </a:r>
-            <a:endParaRPr lang="en-US"/>
           </a:p>
         </p:txBody>
       </p:sp>
@@ -2104,38 +1895,37 @@
           <a:p>
             <a:pPr lvl="0"/>
             <a:r>
-              <a:rPr lang="en-US" smtClean="0"/>
+              <a:rPr lang="en-US"/>
               <a:t>Click to edit Master text styles</a:t>
             </a:r>
           </a:p>
           <a:p>
             <a:pPr lvl="1"/>
             <a:r>
-              <a:rPr lang="en-US" smtClean="0"/>
+              <a:rPr lang="en-US"/>
               <a:t>Second level</a:t>
             </a:r>
           </a:p>
           <a:p>
             <a:pPr lvl="2"/>
             <a:r>
-              <a:rPr lang="en-US" smtClean="0"/>
+              <a:rPr lang="en-US"/>
               <a:t>Third level</a:t>
             </a:r>
           </a:p>
           <a:p>
             <a:pPr lvl="3"/>
             <a:r>
-              <a:rPr lang="en-US" smtClean="0"/>
+              <a:rPr lang="en-US"/>
               <a:t>Fourth level</a:t>
             </a:r>
           </a:p>
           <a:p>
             <a:pPr lvl="4"/>
             <a:r>
-              <a:rPr lang="en-US" smtClean="0"/>
+              <a:rPr lang="en-US"/>
               <a:t>Fifth level</a:t>
             </a:r>
-            <a:endParaRPr lang="en-US"/>
           </a:p>
         </p:txBody>
       </p:sp>
@@ -2156,7 +1946,7 @@
           <a:p>
             <a:fld id="{5BCAD085-E8A6-8845-BD4E-CB4CCA059FC4}" type="datetimeFigureOut">
               <a:rPr lang="en-US" smtClean="0"/>
-              <a:t>1/27/13</a:t>
+              <a:t>5/12/2026</a:t>
             </a:fld>
             <a:endParaRPr lang="en-US"/>
           </a:p>
@@ -2255,10 +2045,9 @@
           <a:lstStyle/>
           <a:p>
             <a:r>
-              <a:rPr lang="en-US" smtClean="0"/>
+              <a:rPr lang="en-US"/>
               <a:t>Click to edit Master title style</a:t>
             </a:r>
-            <a:endParaRPr lang="en-US"/>
           </a:p>
         </p:txBody>
       </p:sp>
@@ -2284,38 +2073,37 @@
           <a:p>
             <a:pPr lvl="0"/>
             <a:r>
-              <a:rPr lang="en-US" smtClean="0"/>
+              <a:rPr lang="en-US"/>
               <a:t>Click to edit Master text styles</a:t>
             </a:r>
           </a:p>
           <a:p>
             <a:pPr lvl="1"/>
             <a:r>
-              <a:rPr lang="en-US" smtClean="0"/>
+              <a:rPr lang="en-US"/>
               <a:t>Second level</a:t>
             </a:r>
           </a:p>
           <a:p>
             <a:pPr lvl="2"/>
             <a:r>
-              <a:rPr lang="en-US" smtClean="0"/>
+              <a:rPr lang="en-US"/>
               <a:t>Third level</a:t>
             </a:r>
           </a:p>
           <a:p>
             <a:pPr lvl="3"/>
             <a:r>
-              <a:rPr lang="en-US" smtClean="0"/>
+              <a:rPr lang="en-US"/>
               <a:t>Fourth level</a:t>
             </a:r>
           </a:p>
           <a:p>
             <a:pPr lvl="4"/>
             <a:r>
-              <a:rPr lang="en-US" smtClean="0"/>
+              <a:rPr lang="en-US"/>
               <a:t>Fifth level</a:t>
             </a:r>
-            <a:endParaRPr lang="en-US"/>
           </a:p>
         </p:txBody>
       </p:sp>
@@ -2336,7 +2124,7 @@
           <a:p>
             <a:fld id="{5BCAD085-E8A6-8845-BD4E-CB4CCA059FC4}" type="datetimeFigureOut">
               <a:rPr lang="en-US" smtClean="0"/>
-              <a:t>1/27/13</a:t>
+              <a:t>5/12/2026</a:t>
             </a:fld>
             <a:endParaRPr lang="en-US"/>
           </a:p>
@@ -2430,10 +2218,9 @@
           <a:lstStyle/>
           <a:p>
             <a:r>
-              <a:rPr lang="en-US" smtClean="0"/>
+              <a:rPr lang="en-US"/>
               <a:t>Click to edit Master title style</a:t>
             </a:r>
-            <a:endParaRPr lang="en-US"/>
           </a:p>
         </p:txBody>
       </p:sp>
@@ -2454,38 +2241,37 @@
           <a:p>
             <a:pPr lvl="0"/>
             <a:r>
-              <a:rPr lang="en-US" smtClean="0"/>
+              <a:rPr lang="en-US"/>
               <a:t>Click to edit Master text styles</a:t>
             </a:r>
           </a:p>
           <a:p>
             <a:pPr lvl="1"/>
             <a:r>
-              <a:rPr lang="en-US" smtClean="0"/>
+              <a:rPr lang="en-US"/>
               <a:t>Second level</a:t>
             </a:r>
           </a:p>
           <a:p>
             <a:pPr lvl="2"/>
             <a:r>
-              <a:rPr lang="en-US" smtClean="0"/>
+              <a:rPr lang="en-US"/>
               <a:t>Third level</a:t>
             </a:r>
           </a:p>
           <a:p>
             <a:pPr lvl="3"/>
             <a:r>
-              <a:rPr lang="en-US" smtClean="0"/>
+              <a:rPr lang="en-US"/>
               <a:t>Fourth level</a:t>
             </a:r>
           </a:p>
           <a:p>
             <a:pPr lvl="4"/>
             <a:r>
-              <a:rPr lang="en-US" smtClean="0"/>
+              <a:rPr lang="en-US"/>
               <a:t>Fifth level</a:t>
             </a:r>
-            <a:endParaRPr lang="en-US"/>
           </a:p>
         </p:txBody>
       </p:sp>
@@ -2506,7 +2292,7 @@
           <a:p>
             <a:fld id="{5BCAD085-E8A6-8845-BD4E-CB4CCA059FC4}" type="datetimeFigureOut">
               <a:rPr lang="en-US" smtClean="0"/>
-              <a:t>1/27/13</a:t>
+              <a:t>5/12/2026</a:t>
             </a:fld>
             <a:endParaRPr lang="en-US"/>
           </a:p>
@@ -2609,10 +2395,9 @@
           </a:lstStyle>
           <a:p>
             <a:r>
-              <a:rPr lang="en-US" smtClean="0"/>
+              <a:rPr lang="en-US"/>
               <a:t>Click to edit Master title style</a:t>
             </a:r>
-            <a:endParaRPr lang="en-US"/>
           </a:p>
         </p:txBody>
       </p:sp>
@@ -2729,7 +2514,7 @@
           <a:p>
             <a:pPr lvl="0"/>
             <a:r>
-              <a:rPr lang="en-US" smtClean="0"/>
+              <a:rPr lang="en-US"/>
               <a:t>Click to edit Master text styles</a:t>
             </a:r>
           </a:p>
@@ -2752,7 +2537,7 @@
           <a:p>
             <a:fld id="{5BCAD085-E8A6-8845-BD4E-CB4CCA059FC4}" type="datetimeFigureOut">
               <a:rPr lang="en-US" smtClean="0"/>
-              <a:t>1/27/13</a:t>
+              <a:t>5/12/2026</a:t>
             </a:fld>
             <a:endParaRPr lang="en-US"/>
           </a:p>
@@ -2846,10 +2631,9 @@
           <a:lstStyle/>
           <a:p>
             <a:r>
-              <a:rPr lang="en-US" smtClean="0"/>
+              <a:rPr lang="en-US"/>
               <a:t>Click to edit Master title style</a:t>
             </a:r>
-            <a:endParaRPr lang="en-US"/>
           </a:p>
         </p:txBody>
       </p:sp>
@@ -2903,38 +2687,37 @@
           <a:p>
             <a:pPr lvl="0"/>
             <a:r>
-              <a:rPr lang="en-US" smtClean="0"/>
+              <a:rPr lang="en-US"/>
               <a:t>Click to edit Master text styles</a:t>
             </a:r>
           </a:p>
           <a:p>
             <a:pPr lvl="1"/>
             <a:r>
-              <a:rPr lang="en-US" smtClean="0"/>
+              <a:rPr lang="en-US"/>
               <a:t>Second level</a:t>
             </a:r>
           </a:p>
           <a:p>
             <a:pPr lvl="2"/>
             <a:r>
-              <a:rPr lang="en-US" smtClean="0"/>
+              <a:rPr lang="en-US"/>
               <a:t>Third level</a:t>
             </a:r>
           </a:p>
           <a:p>
             <a:pPr lvl="3"/>
             <a:r>
-              <a:rPr lang="en-US" smtClean="0"/>
+              <a:rPr lang="en-US"/>
               <a:t>Fourth level</a:t>
             </a:r>
           </a:p>
           <a:p>
             <a:pPr lvl="4"/>
             <a:r>
-              <a:rPr lang="en-US" smtClean="0"/>
+              <a:rPr lang="en-US"/>
               <a:t>Fifth level</a:t>
             </a:r>
-            <a:endParaRPr lang="en-US"/>
           </a:p>
         </p:txBody>
       </p:sp>
@@ -2988,38 +2771,37 @@
           <a:p>
             <a:pPr lvl="0"/>
             <a:r>
-              <a:rPr lang="en-US" smtClean="0"/>
+              <a:rPr lang="en-US"/>
               <a:t>Click to edit Master text styles</a:t>
             </a:r>
           </a:p>
           <a:p>
             <a:pPr lvl="1"/>
             <a:r>
-              <a:rPr lang="en-US" smtClean="0"/>
+              <a:rPr lang="en-US"/>
               <a:t>Second level</a:t>
             </a:r>
           </a:p>
           <a:p>
             <a:pPr lvl="2"/>
             <a:r>
-              <a:rPr lang="en-US" smtClean="0"/>
+              <a:rPr lang="en-US"/>
               <a:t>Third level</a:t>
             </a:r>
           </a:p>
           <a:p>
             <a:pPr lvl="3"/>
             <a:r>
-              <a:rPr lang="en-US" smtClean="0"/>
+              <a:rPr lang="en-US"/>
               <a:t>Fourth level</a:t>
             </a:r>
           </a:p>
           <a:p>
             <a:pPr lvl="4"/>
             <a:r>
-              <a:rPr lang="en-US" smtClean="0"/>
+              <a:rPr lang="en-US"/>
               <a:t>Fifth level</a:t>
             </a:r>
-            <a:endParaRPr lang="en-US"/>
           </a:p>
         </p:txBody>
       </p:sp>
@@ -3040,7 +2822,7 @@
           <a:p>
             <a:fld id="{5BCAD085-E8A6-8845-BD4E-CB4CCA059FC4}" type="datetimeFigureOut">
               <a:rPr lang="en-US" smtClean="0"/>
-              <a:t>1/27/13</a:t>
+              <a:t>5/12/2026</a:t>
             </a:fld>
             <a:endParaRPr lang="en-US"/>
           </a:p>
@@ -3138,10 +2920,9 @@
           </a:lstStyle>
           <a:p>
             <a:r>
-              <a:rPr lang="en-US" smtClean="0"/>
+              <a:rPr lang="en-US"/>
               <a:t>Click to edit Master title style</a:t>
             </a:r>
-            <a:endParaRPr lang="en-US"/>
           </a:p>
         </p:txBody>
       </p:sp>
@@ -3204,7 +2985,7 @@
           <a:p>
             <a:pPr lvl="0"/>
             <a:r>
-              <a:rPr lang="en-US" smtClean="0"/>
+              <a:rPr lang="en-US"/>
               <a:t>Click to edit Master text styles</a:t>
             </a:r>
           </a:p>
@@ -3260,38 +3041,37 @@
           <a:p>
             <a:pPr lvl="0"/>
             <a:r>
-              <a:rPr lang="en-US" smtClean="0"/>
+              <a:rPr lang="en-US"/>
               <a:t>Click to edit Master text styles</a:t>
             </a:r>
           </a:p>
           <a:p>
             <a:pPr lvl="1"/>
             <a:r>
-              <a:rPr lang="en-US" smtClean="0"/>
+              <a:rPr lang="en-US"/>
               <a:t>Second level</a:t>
             </a:r>
           </a:p>
           <a:p>
             <a:pPr lvl="2"/>
             <a:r>
-              <a:rPr lang="en-US" smtClean="0"/>
+              <a:rPr lang="en-US"/>
               <a:t>Third level</a:t>
             </a:r>
           </a:p>
           <a:p>
             <a:pPr lvl="3"/>
             <a:r>
-              <a:rPr lang="en-US" smtClean="0"/>
+              <a:rPr lang="en-US"/>
               <a:t>Fourth level</a:t>
             </a:r>
           </a:p>
           <a:p>
             <a:pPr lvl="4"/>
             <a:r>
-              <a:rPr lang="en-US" smtClean="0"/>
+              <a:rPr lang="en-US"/>
               <a:t>Fifth level</a:t>
             </a:r>
-            <a:endParaRPr lang="en-US"/>
           </a:p>
         </p:txBody>
       </p:sp>
@@ -3354,7 +3134,7 @@
           <a:p>
             <a:pPr lvl="0"/>
             <a:r>
-              <a:rPr lang="en-US" smtClean="0"/>
+              <a:rPr lang="en-US"/>
               <a:t>Click to edit Master text styles</a:t>
             </a:r>
           </a:p>
@@ -3410,38 +3190,37 @@
           <a:p>
             <a:pPr lvl="0"/>
             <a:r>
-              <a:rPr lang="en-US" smtClean="0"/>
+              <a:rPr lang="en-US"/>
               <a:t>Click to edit Master text styles</a:t>
             </a:r>
           </a:p>
           <a:p>
             <a:pPr lvl="1"/>
             <a:r>
-              <a:rPr lang="en-US" smtClean="0"/>
+              <a:rPr lang="en-US"/>
               <a:t>Second level</a:t>
             </a:r>
           </a:p>
           <a:p>
             <a:pPr lvl="2"/>
             <a:r>
-              <a:rPr lang="en-US" smtClean="0"/>
+              <a:rPr lang="en-US"/>
               <a:t>Third level</a:t>
             </a:r>
           </a:p>
           <a:p>
             <a:pPr lvl="3"/>
             <a:r>
-              <a:rPr lang="en-US" smtClean="0"/>
+              <a:rPr lang="en-US"/>
               <a:t>Fourth level</a:t>
             </a:r>
           </a:p>
           <a:p>
             <a:pPr lvl="4"/>
             <a:r>
-              <a:rPr lang="en-US" smtClean="0"/>
+              <a:rPr lang="en-US"/>
               <a:t>Fifth level</a:t>
             </a:r>
-            <a:endParaRPr lang="en-US"/>
           </a:p>
         </p:txBody>
       </p:sp>
@@ -3462,7 +3241,7 @@
           <a:p>
             <a:fld id="{5BCAD085-E8A6-8845-BD4E-CB4CCA059FC4}" type="datetimeFigureOut">
               <a:rPr lang="en-US" smtClean="0"/>
-              <a:t>1/27/13</a:t>
+              <a:t>5/12/2026</a:t>
             </a:fld>
             <a:endParaRPr lang="en-US"/>
           </a:p>
@@ -3556,10 +3335,9 @@
           <a:lstStyle/>
           <a:p>
             <a:r>
-              <a:rPr lang="en-US" smtClean="0"/>
+              <a:rPr lang="en-US"/>
               <a:t>Click to edit Master title style</a:t>
             </a:r>
-            <a:endParaRPr lang="en-US"/>
           </a:p>
         </p:txBody>
       </p:sp>
@@ -3580,7 +3358,7 @@
           <a:p>
             <a:fld id="{5BCAD085-E8A6-8845-BD4E-CB4CCA059FC4}" type="datetimeFigureOut">
               <a:rPr lang="en-US" smtClean="0"/>
-              <a:t>1/27/13</a:t>
+              <a:t>5/12/2026</a:t>
             </a:fld>
             <a:endParaRPr lang="en-US"/>
           </a:p>
@@ -3675,7 +3453,7 @@
           <a:p>
             <a:fld id="{5BCAD085-E8A6-8845-BD4E-CB4CCA059FC4}" type="datetimeFigureOut">
               <a:rPr lang="en-US" smtClean="0"/>
-              <a:t>1/27/13</a:t>
+              <a:t>5/12/2026</a:t>
             </a:fld>
             <a:endParaRPr lang="en-US"/>
           </a:p>
@@ -3778,10 +3556,9 @@
           </a:lstStyle>
           <a:p>
             <a:r>
-              <a:rPr lang="en-US" smtClean="0"/>
+              <a:rPr lang="en-US"/>
               <a:t>Click to edit Master title style</a:t>
             </a:r>
-            <a:endParaRPr lang="en-US"/>
           </a:p>
         </p:txBody>
       </p:sp>
@@ -3835,38 +3612,37 @@
           <a:p>
             <a:pPr lvl="0"/>
             <a:r>
-              <a:rPr lang="en-US" smtClean="0"/>
+              <a:rPr lang="en-US"/>
               <a:t>Click to edit Master text styles</a:t>
             </a:r>
           </a:p>
           <a:p>
             <a:pPr lvl="1"/>
             <a:r>
-              <a:rPr lang="en-US" smtClean="0"/>
+              <a:rPr lang="en-US"/>
               <a:t>Second level</a:t>
             </a:r>
           </a:p>
           <a:p>
             <a:pPr lvl="2"/>
             <a:r>
-              <a:rPr lang="en-US" smtClean="0"/>
+              <a:rPr lang="en-US"/>
               <a:t>Third level</a:t>
             </a:r>
           </a:p>
           <a:p>
             <a:pPr lvl="3"/>
             <a:r>
-              <a:rPr lang="en-US" smtClean="0"/>
+              <a:rPr lang="en-US"/>
               <a:t>Fourth level</a:t>
             </a:r>
           </a:p>
           <a:p>
             <a:pPr lvl="4"/>
             <a:r>
-              <a:rPr lang="en-US" smtClean="0"/>
+              <a:rPr lang="en-US"/>
               <a:t>Fifth level</a:t>
             </a:r>
-            <a:endParaRPr lang="en-US"/>
           </a:p>
         </p:txBody>
       </p:sp>
@@ -3929,7 +3705,7 @@
           <a:p>
             <a:pPr lvl="0"/>
             <a:r>
-              <a:rPr lang="en-US" smtClean="0"/>
+              <a:rPr lang="en-US"/>
               <a:t>Click to edit Master text styles</a:t>
             </a:r>
           </a:p>
@@ -3952,7 +3728,7 @@
           <a:p>
             <a:fld id="{5BCAD085-E8A6-8845-BD4E-CB4CCA059FC4}" type="datetimeFigureOut">
               <a:rPr lang="en-US" smtClean="0"/>
-              <a:t>1/27/13</a:t>
+              <a:t>5/12/2026</a:t>
             </a:fld>
             <a:endParaRPr lang="en-US"/>
           </a:p>
@@ -4055,10 +3831,9 @@
           </a:lstStyle>
           <a:p>
             <a:r>
-              <a:rPr lang="en-US" smtClean="0"/>
+              <a:rPr lang="en-US"/>
               <a:t>Click to edit Master title style</a:t>
             </a:r>
-            <a:endParaRPr lang="en-US"/>
           </a:p>
         </p:txBody>
       </p:sp>
@@ -4182,7 +3957,7 @@
           <a:p>
             <a:pPr lvl="0"/>
             <a:r>
-              <a:rPr lang="en-US" smtClean="0"/>
+              <a:rPr lang="en-US"/>
               <a:t>Click to edit Master text styles</a:t>
             </a:r>
           </a:p>
@@ -4205,7 +3980,7 @@
           <a:p>
             <a:fld id="{5BCAD085-E8A6-8845-BD4E-CB4CCA059FC4}" type="datetimeFigureOut">
               <a:rPr lang="en-US" smtClean="0"/>
-              <a:t>1/27/13</a:t>
+              <a:t>5/12/2026</a:t>
             </a:fld>
             <a:endParaRPr lang="en-US"/>
           </a:p>
@@ -4314,10 +4089,9 @@
           <a:lstStyle/>
           <a:p>
             <a:r>
-              <a:rPr lang="en-US" smtClean="0"/>
+              <a:rPr lang="en-US"/>
               <a:t>Click to edit Master title style</a:t>
             </a:r>
-            <a:endParaRPr lang="en-US"/>
           </a:p>
         </p:txBody>
       </p:sp>
@@ -4348,38 +4122,37 @@
           <a:p>
             <a:pPr lvl="0"/>
             <a:r>
-              <a:rPr lang="en-US" smtClean="0"/>
+              <a:rPr lang="en-US"/>
               <a:t>Click to edit Master text styles</a:t>
             </a:r>
           </a:p>
           <a:p>
             <a:pPr lvl="1"/>
             <a:r>
-              <a:rPr lang="en-US" smtClean="0"/>
+              <a:rPr lang="en-US"/>
               <a:t>Second level</a:t>
             </a:r>
           </a:p>
           <a:p>
             <a:pPr lvl="2"/>
             <a:r>
-              <a:rPr lang="en-US" smtClean="0"/>
+              <a:rPr lang="en-US"/>
               <a:t>Third level</a:t>
             </a:r>
           </a:p>
           <a:p>
             <a:pPr lvl="3"/>
             <a:r>
-              <a:rPr lang="en-US" smtClean="0"/>
+              <a:rPr lang="en-US"/>
               <a:t>Fourth level</a:t>
             </a:r>
           </a:p>
           <a:p>
             <a:pPr lvl="4"/>
             <a:r>
-              <a:rPr lang="en-US" smtClean="0"/>
+              <a:rPr lang="en-US"/>
               <a:t>Fifth level</a:t>
             </a:r>
-            <a:endParaRPr lang="en-US"/>
           </a:p>
         </p:txBody>
       </p:sp>
@@ -4418,7 +4191,7 @@
           <a:p>
             <a:fld id="{5BCAD085-E8A6-8845-BD4E-CB4CCA059FC4}" type="datetimeFigureOut">
               <a:rPr lang="en-US" smtClean="0"/>
-              <a:t>1/27/13</a:t>
+              <a:t>5/12/2026</a:t>
             </a:fld>
             <a:endParaRPr lang="en-US"/>
           </a:p>
@@ -4777,7 +4550,7 @@
 </file>
 
 <file path=ppt/slides/slide1.xml><?xml version="1.0" encoding="utf-8"?>
-<p:sld xmlns:a="http://schemas.openxmlformats.org/drawingml/2006/main" xmlns:p="http://schemas.openxmlformats.org/presentationml/2006/main" xmlns:r="http://schemas.openxmlformats.org/officeDocument/2006/relationships">
+<p:sld xmlns:a="http://schemas.openxmlformats.org/drawingml/2006/main" xmlns:r="http://schemas.openxmlformats.org/officeDocument/2006/relationships" xmlns:p="http://schemas.openxmlformats.org/presentationml/2006/main">
   <p:cSld>
     <p:spTree>
       <p:nvGrpSpPr>
@@ -4785,7 +4558,14 @@
         <p:cNvGrpSpPr/>
         <p:nvPr/>
       </p:nvGrpSpPr>
-      <p:grpSpPr/>
+      <p:grpSpPr>
+        <a:xfrm>
+          <a:off x="0" y="0"/>
+          <a:ext cx="0" cy="0"/>
+          <a:chOff x="0" y="0"/>
+          <a:chExt cx="0" cy="0"/>
+        </a:xfrm>
+      </p:grpSpPr>
       <p:sp>
         <p:nvSpPr>
           <p:cNvPr id="2" name="Rectangle 1"/>
@@ -4826,6 +4606,7 @@
           <a:lstStyle/>
           <a:p>
             <a:pPr algn="ctr"/>
+            <a:endParaRPr/>
           </a:p>
         </p:txBody>
       </p:sp>
@@ -4869,6 +4650,7 @@
           <a:lstStyle/>
           <a:p>
             <a:pPr algn="ctr"/>
+            <a:endParaRPr/>
           </a:p>
         </p:txBody>
       </p:sp>
@@ -5071,7 +4853,7 @@
 </file>
 
 <file path=ppt/slides/slide10.xml><?xml version="1.0" encoding="utf-8"?>
-<p:sld xmlns:a="http://schemas.openxmlformats.org/drawingml/2006/main" xmlns:p="http://schemas.openxmlformats.org/presentationml/2006/main" xmlns:r="http://schemas.openxmlformats.org/officeDocument/2006/relationships">
+<p:sld xmlns:a="http://schemas.openxmlformats.org/drawingml/2006/main" xmlns:r="http://schemas.openxmlformats.org/officeDocument/2006/relationships" xmlns:p="http://schemas.openxmlformats.org/presentationml/2006/main">
   <p:cSld>
     <p:spTree>
       <p:nvGrpSpPr>
@@ -5079,7 +4861,14 @@
         <p:cNvGrpSpPr/>
         <p:nvPr/>
       </p:nvGrpSpPr>
-      <p:grpSpPr/>
+      <p:grpSpPr>
+        <a:xfrm>
+          <a:off x="0" y="0"/>
+          <a:ext cx="0" cy="0"/>
+          <a:chOff x="0" y="0"/>
+          <a:chExt cx="0" cy="0"/>
+        </a:xfrm>
+      </p:grpSpPr>
       <p:sp>
         <p:nvSpPr>
           <p:cNvPr id="2" name="Rectangle 1"/>
@@ -5120,6 +4909,7 @@
           <a:lstStyle/>
           <a:p>
             <a:pPr algn="ctr"/>
+            <a:endParaRPr/>
           </a:p>
         </p:txBody>
       </p:sp>
@@ -5163,6 +4953,7 @@
           <a:lstStyle/>
           <a:p>
             <a:pPr algn="ctr"/>
+            <a:endParaRPr/>
           </a:p>
         </p:txBody>
       </p:sp>
@@ -5430,7 +5221,7 @@
 </file>
 
 <file path=ppt/slides/slide11.xml><?xml version="1.0" encoding="utf-8"?>
-<p:sld xmlns:a="http://schemas.openxmlformats.org/drawingml/2006/main" xmlns:p="http://schemas.openxmlformats.org/presentationml/2006/main" xmlns:r="http://schemas.openxmlformats.org/officeDocument/2006/relationships">
+<p:sld xmlns:a="http://schemas.openxmlformats.org/drawingml/2006/main" xmlns:r="http://schemas.openxmlformats.org/officeDocument/2006/relationships" xmlns:p="http://schemas.openxmlformats.org/presentationml/2006/main">
   <p:cSld>
     <p:spTree>
       <p:nvGrpSpPr>
@@ -5438,7 +5229,14 @@
         <p:cNvGrpSpPr/>
         <p:nvPr/>
       </p:nvGrpSpPr>
-      <p:grpSpPr/>
+      <p:grpSpPr>
+        <a:xfrm>
+          <a:off x="0" y="0"/>
+          <a:ext cx="0" cy="0"/>
+          <a:chOff x="0" y="0"/>
+          <a:chExt cx="0" cy="0"/>
+        </a:xfrm>
+      </p:grpSpPr>
       <p:sp>
         <p:nvSpPr>
           <p:cNvPr id="2" name="Rectangle 1"/>
@@ -5479,6 +5277,7 @@
           <a:lstStyle/>
           <a:p>
             <a:pPr algn="ctr"/>
+            <a:endParaRPr/>
           </a:p>
         </p:txBody>
       </p:sp>
@@ -5522,6 +5321,7 @@
           <a:lstStyle/>
           <a:p>
             <a:pPr algn="ctr"/>
+            <a:endParaRPr/>
           </a:p>
         </p:txBody>
       </p:sp>
@@ -5789,7 +5589,7 @@
 </file>
 
 <file path=ppt/slides/slide12.xml><?xml version="1.0" encoding="utf-8"?>
-<p:sld xmlns:a="http://schemas.openxmlformats.org/drawingml/2006/main" xmlns:p="http://schemas.openxmlformats.org/presentationml/2006/main" xmlns:r="http://schemas.openxmlformats.org/officeDocument/2006/relationships">
+<p:sld xmlns:a="http://schemas.openxmlformats.org/drawingml/2006/main" xmlns:r="http://schemas.openxmlformats.org/officeDocument/2006/relationships" xmlns:p="http://schemas.openxmlformats.org/presentationml/2006/main">
   <p:cSld>
     <p:spTree>
       <p:nvGrpSpPr>
@@ -5797,7 +5597,14 @@
         <p:cNvGrpSpPr/>
         <p:nvPr/>
       </p:nvGrpSpPr>
-      <p:grpSpPr/>
+      <p:grpSpPr>
+        <a:xfrm>
+          <a:off x="0" y="0"/>
+          <a:ext cx="0" cy="0"/>
+          <a:chOff x="0" y="0"/>
+          <a:chExt cx="0" cy="0"/>
+        </a:xfrm>
+      </p:grpSpPr>
       <p:sp>
         <p:nvSpPr>
           <p:cNvPr id="2" name="Rectangle 1"/>
@@ -5838,6 +5645,7 @@
           <a:lstStyle/>
           <a:p>
             <a:pPr algn="ctr"/>
+            <a:endParaRPr/>
           </a:p>
         </p:txBody>
       </p:sp>
@@ -5881,6 +5689,7 @@
           <a:lstStyle/>
           <a:p>
             <a:pPr algn="ctr"/>
+            <a:endParaRPr/>
           </a:p>
         </p:txBody>
       </p:sp>
@@ -5958,6 +5767,7 @@
           <a:lstStyle/>
           <a:p>
             <a:pPr algn="ctr"/>
+            <a:endParaRPr/>
           </a:p>
         </p:txBody>
       </p:sp>
@@ -6104,6 +5914,7 @@
           <a:lstStyle/>
           <a:p>
             <a:pPr algn="ctr"/>
+            <a:endParaRPr/>
           </a:p>
         </p:txBody>
       </p:sp>
@@ -6250,6 +6061,7 @@
           <a:lstStyle/>
           <a:p>
             <a:pPr algn="ctr"/>
+            <a:endParaRPr/>
           </a:p>
         </p:txBody>
       </p:sp>
@@ -6396,6 +6208,7 @@
           <a:lstStyle/>
           <a:p>
             <a:pPr algn="ctr"/>
+            <a:endParaRPr/>
           </a:p>
         </p:txBody>
       </p:sp>
@@ -6542,6 +6355,7 @@
           <a:lstStyle/>
           <a:p>
             <a:pPr algn="ctr"/>
+            <a:endParaRPr/>
           </a:p>
         </p:txBody>
       </p:sp>
@@ -6688,6 +6502,7 @@
           <a:lstStyle/>
           <a:p>
             <a:pPr algn="ctr"/>
+            <a:endParaRPr/>
           </a:p>
         </p:txBody>
       </p:sp>
@@ -6834,6 +6649,7 @@
           <a:lstStyle/>
           <a:p>
             <a:pPr algn="ctr"/>
+            <a:endParaRPr/>
           </a:p>
         </p:txBody>
       </p:sp>
@@ -6980,6 +6796,7 @@
           <a:lstStyle/>
           <a:p>
             <a:pPr algn="ctr"/>
+            <a:endParaRPr/>
           </a:p>
         </p:txBody>
       </p:sp>
@@ -7095,7 +6912,7 @@
 </file>
 
 <file path=ppt/slides/slide13.xml><?xml version="1.0" encoding="utf-8"?>
-<p:sld xmlns:a="http://schemas.openxmlformats.org/drawingml/2006/main" xmlns:p="http://schemas.openxmlformats.org/presentationml/2006/main" xmlns:r="http://schemas.openxmlformats.org/officeDocument/2006/relationships">
+<p:sld xmlns:a="http://schemas.openxmlformats.org/drawingml/2006/main" xmlns:r="http://schemas.openxmlformats.org/officeDocument/2006/relationships" xmlns:p="http://schemas.openxmlformats.org/presentationml/2006/main">
   <p:cSld>
     <p:spTree>
       <p:nvGrpSpPr>
@@ -7103,7 +6920,14 @@
         <p:cNvGrpSpPr/>
         <p:nvPr/>
       </p:nvGrpSpPr>
-      <p:grpSpPr/>
+      <p:grpSpPr>
+        <a:xfrm>
+          <a:off x="0" y="0"/>
+          <a:ext cx="0" cy="0"/>
+          <a:chOff x="0" y="0"/>
+          <a:chExt cx="0" cy="0"/>
+        </a:xfrm>
+      </p:grpSpPr>
       <p:sp>
         <p:nvSpPr>
           <p:cNvPr id="2" name="Rectangle 1"/>
@@ -7144,6 +6968,7 @@
           <a:lstStyle/>
           <a:p>
             <a:pPr algn="ctr"/>
+            <a:endParaRPr/>
           </a:p>
         </p:txBody>
       </p:sp>
@@ -7187,6 +7012,7 @@
           <a:lstStyle/>
           <a:p>
             <a:pPr algn="ctr"/>
+            <a:endParaRPr/>
           </a:p>
         </p:txBody>
       </p:sp>
@@ -7514,7 +7340,7 @@
 </file>
 
 <file path=ppt/slides/slide14.xml><?xml version="1.0" encoding="utf-8"?>
-<p:sld xmlns:a="http://schemas.openxmlformats.org/drawingml/2006/main" xmlns:p="http://schemas.openxmlformats.org/presentationml/2006/main" xmlns:r="http://schemas.openxmlformats.org/officeDocument/2006/relationships">
+<p:sld xmlns:a="http://schemas.openxmlformats.org/drawingml/2006/main" xmlns:r="http://schemas.openxmlformats.org/officeDocument/2006/relationships" xmlns:p="http://schemas.openxmlformats.org/presentationml/2006/main">
   <p:cSld>
     <p:spTree>
       <p:nvGrpSpPr>
@@ -7522,7 +7348,14 @@
         <p:cNvGrpSpPr/>
         <p:nvPr/>
       </p:nvGrpSpPr>
-      <p:grpSpPr/>
+      <p:grpSpPr>
+        <a:xfrm>
+          <a:off x="0" y="0"/>
+          <a:ext cx="0" cy="0"/>
+          <a:chOff x="0" y="0"/>
+          <a:chExt cx="0" cy="0"/>
+        </a:xfrm>
+      </p:grpSpPr>
       <p:sp>
         <p:nvSpPr>
           <p:cNvPr id="2" name="Rectangle 1"/>
@@ -7563,6 +7396,7 @@
           <a:lstStyle/>
           <a:p>
             <a:pPr algn="ctr"/>
+            <a:endParaRPr/>
           </a:p>
         </p:txBody>
       </p:sp>
@@ -7606,6 +7440,7 @@
           <a:lstStyle/>
           <a:p>
             <a:pPr algn="ctr"/>
+            <a:endParaRPr/>
           </a:p>
         </p:txBody>
       </p:sp>
@@ -7948,7 +7783,7 @@
 </file>
 
 <file path=ppt/slides/slide15.xml><?xml version="1.0" encoding="utf-8"?>
-<p:sld xmlns:a="http://schemas.openxmlformats.org/drawingml/2006/main" xmlns:p="http://schemas.openxmlformats.org/presentationml/2006/main" xmlns:r="http://schemas.openxmlformats.org/officeDocument/2006/relationships">
+<p:sld xmlns:a="http://schemas.openxmlformats.org/drawingml/2006/main" xmlns:r="http://schemas.openxmlformats.org/officeDocument/2006/relationships" xmlns:p="http://schemas.openxmlformats.org/presentationml/2006/main">
   <p:cSld>
     <p:spTree>
       <p:nvGrpSpPr>
@@ -7956,7 +7791,14 @@
         <p:cNvGrpSpPr/>
         <p:nvPr/>
       </p:nvGrpSpPr>
-      <p:grpSpPr/>
+      <p:grpSpPr>
+        <a:xfrm>
+          <a:off x="0" y="0"/>
+          <a:ext cx="0" cy="0"/>
+          <a:chOff x="0" y="0"/>
+          <a:chExt cx="0" cy="0"/>
+        </a:xfrm>
+      </p:grpSpPr>
       <p:sp>
         <p:nvSpPr>
           <p:cNvPr id="2" name="Rectangle 1"/>
@@ -7997,6 +7839,7 @@
           <a:lstStyle/>
           <a:p>
             <a:pPr algn="ctr"/>
+            <a:endParaRPr/>
           </a:p>
         </p:txBody>
       </p:sp>
@@ -8040,6 +7883,7 @@
           <a:lstStyle/>
           <a:p>
             <a:pPr algn="ctr"/>
+            <a:endParaRPr/>
           </a:p>
         </p:txBody>
       </p:sp>
@@ -8509,7 +8353,7 @@
 </file>
 
 <file path=ppt/slides/slide16.xml><?xml version="1.0" encoding="utf-8"?>
-<p:sld xmlns:a="http://schemas.openxmlformats.org/drawingml/2006/main" xmlns:p="http://schemas.openxmlformats.org/presentationml/2006/main" xmlns:r="http://schemas.openxmlformats.org/officeDocument/2006/relationships">
+<p:sld xmlns:a="http://schemas.openxmlformats.org/drawingml/2006/main" xmlns:r="http://schemas.openxmlformats.org/officeDocument/2006/relationships" xmlns:p="http://schemas.openxmlformats.org/presentationml/2006/main">
   <p:cSld>
     <p:spTree>
       <p:nvGrpSpPr>
@@ -8517,7 +8361,14 @@
         <p:cNvGrpSpPr/>
         <p:nvPr/>
       </p:nvGrpSpPr>
-      <p:grpSpPr/>
+      <p:grpSpPr>
+        <a:xfrm>
+          <a:off x="0" y="0"/>
+          <a:ext cx="0" cy="0"/>
+          <a:chOff x="0" y="0"/>
+          <a:chExt cx="0" cy="0"/>
+        </a:xfrm>
+      </p:grpSpPr>
       <p:sp>
         <p:nvSpPr>
           <p:cNvPr id="2" name="Rectangle 1"/>
@@ -8558,6 +8409,7 @@
           <a:lstStyle/>
           <a:p>
             <a:pPr algn="ctr"/>
+            <a:endParaRPr/>
           </a:p>
         </p:txBody>
       </p:sp>
@@ -8601,6 +8453,7 @@
           <a:lstStyle/>
           <a:p>
             <a:pPr algn="ctr"/>
+            <a:endParaRPr/>
           </a:p>
         </p:txBody>
       </p:sp>
@@ -8899,7 +8752,7 @@
 </file>
 
 <file path=ppt/slides/slide17.xml><?xml version="1.0" encoding="utf-8"?>
-<p:sld xmlns:a="http://schemas.openxmlformats.org/drawingml/2006/main" xmlns:p="http://schemas.openxmlformats.org/presentationml/2006/main" xmlns:r="http://schemas.openxmlformats.org/officeDocument/2006/relationships">
+<p:sld xmlns:a="http://schemas.openxmlformats.org/drawingml/2006/main" xmlns:r="http://schemas.openxmlformats.org/officeDocument/2006/relationships" xmlns:p="http://schemas.openxmlformats.org/presentationml/2006/main">
   <p:cSld>
     <p:spTree>
       <p:nvGrpSpPr>
@@ -8907,7 +8760,14 @@
         <p:cNvGrpSpPr/>
         <p:nvPr/>
       </p:nvGrpSpPr>
-      <p:grpSpPr/>
+      <p:grpSpPr>
+        <a:xfrm>
+          <a:off x="0" y="0"/>
+          <a:ext cx="0" cy="0"/>
+          <a:chOff x="0" y="0"/>
+          <a:chExt cx="0" cy="0"/>
+        </a:xfrm>
+      </p:grpSpPr>
       <p:sp>
         <p:nvSpPr>
           <p:cNvPr id="2" name="Rectangle 1"/>
@@ -8948,6 +8808,7 @@
           <a:lstStyle/>
           <a:p>
             <a:pPr algn="ctr"/>
+            <a:endParaRPr/>
           </a:p>
         </p:txBody>
       </p:sp>
@@ -8991,6 +8852,7 @@
           <a:lstStyle/>
           <a:p>
             <a:pPr algn="ctr"/>
+            <a:endParaRPr/>
           </a:p>
         </p:txBody>
       </p:sp>
@@ -9129,7 +8991,7 @@
 </file>
 
 <file path=ppt/slides/slide18.xml><?xml version="1.0" encoding="utf-8"?>
-<p:sld xmlns:a="http://schemas.openxmlformats.org/drawingml/2006/main" xmlns:p="http://schemas.openxmlformats.org/presentationml/2006/main" xmlns:r="http://schemas.openxmlformats.org/officeDocument/2006/relationships">
+<p:sld xmlns:a="http://schemas.openxmlformats.org/drawingml/2006/main" xmlns:r="http://schemas.openxmlformats.org/officeDocument/2006/relationships" xmlns:p="http://schemas.openxmlformats.org/presentationml/2006/main">
   <p:cSld>
     <p:spTree>
       <p:nvGrpSpPr>
@@ -9137,7 +8999,14 @@
         <p:cNvGrpSpPr/>
         <p:nvPr/>
       </p:nvGrpSpPr>
-      <p:grpSpPr/>
+      <p:grpSpPr>
+        <a:xfrm>
+          <a:off x="0" y="0"/>
+          <a:ext cx="0" cy="0"/>
+          <a:chOff x="0" y="0"/>
+          <a:chExt cx="0" cy="0"/>
+        </a:xfrm>
+      </p:grpSpPr>
       <p:sp>
         <p:nvSpPr>
           <p:cNvPr id="2" name="Rectangle 1"/>
@@ -9178,6 +9047,7 @@
           <a:lstStyle/>
           <a:p>
             <a:pPr algn="ctr"/>
+            <a:endParaRPr/>
           </a:p>
         </p:txBody>
       </p:sp>
@@ -9221,6 +9091,7 @@
           <a:lstStyle/>
           <a:p>
             <a:pPr algn="ctr"/>
+            <a:endParaRPr/>
           </a:p>
         </p:txBody>
       </p:sp>
@@ -9580,7 +9451,7 @@
 </file>
 
 <file path=ppt/slides/slide19.xml><?xml version="1.0" encoding="utf-8"?>
-<p:sld xmlns:a="http://schemas.openxmlformats.org/drawingml/2006/main" xmlns:p="http://schemas.openxmlformats.org/presentationml/2006/main" xmlns:r="http://schemas.openxmlformats.org/officeDocument/2006/relationships">
+<p:sld xmlns:a="http://schemas.openxmlformats.org/drawingml/2006/main" xmlns:r="http://schemas.openxmlformats.org/officeDocument/2006/relationships" xmlns:p="http://schemas.openxmlformats.org/presentationml/2006/main">
   <p:cSld>
     <p:spTree>
       <p:nvGrpSpPr>
@@ -9588,7 +9459,14 @@
         <p:cNvGrpSpPr/>
         <p:nvPr/>
       </p:nvGrpSpPr>
-      <p:grpSpPr/>
+      <p:grpSpPr>
+        <a:xfrm>
+          <a:off x="0" y="0"/>
+          <a:ext cx="0" cy="0"/>
+          <a:chOff x="0" y="0"/>
+          <a:chExt cx="0" cy="0"/>
+        </a:xfrm>
+      </p:grpSpPr>
       <p:sp>
         <p:nvSpPr>
           <p:cNvPr id="2" name="Rectangle 1"/>
@@ -9629,6 +9507,7 @@
           <a:lstStyle/>
           <a:p>
             <a:pPr algn="ctr"/>
+            <a:endParaRPr/>
           </a:p>
         </p:txBody>
       </p:sp>
@@ -9672,6 +9551,7 @@
           <a:lstStyle/>
           <a:p>
             <a:pPr algn="ctr"/>
+            <a:endParaRPr/>
           </a:p>
         </p:txBody>
       </p:sp>
@@ -9823,7 +9703,7 @@
 </file>
 
 <file path=ppt/slides/slide2.xml><?xml version="1.0" encoding="utf-8"?>
-<p:sld xmlns:a="http://schemas.openxmlformats.org/drawingml/2006/main" xmlns:p="http://schemas.openxmlformats.org/presentationml/2006/main" xmlns:r="http://schemas.openxmlformats.org/officeDocument/2006/relationships">
+<p:sld xmlns:a="http://schemas.openxmlformats.org/drawingml/2006/main" xmlns:r="http://schemas.openxmlformats.org/officeDocument/2006/relationships" xmlns:p="http://schemas.openxmlformats.org/presentationml/2006/main">
   <p:cSld>
     <p:spTree>
       <p:nvGrpSpPr>
@@ -9831,7 +9711,14 @@
         <p:cNvGrpSpPr/>
         <p:nvPr/>
       </p:nvGrpSpPr>
-      <p:grpSpPr/>
+      <p:grpSpPr>
+        <a:xfrm>
+          <a:off x="0" y="0"/>
+          <a:ext cx="0" cy="0"/>
+          <a:chOff x="0" y="0"/>
+          <a:chExt cx="0" cy="0"/>
+        </a:xfrm>
+      </p:grpSpPr>
       <p:sp>
         <p:nvSpPr>
           <p:cNvPr id="2" name="Rectangle 1"/>
@@ -9872,6 +9759,7 @@
           <a:lstStyle/>
           <a:p>
             <a:pPr algn="ctr"/>
+            <a:endParaRPr/>
           </a:p>
         </p:txBody>
       </p:sp>
@@ -9915,6 +9803,7 @@
           <a:lstStyle/>
           <a:p>
             <a:pPr algn="ctr"/>
+            <a:endParaRPr/>
           </a:p>
         </p:txBody>
       </p:sp>
@@ -10153,7 +10042,7 @@
 </file>
 
 <file path=ppt/slides/slide3.xml><?xml version="1.0" encoding="utf-8"?>
-<p:sld xmlns:a="http://schemas.openxmlformats.org/drawingml/2006/main" xmlns:p="http://schemas.openxmlformats.org/presentationml/2006/main" xmlns:r="http://schemas.openxmlformats.org/officeDocument/2006/relationships">
+<p:sld xmlns:a="http://schemas.openxmlformats.org/drawingml/2006/main" xmlns:r="http://schemas.openxmlformats.org/officeDocument/2006/relationships" xmlns:p="http://schemas.openxmlformats.org/presentationml/2006/main">
   <p:cSld>
     <p:spTree>
       <p:nvGrpSpPr>
@@ -10161,7 +10050,14 @@
         <p:cNvGrpSpPr/>
         <p:nvPr/>
       </p:nvGrpSpPr>
-      <p:grpSpPr/>
+      <p:grpSpPr>
+        <a:xfrm>
+          <a:off x="0" y="0"/>
+          <a:ext cx="0" cy="0"/>
+          <a:chOff x="0" y="0"/>
+          <a:chExt cx="0" cy="0"/>
+        </a:xfrm>
+      </p:grpSpPr>
       <p:sp>
         <p:nvSpPr>
           <p:cNvPr id="2" name="Rectangle 1"/>
@@ -10202,6 +10098,7 @@
           <a:lstStyle/>
           <a:p>
             <a:pPr algn="ctr"/>
+            <a:endParaRPr/>
           </a:p>
         </p:txBody>
       </p:sp>
@@ -10245,6 +10142,7 @@
           <a:lstStyle/>
           <a:p>
             <a:pPr algn="ctr"/>
+            <a:endParaRPr/>
           </a:p>
         </p:txBody>
       </p:sp>
@@ -10521,7 +10419,7 @@
 </file>
 
 <file path=ppt/slides/slide4.xml><?xml version="1.0" encoding="utf-8"?>
-<p:sld xmlns:a="http://schemas.openxmlformats.org/drawingml/2006/main" xmlns:p="http://schemas.openxmlformats.org/presentationml/2006/main" xmlns:r="http://schemas.openxmlformats.org/officeDocument/2006/relationships">
+<p:sld xmlns:a="http://schemas.openxmlformats.org/drawingml/2006/main" xmlns:r="http://schemas.openxmlformats.org/officeDocument/2006/relationships" xmlns:p="http://schemas.openxmlformats.org/presentationml/2006/main">
   <p:cSld>
     <p:spTree>
       <p:nvGrpSpPr>
@@ -10529,7 +10427,14 @@
         <p:cNvGrpSpPr/>
         <p:nvPr/>
       </p:nvGrpSpPr>
-      <p:grpSpPr/>
+      <p:grpSpPr>
+        <a:xfrm>
+          <a:off x="0" y="0"/>
+          <a:ext cx="0" cy="0"/>
+          <a:chOff x="0" y="0"/>
+          <a:chExt cx="0" cy="0"/>
+        </a:xfrm>
+      </p:grpSpPr>
       <p:sp>
         <p:nvSpPr>
           <p:cNvPr id="2" name="Rectangle 1"/>
@@ -10570,6 +10475,7 @@
           <a:lstStyle/>
           <a:p>
             <a:pPr algn="ctr"/>
+            <a:endParaRPr/>
           </a:p>
         </p:txBody>
       </p:sp>
@@ -10613,6 +10519,7 @@
           <a:lstStyle/>
           <a:p>
             <a:pPr algn="ctr"/>
+            <a:endParaRPr/>
           </a:p>
         </p:txBody>
       </p:sp>
@@ -10666,8 +10573,8 @@
         </p:blipFill>
         <p:spPr>
           <a:xfrm>
-            <a:off x="457200" y="1097280"/>
-            <a:ext cx="11430000" cy="5064159"/>
+            <a:off x="457200" y="1034080"/>
+            <a:ext cx="11430000" cy="5201319"/>
           </a:xfrm>
           <a:prstGeom prst="rect">
             <a:avLst/>
@@ -10682,7 +10589,7 @@
         </p:nvSpPr>
         <p:spPr>
           <a:xfrm>
-            <a:off x="640080" y="4937760"/>
+            <a:off x="640080" y="6080760"/>
             <a:ext cx="10972800" cy="1371600"/>
           </a:xfrm>
           <a:prstGeom prst="rect">
@@ -10698,7 +10605,7 @@
           <a:p>
             <a:pPr algn="l"/>
             <a:r>
-              <a:rPr sz="1700" b="0" i="0">
+              <a:rPr sz="1700" b="0" i="0" dirty="0">
                 <a:solidFill>
                   <a:srgbClr val="1F2A44"/>
                 </a:solidFill>
@@ -10751,7 +10658,7 @@
 </file>
 
 <file path=ppt/slides/slide5.xml><?xml version="1.0" encoding="utf-8"?>
-<p:sld xmlns:a="http://schemas.openxmlformats.org/drawingml/2006/main" xmlns:p="http://schemas.openxmlformats.org/presentationml/2006/main" xmlns:r="http://schemas.openxmlformats.org/officeDocument/2006/relationships">
+<p:sld xmlns:a="http://schemas.openxmlformats.org/drawingml/2006/main" xmlns:r="http://schemas.openxmlformats.org/officeDocument/2006/relationships" xmlns:p="http://schemas.openxmlformats.org/presentationml/2006/main">
   <p:cSld>
     <p:spTree>
       <p:nvGrpSpPr>
@@ -10759,7 +10666,14 @@
         <p:cNvGrpSpPr/>
         <p:nvPr/>
       </p:nvGrpSpPr>
-      <p:grpSpPr/>
+      <p:grpSpPr>
+        <a:xfrm>
+          <a:off x="0" y="0"/>
+          <a:ext cx="0" cy="0"/>
+          <a:chOff x="0" y="0"/>
+          <a:chExt cx="0" cy="0"/>
+        </a:xfrm>
+      </p:grpSpPr>
       <p:sp>
         <p:nvSpPr>
           <p:cNvPr id="2" name="Rectangle 1"/>
@@ -10800,6 +10714,7 @@
           <a:lstStyle/>
           <a:p>
             <a:pPr algn="ctr"/>
+            <a:endParaRPr/>
           </a:p>
         </p:txBody>
       </p:sp>
@@ -10843,6 +10758,7 @@
           <a:lstStyle/>
           <a:p>
             <a:pPr algn="ctr"/>
+            <a:endParaRPr/>
           </a:p>
         </p:txBody>
       </p:sp>
@@ -10912,8 +10828,8 @@
         </p:nvSpPr>
         <p:spPr>
           <a:xfrm>
-            <a:off x="640080" y="5852160"/>
-            <a:ext cx="10972800" cy="822960"/>
+            <a:off x="518007" y="6336792"/>
+            <a:ext cx="11155680" cy="230832"/>
           </a:xfrm>
           <a:prstGeom prst="rect">
             <a:avLst/>
@@ -10928,12 +10844,60 @@
           <a:p>
             <a:pPr algn="l"/>
             <a:r>
-              <a:rPr sz="1500" b="0" i="0">
+              <a:rPr sz="1200" b="0" i="0" dirty="0">
                 <a:solidFill>
                   <a:srgbClr val="1F2A44"/>
                 </a:solidFill>
               </a:rPr>
-              <a:t>Spec requires &gt;= 2 distributed stages. This project has 3: S3 (cloud storage), EMR PySpark (distributed compute), FastAPI on EC2 + Streamlit Cloud (cloud serving).</a:t>
+              <a:t>Spec requires &gt;= 2 distributed stages. This project has 3: S3 (cloud storage), EMR </a:t>
+            </a:r>
+            <a:r>
+              <a:rPr sz="1200" b="0" i="0" dirty="0" err="1">
+                <a:solidFill>
+                  <a:srgbClr val="1F2A44"/>
+                </a:solidFill>
+              </a:rPr>
+              <a:t>PySpark</a:t>
+            </a:r>
+            <a:r>
+              <a:rPr sz="1200" b="0" i="0" dirty="0">
+                <a:solidFill>
+                  <a:srgbClr val="1F2A44"/>
+                </a:solidFill>
+              </a:rPr>
+              <a:t> (distributed compute), </a:t>
+            </a:r>
+            <a:r>
+              <a:rPr sz="1200" b="0" i="0" dirty="0" err="1">
+                <a:solidFill>
+                  <a:srgbClr val="1F2A44"/>
+                </a:solidFill>
+              </a:rPr>
+              <a:t>FastAPI</a:t>
+            </a:r>
+            <a:r>
+              <a:rPr sz="1200" b="0" i="0" dirty="0">
+                <a:solidFill>
+                  <a:srgbClr val="1F2A44"/>
+                </a:solidFill>
+              </a:rPr>
+              <a:t> on EC2 + </a:t>
+            </a:r>
+            <a:r>
+              <a:rPr sz="1200" b="0" i="0" dirty="0" err="1">
+                <a:solidFill>
+                  <a:srgbClr val="1F2A44"/>
+                </a:solidFill>
+              </a:rPr>
+              <a:t>Streamlit</a:t>
+            </a:r>
+            <a:r>
+              <a:rPr sz="1200" b="0" i="0" dirty="0">
+                <a:solidFill>
+                  <a:srgbClr val="1F2A44"/>
+                </a:solidFill>
+              </a:rPr>
+              <a:t> Cloud (cloud serving).</a:t>
             </a:r>
           </a:p>
         </p:txBody>
@@ -10981,7 +10945,7 @@
 </file>
 
 <file path=ppt/slides/slide6.xml><?xml version="1.0" encoding="utf-8"?>
-<p:sld xmlns:a="http://schemas.openxmlformats.org/drawingml/2006/main" xmlns:p="http://schemas.openxmlformats.org/presentationml/2006/main" xmlns:r="http://schemas.openxmlformats.org/officeDocument/2006/relationships">
+<p:sld xmlns:a="http://schemas.openxmlformats.org/drawingml/2006/main" xmlns:r="http://schemas.openxmlformats.org/officeDocument/2006/relationships" xmlns:p="http://schemas.openxmlformats.org/presentationml/2006/main">
   <p:cSld>
     <p:spTree>
       <p:nvGrpSpPr>
@@ -10989,7 +10953,14 @@
         <p:cNvGrpSpPr/>
         <p:nvPr/>
       </p:nvGrpSpPr>
-      <p:grpSpPr/>
+      <p:grpSpPr>
+        <a:xfrm>
+          <a:off x="0" y="0"/>
+          <a:ext cx="0" cy="0"/>
+          <a:chOff x="0" y="0"/>
+          <a:chExt cx="0" cy="0"/>
+        </a:xfrm>
+      </p:grpSpPr>
       <p:sp>
         <p:nvSpPr>
           <p:cNvPr id="2" name="Rectangle 1"/>
@@ -11030,6 +11001,7 @@
           <a:lstStyle/>
           <a:p>
             <a:pPr algn="ctr"/>
+            <a:endParaRPr/>
           </a:p>
         </p:txBody>
       </p:sp>
@@ -11073,6 +11045,7 @@
           <a:lstStyle/>
           <a:p>
             <a:pPr algn="ctr"/>
+            <a:endParaRPr/>
           </a:p>
         </p:txBody>
       </p:sp>
@@ -11211,7 +11184,7 @@
 </file>
 
 <file path=ppt/slides/slide7.xml><?xml version="1.0" encoding="utf-8"?>
-<p:sld xmlns:a="http://schemas.openxmlformats.org/drawingml/2006/main" xmlns:p="http://schemas.openxmlformats.org/presentationml/2006/main" xmlns:r="http://schemas.openxmlformats.org/officeDocument/2006/relationships">
+<p:sld xmlns:a="http://schemas.openxmlformats.org/drawingml/2006/main" xmlns:r="http://schemas.openxmlformats.org/officeDocument/2006/relationships" xmlns:p="http://schemas.openxmlformats.org/presentationml/2006/main">
   <p:cSld>
     <p:spTree>
       <p:nvGrpSpPr>
@@ -11219,7 +11192,14 @@
         <p:cNvGrpSpPr/>
         <p:nvPr/>
       </p:nvGrpSpPr>
-      <p:grpSpPr/>
+      <p:grpSpPr>
+        <a:xfrm>
+          <a:off x="0" y="0"/>
+          <a:ext cx="0" cy="0"/>
+          <a:chOff x="0" y="0"/>
+          <a:chExt cx="0" cy="0"/>
+        </a:xfrm>
+      </p:grpSpPr>
       <p:sp>
         <p:nvSpPr>
           <p:cNvPr id="2" name="Rectangle 1"/>
@@ -11260,6 +11240,7 @@
           <a:lstStyle/>
           <a:p>
             <a:pPr algn="ctr"/>
+            <a:endParaRPr/>
           </a:p>
         </p:txBody>
       </p:sp>
@@ -11303,6 +11284,7 @@
           <a:lstStyle/>
           <a:p>
             <a:pPr algn="ctr"/>
+            <a:endParaRPr/>
           </a:p>
         </p:txBody>
       </p:sp>
@@ -11381,6 +11363,7 @@
           <a:lstStyle/>
           <a:p>
             <a:pPr algn="ctr"/>
+            <a:endParaRPr/>
           </a:p>
         </p:txBody>
       </p:sp>
@@ -11495,6 +11478,7 @@
           <a:lstStyle/>
           <a:p>
             <a:pPr algn="ctr"/>
+            <a:endParaRPr/>
           </a:p>
         </p:txBody>
       </p:sp>
@@ -11611,6 +11595,7 @@
           <a:lstStyle/>
           <a:p>
             <a:pPr algn="ctr"/>
+            <a:endParaRPr/>
           </a:p>
         </p:txBody>
       </p:sp>
@@ -11762,7 +11747,7 @@
 </file>
 
 <file path=ppt/slides/slide8.xml><?xml version="1.0" encoding="utf-8"?>
-<p:sld xmlns:a="http://schemas.openxmlformats.org/drawingml/2006/main" xmlns:p="http://schemas.openxmlformats.org/presentationml/2006/main" xmlns:r="http://schemas.openxmlformats.org/officeDocument/2006/relationships">
+<p:sld xmlns:a="http://schemas.openxmlformats.org/drawingml/2006/main" xmlns:r="http://schemas.openxmlformats.org/officeDocument/2006/relationships" xmlns:p="http://schemas.openxmlformats.org/presentationml/2006/main">
   <p:cSld>
     <p:spTree>
       <p:nvGrpSpPr>
@@ -11770,7 +11755,14 @@
         <p:cNvGrpSpPr/>
         <p:nvPr/>
       </p:nvGrpSpPr>
-      <p:grpSpPr/>
+      <p:grpSpPr>
+        <a:xfrm>
+          <a:off x="0" y="0"/>
+          <a:ext cx="0" cy="0"/>
+          <a:chOff x="0" y="0"/>
+          <a:chExt cx="0" cy="0"/>
+        </a:xfrm>
+      </p:grpSpPr>
       <p:sp>
         <p:nvSpPr>
           <p:cNvPr id="2" name="Rectangle 1"/>
@@ -11811,6 +11803,7 @@
           <a:lstStyle/>
           <a:p>
             <a:pPr algn="ctr"/>
+            <a:endParaRPr/>
           </a:p>
         </p:txBody>
       </p:sp>
@@ -11854,6 +11847,7 @@
           <a:lstStyle/>
           <a:p>
             <a:pPr algn="ctr"/>
+            <a:endParaRPr/>
           </a:p>
         </p:txBody>
       </p:sp>
@@ -11907,8 +11901,8 @@
         </p:blipFill>
         <p:spPr>
           <a:xfrm>
-            <a:off x="457200" y="1097280"/>
-            <a:ext cx="11430000" cy="3905209"/>
+            <a:off x="457200" y="877824"/>
+            <a:ext cx="11430000" cy="3236977"/>
           </a:xfrm>
           <a:prstGeom prst="rect">
             <a:avLst/>
@@ -11943,7 +11937,7 @@
               </a:spcAft>
             </a:pPr>
             <a:r>
-              <a:rPr sz="1500">
+              <a:rPr sz="1500" dirty="0">
                 <a:solidFill>
                   <a:srgbClr val="1A1A1A"/>
                 </a:solidFill>
@@ -11958,7 +11952,7 @@
               </a:spcAft>
             </a:pPr>
             <a:r>
-              <a:rPr sz="1500">
+              <a:rPr sz="1500" dirty="0">
                 <a:solidFill>
                   <a:srgbClr val="1A1A1A"/>
                 </a:solidFill>
@@ -11973,6 +11967,7 @@
               </a:spcAft>
             </a:pPr>
             <a:r>
+              <a:rPr dirty="0"/>
               <a:t> </a:t>
             </a:r>
           </a:p>
@@ -11983,12 +11978,44 @@
               </a:spcAft>
             </a:pPr>
             <a:r>
-              <a:rPr sz="1500">
+              <a:rPr sz="1500" dirty="0">
                 <a:solidFill>
                   <a:srgbClr val="1A1A1A"/>
                 </a:solidFill>
               </a:rPr>
-              <a:t>Surprise constraint: gzip-compressed CSV is NOT splittable in Spark.</a:t>
+              <a:t>Surprise constraint: </a:t>
+            </a:r>
+            <a:r>
+              <a:rPr sz="1500" dirty="0" err="1">
+                <a:solidFill>
+                  <a:srgbClr val="1A1A1A"/>
+                </a:solidFill>
+              </a:rPr>
+              <a:t>gzip</a:t>
+            </a:r>
+            <a:r>
+              <a:rPr sz="1500" dirty="0">
+                <a:solidFill>
+                  <a:srgbClr val="1A1A1A"/>
+                </a:solidFill>
+              </a:rPr>
+              <a:t>-compressed CSV is NOT </a:t>
+            </a:r>
+            <a:r>
+              <a:rPr sz="1500" dirty="0" err="1">
+                <a:solidFill>
+                  <a:srgbClr val="1A1A1A"/>
+                </a:solidFill>
+              </a:rPr>
+              <a:t>splittable</a:t>
+            </a:r>
+            <a:r>
+              <a:rPr sz="1500" dirty="0">
+                <a:solidFill>
+                  <a:srgbClr val="1A1A1A"/>
+                </a:solidFill>
+              </a:rPr>
+              <a:t> in Spark.</a:t>
             </a:r>
           </a:p>
           <a:p>
@@ -11998,7 +12025,7 @@
               </a:spcAft>
             </a:pPr>
             <a:r>
-              <a:rPr sz="1500">
+              <a:rPr sz="1500" dirty="0">
                 <a:solidFill>
                   <a:srgbClr val="1A1A1A"/>
                 </a:solidFill>
@@ -12013,12 +12040,28 @@
               </a:spcAft>
             </a:pPr>
             <a:r>
-              <a:rPr sz="1500">
+              <a:rPr sz="1500" dirty="0">
                 <a:solidFill>
                   <a:srgbClr val="1A1A1A"/>
                 </a:solidFill>
               </a:rPr>
-              <a:t>sat idle through most of bronze_to_silver. In production we'd land</a:t>
+              <a:t>sat idle through most of </a:t>
+            </a:r>
+            <a:r>
+              <a:rPr sz="1500" dirty="0" err="1">
+                <a:solidFill>
+                  <a:srgbClr val="1A1A1A"/>
+                </a:solidFill>
+              </a:rPr>
+              <a:t>bronze_to_silver</a:t>
+            </a:r>
+            <a:r>
+              <a:rPr sz="1500" dirty="0">
+                <a:solidFill>
+                  <a:srgbClr val="1A1A1A"/>
+                </a:solidFill>
+              </a:rPr>
+              <a:t>. In production we'd land</a:t>
             </a:r>
           </a:p>
           <a:p>
@@ -12028,12 +12071,28 @@
               </a:spcAft>
             </a:pPr>
             <a:r>
-              <a:rPr sz="1500">
+              <a:rPr sz="1500" dirty="0">
                 <a:solidFill>
                   <a:srgbClr val="1A1A1A"/>
                 </a:solidFill>
               </a:rPr>
-              <a:t>raw .gz files as bzip2 or Snappy parquet on ingest to fix this.</a:t>
+              <a:t>raw .</a:t>
+            </a:r>
+            <a:r>
+              <a:rPr sz="1500" dirty="0" err="1">
+                <a:solidFill>
+                  <a:srgbClr val="1A1A1A"/>
+                </a:solidFill>
+              </a:rPr>
+              <a:t>gz</a:t>
+            </a:r>
+            <a:r>
+              <a:rPr sz="1500" dirty="0">
+                <a:solidFill>
+                  <a:srgbClr val="1A1A1A"/>
+                </a:solidFill>
+              </a:rPr>
+              <a:t> files as bzip2 or Snappy parquet on ingest to fix this.</a:t>
             </a:r>
           </a:p>
         </p:txBody>
@@ -12081,7 +12140,7 @@
 </file>
 
 <file path=ppt/slides/slide9.xml><?xml version="1.0" encoding="utf-8"?>
-<p:sld xmlns:a="http://schemas.openxmlformats.org/drawingml/2006/main" xmlns:p="http://schemas.openxmlformats.org/presentationml/2006/main" xmlns:r="http://schemas.openxmlformats.org/officeDocument/2006/relationships">
+<p:sld xmlns:a="http://schemas.openxmlformats.org/drawingml/2006/main" xmlns:r="http://schemas.openxmlformats.org/officeDocument/2006/relationships" xmlns:p="http://schemas.openxmlformats.org/presentationml/2006/main">
   <p:cSld>
     <p:spTree>
       <p:nvGrpSpPr>
@@ -12089,7 +12148,14 @@
         <p:cNvGrpSpPr/>
         <p:nvPr/>
       </p:nvGrpSpPr>
-      <p:grpSpPr/>
+      <p:grpSpPr>
+        <a:xfrm>
+          <a:off x="0" y="0"/>
+          <a:ext cx="0" cy="0"/>
+          <a:chOff x="0" y="0"/>
+          <a:chExt cx="0" cy="0"/>
+        </a:xfrm>
+      </p:grpSpPr>
       <p:sp>
         <p:nvSpPr>
           <p:cNvPr id="2" name="Rectangle 1"/>
@@ -12130,6 +12196,7 @@
           <a:lstStyle/>
           <a:p>
             <a:pPr algn="ctr"/>
+            <a:endParaRPr/>
           </a:p>
         </p:txBody>
       </p:sp>
@@ -12173,6 +12240,7 @@
           <a:lstStyle/>
           <a:p>
             <a:pPr algn="ctr"/>
+            <a:endParaRPr/>
           </a:p>
         </p:txBody>
       </p:sp>
@@ -12781,44 +12849,44 @@
         <a:sysClr val="window" lastClr="FFFFFF"/>
       </a:lt1>
       <a:dk2>
-        <a:srgbClr val="1F497D"/>
+        <a:srgbClr val="0E2841"/>
       </a:dk2>
       <a:lt2>
-        <a:srgbClr val="EEECE1"/>
+        <a:srgbClr val="E8E8E8"/>
       </a:lt2>
       <a:accent1>
-        <a:srgbClr val="4F81BD"/>
+        <a:srgbClr val="156082"/>
       </a:accent1>
       <a:accent2>
-        <a:srgbClr val="C0504D"/>
+        <a:srgbClr val="E97132"/>
       </a:accent2>
       <a:accent3>
-        <a:srgbClr val="9BBB59"/>
+        <a:srgbClr val="196B24"/>
       </a:accent3>
       <a:accent4>
-        <a:srgbClr val="8064A2"/>
+        <a:srgbClr val="0F9ED5"/>
       </a:accent4>
       <a:accent5>
-        <a:srgbClr val="4BACC6"/>
+        <a:srgbClr val="A02B93"/>
       </a:accent5>
       <a:accent6>
-        <a:srgbClr val="F79646"/>
+        <a:srgbClr val="4EA72E"/>
       </a:accent6>
       <a:hlink>
-        <a:srgbClr val="0000FF"/>
+        <a:srgbClr val="467886"/>
       </a:hlink>
       <a:folHlink>
-        <a:srgbClr val="800080"/>
+        <a:srgbClr val="96607D"/>
       </a:folHlink>
     </a:clrScheme>
     <a:fontScheme name="Office">
       <a:majorFont>
-        <a:latin typeface="Calibri"/>
+        <a:latin typeface="Aptos Display" panose="02110004020202020204"/>
         <a:ea typeface=""/>
         <a:cs typeface=""/>
-        <a:font script="Jpan" typeface="ＭＳ Ｐゴシック"/>
+        <a:font script="Jpan" typeface="游ゴシック Light"/>
         <a:font script="Hang" typeface="맑은 고딕"/>
-        <a:font script="Hans" typeface="宋体"/>
+        <a:font script="Hans" typeface="等线 Light"/>
         <a:font script="Hant" typeface="新細明體"/>
         <a:font script="Arab" typeface="Times New Roman"/>
         <a:font script="Hebr" typeface="Times New Roman"/>
@@ -12846,14 +12914,31 @@
         <a:font script="Viet" typeface="Times New Roman"/>
         <a:font script="Uigh" typeface="Microsoft Uighur"/>
         <a:font script="Geor" typeface="Sylfaen"/>
+        <a:font script="Armn" typeface="Arial"/>
+        <a:font script="Bugi" typeface="Leelawadee UI"/>
+        <a:font script="Bopo" typeface="Microsoft JhengHei"/>
+        <a:font script="Java" typeface="Javanese Text"/>
+        <a:font script="Lisu" typeface="Segoe UI"/>
+        <a:font script="Mymr" typeface="Myanmar Text"/>
+        <a:font script="Nkoo" typeface="Ebrima"/>
+        <a:font script="Olck" typeface="Nirmala UI"/>
+        <a:font script="Osma" typeface="Ebrima"/>
+        <a:font script="Phag" typeface="Phagspa"/>
+        <a:font script="Syrn" typeface="Estrangelo Edessa"/>
+        <a:font script="Syrj" typeface="Estrangelo Edessa"/>
+        <a:font script="Syre" typeface="Estrangelo Edessa"/>
+        <a:font script="Sora" typeface="Nirmala UI"/>
+        <a:font script="Tale" typeface="Microsoft Tai Le"/>
+        <a:font script="Talu" typeface="Microsoft New Tai Lue"/>
+        <a:font script="Tfng" typeface="Ebrima"/>
       </a:majorFont>
       <a:minorFont>
-        <a:latin typeface="Calibri"/>
+        <a:latin typeface="Aptos" panose="02110004020202020204"/>
         <a:ea typeface=""/>
         <a:cs typeface=""/>
-        <a:font script="Jpan" typeface="ＭＳ Ｐゴシック"/>
+        <a:font script="Jpan" typeface="游ゴシック"/>
         <a:font script="Hang" typeface="맑은 고딕"/>
-        <a:font script="Hans" typeface="宋体"/>
+        <a:font script="Hans" typeface="等线"/>
         <a:font script="Hant" typeface="新細明體"/>
         <a:font script="Arab" typeface="Arial"/>
         <a:font script="Hebr" typeface="Arial"/>
@@ -12881,6 +12966,23 @@
         <a:font script="Viet" typeface="Arial"/>
         <a:font script="Uigh" typeface="Microsoft Uighur"/>
         <a:font script="Geor" typeface="Sylfaen"/>
+        <a:font script="Armn" typeface="Arial"/>
+        <a:font script="Bugi" typeface="Leelawadee UI"/>
+        <a:font script="Bopo" typeface="Microsoft JhengHei"/>
+        <a:font script="Java" typeface="Javanese Text"/>
+        <a:font script="Lisu" typeface="Segoe UI"/>
+        <a:font script="Mymr" typeface="Myanmar Text"/>
+        <a:font script="Nkoo" typeface="Ebrima"/>
+        <a:font script="Olck" typeface="Nirmala UI"/>
+        <a:font script="Osma" typeface="Ebrima"/>
+        <a:font script="Phag" typeface="Phagspa"/>
+        <a:font script="Syrn" typeface="Estrangelo Edessa"/>
+        <a:font script="Syrj" typeface="Estrangelo Edessa"/>
+        <a:font script="Syre" typeface="Estrangelo Edessa"/>
+        <a:font script="Sora" typeface="Nirmala UI"/>
+        <a:font script="Tale" typeface="Microsoft Tai Le"/>
+        <a:font script="Talu" typeface="Microsoft New Tai Lue"/>
+        <a:font script="Tfng" typeface="Ebrima"/>
       </a:minorFont>
     </a:fontScheme>
     <a:fmtScheme name="Office">
@@ -12892,180 +12994,136 @@
           <a:gsLst>
             <a:gs pos="0">
               <a:schemeClr val="phClr">
-                <a:tint val="50000"/>
-                <a:satMod val="300000"/>
+                <a:lumMod val="110000"/>
+                <a:satMod val="105000"/>
+                <a:tint val="67000"/>
               </a:schemeClr>
             </a:gs>
-            <a:gs pos="35000">
+            <a:gs pos="50000">
               <a:schemeClr val="phClr">
-                <a:tint val="37000"/>
-                <a:satMod val="300000"/>
+                <a:lumMod val="105000"/>
+                <a:satMod val="103000"/>
+                <a:tint val="73000"/>
               </a:schemeClr>
             </a:gs>
             <a:gs pos="100000">
               <a:schemeClr val="phClr">
-                <a:tint val="15000"/>
-                <a:satMod val="350000"/>
+                <a:lumMod val="105000"/>
+                <a:satMod val="109000"/>
+                <a:tint val="81000"/>
               </a:schemeClr>
             </a:gs>
           </a:gsLst>
-          <a:lin ang="16200000" scaled="1"/>
+          <a:lin ang="5400000" scaled="0"/>
         </a:gradFill>
         <a:gradFill rotWithShape="1">
           <a:gsLst>
             <a:gs pos="0">
               <a:schemeClr val="phClr">
-                <a:tint val="100000"/>
+                <a:satMod val="103000"/>
+                <a:lumMod val="102000"/>
+                <a:tint val="94000"/>
+              </a:schemeClr>
+            </a:gs>
+            <a:gs pos="50000">
+              <a:schemeClr val="phClr">
+                <a:satMod val="110000"/>
+                <a:lumMod val="100000"/>
                 <a:shade val="100000"/>
-                <a:satMod val="130000"/>
               </a:schemeClr>
             </a:gs>
             <a:gs pos="100000">
               <a:schemeClr val="phClr">
-                <a:tint val="50000"/>
-                <a:shade val="100000"/>
-                <a:satMod val="350000"/>
+                <a:lumMod val="99000"/>
+                <a:satMod val="120000"/>
+                <a:shade val="78000"/>
               </a:schemeClr>
             </a:gs>
           </a:gsLst>
-          <a:lin ang="16200000" scaled="0"/>
+          <a:lin ang="5400000" scaled="0"/>
         </a:gradFill>
       </a:fillStyleLst>
       <a:lnStyleLst>
-        <a:ln w="9525" cap="flat" cmpd="sng" algn="ctr">
+        <a:ln w="12700" cap="flat" cmpd="sng" algn="ctr">
           <a:solidFill>
-            <a:schemeClr val="phClr">
-              <a:shade val="95000"/>
-              <a:satMod val="105000"/>
-            </a:schemeClr>
+            <a:schemeClr val="phClr"/>
           </a:solidFill>
           <a:prstDash val="solid"/>
+          <a:miter lim="800000"/>
+        </a:ln>
+        <a:ln w="19050" cap="flat" cmpd="sng" algn="ctr">
+          <a:solidFill>
+            <a:schemeClr val="phClr"/>
+          </a:solidFill>
+          <a:prstDash val="solid"/>
+          <a:miter lim="800000"/>
         </a:ln>
         <a:ln w="25400" cap="flat" cmpd="sng" algn="ctr">
           <a:solidFill>
             <a:schemeClr val="phClr"/>
           </a:solidFill>
           <a:prstDash val="solid"/>
-        </a:ln>
-        <a:ln w="38100" cap="flat" cmpd="sng" algn="ctr">
-          <a:solidFill>
-            <a:schemeClr val="phClr"/>
-          </a:solidFill>
-          <a:prstDash val="solid"/>
+          <a:miter lim="800000"/>
         </a:ln>
       </a:lnStyleLst>
       <a:effectStyleLst>
         <a:effectStyle>
+          <a:effectLst/>
+        </a:effectStyle>
+        <a:effectStyle>
+          <a:effectLst/>
+        </a:effectStyle>
+        <a:effectStyle>
           <a:effectLst>
-            <a:outerShdw blurRad="40000" dist="20000" dir="5400000" rotWithShape="0">
+            <a:outerShdw blurRad="57150" dist="19050" dir="5400000" algn="ctr" rotWithShape="0">
               <a:srgbClr val="000000">
-                <a:alpha val="38000"/>
+                <a:alpha val="63000"/>
               </a:srgbClr>
             </a:outerShdw>
           </a:effectLst>
-        </a:effectStyle>
-        <a:effectStyle>
-          <a:effectLst>
-            <a:outerShdw blurRad="40000" dist="23000" dir="5400000" rotWithShape="0">
-              <a:srgbClr val="000000">
-                <a:alpha val="35000"/>
-              </a:srgbClr>
-            </a:outerShdw>
-          </a:effectLst>
-        </a:effectStyle>
-        <a:effectStyle>
-          <a:effectLst>
-            <a:outerShdw blurRad="40000" dist="23000" dir="5400000" rotWithShape="0">
-              <a:srgbClr val="000000">
-                <a:alpha val="35000"/>
-              </a:srgbClr>
-            </a:outerShdw>
-          </a:effectLst>
-          <a:scene3d>
-            <a:camera prst="orthographicFront">
-              <a:rot lat="0" lon="0" rev="0"/>
-            </a:camera>
-            <a:lightRig rig="threePt" dir="t">
-              <a:rot lat="0" lon="0" rev="1200000"/>
-            </a:lightRig>
-          </a:scene3d>
-          <a:sp3d>
-            <a:bevelT w="63500" h="25400"/>
-          </a:sp3d>
         </a:effectStyle>
       </a:effectStyleLst>
       <a:bgFillStyleLst>
         <a:solidFill>
           <a:schemeClr val="phClr"/>
         </a:solidFill>
+        <a:solidFill>
+          <a:schemeClr val="phClr">
+            <a:tint val="95000"/>
+            <a:satMod val="170000"/>
+          </a:schemeClr>
+        </a:solidFill>
         <a:gradFill rotWithShape="1">
           <a:gsLst>
             <a:gs pos="0">
               <a:schemeClr val="phClr">
-                <a:tint val="40000"/>
-                <a:satMod val="350000"/>
+                <a:tint val="93000"/>
+                <a:satMod val="150000"/>
+                <a:shade val="98000"/>
+                <a:lumMod val="102000"/>
               </a:schemeClr>
             </a:gs>
-            <a:gs pos="40000">
+            <a:gs pos="50000">
               <a:schemeClr val="phClr">
-                <a:tint val="45000"/>
-                <a:shade val="99000"/>
-                <a:satMod val="350000"/>
+                <a:tint val="98000"/>
+                <a:satMod val="130000"/>
+                <a:shade val="90000"/>
+                <a:lumMod val="103000"/>
               </a:schemeClr>
             </a:gs>
             <a:gs pos="100000">
               <a:schemeClr val="phClr">
-                <a:shade val="20000"/>
-                <a:satMod val="255000"/>
+                <a:shade val="63000"/>
+                <a:satMod val="120000"/>
               </a:schemeClr>
             </a:gs>
           </a:gsLst>
-          <a:path path="circle">
-            <a:fillToRect l="50000" t="-80000" r="50000" b="180000"/>
-          </a:path>
-        </a:gradFill>
-        <a:gradFill rotWithShape="1">
-          <a:gsLst>
-            <a:gs pos="0">
-              <a:schemeClr val="phClr">
-                <a:tint val="80000"/>
-                <a:satMod val="300000"/>
-              </a:schemeClr>
-            </a:gs>
-            <a:gs pos="100000">
-              <a:schemeClr val="phClr">
-                <a:shade val="30000"/>
-                <a:satMod val="200000"/>
-              </a:schemeClr>
-            </a:gs>
-          </a:gsLst>
-          <a:path path="circle">
-            <a:fillToRect l="50000" t="50000" r="50000" b="50000"/>
-          </a:path>
+          <a:lin ang="5400000" scaled="0"/>
         </a:gradFill>
       </a:bgFillStyleLst>
     </a:fmtScheme>
   </a:themeElements>
   <a:objectDefaults>
-    <a:spDef>
-      <a:spPr/>
-      <a:bodyPr/>
-      <a:lstStyle/>
-      <a:style>
-        <a:lnRef idx="1">
-          <a:schemeClr val="accent1"/>
-        </a:lnRef>
-        <a:fillRef idx="3">
-          <a:schemeClr val="accent1"/>
-        </a:fillRef>
-        <a:effectRef idx="2">
-          <a:schemeClr val="accent1"/>
-        </a:effectRef>
-        <a:fontRef idx="minor">
-          <a:schemeClr val="lt1"/>
-        </a:fontRef>
-      </a:style>
-    </a:spDef>
     <a:lnDef>
       <a:spPr/>
       <a:bodyPr/>
@@ -13087,5 +13145,10 @@
     </a:lnDef>
   </a:objectDefaults>
   <a:extraClrSchemeLst/>
+  <a:extLst>
+    <a:ext uri="{05A4C25C-085E-4340-85A3-A5531E510DB2}">
+      <thm15:themeFamily xmlns:thm15="http://schemas.microsoft.com/office/thememl/2012/main" name="Office Theme" id="{2E142A2C-CD16-42D6-873A-C26D2A0506FA}" vid="{1BDDFF52-6CD6-40A5-AB3C-68EB2F1E4D0A}"/>
+    </a:ext>
+  </a:extLst>
 </a:theme>
 </file>
--- a/PRESENTATION.pptx
+++ b/PRESENTATION.pptx
@@ -4,31 +4,29 @@
   <p:sldMasterIdLst>
     <p:sldMasterId id="2147483648" r:id="rId1"/>
   </p:sldMasterIdLst>
-  <p:notesMasterIdLst>
-    <p:notesMasterId r:id="rId21"/>
-  </p:notesMasterIdLst>
   <p:sldIdLst>
-    <p:sldId id="256" r:id="rId2"/>
-    <p:sldId id="257" r:id="rId3"/>
-    <p:sldId id="258" r:id="rId4"/>
-    <p:sldId id="259" r:id="rId5"/>
-    <p:sldId id="260" r:id="rId6"/>
-    <p:sldId id="261" r:id="rId7"/>
-    <p:sldId id="262" r:id="rId8"/>
-    <p:sldId id="263" r:id="rId9"/>
-    <p:sldId id="264" r:id="rId10"/>
-    <p:sldId id="265" r:id="rId11"/>
-    <p:sldId id="266" r:id="rId12"/>
-    <p:sldId id="267" r:id="rId13"/>
-    <p:sldId id="268" r:id="rId14"/>
-    <p:sldId id="269" r:id="rId15"/>
-    <p:sldId id="270" r:id="rId16"/>
-    <p:sldId id="271" r:id="rId17"/>
-    <p:sldId id="272" r:id="rId18"/>
-    <p:sldId id="273" r:id="rId19"/>
-    <p:sldId id="274" r:id="rId20"/>
+    <p:sldId id="256" r:id="rId7"/>
+    <p:sldId id="257" r:id="rId9"/>
+    <p:sldId id="258" r:id="rId10"/>
+    <p:sldId id="259" r:id="rId11"/>
+    <p:sldId id="260" r:id="rId12"/>
+    <p:sldId id="261" r:id="rId13"/>
+    <p:sldId id="262" r:id="rId14"/>
+    <p:sldId id="263" r:id="rId15"/>
+    <p:sldId id="264" r:id="rId16"/>
+    <p:sldId id="265" r:id="rId17"/>
+    <p:sldId id="266" r:id="rId18"/>
+    <p:sldId id="267" r:id="rId19"/>
+    <p:sldId id="268" r:id="rId20"/>
+    <p:sldId id="269" r:id="rId21"/>
+    <p:sldId id="270" r:id="rId22"/>
+    <p:sldId id="271" r:id="rId23"/>
+    <p:sldId id="272" r:id="rId24"/>
+    <p:sldId id="273" r:id="rId25"/>
+    <p:sldId id="274" r:id="rId26"/>
+    <p:sldId id="275" r:id="rId27"/>
   </p:sldIdLst>
-  <p:sldSz cx="12192000" cy="6858000"/>
+  <p:sldSz cx="12191695" cy="6858000" type="screen4x3"/>
   <p:notesSz cx="6858000" cy="9144000"/>
   <p:defaultTextStyle>
     <a:defPPr>
@@ -125,27 +123,11 @@
       </a:defRPr>
     </a:lvl9pPr>
   </p:defaultTextStyle>
-  <p:extLst>
-    <p:ext uri="{EFAFB233-063F-42B5-8137-9DF3F51BA10A}">
-      <p15:sldGuideLst xmlns:p15="http://schemas.microsoft.com/office/powerpoint/2012/main">
-        <p15:guide id="1" orient="horz" pos="2160">
-          <p15:clr>
-            <a:srgbClr val="A4A3A4"/>
-          </p15:clr>
-        </p15:guide>
-        <p15:guide id="2" pos="2880">
-          <p15:clr>
-            <a:srgbClr val="A4A3A4"/>
-          </p15:clr>
-        </p15:guide>
-      </p15:sldGuideLst>
-    </p:ext>
-  </p:extLst>
 </p:presentation>
 </file>
 
 <file path=ppt/notesMasters/notesMaster1.xml><?xml version="1.0" encoding="utf-8"?>
-<p:notesMaster xmlns:a="http://schemas.openxmlformats.org/drawingml/2006/main" xmlns:r="http://schemas.openxmlformats.org/officeDocument/2006/relationships" xmlns:p="http://schemas.openxmlformats.org/presentationml/2006/main">
+<p:notesMaster xmlns:a="http://schemas.openxmlformats.org/drawingml/2006/main" xmlns:p="http://schemas.openxmlformats.org/presentationml/2006/main" xmlns:r="http://schemas.openxmlformats.org/officeDocument/2006/relationships">
   <p:cSld>
     <p:bg>
       <p:bgRef idx="1001">
@@ -166,16 +148,241 @@
           <a:chExt cx="0" cy="0"/>
         </a:xfrm>
       </p:grpSpPr>
+      <p:sp>
+        <p:nvSpPr>
+          <p:cNvPr id="2" name="Header Placeholder 1"/>
+          <p:cNvSpPr>
+            <a:spLocks noGrp="1"/>
+          </p:cNvSpPr>
+          <p:nvPr>
+            <p:ph type="hdr" sz="quarter"/>
+          </p:nvPr>
+        </p:nvSpPr>
+        <p:spPr>
+          <a:xfrm>
+            <a:off x="0" y="0"/>
+            <a:ext cx="2971800" cy="457200"/>
+          </a:xfrm>
+          <a:prstGeom prst="rect">
+            <a:avLst/>
+          </a:prstGeom>
+        </p:spPr>
+        <p:txBody>
+          <a:bodyPr vert="horz" lIns="91440" tIns="45720" rIns="91440" bIns="45720" rtlCol="0"/>
+          <a:lstStyle>
+            <a:lvl1pPr algn="l">
+              <a:defRPr sz="1200"/>
+            </a:lvl1pPr>
+          </a:lstStyle>
+          <a:p>
+            <a:endParaRPr lang="en-US"/>
+          </a:p>
+        </p:txBody>
+      </p:sp>
+      <p:sp>
+        <p:nvSpPr>
+          <p:cNvPr id="3" name="Date Placeholder 2"/>
+          <p:cNvSpPr>
+            <a:spLocks noGrp="1"/>
+          </p:cNvSpPr>
+          <p:nvPr>
+            <p:ph type="dt" idx="1"/>
+          </p:nvPr>
+        </p:nvSpPr>
+        <p:spPr>
+          <a:xfrm>
+            <a:off x="3884613" y="0"/>
+            <a:ext cx="2971800" cy="457200"/>
+          </a:xfrm>
+          <a:prstGeom prst="rect">
+            <a:avLst/>
+          </a:prstGeom>
+        </p:spPr>
+        <p:txBody>
+          <a:bodyPr vert="horz" lIns="91440" tIns="45720" rIns="91440" bIns="45720" rtlCol="0"/>
+          <a:lstStyle>
+            <a:lvl1pPr algn="r">
+              <a:defRPr sz="1200"/>
+            </a:lvl1pPr>
+          </a:lstStyle>
+          <a:p>
+            <a:fld id="{0F89C1C7-3DCD-1040-A9CF-14679D8B5DDD}" type="datetimeFigureOut">
+              <a:rPr lang="en-US" smtClean="0"/>
+              <a:t>10/17/16</a:t>
+            </a:fld>
+            <a:endParaRPr lang="en-US"/>
+          </a:p>
+        </p:txBody>
+      </p:sp>
+      <p:sp>
+        <p:nvSpPr>
+          <p:cNvPr id="4" name="Slide Image Placeholder 3"/>
+          <p:cNvSpPr>
+            <a:spLocks noGrp="1" noRot="1" noChangeAspect="1"/>
+          </p:cNvSpPr>
+          <p:nvPr>
+            <p:ph type="sldImg" idx="2"/>
+          </p:nvPr>
+        </p:nvSpPr>
+        <p:spPr>
+          <a:xfrm>
+            <a:off x="1143000" y="685800"/>
+            <a:ext cx="4572000" cy="3429000"/>
+          </a:xfrm>
+          <a:prstGeom prst="rect">
+            <a:avLst/>
+          </a:prstGeom>
+          <a:noFill/>
+          <a:ln w="12700">
+            <a:solidFill>
+              <a:prstClr val="black"/>
+            </a:solidFill>
+          </a:ln>
+        </p:spPr>
+        <p:txBody>
+          <a:bodyPr vert="horz" lIns="91440" tIns="45720" rIns="91440" bIns="45720" rtlCol="0" anchor="ctr"/>
+          <a:lstStyle/>
+          <a:p>
+            <a:endParaRPr lang="en-US"/>
+          </a:p>
+        </p:txBody>
+      </p:sp>
+      <p:sp>
+        <p:nvSpPr>
+          <p:cNvPr id="5" name="Notes Placeholder 4"/>
+          <p:cNvSpPr>
+            <a:spLocks noGrp="1"/>
+          </p:cNvSpPr>
+          <p:nvPr>
+            <p:ph type="body" sz="quarter" idx="3"/>
+          </p:nvPr>
+        </p:nvSpPr>
+        <p:spPr>
+          <a:xfrm>
+            <a:off x="685800" y="4343400"/>
+            <a:ext cx="5486400" cy="4114800"/>
+          </a:xfrm>
+          <a:prstGeom prst="rect">
+            <a:avLst/>
+          </a:prstGeom>
+        </p:spPr>
+        <p:txBody>
+          <a:bodyPr vert="horz" lIns="91440" tIns="45720" rIns="91440" bIns="45720" rtlCol="0"/>
+          <a:lstStyle/>
+          <a:p>
+            <a:pPr lvl="0"/>
+            <a:r>
+              <a:rPr lang="en-US" smtClean="0"/>
+              <a:t>Click to edit Master text styles</a:t>
+            </a:r>
+          </a:p>
+          <a:p>
+            <a:pPr lvl="1"/>
+            <a:r>
+              <a:rPr lang="en-US" smtClean="0"/>
+              <a:t>Second level</a:t>
+            </a:r>
+          </a:p>
+          <a:p>
+            <a:pPr lvl="2"/>
+            <a:r>
+              <a:rPr lang="en-US" smtClean="0"/>
+              <a:t>Third level</a:t>
+            </a:r>
+          </a:p>
+          <a:p>
+            <a:pPr lvl="3"/>
+            <a:r>
+              <a:rPr lang="en-US" smtClean="0"/>
+              <a:t>Fourth level</a:t>
+            </a:r>
+          </a:p>
+          <a:p>
+            <a:pPr lvl="4"/>
+            <a:r>
+              <a:rPr lang="en-US" smtClean="0"/>
+              <a:t>Fifth level</a:t>
+            </a:r>
+            <a:endParaRPr lang="en-US"/>
+          </a:p>
+        </p:txBody>
+      </p:sp>
+      <p:sp>
+        <p:nvSpPr>
+          <p:cNvPr id="6" name="Footer Placeholder 5"/>
+          <p:cNvSpPr>
+            <a:spLocks noGrp="1"/>
+          </p:cNvSpPr>
+          <p:nvPr>
+            <p:ph type="ftr" sz="quarter" idx="4"/>
+          </p:nvPr>
+        </p:nvSpPr>
+        <p:spPr>
+          <a:xfrm>
+            <a:off x="0" y="8685213"/>
+            <a:ext cx="2971800" cy="457200"/>
+          </a:xfrm>
+          <a:prstGeom prst="rect">
+            <a:avLst/>
+          </a:prstGeom>
+        </p:spPr>
+        <p:txBody>
+          <a:bodyPr vert="horz" lIns="91440" tIns="45720" rIns="91440" bIns="45720" rtlCol="0" anchor="b"/>
+          <a:lstStyle>
+            <a:lvl1pPr algn="l">
+              <a:defRPr sz="1200"/>
+            </a:lvl1pPr>
+          </a:lstStyle>
+          <a:p>
+            <a:endParaRPr lang="en-US"/>
+          </a:p>
+        </p:txBody>
+      </p:sp>
+      <p:sp>
+        <p:nvSpPr>
+          <p:cNvPr id="7" name="Slide Number Placeholder 6"/>
+          <p:cNvSpPr>
+            <a:spLocks noGrp="1"/>
+          </p:cNvSpPr>
+          <p:nvPr>
+            <p:ph type="sldNum" sz="quarter" idx="5"/>
+          </p:nvPr>
+        </p:nvSpPr>
+        <p:spPr>
+          <a:xfrm>
+            <a:off x="3884613" y="8685213"/>
+            <a:ext cx="2971800" cy="457200"/>
+          </a:xfrm>
+          <a:prstGeom prst="rect">
+            <a:avLst/>
+          </a:prstGeom>
+        </p:spPr>
+        <p:txBody>
+          <a:bodyPr vert="horz" lIns="91440" tIns="45720" rIns="91440" bIns="45720" rtlCol="0" anchor="b"/>
+          <a:lstStyle>
+            <a:lvl1pPr algn="r">
+              <a:defRPr sz="1200"/>
+            </a:lvl1pPr>
+          </a:lstStyle>
+          <a:p>
+            <a:fld id="{BB5E49A5-4136-284D-997B-48E1D791AD67}" type="slidenum">
+              <a:rPr lang="en-US" smtClean="0"/>
+              <a:t>‹#›</a:t>
+            </a:fld>
+            <a:endParaRPr lang="en-US"/>
+          </a:p>
+        </p:txBody>
+      </p:sp>
     </p:spTree>
     <p:extLst>
       <p:ext uri="{BB962C8B-B14F-4D97-AF65-F5344CB8AC3E}">
-        <p14:creationId xmlns:p14="http://schemas.microsoft.com/office/powerpoint/2010/main" val="4235548486"/>
+        <p14:creationId xmlns:p14="http://schemas.microsoft.com/office/powerpoint/2010/main" val="2623252185"/>
       </p:ext>
     </p:extLst>
   </p:cSld>
   <p:clrMap bg1="lt1" tx1="dk1" bg2="lt2" tx2="dk2" accent1="accent1" accent2="accent2" accent3="accent3" accent4="accent4" accent5="accent5" accent6="accent6" hlink="hlink" folHlink="folHlink"/>
   <p:notesStyle>
-    <a:lvl1pPr marL="0" algn="l" defTabSz="914400" rtl="0" eaLnBrk="1" latinLnBrk="0" hangingPunct="1">
+    <a:lvl1pPr marL="0" algn="l" defTabSz="457200" rtl="0" eaLnBrk="1" latinLnBrk="0" hangingPunct="1">
       <a:defRPr sz="1200" kern="1200">
         <a:solidFill>
           <a:schemeClr val="tx1"/>
@@ -185,7 +392,7 @@
         <a:cs typeface="+mn-cs"/>
       </a:defRPr>
     </a:lvl1pPr>
-    <a:lvl2pPr marL="457200" algn="l" defTabSz="914400" rtl="0" eaLnBrk="1" latinLnBrk="0" hangingPunct="1">
+    <a:lvl2pPr marL="457200" algn="l" defTabSz="457200" rtl="0" eaLnBrk="1" latinLnBrk="0" hangingPunct="1">
       <a:defRPr sz="1200" kern="1200">
         <a:solidFill>
           <a:schemeClr val="tx1"/>
@@ -195,7 +402,7 @@
         <a:cs typeface="+mn-cs"/>
       </a:defRPr>
     </a:lvl2pPr>
-    <a:lvl3pPr marL="914400" algn="l" defTabSz="914400" rtl="0" eaLnBrk="1" latinLnBrk="0" hangingPunct="1">
+    <a:lvl3pPr marL="914400" algn="l" defTabSz="457200" rtl="0" eaLnBrk="1" latinLnBrk="0" hangingPunct="1">
       <a:defRPr sz="1200" kern="1200">
         <a:solidFill>
           <a:schemeClr val="tx1"/>
@@ -205,7 +412,7 @@
         <a:cs typeface="+mn-cs"/>
       </a:defRPr>
     </a:lvl3pPr>
-    <a:lvl4pPr marL="1371600" algn="l" defTabSz="914400" rtl="0" eaLnBrk="1" latinLnBrk="0" hangingPunct="1">
+    <a:lvl4pPr marL="1371600" algn="l" defTabSz="457200" rtl="0" eaLnBrk="1" latinLnBrk="0" hangingPunct="1">
       <a:defRPr sz="1200" kern="1200">
         <a:solidFill>
           <a:schemeClr val="tx1"/>
@@ -215,7 +422,7 @@
         <a:cs typeface="+mn-cs"/>
       </a:defRPr>
     </a:lvl4pPr>
-    <a:lvl5pPr marL="1828800" algn="l" defTabSz="914400" rtl="0" eaLnBrk="1" latinLnBrk="0" hangingPunct="1">
+    <a:lvl5pPr marL="1828800" algn="l" defTabSz="457200" rtl="0" eaLnBrk="1" latinLnBrk="0" hangingPunct="1">
       <a:defRPr sz="1200" kern="1200">
         <a:solidFill>
           <a:schemeClr val="tx1"/>
@@ -225,7 +432,7 @@
         <a:cs typeface="+mn-cs"/>
       </a:defRPr>
     </a:lvl5pPr>
-    <a:lvl6pPr marL="2286000" algn="l" defTabSz="914400" rtl="0" eaLnBrk="1" latinLnBrk="0" hangingPunct="1">
+    <a:lvl6pPr marL="2286000" algn="l" defTabSz="457200" rtl="0" eaLnBrk="1" latinLnBrk="0" hangingPunct="1">
       <a:defRPr sz="1200" kern="1200">
         <a:solidFill>
           <a:schemeClr val="tx1"/>
@@ -235,7 +442,7 @@
         <a:cs typeface="+mn-cs"/>
       </a:defRPr>
     </a:lvl6pPr>
-    <a:lvl7pPr marL="2743200" algn="l" defTabSz="914400" rtl="0" eaLnBrk="1" latinLnBrk="0" hangingPunct="1">
+    <a:lvl7pPr marL="2743200" algn="l" defTabSz="457200" rtl="0" eaLnBrk="1" latinLnBrk="0" hangingPunct="1">
       <a:defRPr sz="1200" kern="1200">
         <a:solidFill>
           <a:schemeClr val="tx1"/>
@@ -245,7 +452,7 @@
         <a:cs typeface="+mn-cs"/>
       </a:defRPr>
     </a:lvl7pPr>
-    <a:lvl8pPr marL="3200400" algn="l" defTabSz="914400" rtl="0" eaLnBrk="1" latinLnBrk="0" hangingPunct="1">
+    <a:lvl8pPr marL="3200400" algn="l" defTabSz="457200" rtl="0" eaLnBrk="1" latinLnBrk="0" hangingPunct="1">
       <a:defRPr sz="1200" kern="1200">
         <a:solidFill>
           <a:schemeClr val="tx1"/>
@@ -255,7 +462,7 @@
         <a:cs typeface="+mn-cs"/>
       </a:defRPr>
     </a:lvl8pPr>
-    <a:lvl9pPr marL="3657600" algn="l" defTabSz="914400" rtl="0" eaLnBrk="1" latinLnBrk="0" hangingPunct="1">
+    <a:lvl9pPr marL="3657600" algn="l" defTabSz="457200" rtl="0" eaLnBrk="1" latinLnBrk="0" hangingPunct="1">
       <a:defRPr sz="1200" kern="1200">
         <a:solidFill>
           <a:schemeClr val="tx1"/>
@@ -270,7 +477,7 @@
 </file>
 
 <file path=ppt/notesSlides/notesSlide1.xml><?xml version="1.0" encoding="utf-8"?>
-<p:notes xmlns:a="http://schemas.openxmlformats.org/drawingml/2006/main" xmlns:r="http://schemas.openxmlformats.org/officeDocument/2006/relationships" xmlns:p="http://schemas.openxmlformats.org/presentationml/2006/main">
+<p:notes xmlns:a="http://schemas.openxmlformats.org/drawingml/2006/main" xmlns:p="http://schemas.openxmlformats.org/presentationml/2006/main" xmlns:r="http://schemas.openxmlformats.org/officeDocument/2006/relationships">
   <p:cSld>
     <p:spTree>
       <p:nvGrpSpPr>
@@ -290,7 +497,7 @@
         <p:nvSpPr>
           <p:cNvPr id="2" name="Slide Image Placeholder 1"/>
           <p:cNvSpPr>
-            <a:spLocks noGrp="1" noRot="1" noChangeAspect="1"/>
+            <a:spLocks noGrp="1"/>
           </p:cNvSpPr>
           <p:nvPr>
             <p:ph type="sldImg" idx="2"/>
@@ -305,7 +512,7 @@
             <a:spLocks noGrp="1"/>
           </p:cNvSpPr>
           <p:nvPr>
-            <p:ph type="body" sz="quarter" idx="3"/>
+            <p:ph type="body" idx="3" sz="quarter"/>
           </p:nvPr>
         </p:nvSpPr>
         <p:spPr/>
@@ -326,7 +533,7 @@
             <a:spLocks noGrp="1"/>
           </p:cNvSpPr>
           <p:nvPr>
-            <p:ph type="sldNum" sz="quarter" idx="5"/>
+            <p:ph type="sldNum" idx="5" sz="quarter"/>
           </p:nvPr>
         </p:nvSpPr>
         <p:spPr/>
@@ -340,7 +547,7 @@
 </file>
 
 <file path=ppt/notesSlides/notesSlide10.xml><?xml version="1.0" encoding="utf-8"?>
-<p:notes xmlns:a="http://schemas.openxmlformats.org/drawingml/2006/main" xmlns:r="http://schemas.openxmlformats.org/officeDocument/2006/relationships" xmlns:p="http://schemas.openxmlformats.org/presentationml/2006/main">
+<p:notes xmlns:a="http://schemas.openxmlformats.org/drawingml/2006/main" xmlns:p="http://schemas.openxmlformats.org/presentationml/2006/main" xmlns:r="http://schemas.openxmlformats.org/officeDocument/2006/relationships">
   <p:cSld>
     <p:spTree>
       <p:nvGrpSpPr>
@@ -360,7 +567,7 @@
         <p:nvSpPr>
           <p:cNvPr id="2" name="Slide Image Placeholder 1"/>
           <p:cNvSpPr>
-            <a:spLocks noGrp="1" noRot="1" noChangeAspect="1"/>
+            <a:spLocks noGrp="1"/>
           </p:cNvSpPr>
           <p:nvPr>
             <p:ph type="sldImg" idx="2"/>
@@ -375,7 +582,7 @@
             <a:spLocks noGrp="1"/>
           </p:cNvSpPr>
           <p:nvPr>
-            <p:ph type="body" sz="quarter" idx="3"/>
+            <p:ph type="body" idx="3" sz="quarter"/>
           </p:nvPr>
         </p:nvSpPr>
         <p:spPr/>
@@ -396,7 +603,7 @@
             <a:spLocks noGrp="1"/>
           </p:cNvSpPr>
           <p:nvPr>
-            <p:ph type="sldNum" sz="quarter" idx="5"/>
+            <p:ph type="sldNum" idx="5" sz="quarter"/>
           </p:nvPr>
         </p:nvSpPr>
         <p:spPr/>
@@ -410,7 +617,7 @@
 </file>
 
 <file path=ppt/notesSlides/notesSlide11.xml><?xml version="1.0" encoding="utf-8"?>
-<p:notes xmlns:a="http://schemas.openxmlformats.org/drawingml/2006/main" xmlns:r="http://schemas.openxmlformats.org/officeDocument/2006/relationships" xmlns:p="http://schemas.openxmlformats.org/presentationml/2006/main">
+<p:notes xmlns:a="http://schemas.openxmlformats.org/drawingml/2006/main" xmlns:p="http://schemas.openxmlformats.org/presentationml/2006/main" xmlns:r="http://schemas.openxmlformats.org/officeDocument/2006/relationships">
   <p:cSld>
     <p:spTree>
       <p:nvGrpSpPr>
@@ -430,7 +637,7 @@
         <p:nvSpPr>
           <p:cNvPr id="2" name="Slide Image Placeholder 1"/>
           <p:cNvSpPr>
-            <a:spLocks noGrp="1" noRot="1" noChangeAspect="1"/>
+            <a:spLocks noGrp="1"/>
           </p:cNvSpPr>
           <p:nvPr>
             <p:ph type="sldImg" idx="2"/>
@@ -445,7 +652,7 @@
             <a:spLocks noGrp="1"/>
           </p:cNvSpPr>
           <p:nvPr>
-            <p:ph type="body" sz="quarter" idx="3"/>
+            <p:ph type="body" idx="3" sz="quarter"/>
           </p:nvPr>
         </p:nvSpPr>
         <p:spPr/>
@@ -466,7 +673,7 @@
             <a:spLocks noGrp="1"/>
           </p:cNvSpPr>
           <p:nvPr>
-            <p:ph type="sldNum" sz="quarter" idx="5"/>
+            <p:ph type="sldNum" idx="5" sz="quarter"/>
           </p:nvPr>
         </p:nvSpPr>
         <p:spPr/>
@@ -480,7 +687,7 @@
 </file>
 
 <file path=ppt/notesSlides/notesSlide12.xml><?xml version="1.0" encoding="utf-8"?>
-<p:notes xmlns:a="http://schemas.openxmlformats.org/drawingml/2006/main" xmlns:r="http://schemas.openxmlformats.org/officeDocument/2006/relationships" xmlns:p="http://schemas.openxmlformats.org/presentationml/2006/main">
+<p:notes xmlns:a="http://schemas.openxmlformats.org/drawingml/2006/main" xmlns:p="http://schemas.openxmlformats.org/presentationml/2006/main" xmlns:r="http://schemas.openxmlformats.org/officeDocument/2006/relationships">
   <p:cSld>
     <p:spTree>
       <p:nvGrpSpPr>
@@ -500,7 +707,7 @@
         <p:nvSpPr>
           <p:cNvPr id="2" name="Slide Image Placeholder 1"/>
           <p:cNvSpPr>
-            <a:spLocks noGrp="1" noRot="1" noChangeAspect="1"/>
+            <a:spLocks noGrp="1"/>
           </p:cNvSpPr>
           <p:nvPr>
             <p:ph type="sldImg" idx="2"/>
@@ -515,7 +722,7 @@
             <a:spLocks noGrp="1"/>
           </p:cNvSpPr>
           <p:nvPr>
-            <p:ph type="body" sz="quarter" idx="3"/>
+            <p:ph type="body" idx="3" sz="quarter"/>
           </p:nvPr>
         </p:nvSpPr>
         <p:spPr/>
@@ -536,7 +743,7 @@
             <a:spLocks noGrp="1"/>
           </p:cNvSpPr>
           <p:nvPr>
-            <p:ph type="sldNum" sz="quarter" idx="5"/>
+            <p:ph type="sldNum" idx="5" sz="quarter"/>
           </p:nvPr>
         </p:nvSpPr>
         <p:spPr/>
@@ -550,7 +757,7 @@
 </file>
 
 <file path=ppt/notesSlides/notesSlide13.xml><?xml version="1.0" encoding="utf-8"?>
-<p:notes xmlns:a="http://schemas.openxmlformats.org/drawingml/2006/main" xmlns:r="http://schemas.openxmlformats.org/officeDocument/2006/relationships" xmlns:p="http://schemas.openxmlformats.org/presentationml/2006/main">
+<p:notes xmlns:a="http://schemas.openxmlformats.org/drawingml/2006/main" xmlns:p="http://schemas.openxmlformats.org/presentationml/2006/main" xmlns:r="http://schemas.openxmlformats.org/officeDocument/2006/relationships">
   <p:cSld>
     <p:spTree>
       <p:nvGrpSpPr>
@@ -570,7 +777,7 @@
         <p:nvSpPr>
           <p:cNvPr id="2" name="Slide Image Placeholder 1"/>
           <p:cNvSpPr>
-            <a:spLocks noGrp="1" noRot="1" noChangeAspect="1"/>
+            <a:spLocks noGrp="1"/>
           </p:cNvSpPr>
           <p:nvPr>
             <p:ph type="sldImg" idx="2"/>
@@ -585,7 +792,7 @@
             <a:spLocks noGrp="1"/>
           </p:cNvSpPr>
           <p:nvPr>
-            <p:ph type="body" sz="quarter" idx="3"/>
+            <p:ph type="body" idx="3" sz="quarter"/>
           </p:nvPr>
         </p:nvSpPr>
         <p:spPr/>
@@ -606,7 +813,7 @@
             <a:spLocks noGrp="1"/>
           </p:cNvSpPr>
           <p:nvPr>
-            <p:ph type="sldNum" sz="quarter" idx="5"/>
+            <p:ph type="sldNum" idx="5" sz="quarter"/>
           </p:nvPr>
         </p:nvSpPr>
         <p:spPr/>
@@ -620,7 +827,7 @@
 </file>
 
 <file path=ppt/notesSlides/notesSlide14.xml><?xml version="1.0" encoding="utf-8"?>
-<p:notes xmlns:a="http://schemas.openxmlformats.org/drawingml/2006/main" xmlns:r="http://schemas.openxmlformats.org/officeDocument/2006/relationships" xmlns:p="http://schemas.openxmlformats.org/presentationml/2006/main">
+<p:notes xmlns:a="http://schemas.openxmlformats.org/drawingml/2006/main" xmlns:p="http://schemas.openxmlformats.org/presentationml/2006/main" xmlns:r="http://schemas.openxmlformats.org/officeDocument/2006/relationships">
   <p:cSld>
     <p:spTree>
       <p:nvGrpSpPr>
@@ -640,7 +847,7 @@
         <p:nvSpPr>
           <p:cNvPr id="2" name="Slide Image Placeholder 1"/>
           <p:cNvSpPr>
-            <a:spLocks noGrp="1" noRot="1" noChangeAspect="1"/>
+            <a:spLocks noGrp="1"/>
           </p:cNvSpPr>
           <p:nvPr>
             <p:ph type="sldImg" idx="2"/>
@@ -655,7 +862,7 @@
             <a:spLocks noGrp="1"/>
           </p:cNvSpPr>
           <p:nvPr>
-            <p:ph type="body" sz="quarter" idx="3"/>
+            <p:ph type="body" idx="3" sz="quarter"/>
           </p:nvPr>
         </p:nvSpPr>
         <p:spPr/>
@@ -676,7 +883,7 @@
             <a:spLocks noGrp="1"/>
           </p:cNvSpPr>
           <p:nvPr>
-            <p:ph type="sldNum" sz="quarter" idx="5"/>
+            <p:ph type="sldNum" idx="5" sz="quarter"/>
           </p:nvPr>
         </p:nvSpPr>
         <p:spPr/>
@@ -690,7 +897,7 @@
 </file>
 
 <file path=ppt/notesSlides/notesSlide15.xml><?xml version="1.0" encoding="utf-8"?>
-<p:notes xmlns:a="http://schemas.openxmlformats.org/drawingml/2006/main" xmlns:r="http://schemas.openxmlformats.org/officeDocument/2006/relationships" xmlns:p="http://schemas.openxmlformats.org/presentationml/2006/main">
+<p:notes xmlns:a="http://schemas.openxmlformats.org/drawingml/2006/main" xmlns:p="http://schemas.openxmlformats.org/presentationml/2006/main" xmlns:r="http://schemas.openxmlformats.org/officeDocument/2006/relationships">
   <p:cSld>
     <p:spTree>
       <p:nvGrpSpPr>
@@ -710,7 +917,7 @@
         <p:nvSpPr>
           <p:cNvPr id="2" name="Slide Image Placeholder 1"/>
           <p:cNvSpPr>
-            <a:spLocks noGrp="1" noRot="1" noChangeAspect="1"/>
+            <a:spLocks noGrp="1"/>
           </p:cNvSpPr>
           <p:nvPr>
             <p:ph type="sldImg" idx="2"/>
@@ -725,7 +932,7 @@
             <a:spLocks noGrp="1"/>
           </p:cNvSpPr>
           <p:nvPr>
-            <p:ph type="body" sz="quarter" idx="3"/>
+            <p:ph type="body" idx="3" sz="quarter"/>
           </p:nvPr>
         </p:nvSpPr>
         <p:spPr/>
@@ -746,7 +953,7 @@
             <a:spLocks noGrp="1"/>
           </p:cNvSpPr>
           <p:nvPr>
-            <p:ph type="sldNum" sz="quarter" idx="5"/>
+            <p:ph type="sldNum" idx="5" sz="quarter"/>
           </p:nvPr>
         </p:nvSpPr>
         <p:spPr/>
@@ -760,7 +967,7 @@
 </file>
 
 <file path=ppt/notesSlides/notesSlide16.xml><?xml version="1.0" encoding="utf-8"?>
-<p:notes xmlns:a="http://schemas.openxmlformats.org/drawingml/2006/main" xmlns:r="http://schemas.openxmlformats.org/officeDocument/2006/relationships" xmlns:p="http://schemas.openxmlformats.org/presentationml/2006/main">
+<p:notes xmlns:a="http://schemas.openxmlformats.org/drawingml/2006/main" xmlns:p="http://schemas.openxmlformats.org/presentationml/2006/main" xmlns:r="http://schemas.openxmlformats.org/officeDocument/2006/relationships">
   <p:cSld>
     <p:spTree>
       <p:nvGrpSpPr>
@@ -780,7 +987,7 @@
         <p:nvSpPr>
           <p:cNvPr id="2" name="Slide Image Placeholder 1"/>
           <p:cNvSpPr>
-            <a:spLocks noGrp="1" noRot="1" noChangeAspect="1"/>
+            <a:spLocks noGrp="1"/>
           </p:cNvSpPr>
           <p:nvPr>
             <p:ph type="sldImg" idx="2"/>
@@ -795,7 +1002,7 @@
             <a:spLocks noGrp="1"/>
           </p:cNvSpPr>
           <p:nvPr>
-            <p:ph type="body" sz="quarter" idx="3"/>
+            <p:ph type="body" idx="3" sz="quarter"/>
           </p:nvPr>
         </p:nvSpPr>
         <p:spPr/>
@@ -804,7 +1011,7 @@
           <a:lstStyle/>
           <a:p>
             <a:r>
-              <a:t>Run the smoke test on stage. PASS shows up at the end. That's the same script the grader will run.</a:t>
+              <a:t>This is the visual peak of the demo. Click Live monitor tab, click Start stream, wait two seconds for the batch-score, watch the dots appear. Around 10 seconds in, click 'Inject HIGH-risk row' - the big white-bordered red dot lands and the alert banner fires. Then deliver the disclaimer line verbatim: 'this is a streaming simulator, swapping it for Kinesis is a wire-format change, not a model change.' That sentence is what wins the rubric points.</a:t>
             </a:r>
           </a:p>
         </p:txBody>
@@ -816,7 +1023,7 @@
             <a:spLocks noGrp="1"/>
           </p:cNvSpPr>
           <p:nvPr>
-            <p:ph type="sldNum" sz="quarter" idx="5"/>
+            <p:ph type="sldNum" idx="5" sz="quarter"/>
           </p:nvPr>
         </p:nvSpPr>
         <p:spPr/>
@@ -830,7 +1037,7 @@
 </file>
 
 <file path=ppt/notesSlides/notesSlide17.xml><?xml version="1.0" encoding="utf-8"?>
-<p:notes xmlns:a="http://schemas.openxmlformats.org/drawingml/2006/main" xmlns:r="http://schemas.openxmlformats.org/officeDocument/2006/relationships" xmlns:p="http://schemas.openxmlformats.org/presentationml/2006/main">
+<p:notes xmlns:a="http://schemas.openxmlformats.org/drawingml/2006/main" xmlns:p="http://schemas.openxmlformats.org/presentationml/2006/main" xmlns:r="http://schemas.openxmlformats.org/officeDocument/2006/relationships">
   <p:cSld>
     <p:spTree>
       <p:nvGrpSpPr>
@@ -850,7 +1057,7 @@
         <p:nvSpPr>
           <p:cNvPr id="2" name="Slide Image Placeholder 1"/>
           <p:cNvSpPr>
-            <a:spLocks noGrp="1" noRot="1" noChangeAspect="1"/>
+            <a:spLocks noGrp="1"/>
           </p:cNvSpPr>
           <p:nvPr>
             <p:ph type="sldImg" idx="2"/>
@@ -865,7 +1072,7 @@
             <a:spLocks noGrp="1"/>
           </p:cNvSpPr>
           <p:nvPr>
-            <p:ph type="body" sz="quarter" idx="3"/>
+            <p:ph type="body" idx="3" sz="quarter"/>
           </p:nvPr>
         </p:nvSpPr>
         <p:spPr/>
@@ -874,7 +1081,7 @@
           <a:lstStyle/>
           <a:p>
             <a:r>
-              <a:t>Frame the pivot as a strength, not a weakness. Every capability the rubric requires is still present.</a:t>
+              <a:t>Run the smoke test on stage. PASS shows up at the end. That's the same script the grader will run.</a:t>
             </a:r>
           </a:p>
         </p:txBody>
@@ -886,7 +1093,7 @@
             <a:spLocks noGrp="1"/>
           </p:cNvSpPr>
           <p:nvPr>
-            <p:ph type="sldNum" sz="quarter" idx="5"/>
+            <p:ph type="sldNum" idx="5" sz="quarter"/>
           </p:nvPr>
         </p:nvSpPr>
         <p:spPr/>
@@ -900,7 +1107,7 @@
 </file>
 
 <file path=ppt/notesSlides/notesSlide18.xml><?xml version="1.0" encoding="utf-8"?>
-<p:notes xmlns:a="http://schemas.openxmlformats.org/drawingml/2006/main" xmlns:r="http://schemas.openxmlformats.org/officeDocument/2006/relationships" xmlns:p="http://schemas.openxmlformats.org/presentationml/2006/main">
+<p:notes xmlns:a="http://schemas.openxmlformats.org/drawingml/2006/main" xmlns:p="http://schemas.openxmlformats.org/presentationml/2006/main" xmlns:r="http://schemas.openxmlformats.org/officeDocument/2006/relationships">
   <p:cSld>
     <p:spTree>
       <p:nvGrpSpPr>
@@ -920,7 +1127,7 @@
         <p:nvSpPr>
           <p:cNvPr id="2" name="Slide Image Placeholder 1"/>
           <p:cNvSpPr>
-            <a:spLocks noGrp="1" noRot="1" noChangeAspect="1"/>
+            <a:spLocks noGrp="1"/>
           </p:cNvSpPr>
           <p:nvPr>
             <p:ph type="sldImg" idx="2"/>
@@ -935,7 +1142,7 @@
             <a:spLocks noGrp="1"/>
           </p:cNvSpPr>
           <p:nvPr>
-            <p:ph type="body" sz="quarter" idx="3"/>
+            <p:ph type="body" idx="3" sz="quarter"/>
           </p:nvPr>
         </p:nvSpPr>
         <p:spPr/>
@@ -944,7 +1151,7 @@
           <a:lstStyle/>
           <a:p>
             <a:r>
-              <a:t>Show what you didn't do. Honesty + specific roadmap signals real understanding.</a:t>
+              <a:t>Frame the pivot as a strength, not a weakness. Every capability the rubric requires is still present.</a:t>
             </a:r>
           </a:p>
         </p:txBody>
@@ -956,7 +1163,7 @@
             <a:spLocks noGrp="1"/>
           </p:cNvSpPr>
           <p:nvPr>
-            <p:ph type="sldNum" sz="quarter" idx="5"/>
+            <p:ph type="sldNum" idx="5" sz="quarter"/>
           </p:nvPr>
         </p:nvSpPr>
         <p:spPr/>
@@ -970,7 +1177,7 @@
 </file>
 
 <file path=ppt/notesSlides/notesSlide19.xml><?xml version="1.0" encoding="utf-8"?>
-<p:notes xmlns:a="http://schemas.openxmlformats.org/drawingml/2006/main" xmlns:r="http://schemas.openxmlformats.org/officeDocument/2006/relationships" xmlns:p="http://schemas.openxmlformats.org/presentationml/2006/main">
+<p:notes xmlns:a="http://schemas.openxmlformats.org/drawingml/2006/main" xmlns:p="http://schemas.openxmlformats.org/presentationml/2006/main" xmlns:r="http://schemas.openxmlformats.org/officeDocument/2006/relationships">
   <p:cSld>
     <p:spTree>
       <p:nvGrpSpPr>
@@ -990,7 +1197,7 @@
         <p:nvSpPr>
           <p:cNvPr id="2" name="Slide Image Placeholder 1"/>
           <p:cNvSpPr>
-            <a:spLocks noGrp="1" noRot="1" noChangeAspect="1"/>
+            <a:spLocks noGrp="1"/>
           </p:cNvSpPr>
           <p:nvPr>
             <p:ph type="sldImg" idx="2"/>
@@ -1005,7 +1212,7 @@
             <a:spLocks noGrp="1"/>
           </p:cNvSpPr>
           <p:nvPr>
-            <p:ph type="body" sz="quarter" idx="3"/>
+            <p:ph type="body" idx="3" sz="quarter"/>
           </p:nvPr>
         </p:nvSpPr>
         <p:spPr/>
@@ -1014,7 +1221,7 @@
           <a:lstStyle/>
           <a:p>
             <a:r>
-              <a:t>Close confidently. Repeat the live URL. Prepared Q&amp;A topics: (1) why stratified random split, (2) why precision so low, (3) why sklearn after Spark, (4) /counterfactual vs SHAP, (5) what about cost overruns, (6) what would streaming change.</a:t>
+              <a:t>Show what you didn't do. Honesty + specific roadmap signals real understanding.</a:t>
             </a:r>
           </a:p>
         </p:txBody>
@@ -1026,7 +1233,7 @@
             <a:spLocks noGrp="1"/>
           </p:cNvSpPr>
           <p:nvPr>
-            <p:ph type="sldNum" sz="quarter" idx="5"/>
+            <p:ph type="sldNum" idx="5" sz="quarter"/>
           </p:nvPr>
         </p:nvSpPr>
         <p:spPr/>
@@ -1040,7 +1247,7 @@
 </file>
 
 <file path=ppt/notesSlides/notesSlide2.xml><?xml version="1.0" encoding="utf-8"?>
-<p:notes xmlns:a="http://schemas.openxmlformats.org/drawingml/2006/main" xmlns:r="http://schemas.openxmlformats.org/officeDocument/2006/relationships" xmlns:p="http://schemas.openxmlformats.org/presentationml/2006/main">
+<p:notes xmlns:a="http://schemas.openxmlformats.org/drawingml/2006/main" xmlns:p="http://schemas.openxmlformats.org/presentationml/2006/main" xmlns:r="http://schemas.openxmlformats.org/officeDocument/2006/relationships">
   <p:cSld>
     <p:spTree>
       <p:nvGrpSpPr>
@@ -1060,7 +1267,7 @@
         <p:nvSpPr>
           <p:cNvPr id="2" name="Slide Image Placeholder 1"/>
           <p:cNvSpPr>
-            <a:spLocks noGrp="1" noRot="1" noChangeAspect="1"/>
+            <a:spLocks noGrp="1"/>
           </p:cNvSpPr>
           <p:nvPr>
             <p:ph type="sldImg" idx="2"/>
@@ -1075,7 +1282,7 @@
             <a:spLocks noGrp="1"/>
           </p:cNvSpPr>
           <p:nvPr>
-            <p:ph type="body" sz="quarter" idx="3"/>
+            <p:ph type="body" idx="3" sz="quarter"/>
           </p:nvPr>
         </p:nvSpPr>
         <p:spPr/>
@@ -1096,7 +1303,7 @@
             <a:spLocks noGrp="1"/>
           </p:cNvSpPr>
           <p:nvPr>
-            <p:ph type="sldNum" sz="quarter" idx="5"/>
+            <p:ph type="sldNum" idx="5" sz="quarter"/>
           </p:nvPr>
         </p:nvSpPr>
         <p:spPr/>
@@ -1109,8 +1316,8 @@
 </p:notes>
 </file>
 
-<file path=ppt/notesSlides/notesSlide3.xml><?xml version="1.0" encoding="utf-8"?>
-<p:notes xmlns:a="http://schemas.openxmlformats.org/drawingml/2006/main" xmlns:r="http://schemas.openxmlformats.org/officeDocument/2006/relationships" xmlns:p="http://schemas.openxmlformats.org/presentationml/2006/main">
+<file path=ppt/notesSlides/notesSlide20.xml><?xml version="1.0" encoding="utf-8"?>
+<p:notes xmlns:a="http://schemas.openxmlformats.org/drawingml/2006/main" xmlns:p="http://schemas.openxmlformats.org/presentationml/2006/main" xmlns:r="http://schemas.openxmlformats.org/officeDocument/2006/relationships">
   <p:cSld>
     <p:spTree>
       <p:nvGrpSpPr>
@@ -1130,7 +1337,7 @@
         <p:nvSpPr>
           <p:cNvPr id="2" name="Slide Image Placeholder 1"/>
           <p:cNvSpPr>
-            <a:spLocks noGrp="1" noRot="1" noChangeAspect="1"/>
+            <a:spLocks noGrp="1"/>
           </p:cNvSpPr>
           <p:nvPr>
             <p:ph type="sldImg" idx="2"/>
@@ -1145,7 +1352,7 @@
             <a:spLocks noGrp="1"/>
           </p:cNvSpPr>
           <p:nvPr>
-            <p:ph type="body" sz="quarter" idx="3"/>
+            <p:ph type="body" idx="3" sz="quarter"/>
           </p:nvPr>
         </p:nvSpPr>
         <p:spPr/>
@@ -1154,7 +1361,7 @@
           <a:lstStyle/>
           <a:p>
             <a:r>
-              <a:t>Auth is 7.1 GB compressed and gzip-non-splittable - we will see why that matters two slides from now. Redteam is the tiny ground-truth file.</a:t>
+              <a:t>Close confidently. Repeat the live URL. Prepared Q&amp;A topics: (1) why stratified random split, (2) why precision so low, (3) why sklearn after Spark, (4) /counterfactual vs SHAP, (5) what about cost overruns, (6) what would streaming change.</a:t>
             </a:r>
           </a:p>
         </p:txBody>
@@ -1166,7 +1373,7 @@
             <a:spLocks noGrp="1"/>
           </p:cNvSpPr>
           <p:nvPr>
-            <p:ph type="sldNum" sz="quarter" idx="5"/>
+            <p:ph type="sldNum" idx="5" sz="quarter"/>
           </p:nvPr>
         </p:nvSpPr>
         <p:spPr/>
@@ -1179,8 +1386,8 @@
 </p:notes>
 </file>
 
-<file path=ppt/notesSlides/notesSlide4.xml><?xml version="1.0" encoding="utf-8"?>
-<p:notes xmlns:a="http://schemas.openxmlformats.org/drawingml/2006/main" xmlns:r="http://schemas.openxmlformats.org/officeDocument/2006/relationships" xmlns:p="http://schemas.openxmlformats.org/presentationml/2006/main">
+<file path=ppt/notesSlides/notesSlide3.xml><?xml version="1.0" encoding="utf-8"?>
+<p:notes xmlns:a="http://schemas.openxmlformats.org/drawingml/2006/main" xmlns:p="http://schemas.openxmlformats.org/presentationml/2006/main" xmlns:r="http://schemas.openxmlformats.org/officeDocument/2006/relationships">
   <p:cSld>
     <p:spTree>
       <p:nvGrpSpPr>
@@ -1200,7 +1407,7 @@
         <p:nvSpPr>
           <p:cNvPr id="2" name="Slide Image Placeholder 1"/>
           <p:cNvSpPr>
-            <a:spLocks noGrp="1" noRot="1" noChangeAspect="1"/>
+            <a:spLocks noGrp="1"/>
           </p:cNvSpPr>
           <p:nvPr>
             <p:ph type="sldImg" idx="2"/>
@@ -1215,7 +1422,7 @@
             <a:spLocks noGrp="1"/>
           </p:cNvSpPr>
           <p:nvPr>
-            <p:ph type="body" sz="quarter" idx="3"/>
+            <p:ph type="body" idx="3" sz="quarter"/>
           </p:nvPr>
         </p:nvSpPr>
         <p:spPr/>
@@ -1224,7 +1431,7 @@
           <a:lstStyle/>
           <a:p>
             <a:r>
-              <a:t>Drive this home: the entire signal is the red sliver. ROC AUC and PR AUC are the right metrics; F1 is misleading without context.</a:t>
+              <a:t>Auth is 7.1 GB compressed and gzip-non-splittable - we will see why that matters two slides from now. Redteam is the tiny ground-truth file.</a:t>
             </a:r>
           </a:p>
         </p:txBody>
@@ -1236,7 +1443,7 @@
             <a:spLocks noGrp="1"/>
           </p:cNvSpPr>
           <p:nvPr>
-            <p:ph type="sldNum" sz="quarter" idx="5"/>
+            <p:ph type="sldNum" idx="5" sz="quarter"/>
           </p:nvPr>
         </p:nvSpPr>
         <p:spPr/>
@@ -1249,8 +1456,8 @@
 </p:notes>
 </file>
 
-<file path=ppt/notesSlides/notesSlide5.xml><?xml version="1.0" encoding="utf-8"?>
-<p:notes xmlns:a="http://schemas.openxmlformats.org/drawingml/2006/main" xmlns:r="http://schemas.openxmlformats.org/officeDocument/2006/relationships" xmlns:p="http://schemas.openxmlformats.org/presentationml/2006/main">
+<file path=ppt/notesSlides/notesSlide4.xml><?xml version="1.0" encoding="utf-8"?>
+<p:notes xmlns:a="http://schemas.openxmlformats.org/drawingml/2006/main" xmlns:p="http://schemas.openxmlformats.org/presentationml/2006/main" xmlns:r="http://schemas.openxmlformats.org/officeDocument/2006/relationships">
   <p:cSld>
     <p:spTree>
       <p:nvGrpSpPr>
@@ -1270,7 +1477,7 @@
         <p:nvSpPr>
           <p:cNvPr id="2" name="Slide Image Placeholder 1"/>
           <p:cNvSpPr>
-            <a:spLocks noGrp="1" noRot="1" noChangeAspect="1"/>
+            <a:spLocks noGrp="1"/>
           </p:cNvSpPr>
           <p:nvPr>
             <p:ph type="sldImg" idx="2"/>
@@ -1285,7 +1492,7 @@
             <a:spLocks noGrp="1"/>
           </p:cNvSpPr>
           <p:nvPr>
-            <p:ph type="body" sz="quarter" idx="3"/>
+            <p:ph type="body" idx="3" sz="quarter"/>
           </p:nvPr>
         </p:nvSpPr>
         <p:spPr/>
@@ -1294,7 +1501,7 @@
           <a:lstStyle/>
           <a:p>
             <a:r>
-              <a:t>Lead with the rubric framing. The accent colors on the diagram match the legend. Walk top to bottom following the arrows.</a:t>
+              <a:t>Drive this home: the entire signal is the red sliver. ROC AUC and PR AUC are the right metrics; F1 is misleading without context.</a:t>
             </a:r>
           </a:p>
         </p:txBody>
@@ -1306,7 +1513,7 @@
             <a:spLocks noGrp="1"/>
           </p:cNvSpPr>
           <p:nvPr>
-            <p:ph type="sldNum" sz="quarter" idx="5"/>
+            <p:ph type="sldNum" idx="5" sz="quarter"/>
           </p:nvPr>
         </p:nvSpPr>
         <p:spPr/>
@@ -1319,8 +1526,8 @@
 </p:notes>
 </file>
 
-<file path=ppt/notesSlides/notesSlide6.xml><?xml version="1.0" encoding="utf-8"?>
-<p:notes xmlns:a="http://schemas.openxmlformats.org/drawingml/2006/main" xmlns:r="http://schemas.openxmlformats.org/officeDocument/2006/relationships" xmlns:p="http://schemas.openxmlformats.org/presentationml/2006/main">
+<file path=ppt/notesSlides/notesSlide5.xml><?xml version="1.0" encoding="utf-8"?>
+<p:notes xmlns:a="http://schemas.openxmlformats.org/drawingml/2006/main" xmlns:p="http://schemas.openxmlformats.org/presentationml/2006/main" xmlns:r="http://schemas.openxmlformats.org/officeDocument/2006/relationships">
   <p:cSld>
     <p:spTree>
       <p:nvGrpSpPr>
@@ -1340,7 +1547,7 @@
         <p:nvSpPr>
           <p:cNvPr id="2" name="Slide Image Placeholder 1"/>
           <p:cNvSpPr>
-            <a:spLocks noGrp="1" noRot="1" noChangeAspect="1"/>
+            <a:spLocks noGrp="1"/>
           </p:cNvSpPr>
           <p:nvPr>
             <p:ph type="sldImg" idx="2"/>
@@ -1355,7 +1562,7 @@
             <a:spLocks noGrp="1"/>
           </p:cNvSpPr>
           <p:nvPr>
-            <p:ph type="body" sz="quarter" idx="3"/>
+            <p:ph type="body" idx="3" sz="quarter"/>
           </p:nvPr>
         </p:nvSpPr>
         <p:spPr/>
@@ -1364,7 +1571,7 @@
           <a:lstStyle/>
           <a:p>
             <a:r>
-              <a:t>The single most important conceptual point about the architecture.</a:t>
+              <a:t>Lead with the rubric framing. The accent colors on the diagram match the legend. Walk top to bottom following the arrows.</a:t>
             </a:r>
           </a:p>
         </p:txBody>
@@ -1376,7 +1583,7 @@
             <a:spLocks noGrp="1"/>
           </p:cNvSpPr>
           <p:nvPr>
-            <p:ph type="sldNum" sz="quarter" idx="5"/>
+            <p:ph type="sldNum" idx="5" sz="quarter"/>
           </p:nvPr>
         </p:nvSpPr>
         <p:spPr/>
@@ -1389,8 +1596,8 @@
 </p:notes>
 </file>
 
-<file path=ppt/notesSlides/notesSlide7.xml><?xml version="1.0" encoding="utf-8"?>
-<p:notes xmlns:a="http://schemas.openxmlformats.org/drawingml/2006/main" xmlns:r="http://schemas.openxmlformats.org/officeDocument/2006/relationships" xmlns:p="http://schemas.openxmlformats.org/presentationml/2006/main">
+<file path=ppt/notesSlides/notesSlide6.xml><?xml version="1.0" encoding="utf-8"?>
+<p:notes xmlns:a="http://schemas.openxmlformats.org/drawingml/2006/main" xmlns:p="http://schemas.openxmlformats.org/presentationml/2006/main" xmlns:r="http://schemas.openxmlformats.org/officeDocument/2006/relationships">
   <p:cSld>
     <p:spTree>
       <p:nvGrpSpPr>
@@ -1410,7 +1617,7 @@
         <p:nvSpPr>
           <p:cNvPr id="2" name="Slide Image Placeholder 1"/>
           <p:cNvSpPr>
-            <a:spLocks noGrp="1" noRot="1" noChangeAspect="1"/>
+            <a:spLocks noGrp="1"/>
           </p:cNvSpPr>
           <p:nvPr>
             <p:ph type="sldImg" idx="2"/>
@@ -1425,7 +1632,7 @@
             <a:spLocks noGrp="1"/>
           </p:cNvSpPr>
           <p:nvPr>
-            <p:ph type="body" sz="quarter" idx="3"/>
+            <p:ph type="body" idx="3" sz="quarter"/>
           </p:nvPr>
         </p:nvSpPr>
         <p:spPr/>
@@ -1434,7 +1641,7 @@
           <a:lstStyle/>
           <a:p>
             <a:r>
-              <a:t>Three layers of defense. Real-world anti-leakage isn't a vibe - it's three concrete code mechanisms working together.</a:t>
+              <a:t>The single most important conceptual point about the architecture.</a:t>
             </a:r>
           </a:p>
         </p:txBody>
@@ -1446,7 +1653,7 @@
             <a:spLocks noGrp="1"/>
           </p:cNvSpPr>
           <p:nvPr>
-            <p:ph type="sldNum" sz="quarter" idx="5"/>
+            <p:ph type="sldNum" idx="5" sz="quarter"/>
           </p:nvPr>
         </p:nvSpPr>
         <p:spPr/>
@@ -1459,8 +1666,8 @@
 </p:notes>
 </file>
 
-<file path=ppt/notesSlides/notesSlide8.xml><?xml version="1.0" encoding="utf-8"?>
-<p:notes xmlns:a="http://schemas.openxmlformats.org/drawingml/2006/main" xmlns:r="http://schemas.openxmlformats.org/officeDocument/2006/relationships" xmlns:p="http://schemas.openxmlformats.org/presentationml/2006/main">
+<file path=ppt/notesSlides/notesSlide7.xml><?xml version="1.0" encoding="utf-8"?>
+<p:notes xmlns:a="http://schemas.openxmlformats.org/drawingml/2006/main" xmlns:p="http://schemas.openxmlformats.org/presentationml/2006/main" xmlns:r="http://schemas.openxmlformats.org/officeDocument/2006/relationships">
   <p:cSld>
     <p:spTree>
       <p:nvGrpSpPr>
@@ -1480,7 +1687,7 @@
         <p:nvSpPr>
           <p:cNvPr id="2" name="Slide Image Placeholder 1"/>
           <p:cNvSpPr>
-            <a:spLocks noGrp="1" noRot="1" noChangeAspect="1"/>
+            <a:spLocks noGrp="1"/>
           </p:cNvSpPr>
           <p:nvPr>
             <p:ph type="sldImg" idx="2"/>
@@ -1495,7 +1702,7 @@
             <a:spLocks noGrp="1"/>
           </p:cNvSpPr>
           <p:nvPr>
-            <p:ph type="body" sz="quarter" idx="3"/>
+            <p:ph type="body" idx="3" sz="quarter"/>
           </p:nvPr>
         </p:nvSpPr>
         <p:spPr/>
@@ -1504,7 +1711,7 @@
           <a:lstStyle/>
           <a:p>
             <a:r>
-              <a:t>Real distributed-computing trade-offs. The gzip-non-splittable insight is exactly the kind of detail that signals deep understanding.</a:t>
+              <a:t>Three layers of defense. Real-world anti-leakage isn't a vibe - it's three concrete code mechanisms working together.</a:t>
             </a:r>
           </a:p>
         </p:txBody>
@@ -1516,7 +1723,7 @@
             <a:spLocks noGrp="1"/>
           </p:cNvSpPr>
           <p:nvPr>
-            <p:ph type="sldNum" sz="quarter" idx="5"/>
+            <p:ph type="sldNum" idx="5" sz="quarter"/>
           </p:nvPr>
         </p:nvSpPr>
         <p:spPr/>
@@ -1529,8 +1736,8 @@
 </p:notes>
 </file>
 
-<file path=ppt/notesSlides/notesSlide9.xml><?xml version="1.0" encoding="utf-8"?>
-<p:notes xmlns:a="http://schemas.openxmlformats.org/drawingml/2006/main" xmlns:r="http://schemas.openxmlformats.org/officeDocument/2006/relationships" xmlns:p="http://schemas.openxmlformats.org/presentationml/2006/main">
+<file path=ppt/notesSlides/notesSlide8.xml><?xml version="1.0" encoding="utf-8"?>
+<p:notes xmlns:a="http://schemas.openxmlformats.org/drawingml/2006/main" xmlns:p="http://schemas.openxmlformats.org/presentationml/2006/main" xmlns:r="http://schemas.openxmlformats.org/officeDocument/2006/relationships">
   <p:cSld>
     <p:spTree>
       <p:nvGrpSpPr>
@@ -1550,7 +1757,7 @@
         <p:nvSpPr>
           <p:cNvPr id="2" name="Slide Image Placeholder 1"/>
           <p:cNvSpPr>
-            <a:spLocks noGrp="1" noRot="1" noChangeAspect="1"/>
+            <a:spLocks noGrp="1"/>
           </p:cNvSpPr>
           <p:nvPr>
             <p:ph type="sldImg" idx="2"/>
@@ -1565,7 +1772,7 @@
             <a:spLocks noGrp="1"/>
           </p:cNvSpPr>
           <p:nvPr>
-            <p:ph type="body" sz="quarter" idx="3"/>
+            <p:ph type="body" idx="3" sz="quarter"/>
           </p:nvPr>
         </p:nvSpPr>
         <p:spPr/>
@@ -1574,7 +1781,7 @@
           <a:lstStyle/>
           <a:p>
             <a:r>
-              <a:t>The rubric requires Model Registry, not just MLflow tracking. The alias is what makes it auditable - any reviewer can answer 'which version is serving prod' in one query.</a:t>
+              <a:t>Real distributed-computing trade-offs. The gzip-non-splittable insight is exactly the kind of detail that signals deep understanding.</a:t>
             </a:r>
           </a:p>
         </p:txBody>
@@ -1586,7 +1793,77 @@
             <a:spLocks noGrp="1"/>
           </p:cNvSpPr>
           <p:nvPr>
-            <p:ph type="sldNum" sz="quarter" idx="5"/>
+            <p:ph type="sldNum" idx="5" sz="quarter"/>
+          </p:nvPr>
+        </p:nvSpPr>
+        <p:spPr/>
+      </p:sp>
+    </p:spTree>
+  </p:cSld>
+  <p:clrMapOvr>
+    <a:masterClrMapping/>
+  </p:clrMapOvr>
+</p:notes>
+</file>
+
+<file path=ppt/notesSlides/notesSlide9.xml><?xml version="1.0" encoding="utf-8"?>
+<p:notes xmlns:a="http://schemas.openxmlformats.org/drawingml/2006/main" xmlns:p="http://schemas.openxmlformats.org/presentationml/2006/main" xmlns:r="http://schemas.openxmlformats.org/officeDocument/2006/relationships">
+  <p:cSld>
+    <p:spTree>
+      <p:nvGrpSpPr>
+        <p:cNvPr id="1" name=""/>
+        <p:cNvGrpSpPr/>
+        <p:nvPr/>
+      </p:nvGrpSpPr>
+      <p:grpSpPr>
+        <a:xfrm>
+          <a:off x="0" y="0"/>
+          <a:ext cx="0" cy="0"/>
+          <a:chOff x="0" y="0"/>
+          <a:chExt cx="0" cy="0"/>
+        </a:xfrm>
+      </p:grpSpPr>
+      <p:sp>
+        <p:nvSpPr>
+          <p:cNvPr id="2" name="Slide Image Placeholder 1"/>
+          <p:cNvSpPr>
+            <a:spLocks noGrp="1"/>
+          </p:cNvSpPr>
+          <p:nvPr>
+            <p:ph type="sldImg" idx="2"/>
+          </p:nvPr>
+        </p:nvSpPr>
+        <p:spPr/>
+      </p:sp>
+      <p:sp>
+        <p:nvSpPr>
+          <p:cNvPr id="3" name="Notes Placeholder 2"/>
+          <p:cNvSpPr>
+            <a:spLocks noGrp="1"/>
+          </p:cNvSpPr>
+          <p:nvPr>
+            <p:ph type="body" idx="3" sz="quarter"/>
+          </p:nvPr>
+        </p:nvSpPr>
+        <p:spPr/>
+        <p:txBody>
+          <a:bodyPr/>
+          <a:lstStyle/>
+          <a:p>
+            <a:r>
+              <a:t>The rubric requires Model Registry, not just MLflow tracking. The alias is what makes it auditable - any reviewer can answer 'which version is serving prod' in one query.</a:t>
+            </a:r>
+          </a:p>
+        </p:txBody>
+      </p:sp>
+      <p:sp>
+        <p:nvSpPr>
+          <p:cNvPr id="4" name="Slide Number Placeholder 3"/>
+          <p:cNvSpPr>
+            <a:spLocks noGrp="1"/>
+          </p:cNvSpPr>
+          <p:nvPr>
+            <p:ph type="sldNum" idx="5" sz="quarter"/>
           </p:nvPr>
         </p:nvSpPr>
         <p:spPr/>
@@ -1637,9 +1914,10 @@
           <a:lstStyle/>
           <a:p>
             <a:r>
-              <a:rPr lang="en-US"/>
+              <a:rPr lang="en-US" smtClean="0"/>
               <a:t>Click to edit Master title style</a:t>
             </a:r>
+            <a:endParaRPr lang="en-US"/>
           </a:p>
         </p:txBody>
       </p:sp>
@@ -1755,9 +2033,10 @@
           </a:lstStyle>
           <a:p>
             <a:r>
-              <a:rPr lang="en-US"/>
+              <a:rPr lang="en-US" smtClean="0"/>
               <a:t>Click to edit Master subtitle style</a:t>
             </a:r>
+            <a:endParaRPr lang="en-US"/>
           </a:p>
         </p:txBody>
       </p:sp>
@@ -1778,7 +2057,7 @@
           <a:p>
             <a:fld id="{5BCAD085-E8A6-8845-BD4E-CB4CCA059FC4}" type="datetimeFigureOut">
               <a:rPr lang="en-US" smtClean="0"/>
-              <a:t>5/12/2026</a:t>
+              <a:t>1/27/13</a:t>
             </a:fld>
             <a:endParaRPr lang="en-US"/>
           </a:p>
@@ -1872,9 +2151,10 @@
           <a:lstStyle/>
           <a:p>
             <a:r>
-              <a:rPr lang="en-US"/>
+              <a:rPr lang="en-US" smtClean="0"/>
               <a:t>Click to edit Master title style</a:t>
             </a:r>
+            <a:endParaRPr lang="en-US"/>
           </a:p>
         </p:txBody>
       </p:sp>
@@ -1895,37 +2175,38 @@
           <a:p>
             <a:pPr lvl="0"/>
             <a:r>
-              <a:rPr lang="en-US"/>
+              <a:rPr lang="en-US" smtClean="0"/>
               <a:t>Click to edit Master text styles</a:t>
             </a:r>
           </a:p>
           <a:p>
             <a:pPr lvl="1"/>
             <a:r>
-              <a:rPr lang="en-US"/>
+              <a:rPr lang="en-US" smtClean="0"/>
               <a:t>Second level</a:t>
             </a:r>
           </a:p>
           <a:p>
             <a:pPr lvl="2"/>
             <a:r>
-              <a:rPr lang="en-US"/>
+              <a:rPr lang="en-US" smtClean="0"/>
               <a:t>Third level</a:t>
             </a:r>
           </a:p>
           <a:p>
             <a:pPr lvl="3"/>
             <a:r>
-              <a:rPr lang="en-US"/>
+              <a:rPr lang="en-US" smtClean="0"/>
               <a:t>Fourth level</a:t>
             </a:r>
           </a:p>
           <a:p>
             <a:pPr lvl="4"/>
             <a:r>
-              <a:rPr lang="en-US"/>
+              <a:rPr lang="en-US" smtClean="0"/>
               <a:t>Fifth level</a:t>
             </a:r>
+            <a:endParaRPr lang="en-US"/>
           </a:p>
         </p:txBody>
       </p:sp>
@@ -1946,7 +2227,7 @@
           <a:p>
             <a:fld id="{5BCAD085-E8A6-8845-BD4E-CB4CCA059FC4}" type="datetimeFigureOut">
               <a:rPr lang="en-US" smtClean="0"/>
-              <a:t>5/12/2026</a:t>
+              <a:t>1/27/13</a:t>
             </a:fld>
             <a:endParaRPr lang="en-US"/>
           </a:p>
@@ -2045,9 +2326,10 @@
           <a:lstStyle/>
           <a:p>
             <a:r>
-              <a:rPr lang="en-US"/>
+              <a:rPr lang="en-US" smtClean="0"/>
               <a:t>Click to edit Master title style</a:t>
             </a:r>
+            <a:endParaRPr lang="en-US"/>
           </a:p>
         </p:txBody>
       </p:sp>
@@ -2073,37 +2355,38 @@
           <a:p>
             <a:pPr lvl="0"/>
             <a:r>
-              <a:rPr lang="en-US"/>
+              <a:rPr lang="en-US" smtClean="0"/>
               <a:t>Click to edit Master text styles</a:t>
             </a:r>
           </a:p>
           <a:p>
             <a:pPr lvl="1"/>
             <a:r>
-              <a:rPr lang="en-US"/>
+              <a:rPr lang="en-US" smtClean="0"/>
               <a:t>Second level</a:t>
             </a:r>
           </a:p>
           <a:p>
             <a:pPr lvl="2"/>
             <a:r>
-              <a:rPr lang="en-US"/>
+              <a:rPr lang="en-US" smtClean="0"/>
               <a:t>Third level</a:t>
             </a:r>
           </a:p>
           <a:p>
             <a:pPr lvl="3"/>
             <a:r>
-              <a:rPr lang="en-US"/>
+              <a:rPr lang="en-US" smtClean="0"/>
               <a:t>Fourth level</a:t>
             </a:r>
           </a:p>
           <a:p>
             <a:pPr lvl="4"/>
             <a:r>
-              <a:rPr lang="en-US"/>
+              <a:rPr lang="en-US" smtClean="0"/>
               <a:t>Fifth level</a:t>
             </a:r>
+            <a:endParaRPr lang="en-US"/>
           </a:p>
         </p:txBody>
       </p:sp>
@@ -2124,7 +2407,7 @@
           <a:p>
             <a:fld id="{5BCAD085-E8A6-8845-BD4E-CB4CCA059FC4}" type="datetimeFigureOut">
               <a:rPr lang="en-US" smtClean="0"/>
-              <a:t>5/12/2026</a:t>
+              <a:t>1/27/13</a:t>
             </a:fld>
             <a:endParaRPr lang="en-US"/>
           </a:p>
@@ -2218,9 +2501,10 @@
           <a:lstStyle/>
           <a:p>
             <a:r>
-              <a:rPr lang="en-US"/>
+              <a:rPr lang="en-US" smtClean="0"/>
               <a:t>Click to edit Master title style</a:t>
             </a:r>
+            <a:endParaRPr lang="en-US"/>
           </a:p>
         </p:txBody>
       </p:sp>
@@ -2241,37 +2525,38 @@
           <a:p>
             <a:pPr lvl="0"/>
             <a:r>
-              <a:rPr lang="en-US"/>
+              <a:rPr lang="en-US" smtClean="0"/>
               <a:t>Click to edit Master text styles</a:t>
             </a:r>
           </a:p>
           <a:p>
             <a:pPr lvl="1"/>
             <a:r>
-              <a:rPr lang="en-US"/>
+              <a:rPr lang="en-US" smtClean="0"/>
               <a:t>Second level</a:t>
             </a:r>
           </a:p>
           <a:p>
             <a:pPr lvl="2"/>
             <a:r>
-              <a:rPr lang="en-US"/>
+              <a:rPr lang="en-US" smtClean="0"/>
               <a:t>Third level</a:t>
             </a:r>
           </a:p>
           <a:p>
             <a:pPr lvl="3"/>
             <a:r>
-              <a:rPr lang="en-US"/>
+              <a:rPr lang="en-US" smtClean="0"/>
               <a:t>Fourth level</a:t>
             </a:r>
           </a:p>
           <a:p>
             <a:pPr lvl="4"/>
             <a:r>
-              <a:rPr lang="en-US"/>
+              <a:rPr lang="en-US" smtClean="0"/>
               <a:t>Fifth level</a:t>
             </a:r>
+            <a:endParaRPr lang="en-US"/>
           </a:p>
         </p:txBody>
       </p:sp>
@@ -2292,7 +2577,7 @@
           <a:p>
             <a:fld id="{5BCAD085-E8A6-8845-BD4E-CB4CCA059FC4}" type="datetimeFigureOut">
               <a:rPr lang="en-US" smtClean="0"/>
-              <a:t>5/12/2026</a:t>
+              <a:t>1/27/13</a:t>
             </a:fld>
             <a:endParaRPr lang="en-US"/>
           </a:p>
@@ -2395,9 +2680,10 @@
           </a:lstStyle>
           <a:p>
             <a:r>
-              <a:rPr lang="en-US"/>
+              <a:rPr lang="en-US" smtClean="0"/>
               <a:t>Click to edit Master title style</a:t>
             </a:r>
+            <a:endParaRPr lang="en-US"/>
           </a:p>
         </p:txBody>
       </p:sp>
@@ -2514,7 +2800,7 @@
           <a:p>
             <a:pPr lvl="0"/>
             <a:r>
-              <a:rPr lang="en-US"/>
+              <a:rPr lang="en-US" smtClean="0"/>
               <a:t>Click to edit Master text styles</a:t>
             </a:r>
           </a:p>
@@ -2537,7 +2823,7 @@
           <a:p>
             <a:fld id="{5BCAD085-E8A6-8845-BD4E-CB4CCA059FC4}" type="datetimeFigureOut">
               <a:rPr lang="en-US" smtClean="0"/>
-              <a:t>5/12/2026</a:t>
+              <a:t>1/27/13</a:t>
             </a:fld>
             <a:endParaRPr lang="en-US"/>
           </a:p>
@@ -2631,9 +2917,10 @@
           <a:lstStyle/>
           <a:p>
             <a:r>
-              <a:rPr lang="en-US"/>
+              <a:rPr lang="en-US" smtClean="0"/>
               <a:t>Click to edit Master title style</a:t>
             </a:r>
+            <a:endParaRPr lang="en-US"/>
           </a:p>
         </p:txBody>
       </p:sp>
@@ -2687,37 +2974,38 @@
           <a:p>
             <a:pPr lvl="0"/>
             <a:r>
-              <a:rPr lang="en-US"/>
+              <a:rPr lang="en-US" smtClean="0"/>
               <a:t>Click to edit Master text styles</a:t>
             </a:r>
           </a:p>
           <a:p>
             <a:pPr lvl="1"/>
             <a:r>
-              <a:rPr lang="en-US"/>
+              <a:rPr lang="en-US" smtClean="0"/>
               <a:t>Second level</a:t>
             </a:r>
           </a:p>
           <a:p>
             <a:pPr lvl="2"/>
             <a:r>
-              <a:rPr lang="en-US"/>
+              <a:rPr lang="en-US" smtClean="0"/>
               <a:t>Third level</a:t>
             </a:r>
           </a:p>
           <a:p>
             <a:pPr lvl="3"/>
             <a:r>
-              <a:rPr lang="en-US"/>
+              <a:rPr lang="en-US" smtClean="0"/>
               <a:t>Fourth level</a:t>
             </a:r>
           </a:p>
           <a:p>
             <a:pPr lvl="4"/>
             <a:r>
-              <a:rPr lang="en-US"/>
+              <a:rPr lang="en-US" smtClean="0"/>
               <a:t>Fifth level</a:t>
             </a:r>
+            <a:endParaRPr lang="en-US"/>
           </a:p>
         </p:txBody>
       </p:sp>
@@ -2771,37 +3059,38 @@
           <a:p>
             <a:pPr lvl="0"/>
             <a:r>
-              <a:rPr lang="en-US"/>
+              <a:rPr lang="en-US" smtClean="0"/>
               <a:t>Click to edit Master text styles</a:t>
             </a:r>
           </a:p>
           <a:p>
             <a:pPr lvl="1"/>
             <a:r>
-              <a:rPr lang="en-US"/>
+              <a:rPr lang="en-US" smtClean="0"/>
               <a:t>Second level</a:t>
             </a:r>
           </a:p>
           <a:p>
             <a:pPr lvl="2"/>
             <a:r>
-              <a:rPr lang="en-US"/>
+              <a:rPr lang="en-US" smtClean="0"/>
               <a:t>Third level</a:t>
             </a:r>
           </a:p>
           <a:p>
             <a:pPr lvl="3"/>
             <a:r>
-              <a:rPr lang="en-US"/>
+              <a:rPr lang="en-US" smtClean="0"/>
               <a:t>Fourth level</a:t>
             </a:r>
           </a:p>
           <a:p>
             <a:pPr lvl="4"/>
             <a:r>
-              <a:rPr lang="en-US"/>
+              <a:rPr lang="en-US" smtClean="0"/>
               <a:t>Fifth level</a:t>
             </a:r>
+            <a:endParaRPr lang="en-US"/>
           </a:p>
         </p:txBody>
       </p:sp>
@@ -2822,7 +3111,7 @@
           <a:p>
             <a:fld id="{5BCAD085-E8A6-8845-BD4E-CB4CCA059FC4}" type="datetimeFigureOut">
               <a:rPr lang="en-US" smtClean="0"/>
-              <a:t>5/12/2026</a:t>
+              <a:t>1/27/13</a:t>
             </a:fld>
             <a:endParaRPr lang="en-US"/>
           </a:p>
@@ -2920,9 +3209,10 @@
           </a:lstStyle>
           <a:p>
             <a:r>
-              <a:rPr lang="en-US"/>
+              <a:rPr lang="en-US" smtClean="0"/>
               <a:t>Click to edit Master title style</a:t>
             </a:r>
+            <a:endParaRPr lang="en-US"/>
           </a:p>
         </p:txBody>
       </p:sp>
@@ -2985,7 +3275,7 @@
           <a:p>
             <a:pPr lvl="0"/>
             <a:r>
-              <a:rPr lang="en-US"/>
+              <a:rPr lang="en-US" smtClean="0"/>
               <a:t>Click to edit Master text styles</a:t>
             </a:r>
           </a:p>
@@ -3041,37 +3331,38 @@
           <a:p>
             <a:pPr lvl="0"/>
             <a:r>
-              <a:rPr lang="en-US"/>
+              <a:rPr lang="en-US" smtClean="0"/>
               <a:t>Click to edit Master text styles</a:t>
             </a:r>
           </a:p>
           <a:p>
             <a:pPr lvl="1"/>
             <a:r>
-              <a:rPr lang="en-US"/>
+              <a:rPr lang="en-US" smtClean="0"/>
               <a:t>Second level</a:t>
             </a:r>
           </a:p>
           <a:p>
             <a:pPr lvl="2"/>
             <a:r>
-              <a:rPr lang="en-US"/>
+              <a:rPr lang="en-US" smtClean="0"/>
               <a:t>Third level</a:t>
             </a:r>
           </a:p>
           <a:p>
             <a:pPr lvl="3"/>
             <a:r>
-              <a:rPr lang="en-US"/>
+              <a:rPr lang="en-US" smtClean="0"/>
               <a:t>Fourth level</a:t>
             </a:r>
           </a:p>
           <a:p>
             <a:pPr lvl="4"/>
             <a:r>
-              <a:rPr lang="en-US"/>
+              <a:rPr lang="en-US" smtClean="0"/>
               <a:t>Fifth level</a:t>
             </a:r>
+            <a:endParaRPr lang="en-US"/>
           </a:p>
         </p:txBody>
       </p:sp>
@@ -3134,7 +3425,7 @@
           <a:p>
             <a:pPr lvl="0"/>
             <a:r>
-              <a:rPr lang="en-US"/>
+              <a:rPr lang="en-US" smtClean="0"/>
               <a:t>Click to edit Master text styles</a:t>
             </a:r>
           </a:p>
@@ -3190,37 +3481,38 @@
           <a:p>
             <a:pPr lvl="0"/>
             <a:r>
-              <a:rPr lang="en-US"/>
+              <a:rPr lang="en-US" smtClean="0"/>
               <a:t>Click to edit Master text styles</a:t>
             </a:r>
           </a:p>
           <a:p>
             <a:pPr lvl="1"/>
             <a:r>
-              <a:rPr lang="en-US"/>
+              <a:rPr lang="en-US" smtClean="0"/>
               <a:t>Second level</a:t>
             </a:r>
           </a:p>
           <a:p>
             <a:pPr lvl="2"/>
             <a:r>
-              <a:rPr lang="en-US"/>
+              <a:rPr lang="en-US" smtClean="0"/>
               <a:t>Third level</a:t>
             </a:r>
           </a:p>
           <a:p>
             <a:pPr lvl="3"/>
             <a:r>
-              <a:rPr lang="en-US"/>
+              <a:rPr lang="en-US" smtClean="0"/>
               <a:t>Fourth level</a:t>
             </a:r>
           </a:p>
           <a:p>
             <a:pPr lvl="4"/>
             <a:r>
-              <a:rPr lang="en-US"/>
+              <a:rPr lang="en-US" smtClean="0"/>
               <a:t>Fifth level</a:t>
             </a:r>
+            <a:endParaRPr lang="en-US"/>
           </a:p>
         </p:txBody>
       </p:sp>
@@ -3241,7 +3533,7 @@
           <a:p>
             <a:fld id="{5BCAD085-E8A6-8845-BD4E-CB4CCA059FC4}" type="datetimeFigureOut">
               <a:rPr lang="en-US" smtClean="0"/>
-              <a:t>5/12/2026</a:t>
+              <a:t>1/27/13</a:t>
             </a:fld>
             <a:endParaRPr lang="en-US"/>
           </a:p>
@@ -3335,9 +3627,10 @@
           <a:lstStyle/>
           <a:p>
             <a:r>
-              <a:rPr lang="en-US"/>
+              <a:rPr lang="en-US" smtClean="0"/>
               <a:t>Click to edit Master title style</a:t>
             </a:r>
+            <a:endParaRPr lang="en-US"/>
           </a:p>
         </p:txBody>
       </p:sp>
@@ -3358,7 +3651,7 @@
           <a:p>
             <a:fld id="{5BCAD085-E8A6-8845-BD4E-CB4CCA059FC4}" type="datetimeFigureOut">
               <a:rPr lang="en-US" smtClean="0"/>
-              <a:t>5/12/2026</a:t>
+              <a:t>1/27/13</a:t>
             </a:fld>
             <a:endParaRPr lang="en-US"/>
           </a:p>
@@ -3453,7 +3746,7 @@
           <a:p>
             <a:fld id="{5BCAD085-E8A6-8845-BD4E-CB4CCA059FC4}" type="datetimeFigureOut">
               <a:rPr lang="en-US" smtClean="0"/>
-              <a:t>5/12/2026</a:t>
+              <a:t>1/27/13</a:t>
             </a:fld>
             <a:endParaRPr lang="en-US"/>
           </a:p>
@@ -3556,9 +3849,10 @@
           </a:lstStyle>
           <a:p>
             <a:r>
-              <a:rPr lang="en-US"/>
+              <a:rPr lang="en-US" smtClean="0"/>
               <a:t>Click to edit Master title style</a:t>
             </a:r>
+            <a:endParaRPr lang="en-US"/>
           </a:p>
         </p:txBody>
       </p:sp>
@@ -3612,37 +3906,38 @@
           <a:p>
             <a:pPr lvl="0"/>
             <a:r>
-              <a:rPr lang="en-US"/>
+              <a:rPr lang="en-US" smtClean="0"/>
               <a:t>Click to edit Master text styles</a:t>
             </a:r>
           </a:p>
           <a:p>
             <a:pPr lvl="1"/>
             <a:r>
-              <a:rPr lang="en-US"/>
+              <a:rPr lang="en-US" smtClean="0"/>
               <a:t>Second level</a:t>
             </a:r>
           </a:p>
           <a:p>
             <a:pPr lvl="2"/>
             <a:r>
-              <a:rPr lang="en-US"/>
+              <a:rPr lang="en-US" smtClean="0"/>
               <a:t>Third level</a:t>
             </a:r>
           </a:p>
           <a:p>
             <a:pPr lvl="3"/>
             <a:r>
-              <a:rPr lang="en-US"/>
+              <a:rPr lang="en-US" smtClean="0"/>
               <a:t>Fourth level</a:t>
             </a:r>
           </a:p>
           <a:p>
             <a:pPr lvl="4"/>
             <a:r>
-              <a:rPr lang="en-US"/>
+              <a:rPr lang="en-US" smtClean="0"/>
               <a:t>Fifth level</a:t>
             </a:r>
+            <a:endParaRPr lang="en-US"/>
           </a:p>
         </p:txBody>
       </p:sp>
@@ -3705,7 +4000,7 @@
           <a:p>
             <a:pPr lvl="0"/>
             <a:r>
-              <a:rPr lang="en-US"/>
+              <a:rPr lang="en-US" smtClean="0"/>
               <a:t>Click to edit Master text styles</a:t>
             </a:r>
           </a:p>
@@ -3728,7 +4023,7 @@
           <a:p>
             <a:fld id="{5BCAD085-E8A6-8845-BD4E-CB4CCA059FC4}" type="datetimeFigureOut">
               <a:rPr lang="en-US" smtClean="0"/>
-              <a:t>5/12/2026</a:t>
+              <a:t>1/27/13</a:t>
             </a:fld>
             <a:endParaRPr lang="en-US"/>
           </a:p>
@@ -3831,9 +4126,10 @@
           </a:lstStyle>
           <a:p>
             <a:r>
-              <a:rPr lang="en-US"/>
+              <a:rPr lang="en-US" smtClean="0"/>
               <a:t>Click to edit Master title style</a:t>
             </a:r>
+            <a:endParaRPr lang="en-US"/>
           </a:p>
         </p:txBody>
       </p:sp>
@@ -3957,7 +4253,7 @@
           <a:p>
             <a:pPr lvl="0"/>
             <a:r>
-              <a:rPr lang="en-US"/>
+              <a:rPr lang="en-US" smtClean="0"/>
               <a:t>Click to edit Master text styles</a:t>
             </a:r>
           </a:p>
@@ -3980,7 +4276,7 @@
           <a:p>
             <a:fld id="{5BCAD085-E8A6-8845-BD4E-CB4CCA059FC4}" type="datetimeFigureOut">
               <a:rPr lang="en-US" smtClean="0"/>
-              <a:t>5/12/2026</a:t>
+              <a:t>1/27/13</a:t>
             </a:fld>
             <a:endParaRPr lang="en-US"/>
           </a:p>
@@ -4089,9 +4385,10 @@
           <a:lstStyle/>
           <a:p>
             <a:r>
-              <a:rPr lang="en-US"/>
+              <a:rPr lang="en-US" smtClean="0"/>
               <a:t>Click to edit Master title style</a:t>
             </a:r>
+            <a:endParaRPr lang="en-US"/>
           </a:p>
         </p:txBody>
       </p:sp>
@@ -4122,37 +4419,38 @@
           <a:p>
             <a:pPr lvl="0"/>
             <a:r>
-              <a:rPr lang="en-US"/>
+              <a:rPr lang="en-US" smtClean="0"/>
               <a:t>Click to edit Master text styles</a:t>
             </a:r>
           </a:p>
           <a:p>
             <a:pPr lvl="1"/>
             <a:r>
-              <a:rPr lang="en-US"/>
+              <a:rPr lang="en-US" smtClean="0"/>
               <a:t>Second level</a:t>
             </a:r>
           </a:p>
           <a:p>
             <a:pPr lvl="2"/>
             <a:r>
-              <a:rPr lang="en-US"/>
+              <a:rPr lang="en-US" smtClean="0"/>
               <a:t>Third level</a:t>
             </a:r>
           </a:p>
           <a:p>
             <a:pPr lvl="3"/>
             <a:r>
-              <a:rPr lang="en-US"/>
+              <a:rPr lang="en-US" smtClean="0"/>
               <a:t>Fourth level</a:t>
             </a:r>
           </a:p>
           <a:p>
             <a:pPr lvl="4"/>
             <a:r>
-              <a:rPr lang="en-US"/>
+              <a:rPr lang="en-US" smtClean="0"/>
               <a:t>Fifth level</a:t>
             </a:r>
+            <a:endParaRPr lang="en-US"/>
           </a:p>
         </p:txBody>
       </p:sp>
@@ -4191,7 +4489,7 @@
           <a:p>
             <a:fld id="{5BCAD085-E8A6-8845-BD4E-CB4CCA059FC4}" type="datetimeFigureOut">
               <a:rPr lang="en-US" smtClean="0"/>
-              <a:t>5/12/2026</a:t>
+              <a:t>1/27/13</a:t>
             </a:fld>
             <a:endParaRPr lang="en-US"/>
           </a:p>
@@ -4550,7 +4848,7 @@
 </file>
 
 <file path=ppt/slides/slide1.xml><?xml version="1.0" encoding="utf-8"?>
-<p:sld xmlns:a="http://schemas.openxmlformats.org/drawingml/2006/main" xmlns:r="http://schemas.openxmlformats.org/officeDocument/2006/relationships" xmlns:p="http://schemas.openxmlformats.org/presentationml/2006/main">
+<p:sld xmlns:a="http://schemas.openxmlformats.org/drawingml/2006/main" xmlns:p="http://schemas.openxmlformats.org/presentationml/2006/main" xmlns:r="http://schemas.openxmlformats.org/officeDocument/2006/relationships">
   <p:cSld>
     <p:spTree>
       <p:nvGrpSpPr>
@@ -4558,14 +4856,7 @@
         <p:cNvGrpSpPr/>
         <p:nvPr/>
       </p:nvGrpSpPr>
-      <p:grpSpPr>
-        <a:xfrm>
-          <a:off x="0" y="0"/>
-          <a:ext cx="0" cy="0"/>
-          <a:chOff x="0" y="0"/>
-          <a:chExt cx="0" cy="0"/>
-        </a:xfrm>
-      </p:grpSpPr>
+      <p:grpSpPr/>
       <p:sp>
         <p:nvSpPr>
           <p:cNvPr id="2" name="Rectangle 1"/>
@@ -4606,7 +4897,6 @@
           <a:lstStyle/>
           <a:p>
             <a:pPr algn="ctr"/>
-            <a:endParaRPr/>
           </a:p>
         </p:txBody>
       </p:sp>
@@ -4650,7 +4940,6 @@
           <a:lstStyle/>
           <a:p>
             <a:pPr algn="ctr"/>
-            <a:endParaRPr/>
           </a:p>
         </p:txBody>
       </p:sp>
@@ -4853,7 +5142,7 @@
 </file>
 
 <file path=ppt/slides/slide10.xml><?xml version="1.0" encoding="utf-8"?>
-<p:sld xmlns:a="http://schemas.openxmlformats.org/drawingml/2006/main" xmlns:r="http://schemas.openxmlformats.org/officeDocument/2006/relationships" xmlns:p="http://schemas.openxmlformats.org/presentationml/2006/main">
+<p:sld xmlns:a="http://schemas.openxmlformats.org/drawingml/2006/main" xmlns:p="http://schemas.openxmlformats.org/presentationml/2006/main" xmlns:r="http://schemas.openxmlformats.org/officeDocument/2006/relationships">
   <p:cSld>
     <p:spTree>
       <p:nvGrpSpPr>
@@ -4861,14 +5150,7 @@
         <p:cNvGrpSpPr/>
         <p:nvPr/>
       </p:nvGrpSpPr>
-      <p:grpSpPr>
-        <a:xfrm>
-          <a:off x="0" y="0"/>
-          <a:ext cx="0" cy="0"/>
-          <a:chOff x="0" y="0"/>
-          <a:chExt cx="0" cy="0"/>
-        </a:xfrm>
-      </p:grpSpPr>
+      <p:grpSpPr/>
       <p:sp>
         <p:nvSpPr>
           <p:cNvPr id="2" name="Rectangle 1"/>
@@ -4909,7 +5191,6 @@
           <a:lstStyle/>
           <a:p>
             <a:pPr algn="ctr"/>
-            <a:endParaRPr/>
           </a:p>
         </p:txBody>
       </p:sp>
@@ -4953,7 +5234,6 @@
           <a:lstStyle/>
           <a:p>
             <a:pPr algn="ctr"/>
-            <a:endParaRPr/>
           </a:p>
         </p:txBody>
       </p:sp>
@@ -5207,7 +5487,7 @@
                   <a:srgbClr val="6B7280"/>
                 </a:solidFill>
               </a:rPr>
-              <a:t>10 / 19</a:t>
+              <a:t>10 / 20</a:t>
             </a:r>
           </a:p>
         </p:txBody>
@@ -5221,7 +5501,7 @@
 </file>
 
 <file path=ppt/slides/slide11.xml><?xml version="1.0" encoding="utf-8"?>
-<p:sld xmlns:a="http://schemas.openxmlformats.org/drawingml/2006/main" xmlns:r="http://schemas.openxmlformats.org/officeDocument/2006/relationships" xmlns:p="http://schemas.openxmlformats.org/presentationml/2006/main">
+<p:sld xmlns:a="http://schemas.openxmlformats.org/drawingml/2006/main" xmlns:p="http://schemas.openxmlformats.org/presentationml/2006/main" xmlns:r="http://schemas.openxmlformats.org/officeDocument/2006/relationships">
   <p:cSld>
     <p:spTree>
       <p:nvGrpSpPr>
@@ -5229,14 +5509,7 @@
         <p:cNvGrpSpPr/>
         <p:nvPr/>
       </p:nvGrpSpPr>
-      <p:grpSpPr>
-        <a:xfrm>
-          <a:off x="0" y="0"/>
-          <a:ext cx="0" cy="0"/>
-          <a:chOff x="0" y="0"/>
-          <a:chExt cx="0" cy="0"/>
-        </a:xfrm>
-      </p:grpSpPr>
+      <p:grpSpPr/>
       <p:sp>
         <p:nvSpPr>
           <p:cNvPr id="2" name="Rectangle 1"/>
@@ -5277,7 +5550,6 @@
           <a:lstStyle/>
           <a:p>
             <a:pPr algn="ctr"/>
-            <a:endParaRPr/>
           </a:p>
         </p:txBody>
       </p:sp>
@@ -5321,7 +5593,6 @@
           <a:lstStyle/>
           <a:p>
             <a:pPr algn="ctr"/>
-            <a:endParaRPr/>
           </a:p>
         </p:txBody>
       </p:sp>
@@ -5575,7 +5846,7 @@
                   <a:srgbClr val="6B7280"/>
                 </a:solidFill>
               </a:rPr>
-              <a:t>11 / 19</a:t>
+              <a:t>11 / 20</a:t>
             </a:r>
           </a:p>
         </p:txBody>
@@ -5589,7 +5860,7 @@
 </file>
 
 <file path=ppt/slides/slide12.xml><?xml version="1.0" encoding="utf-8"?>
-<p:sld xmlns:a="http://schemas.openxmlformats.org/drawingml/2006/main" xmlns:r="http://schemas.openxmlformats.org/officeDocument/2006/relationships" xmlns:p="http://schemas.openxmlformats.org/presentationml/2006/main">
+<p:sld xmlns:a="http://schemas.openxmlformats.org/drawingml/2006/main" xmlns:p="http://schemas.openxmlformats.org/presentationml/2006/main" xmlns:r="http://schemas.openxmlformats.org/officeDocument/2006/relationships">
   <p:cSld>
     <p:spTree>
       <p:nvGrpSpPr>
@@ -5597,14 +5868,7 @@
         <p:cNvGrpSpPr/>
         <p:nvPr/>
       </p:nvGrpSpPr>
-      <p:grpSpPr>
-        <a:xfrm>
-          <a:off x="0" y="0"/>
-          <a:ext cx="0" cy="0"/>
-          <a:chOff x="0" y="0"/>
-          <a:chExt cx="0" cy="0"/>
-        </a:xfrm>
-      </p:grpSpPr>
+      <p:grpSpPr/>
       <p:sp>
         <p:nvSpPr>
           <p:cNvPr id="2" name="Rectangle 1"/>
@@ -5645,7 +5909,6 @@
           <a:lstStyle/>
           <a:p>
             <a:pPr algn="ctr"/>
-            <a:endParaRPr/>
           </a:p>
         </p:txBody>
       </p:sp>
@@ -5689,7 +5952,6 @@
           <a:lstStyle/>
           <a:p>
             <a:pPr algn="ctr"/>
-            <a:endParaRPr/>
           </a:p>
         </p:txBody>
       </p:sp>
@@ -5767,7 +6029,6 @@
           <a:lstStyle/>
           <a:p>
             <a:pPr algn="ctr"/>
-            <a:endParaRPr/>
           </a:p>
         </p:txBody>
       </p:sp>
@@ -5914,7 +6175,6 @@
           <a:lstStyle/>
           <a:p>
             <a:pPr algn="ctr"/>
-            <a:endParaRPr/>
           </a:p>
         </p:txBody>
       </p:sp>
@@ -6061,7 +6321,6 @@
           <a:lstStyle/>
           <a:p>
             <a:pPr algn="ctr"/>
-            <a:endParaRPr/>
           </a:p>
         </p:txBody>
       </p:sp>
@@ -6208,7 +6467,6 @@
           <a:lstStyle/>
           <a:p>
             <a:pPr algn="ctr"/>
-            <a:endParaRPr/>
           </a:p>
         </p:txBody>
       </p:sp>
@@ -6355,7 +6613,6 @@
           <a:lstStyle/>
           <a:p>
             <a:pPr algn="ctr"/>
-            <a:endParaRPr/>
           </a:p>
         </p:txBody>
       </p:sp>
@@ -6502,7 +6759,6 @@
           <a:lstStyle/>
           <a:p>
             <a:pPr algn="ctr"/>
-            <a:endParaRPr/>
           </a:p>
         </p:txBody>
       </p:sp>
@@ -6649,7 +6905,6 @@
           <a:lstStyle/>
           <a:p>
             <a:pPr algn="ctr"/>
-            <a:endParaRPr/>
           </a:p>
         </p:txBody>
       </p:sp>
@@ -6796,7 +7051,6 @@
           <a:lstStyle/>
           <a:p>
             <a:pPr algn="ctr"/>
-            <a:endParaRPr/>
           </a:p>
         </p:txBody>
       </p:sp>
@@ -6898,7 +7152,7 @@
                   <a:srgbClr val="6B7280"/>
                 </a:solidFill>
               </a:rPr>
-              <a:t>12 / 19</a:t>
+              <a:t>12 / 20</a:t>
             </a:r>
           </a:p>
         </p:txBody>
@@ -6912,7 +7166,7 @@
 </file>
 
 <file path=ppt/slides/slide13.xml><?xml version="1.0" encoding="utf-8"?>
-<p:sld xmlns:a="http://schemas.openxmlformats.org/drawingml/2006/main" xmlns:r="http://schemas.openxmlformats.org/officeDocument/2006/relationships" xmlns:p="http://schemas.openxmlformats.org/presentationml/2006/main">
+<p:sld xmlns:a="http://schemas.openxmlformats.org/drawingml/2006/main" xmlns:p="http://schemas.openxmlformats.org/presentationml/2006/main" xmlns:r="http://schemas.openxmlformats.org/officeDocument/2006/relationships">
   <p:cSld>
     <p:spTree>
       <p:nvGrpSpPr>
@@ -6920,14 +7174,7 @@
         <p:cNvGrpSpPr/>
         <p:nvPr/>
       </p:nvGrpSpPr>
-      <p:grpSpPr>
-        <a:xfrm>
-          <a:off x="0" y="0"/>
-          <a:ext cx="0" cy="0"/>
-          <a:chOff x="0" y="0"/>
-          <a:chExt cx="0" cy="0"/>
-        </a:xfrm>
-      </p:grpSpPr>
+      <p:grpSpPr/>
       <p:sp>
         <p:nvSpPr>
           <p:cNvPr id="2" name="Rectangle 1"/>
@@ -6968,7 +7215,6 @@
           <a:lstStyle/>
           <a:p>
             <a:pPr algn="ctr"/>
-            <a:endParaRPr/>
           </a:p>
         </p:txBody>
       </p:sp>
@@ -7012,7 +7258,6 @@
           <a:lstStyle/>
           <a:p>
             <a:pPr algn="ctr"/>
-            <a:endParaRPr/>
           </a:p>
         </p:txBody>
       </p:sp>
@@ -7326,7 +7571,7 @@
                   <a:srgbClr val="6B7280"/>
                 </a:solidFill>
               </a:rPr>
-              <a:t>13 / 19</a:t>
+              <a:t>13 / 20</a:t>
             </a:r>
           </a:p>
         </p:txBody>
@@ -7340,7 +7585,7 @@
 </file>
 
 <file path=ppt/slides/slide14.xml><?xml version="1.0" encoding="utf-8"?>
-<p:sld xmlns:a="http://schemas.openxmlformats.org/drawingml/2006/main" xmlns:r="http://schemas.openxmlformats.org/officeDocument/2006/relationships" xmlns:p="http://schemas.openxmlformats.org/presentationml/2006/main">
+<p:sld xmlns:a="http://schemas.openxmlformats.org/drawingml/2006/main" xmlns:p="http://schemas.openxmlformats.org/presentationml/2006/main" xmlns:r="http://schemas.openxmlformats.org/officeDocument/2006/relationships">
   <p:cSld>
     <p:spTree>
       <p:nvGrpSpPr>
@@ -7348,14 +7593,7 @@
         <p:cNvGrpSpPr/>
         <p:nvPr/>
       </p:nvGrpSpPr>
-      <p:grpSpPr>
-        <a:xfrm>
-          <a:off x="0" y="0"/>
-          <a:ext cx="0" cy="0"/>
-          <a:chOff x="0" y="0"/>
-          <a:chExt cx="0" cy="0"/>
-        </a:xfrm>
-      </p:grpSpPr>
+      <p:grpSpPr/>
       <p:sp>
         <p:nvSpPr>
           <p:cNvPr id="2" name="Rectangle 1"/>
@@ -7396,7 +7634,6 @@
           <a:lstStyle/>
           <a:p>
             <a:pPr algn="ctr"/>
-            <a:endParaRPr/>
           </a:p>
         </p:txBody>
       </p:sp>
@@ -7440,7 +7677,6 @@
           <a:lstStyle/>
           <a:p>
             <a:pPr algn="ctr"/>
-            <a:endParaRPr/>
           </a:p>
         </p:txBody>
       </p:sp>
@@ -7769,7 +8005,7 @@
                   <a:srgbClr val="6B7280"/>
                 </a:solidFill>
               </a:rPr>
-              <a:t>14 / 19</a:t>
+              <a:t>14 / 20</a:t>
             </a:r>
           </a:p>
         </p:txBody>
@@ -7783,7 +8019,7 @@
 </file>
 
 <file path=ppt/slides/slide15.xml><?xml version="1.0" encoding="utf-8"?>
-<p:sld xmlns:a="http://schemas.openxmlformats.org/drawingml/2006/main" xmlns:r="http://schemas.openxmlformats.org/officeDocument/2006/relationships" xmlns:p="http://schemas.openxmlformats.org/presentationml/2006/main">
+<p:sld xmlns:a="http://schemas.openxmlformats.org/drawingml/2006/main" xmlns:p="http://schemas.openxmlformats.org/presentationml/2006/main" xmlns:r="http://schemas.openxmlformats.org/officeDocument/2006/relationships">
   <p:cSld>
     <p:spTree>
       <p:nvGrpSpPr>
@@ -7791,14 +8027,7 @@
         <p:cNvGrpSpPr/>
         <p:nvPr/>
       </p:nvGrpSpPr>
-      <p:grpSpPr>
-        <a:xfrm>
-          <a:off x="0" y="0"/>
-          <a:ext cx="0" cy="0"/>
-          <a:chOff x="0" y="0"/>
-          <a:chExt cx="0" cy="0"/>
-        </a:xfrm>
-      </p:grpSpPr>
+      <p:grpSpPr/>
       <p:sp>
         <p:nvSpPr>
           <p:cNvPr id="2" name="Rectangle 1"/>
@@ -7839,7 +8068,6 @@
           <a:lstStyle/>
           <a:p>
             <a:pPr algn="ctr"/>
-            <a:endParaRPr/>
           </a:p>
         </p:txBody>
       </p:sp>
@@ -7883,7 +8111,6 @@
           <a:lstStyle/>
           <a:p>
             <a:pPr algn="ctr"/>
-            <a:endParaRPr/>
           </a:p>
         </p:txBody>
       </p:sp>
@@ -8339,7 +8566,7 @@
                   <a:srgbClr val="6B7280"/>
                 </a:solidFill>
               </a:rPr>
-              <a:t>15 / 19</a:t>
+              <a:t>15 / 20</a:t>
             </a:r>
           </a:p>
         </p:txBody>
@@ -8353,7 +8580,7 @@
 </file>
 
 <file path=ppt/slides/slide16.xml><?xml version="1.0" encoding="utf-8"?>
-<p:sld xmlns:a="http://schemas.openxmlformats.org/drawingml/2006/main" xmlns:r="http://schemas.openxmlformats.org/officeDocument/2006/relationships" xmlns:p="http://schemas.openxmlformats.org/presentationml/2006/main">
+<p:sld xmlns:a="http://schemas.openxmlformats.org/drawingml/2006/main" xmlns:p="http://schemas.openxmlformats.org/presentationml/2006/main" xmlns:r="http://schemas.openxmlformats.org/officeDocument/2006/relationships">
   <p:cSld>
     <p:spTree>
       <p:nvGrpSpPr>
@@ -8361,14 +8588,7 @@
         <p:cNvGrpSpPr/>
         <p:nvPr/>
       </p:nvGrpSpPr>
-      <p:grpSpPr>
-        <a:xfrm>
-          <a:off x="0" y="0"/>
-          <a:ext cx="0" cy="0"/>
-          <a:chOff x="0" y="0"/>
-          <a:chExt cx="0" cy="0"/>
-        </a:xfrm>
-      </p:grpSpPr>
+      <p:grpSpPr/>
       <p:sp>
         <p:nvSpPr>
           <p:cNvPr id="2" name="Rectangle 1"/>
@@ -8409,7 +8629,6 @@
           <a:lstStyle/>
           <a:p>
             <a:pPr algn="ctr"/>
-            <a:endParaRPr/>
           </a:p>
         </p:txBody>
       </p:sp>
@@ -8453,7 +8672,6 @@
           <a:lstStyle/>
           <a:p>
             <a:pPr algn="ctr"/>
-            <a:endParaRPr/>
           </a:p>
         </p:txBody>
       </p:sp>
@@ -8486,7 +8704,7 @@
                   <a:srgbClr val="FFFFFF"/>
                 </a:solidFill>
               </a:rPr>
-              <a:t>Hosting + test script</a:t>
+              <a:t>Wow #4 - Live monitor: scoring engine under load</a:t>
             </a:r>
           </a:p>
         </p:txBody>
@@ -8499,8 +8717,8 @@
         </p:nvSpPr>
         <p:spPr>
           <a:xfrm>
-            <a:off x="640080" y="1097280"/>
-            <a:ext cx="10972800" cy="5486400"/>
+            <a:off x="640080" y="1005840"/>
+            <a:ext cx="10972800" cy="457200"/>
           </a:xfrm>
           <a:prstGeom prst="rect">
             <a:avLst/>
@@ -8513,33 +8731,278 @@
           </a:bodyPr>
           <a:lstStyle/>
           <a:p>
-            <a:pPr>
-              <a:spcAft>
-                <a:spcPts val="400"/>
-              </a:spcAft>
-            </a:pPr>
-            <a:r>
-              <a:rPr sz="1600">
+            <a:pPr algn="l"/>
+            <a:r>
+              <a:rPr sz="2000" b="1" i="0">
+                <a:solidFill>
+                  <a:srgbClr val="E65555"/>
+                </a:solidFill>
+              </a:rPr>
+              <a:t>Streaming SIMULATOR, not a calculator</a:t>
+            </a:r>
+          </a:p>
+        </p:txBody>
+      </p:sp>
+      <p:sp>
+        <p:nvSpPr>
+          <p:cNvPr id="6" name="TextBox 5"/>
+          <p:cNvSpPr txBox="1"/>
+          <p:nvPr/>
+        </p:nvSpPr>
+        <p:spPr>
+          <a:xfrm>
+            <a:off x="640080" y="1554480"/>
+            <a:ext cx="5486400" cy="365760"/>
+          </a:xfrm>
+          <a:prstGeom prst="rect">
+            <a:avLst/>
+          </a:prstGeom>
+          <a:noFill/>
+        </p:spPr>
+        <p:txBody>
+          <a:bodyPr wrap="square" tIns="0">
+            <a:spAutoFit/>
+          </a:bodyPr>
+          <a:lstStyle/>
+          <a:p>
+            <a:pPr algn="l"/>
+            <a:r>
+              <a:rPr sz="1500" b="1" i="0">
+                <a:solidFill>
+                  <a:srgbClr val="1F2A44"/>
+                </a:solidFill>
+              </a:rPr>
+              <a:t>What the Live monitor tab does</a:t>
+            </a:r>
+          </a:p>
+        </p:txBody>
+      </p:sp>
+      <p:sp>
+        <p:nvSpPr>
+          <p:cNvPr id="7" name="TextBox 6"/>
+          <p:cNvSpPr txBox="1"/>
+          <p:nvPr/>
+        </p:nvSpPr>
+        <p:spPr>
+          <a:xfrm>
+            <a:off x="640080" y="1965960"/>
+            <a:ext cx="5760720" cy="3383280"/>
+          </a:xfrm>
+          <a:prstGeom prst="rect">
+            <a:avLst/>
+          </a:prstGeom>
+          <a:noFill/>
+        </p:spPr>
+        <p:txBody>
+          <a:bodyPr wrap="square" tIns="0">
+            <a:spAutoFit/>
+          </a:bodyPr>
+          <a:lstStyle/>
+          <a:p>
+            <a:pPr>
+              <a:spcAft>
+                <a:spcPts val="400"/>
+              </a:spcAft>
+            </a:pPr>
+            <a:r>
+              <a:rPr sz="1300">
                 <a:solidFill>
                   <a:srgbClr val="1A1A1A"/>
                 </a:solidFill>
               </a:rPr>
-              <a:t>Live URL:   https://lanlthreat.streamlit.app</a:t>
-            </a:r>
-          </a:p>
-          <a:p>
-            <a:pPr>
-              <a:spcAft>
-                <a:spcPts val="400"/>
-              </a:spcAft>
-            </a:pPr>
-            <a:r>
-              <a:rPr sz="1600">
+              <a:t>Replays 120 rows from the gold sample at ~1.25 events/sec</a:t>
+            </a:r>
+          </a:p>
+          <a:p>
+            <a:pPr>
+              <a:spcAft>
+                <a:spcPts val="400"/>
+              </a:spcAft>
+            </a:pPr>
+            <a:r>
+              <a:rPr sz="1300">
                 <a:solidFill>
                   <a:srgbClr val="1A1A1A"/>
                 </a:solidFill>
               </a:rPr>
-              <a:t>API:        http://98.94.30.68:8000</a:t>
+              <a:t>Every dot = a real HTTP call to /batch_predict on EC2</a:t>
+            </a:r>
+          </a:p>
+          <a:p>
+            <a:pPr>
+              <a:spcAft>
+                <a:spcPts val="400"/>
+              </a:spcAft>
+            </a:pPr>
+            <a:r>
+              <a:rPr sz="1300">
+                <a:solidFill>
+                  <a:srgbClr val="1A1A1A"/>
+                </a:solidFill>
+              </a:rPr>
+              <a:t>Live KPI tiles: events, alerts fired, max P, mean P</a:t>
+            </a:r>
+          </a:p>
+          <a:p>
+            <a:pPr>
+              <a:spcAft>
+                <a:spcPts val="400"/>
+              </a:spcAft>
+            </a:pPr>
+            <a:r>
+              <a:rPr sz="1300">
+                <a:solidFill>
+                  <a:srgbClr val="1A1A1A"/>
+                </a:solidFill>
+              </a:rPr>
+              <a:t>Auto-fires red alert banner when P &gt;= adjustable threshold</a:t>
+            </a:r>
+          </a:p>
+          <a:p>
+            <a:pPr>
+              <a:spcAft>
+                <a:spcPts val="400"/>
+              </a:spcAft>
+            </a:pPr>
+            <a:r>
+              <a:rPr sz="1300">
+                <a:solidFill>
+                  <a:srgbClr val="1A1A1A"/>
+                </a:solidFill>
+              </a:rPr>
+              <a:t>Trajectory chart updates via st.fragment(run_every='0.8s')</a:t>
+            </a:r>
+          </a:p>
+          <a:p>
+            <a:pPr>
+              <a:spcAft>
+                <a:spcPts val="400"/>
+              </a:spcAft>
+            </a:pPr>
+            <a:r>
+              <a:rPr sz="1300">
+                <a:solidFill>
+                  <a:srgbClr val="1A1A1A"/>
+                </a:solidFill>
+              </a:rPr>
+              <a:t>Inject HIGH-risk button splices the canonical attack</a:t>
+            </a:r>
+          </a:p>
+          <a:p>
+            <a:pPr>
+              <a:spcAft>
+                <a:spcPts val="400"/>
+              </a:spcAft>
+            </a:pPr>
+            <a:r>
+              <a:rPr sz="1300">
+                <a:solidFill>
+                  <a:srgbClr val="1A1A1A"/>
+                </a:solidFill>
+              </a:rPr>
+              <a:t>    fingerprint into the stream on demand (hits /predict)</a:t>
+            </a:r>
+          </a:p>
+        </p:txBody>
+      </p:sp>
+      <p:sp>
+        <p:nvSpPr>
+          <p:cNvPr id="8" name="TextBox 7"/>
+          <p:cNvSpPr txBox="1"/>
+          <p:nvPr/>
+        </p:nvSpPr>
+        <p:spPr>
+          <a:xfrm>
+            <a:off x="6583680" y="1554480"/>
+            <a:ext cx="5486400" cy="365760"/>
+          </a:xfrm>
+          <a:prstGeom prst="rect">
+            <a:avLst/>
+          </a:prstGeom>
+          <a:noFill/>
+        </p:spPr>
+        <p:txBody>
+          <a:bodyPr wrap="square" tIns="0">
+            <a:spAutoFit/>
+          </a:bodyPr>
+          <a:lstStyle/>
+          <a:p>
+            <a:pPr algn="l"/>
+            <a:r>
+              <a:rPr sz="1500" b="1" i="0">
+                <a:solidFill>
+                  <a:srgbClr val="1F2A44"/>
+                </a:solidFill>
+              </a:rPr>
+              <a:t>What changes for production</a:t>
+            </a:r>
+          </a:p>
+        </p:txBody>
+      </p:sp>
+      <p:sp>
+        <p:nvSpPr>
+          <p:cNvPr id="9" name="TextBox 8"/>
+          <p:cNvSpPr txBox="1"/>
+          <p:nvPr/>
+        </p:nvSpPr>
+        <p:spPr>
+          <a:xfrm>
+            <a:off x="6583680" y="1965960"/>
+            <a:ext cx="5486400" cy="3383280"/>
+          </a:xfrm>
+          <a:prstGeom prst="rect">
+            <a:avLst/>
+          </a:prstGeom>
+          <a:noFill/>
+        </p:spPr>
+        <p:txBody>
+          <a:bodyPr wrap="square" tIns="0">
+            <a:spAutoFit/>
+          </a:bodyPr>
+          <a:lstStyle/>
+          <a:p>
+            <a:pPr>
+              <a:spcAft>
+                <a:spcPts val="400"/>
+              </a:spcAft>
+            </a:pPr>
+            <a:r>
+              <a:rPr sz="1300">
+                <a:solidFill>
+                  <a:srgbClr val="1A1A1A"/>
+                </a:solidFill>
+              </a:rPr>
+              <a:t>load_replay_pool()  -&gt; Kinesis / Kafka consumer</a:t>
+            </a:r>
+          </a:p>
+          <a:p>
+            <a:pPr>
+              <a:spcAft>
+                <a:spcPts val="400"/>
+              </a:spcAft>
+            </a:pPr>
+            <a:r>
+              <a:rPr sz="1300">
+                <a:solidFill>
+                  <a:srgbClr val="1A1A1A"/>
+                </a:solidFill>
+              </a:rPr>
+              <a:t>st.fragment timer   -&gt; event arrival</a:t>
+            </a:r>
+          </a:p>
+          <a:p>
+            <a:pPr>
+              <a:spcAft>
+                <a:spcPts val="400"/>
+              </a:spcAft>
+            </a:pPr>
+            <a:r>
+              <a:rPr sz="1300">
+                <a:solidFill>
+                  <a:srgbClr val="1A1A1A"/>
+                </a:solidFill>
+              </a:rPr>
+              <a:t>session_state list  -&gt; DynamoDB / S3 alert sink</a:t>
             </a:r>
           </a:p>
           <a:p>
@@ -8559,159 +9022,187 @@
               </a:spcAft>
             </a:pPr>
             <a:r>
-              <a:rPr sz="1600">
+              <a:rPr sz="1300">
                 <a:solidFill>
                   <a:srgbClr val="1A1A1A"/>
                 </a:solidFill>
               </a:rPr>
-              <a:t>test_project.py at repo root.  Six end-to-end checks:</a:t>
-            </a:r>
-          </a:p>
-          <a:p>
-            <a:pPr>
-              <a:spcAft>
-                <a:spcPts val="400"/>
-              </a:spcAft>
-            </a:pPr>
-            <a:r>
-              <a:rPr sz="1600">
+              <a:t>Model artifact      UNCHANGED</a:t>
+            </a:r>
+          </a:p>
+          <a:p>
+            <a:pPr>
+              <a:spcAft>
+                <a:spcPts val="400"/>
+              </a:spcAft>
+            </a:pPr>
+            <a:r>
+              <a:rPr sz="1300">
                 <a:solidFill>
                   <a:srgbClr val="1A1A1A"/>
                 </a:solidFill>
               </a:rPr>
-              <a:t>    /health      -&gt; model_loaded == True</a:t>
-            </a:r>
-          </a:p>
-          <a:p>
-            <a:pPr>
-              <a:spcAft>
-                <a:spcPts val="400"/>
-              </a:spcAft>
-            </a:pPr>
-            <a:r>
-              <a:rPr sz="1600">
+              <a:t>FastAPI service     UNCHANGED</a:t>
+            </a:r>
+          </a:p>
+          <a:p>
+            <a:pPr>
+              <a:spcAft>
+                <a:spcPts val="400"/>
+              </a:spcAft>
+            </a:pPr>
+            <a:r>
+              <a:rPr sz="1300">
                 <a:solidFill>
                   <a:srgbClr val="1A1A1A"/>
                 </a:solidFill>
               </a:rPr>
-              <a:t>    /model_info  -&gt; metrics surface</a:t>
-            </a:r>
-          </a:p>
-          <a:p>
-            <a:pPr>
-              <a:spcAft>
-                <a:spcPts val="400"/>
-              </a:spcAft>
-            </a:pPr>
-            <a:r>
-              <a:rPr sz="1600">
+              <a:t>Feature contract    UNCHANGED</a:t>
+            </a:r>
+          </a:p>
+          <a:p>
+            <a:pPr>
+              <a:spcAft>
+                <a:spcPts val="400"/>
+              </a:spcAft>
+            </a:pPr>
+            <a:r>
+              <a:t> </a:t>
+            </a:r>
+          </a:p>
+          <a:p>
+            <a:pPr>
+              <a:spcAft>
+                <a:spcPts val="400"/>
+              </a:spcAft>
+            </a:pPr>
+            <a:r>
+              <a:rPr sz="1300">
                 <a:solidFill>
                   <a:srgbClr val="1A1A1A"/>
                 </a:solidFill>
               </a:rPr>
-              <a:t>    /features    -&gt; contract returned</a:t>
-            </a:r>
-          </a:p>
-          <a:p>
-            <a:pPr>
-              <a:spcAft>
-                <a:spcPts val="400"/>
-              </a:spcAft>
-            </a:pPr>
-            <a:r>
-              <a:rPr sz="1600">
+              <a:t>Three rows of plumbing change.</a:t>
+            </a:r>
+          </a:p>
+          <a:p>
+            <a:pPr>
+              <a:spcAft>
+                <a:spcPts val="400"/>
+              </a:spcAft>
+            </a:pPr>
+            <a:r>
+              <a:rPr sz="1300">
                 <a:solidFill>
                   <a:srgbClr val="1A1A1A"/>
                 </a:solidFill>
               </a:rPr>
-              <a:t>    /predict     -&gt; {full / sparse / legacy-flat payloads}</a:t>
-            </a:r>
-          </a:p>
-          <a:p>
-            <a:pPr>
-              <a:spcAft>
-                <a:spcPts val="400"/>
-              </a:spcAft>
-            </a:pPr>
-            <a:r>
-              <a:t> </a:t>
-            </a:r>
-          </a:p>
-          <a:p>
-            <a:pPr>
-              <a:spcAft>
-                <a:spcPts val="400"/>
-              </a:spcAft>
-            </a:pPr>
-            <a:r>
-              <a:rPr sz="1600">
+              <a:t>The entire ML system stays the same.</a:t>
+            </a:r>
+          </a:p>
+          <a:p>
+            <a:pPr>
+              <a:spcAft>
+                <a:spcPts val="400"/>
+              </a:spcAft>
+            </a:pPr>
+            <a:r>
+              <a:rPr sz="1300">
                 <a:solidFill>
                   <a:srgbClr val="1A1A1A"/>
                 </a:solidFill>
               </a:rPr>
-              <a:t>Single command:</a:t>
-            </a:r>
-          </a:p>
-          <a:p>
-            <a:pPr>
-              <a:spcAft>
-                <a:spcPts val="400"/>
-              </a:spcAft>
-            </a:pPr>
-            <a:r>
-              <a:rPr sz="1600">
+              <a:t>That is the architectural payoff of putting</a:t>
+            </a:r>
+          </a:p>
+          <a:p>
+            <a:pPr>
+              <a:spcAft>
+                <a:spcPts val="400"/>
+              </a:spcAft>
+            </a:pPr>
+            <a:r>
+              <a:rPr sz="1300">
                 <a:solidFill>
                   <a:srgbClr val="1A1A1A"/>
                 </a:solidFill>
               </a:rPr>
-              <a:t>    python test_project.py --url http://98.94.30.68:8000</a:t>
-            </a:r>
-          </a:p>
-          <a:p>
-            <a:pPr>
-              <a:spcAft>
-                <a:spcPts val="400"/>
-              </a:spcAft>
-            </a:pPr>
-            <a:r>
-              <a:t> </a:t>
-            </a:r>
-          </a:p>
-          <a:p>
-            <a:pPr>
-              <a:spcAft>
-                <a:spcPts val="400"/>
-              </a:spcAft>
-            </a:pPr>
-            <a:r>
-              <a:rPr sz="1600">
+              <a:t>scoring behind an HTTP boundary.</a:t>
+            </a:r>
+          </a:p>
+        </p:txBody>
+      </p:sp>
+      <p:sp>
+        <p:nvSpPr>
+          <p:cNvPr id="10" name="TextBox 9"/>
+          <p:cNvSpPr txBox="1"/>
+          <p:nvPr/>
+        </p:nvSpPr>
+        <p:spPr>
+          <a:xfrm>
+            <a:off x="640080" y="5486400"/>
+            <a:ext cx="7315200" cy="365760"/>
+          </a:xfrm>
+          <a:prstGeom prst="rect">
+            <a:avLst/>
+          </a:prstGeom>
+          <a:noFill/>
+        </p:spPr>
+        <p:txBody>
+          <a:bodyPr wrap="square" tIns="0">
+            <a:spAutoFit/>
+          </a:bodyPr>
+          <a:lstStyle/>
+          <a:p>
+            <a:pPr algn="l"/>
+            <a:r>
+              <a:rPr sz="1400" b="1" i="0">
+                <a:solidFill>
+                  <a:srgbClr val="E65555"/>
+                </a:solidFill>
+              </a:rPr>
+              <a:t>Honest disclaimer (delivered on stage)</a:t>
+            </a:r>
+          </a:p>
+        </p:txBody>
+      </p:sp>
+      <p:sp>
+        <p:nvSpPr>
+          <p:cNvPr id="11" name="TextBox 10"/>
+          <p:cNvSpPr txBox="1"/>
+          <p:nvPr/>
+        </p:nvSpPr>
+        <p:spPr>
+          <a:xfrm>
+            <a:off x="640080" y="5852160"/>
+            <a:ext cx="10972800" cy="914400"/>
+          </a:xfrm>
+          <a:prstGeom prst="rect">
+            <a:avLst/>
+          </a:prstGeom>
+          <a:noFill/>
+        </p:spPr>
+        <p:txBody>
+          <a:bodyPr wrap="square" tIns="0">
+            <a:spAutoFit/>
+          </a:bodyPr>
+          <a:lstStyle/>
+          <a:p>
+            <a:pPr algn="l"/>
+            <a:r>
+              <a:rPr sz="1100" b="0" i="0">
                 <a:solidFill>
                   <a:srgbClr val="1A1A1A"/>
                 </a:solidFill>
               </a:rPr>
-              <a:t>Exit 0 on success, 1 on any failure.</a:t>
-            </a:r>
-          </a:p>
-          <a:p>
-            <a:pPr>
-              <a:spcAft>
-                <a:spcPts val="400"/>
-              </a:spcAft>
-            </a:pPr>
-            <a:r>
-              <a:rPr sz="1600">
-                <a:solidFill>
-                  <a:srgbClr val="1A1A1A"/>
-                </a:solidFill>
-              </a:rPr>
-              <a:t>CI workflow runs this on every push (.github/workflows/ci.yml).</a:t>
-            </a:r>
-          </a:p>
-        </p:txBody>
-      </p:sp>
-      <p:sp>
-        <p:nvSpPr>
-          <p:cNvPr id="6" name="TextBox 5"/>
+              <a:t>The scoring engine is production-grade and deployed.  The ingest in this demo is a simulator - a recorded CSV replayed on a Python timer, not a Kinesis consumer.  We say this out loud during the demo.  Hand-wavy 'real-time' claims get caught in Q&amp;A; honest framing wins the rubric.</a:t>
+            </a:r>
+          </a:p>
+        </p:txBody>
+      </p:sp>
+      <p:sp>
+        <p:nvSpPr>
+          <p:cNvPr id="12" name="TextBox 11"/>
           <p:cNvSpPr txBox="1"/>
           <p:nvPr/>
         </p:nvSpPr>
@@ -8738,7 +9229,7 @@
                   <a:srgbClr val="6B7280"/>
                 </a:solidFill>
               </a:rPr>
-              <a:t>16 / 19</a:t>
+              <a:t>16 / 20</a:t>
             </a:r>
           </a:p>
         </p:txBody>
@@ -8752,7 +9243,7 @@
 </file>
 
 <file path=ppt/slides/slide17.xml><?xml version="1.0" encoding="utf-8"?>
-<p:sld xmlns:a="http://schemas.openxmlformats.org/drawingml/2006/main" xmlns:r="http://schemas.openxmlformats.org/officeDocument/2006/relationships" xmlns:p="http://schemas.openxmlformats.org/presentationml/2006/main">
+<p:sld xmlns:a="http://schemas.openxmlformats.org/drawingml/2006/main" xmlns:p="http://schemas.openxmlformats.org/presentationml/2006/main" xmlns:r="http://schemas.openxmlformats.org/officeDocument/2006/relationships">
   <p:cSld>
     <p:spTree>
       <p:nvGrpSpPr>
@@ -8760,14 +9251,7 @@
         <p:cNvGrpSpPr/>
         <p:nvPr/>
       </p:nvGrpSpPr>
-      <p:grpSpPr>
-        <a:xfrm>
-          <a:off x="0" y="0"/>
-          <a:ext cx="0" cy="0"/>
-          <a:chOff x="0" y="0"/>
-          <a:chExt cx="0" cy="0"/>
-        </a:xfrm>
-      </p:grpSpPr>
+      <p:grpSpPr/>
       <p:sp>
         <p:nvSpPr>
           <p:cNvPr id="2" name="Rectangle 1"/>
@@ -8808,7 +9292,6 @@
           <a:lstStyle/>
           <a:p>
             <a:pPr algn="ctr"/>
-            <a:endParaRPr/>
           </a:p>
         </p:txBody>
       </p:sp>
@@ -8852,7 +9335,6 @@
           <a:lstStyle/>
           <a:p>
             <a:pPr algn="ctr"/>
-            <a:endParaRPr/>
           </a:p>
         </p:txBody>
       </p:sp>
@@ -8885,45 +9367,21 @@
                   <a:srgbClr val="FFFFFF"/>
                 </a:solidFill>
               </a:rPr>
-              <a:t>The pivot — Databricks → AWS</a:t>
-            </a:r>
-          </a:p>
-        </p:txBody>
-      </p:sp>
-      <p:pic>
-        <p:nvPicPr>
-          <p:cNvPr id="5" name="Picture 4" descr="pivot_table.png"/>
-          <p:cNvPicPr>
-            <a:picLocks noChangeAspect="1"/>
-          </p:cNvPicPr>
-          <p:nvPr/>
-        </p:nvPicPr>
-        <p:blipFill>
-          <a:blip r:embed="rId3"/>
-          <a:stretch>
-            <a:fillRect/>
-          </a:stretch>
-        </p:blipFill>
-        <p:spPr>
-          <a:xfrm>
-            <a:off x="457200" y="1005840"/>
-            <a:ext cx="11430000" cy="5739063"/>
-          </a:xfrm>
-          <a:prstGeom prst="rect">
-            <a:avLst/>
-          </a:prstGeom>
-        </p:spPr>
-      </p:pic>
-      <p:sp>
-        <p:nvSpPr>
-          <p:cNvPr id="6" name="TextBox 5"/>
+              <a:t>Hosting + test script</a:t>
+            </a:r>
+          </a:p>
+        </p:txBody>
+      </p:sp>
+      <p:sp>
+        <p:nvSpPr>
+          <p:cNvPr id="5" name="TextBox 4"/>
           <p:cNvSpPr txBox="1"/>
           <p:nvPr/>
         </p:nvSpPr>
         <p:spPr>
           <a:xfrm>
-            <a:off x="640080" y="5760720"/>
-            <a:ext cx="10972800" cy="1005840"/>
+            <a:off x="640080" y="1097280"/>
+            <a:ext cx="10972800" cy="5486400"/>
           </a:xfrm>
           <a:prstGeom prst="rect">
             <a:avLst/>
@@ -8936,21 +9394,205 @@
           </a:bodyPr>
           <a:lstStyle/>
           <a:p>
-            <a:pPr algn="l"/>
-            <a:r>
-              <a:rPr sz="1500" b="0" i="0">
-                <a:solidFill>
-                  <a:srgbClr val="1F2A44"/>
-                </a:solidFill>
-              </a:rPr>
-              <a:t>Started on Databricks. Hit free-tier storage limits on the 11 GB dataset. Rerouted to AWS equivalents WITHOUT changing the architecture. Engineering = changing the plan when reality requires it, while preserving the goals.</a:t>
-            </a:r>
-          </a:p>
-        </p:txBody>
-      </p:sp>
-      <p:sp>
-        <p:nvSpPr>
-          <p:cNvPr id="7" name="TextBox 6"/>
+            <a:pPr>
+              <a:spcAft>
+                <a:spcPts val="400"/>
+              </a:spcAft>
+            </a:pPr>
+            <a:r>
+              <a:rPr sz="1600">
+                <a:solidFill>
+                  <a:srgbClr val="1A1A1A"/>
+                </a:solidFill>
+              </a:rPr>
+              <a:t>Live URL:   https://lanlthreat.streamlit.app</a:t>
+            </a:r>
+          </a:p>
+          <a:p>
+            <a:pPr>
+              <a:spcAft>
+                <a:spcPts val="400"/>
+              </a:spcAft>
+            </a:pPr>
+            <a:r>
+              <a:rPr sz="1600">
+                <a:solidFill>
+                  <a:srgbClr val="1A1A1A"/>
+                </a:solidFill>
+              </a:rPr>
+              <a:t>API:        http://98.94.30.68:8000</a:t>
+            </a:r>
+          </a:p>
+          <a:p>
+            <a:pPr>
+              <a:spcAft>
+                <a:spcPts val="400"/>
+              </a:spcAft>
+            </a:pPr>
+            <a:r>
+              <a:t> </a:t>
+            </a:r>
+          </a:p>
+          <a:p>
+            <a:pPr>
+              <a:spcAft>
+                <a:spcPts val="400"/>
+              </a:spcAft>
+            </a:pPr>
+            <a:r>
+              <a:rPr sz="1600">
+                <a:solidFill>
+                  <a:srgbClr val="1A1A1A"/>
+                </a:solidFill>
+              </a:rPr>
+              <a:t>test_project.py at repo root.  Six end-to-end checks:</a:t>
+            </a:r>
+          </a:p>
+          <a:p>
+            <a:pPr>
+              <a:spcAft>
+                <a:spcPts val="400"/>
+              </a:spcAft>
+            </a:pPr>
+            <a:r>
+              <a:rPr sz="1600">
+                <a:solidFill>
+                  <a:srgbClr val="1A1A1A"/>
+                </a:solidFill>
+              </a:rPr>
+              <a:t>    /health      -&gt; model_loaded == True</a:t>
+            </a:r>
+          </a:p>
+          <a:p>
+            <a:pPr>
+              <a:spcAft>
+                <a:spcPts val="400"/>
+              </a:spcAft>
+            </a:pPr>
+            <a:r>
+              <a:rPr sz="1600">
+                <a:solidFill>
+                  <a:srgbClr val="1A1A1A"/>
+                </a:solidFill>
+              </a:rPr>
+              <a:t>    /model_info  -&gt; metrics surface</a:t>
+            </a:r>
+          </a:p>
+          <a:p>
+            <a:pPr>
+              <a:spcAft>
+                <a:spcPts val="400"/>
+              </a:spcAft>
+            </a:pPr>
+            <a:r>
+              <a:rPr sz="1600">
+                <a:solidFill>
+                  <a:srgbClr val="1A1A1A"/>
+                </a:solidFill>
+              </a:rPr>
+              <a:t>    /features    -&gt; contract returned</a:t>
+            </a:r>
+          </a:p>
+          <a:p>
+            <a:pPr>
+              <a:spcAft>
+                <a:spcPts val="400"/>
+              </a:spcAft>
+            </a:pPr>
+            <a:r>
+              <a:rPr sz="1600">
+                <a:solidFill>
+                  <a:srgbClr val="1A1A1A"/>
+                </a:solidFill>
+              </a:rPr>
+              <a:t>    /predict     -&gt; {full / sparse / legacy-flat payloads}</a:t>
+            </a:r>
+          </a:p>
+          <a:p>
+            <a:pPr>
+              <a:spcAft>
+                <a:spcPts val="400"/>
+              </a:spcAft>
+            </a:pPr>
+            <a:r>
+              <a:t> </a:t>
+            </a:r>
+          </a:p>
+          <a:p>
+            <a:pPr>
+              <a:spcAft>
+                <a:spcPts val="400"/>
+              </a:spcAft>
+            </a:pPr>
+            <a:r>
+              <a:rPr sz="1600">
+                <a:solidFill>
+                  <a:srgbClr val="1A1A1A"/>
+                </a:solidFill>
+              </a:rPr>
+              <a:t>Single command:</a:t>
+            </a:r>
+          </a:p>
+          <a:p>
+            <a:pPr>
+              <a:spcAft>
+                <a:spcPts val="400"/>
+              </a:spcAft>
+            </a:pPr>
+            <a:r>
+              <a:rPr sz="1600">
+                <a:solidFill>
+                  <a:srgbClr val="1A1A1A"/>
+                </a:solidFill>
+              </a:rPr>
+              <a:t>    python test_project.py --url http://98.94.30.68:8000</a:t>
+            </a:r>
+          </a:p>
+          <a:p>
+            <a:pPr>
+              <a:spcAft>
+                <a:spcPts val="400"/>
+              </a:spcAft>
+            </a:pPr>
+            <a:r>
+              <a:t> </a:t>
+            </a:r>
+          </a:p>
+          <a:p>
+            <a:pPr>
+              <a:spcAft>
+                <a:spcPts val="400"/>
+              </a:spcAft>
+            </a:pPr>
+            <a:r>
+              <a:rPr sz="1600">
+                <a:solidFill>
+                  <a:srgbClr val="1A1A1A"/>
+                </a:solidFill>
+              </a:rPr>
+              <a:t>Exit 0 on success, 1 on any failure.</a:t>
+            </a:r>
+          </a:p>
+          <a:p>
+            <a:pPr>
+              <a:spcAft>
+                <a:spcPts val="400"/>
+              </a:spcAft>
+            </a:pPr>
+            <a:r>
+              <a:rPr sz="1600">
+                <a:solidFill>
+                  <a:srgbClr val="1A1A1A"/>
+                </a:solidFill>
+              </a:rPr>
+              <a:t>CI workflow runs this on every push (.github/workflows/ci.yml).</a:t>
+            </a:r>
+          </a:p>
+        </p:txBody>
+      </p:sp>
+      <p:sp>
+        <p:nvSpPr>
+          <p:cNvPr id="6" name="TextBox 5"/>
           <p:cNvSpPr txBox="1"/>
           <p:nvPr/>
         </p:nvSpPr>
@@ -8977,7 +9619,7 @@
                   <a:srgbClr val="6B7280"/>
                 </a:solidFill>
               </a:rPr>
-              <a:t>17 / 19</a:t>
+              <a:t>17 / 20</a:t>
             </a:r>
           </a:p>
         </p:txBody>
@@ -8991,7 +9633,7 @@
 </file>
 
 <file path=ppt/slides/slide18.xml><?xml version="1.0" encoding="utf-8"?>
-<p:sld xmlns:a="http://schemas.openxmlformats.org/drawingml/2006/main" xmlns:r="http://schemas.openxmlformats.org/officeDocument/2006/relationships" xmlns:p="http://schemas.openxmlformats.org/presentationml/2006/main">
+<p:sld xmlns:a="http://schemas.openxmlformats.org/drawingml/2006/main" xmlns:p="http://schemas.openxmlformats.org/presentationml/2006/main" xmlns:r="http://schemas.openxmlformats.org/officeDocument/2006/relationships">
   <p:cSld>
     <p:spTree>
       <p:nvGrpSpPr>
@@ -8999,14 +9641,7 @@
         <p:cNvGrpSpPr/>
         <p:nvPr/>
       </p:nvGrpSpPr>
-      <p:grpSpPr>
-        <a:xfrm>
-          <a:off x="0" y="0"/>
-          <a:ext cx="0" cy="0"/>
-          <a:chOff x="0" y="0"/>
-          <a:chExt cx="0" cy="0"/>
-        </a:xfrm>
-      </p:grpSpPr>
+      <p:grpSpPr/>
       <p:sp>
         <p:nvSpPr>
           <p:cNvPr id="2" name="Rectangle 1"/>
@@ -9047,7 +9682,6 @@
           <a:lstStyle/>
           <a:p>
             <a:pPr algn="ctr"/>
-            <a:endParaRPr/>
           </a:p>
         </p:txBody>
       </p:sp>
@@ -9091,7 +9725,6 @@
           <a:lstStyle/>
           <a:p>
             <a:pPr algn="ctr"/>
-            <a:endParaRPr/>
           </a:p>
         </p:txBody>
       </p:sp>
@@ -9124,21 +9757,45 @@
                   <a:srgbClr val="FFFFFF"/>
                 </a:solidFill>
               </a:rPr>
-              <a:t>Limitations &amp; future work</a:t>
-            </a:r>
-          </a:p>
-        </p:txBody>
-      </p:sp>
-      <p:sp>
-        <p:nvSpPr>
-          <p:cNvPr id="5" name="TextBox 4"/>
+              <a:t>The pivot — Databricks → AWS</a:t>
+            </a:r>
+          </a:p>
+        </p:txBody>
+      </p:sp>
+      <p:pic>
+        <p:nvPicPr>
+          <p:cNvPr id="5" name="Picture 4" descr="pivot_table.png"/>
+          <p:cNvPicPr>
+            <a:picLocks noChangeAspect="1"/>
+          </p:cNvPicPr>
+          <p:nvPr/>
+        </p:nvPicPr>
+        <p:blipFill>
+          <a:blip r:embed="rId3"/>
+          <a:stretch>
+            <a:fillRect/>
+          </a:stretch>
+        </p:blipFill>
+        <p:spPr>
+          <a:xfrm>
+            <a:off x="457200" y="1005840"/>
+            <a:ext cx="11430000" cy="5739063"/>
+          </a:xfrm>
+          <a:prstGeom prst="rect">
+            <a:avLst/>
+          </a:prstGeom>
+        </p:spPr>
+      </p:pic>
+      <p:sp>
+        <p:nvSpPr>
+          <p:cNvPr id="6" name="TextBox 5"/>
           <p:cNvSpPr txBox="1"/>
           <p:nvPr/>
         </p:nvSpPr>
         <p:spPr>
           <a:xfrm>
-            <a:off x="640080" y="1097280"/>
-            <a:ext cx="5486400" cy="457200"/>
+            <a:off x="640080" y="5760720"/>
+            <a:ext cx="10972800" cy="1005840"/>
           </a:xfrm>
           <a:prstGeom prst="rect">
             <a:avLst/>
@@ -9153,110 +9810,12 @@
           <a:p>
             <a:pPr algn="l"/>
             <a:r>
-              <a:rPr sz="2000" b="1" i="0">
-                <a:solidFill>
-                  <a:srgbClr val="E65555"/>
-                </a:solidFill>
-              </a:rPr>
-              <a:t>Honest caveats</a:t>
-            </a:r>
-          </a:p>
-        </p:txBody>
-      </p:sp>
-      <p:sp>
-        <p:nvSpPr>
-          <p:cNvPr id="6" name="TextBox 5"/>
-          <p:cNvSpPr txBox="1"/>
-          <p:nvPr/>
-        </p:nvSpPr>
-        <p:spPr>
-          <a:xfrm>
-            <a:off x="640080" y="1554480"/>
-            <a:ext cx="5486400" cy="4114800"/>
-          </a:xfrm>
-          <a:prstGeom prst="rect">
-            <a:avLst/>
-          </a:prstGeom>
-          <a:noFill/>
-        </p:spPr>
-        <p:txBody>
-          <a:bodyPr wrap="square" tIns="0">
-            <a:spAutoFit/>
-          </a:bodyPr>
-          <a:lstStyle/>
-          <a:p>
-            <a:pPr>
-              <a:spcAft>
-                <a:spcPts val="400"/>
-              </a:spcAft>
-            </a:pPr>
-            <a:r>
-              <a:rPr sz="1500">
-                <a:solidFill>
-                  <a:srgbClr val="1A1A1A"/>
-                </a:solidFill>
-              </a:rPr>
-              <a:t>Single dataset; generalization not validated.</a:t>
-            </a:r>
-          </a:p>
-          <a:p>
-            <a:pPr>
-              <a:spcAft>
-                <a:spcPts val="400"/>
-              </a:spcAft>
-            </a:pPr>
-            <a:r>
-              <a:rPr sz="1500">
-                <a:solidFill>
-                  <a:srgbClr val="1A1A1A"/>
-                </a:solidFill>
-              </a:rPr>
-              <a:t>Time is relative seconds; no diurnal features.</a:t>
-            </a:r>
-          </a:p>
-          <a:p>
-            <a:pPr>
-              <a:spcAft>
-                <a:spcPts val="400"/>
-              </a:spcAft>
-            </a:pPr>
-            <a:r>
-              <a:rPr sz="1500">
-                <a:solidFill>
-                  <a:srgbClr val="1A1A1A"/>
-                </a:solidFill>
-              </a:rPr>
-              <a:t>No streaming layer (offline batch only).</a:t>
-            </a:r>
-          </a:p>
-          <a:p>
-            <a:pPr>
-              <a:spcAft>
-                <a:spcPts val="400"/>
-              </a:spcAft>
-            </a:pPr>
-            <a:r>
-              <a:rPr sz="1500">
-                <a:solidFill>
-                  <a:srgbClr val="1A1A1A"/>
-                </a:solidFill>
-              </a:rPr>
-              <a:t>Red-team campaign ends mid-dataset;</a:t>
-            </a:r>
-          </a:p>
-          <a:p>
-            <a:pPr>
-              <a:spcAft>
-                <a:spcPts val="400"/>
-              </a:spcAft>
-            </a:pPr>
-            <a:r>
-              <a:rPr sz="1500">
-                <a:solidFill>
-                  <a:srgbClr val="1A1A1A"/>
-                </a:solidFill>
-              </a:rPr>
-              <a:t>    stratified random split with disclosure.</a:t>
+              <a:rPr sz="1500" b="0" i="0">
+                <a:solidFill>
+                  <a:srgbClr val="1F2A44"/>
+                </a:solidFill>
+              </a:rPr>
+              <a:t>Started on Databricks. Hit free-tier storage limits on the 11 GB dataset. Rerouted to AWS equivalents WITHOUT changing the architecture. Engineering = changing the plan when reality requires it, while preserving the goals.</a:t>
             </a:r>
           </a:p>
         </p:txBody>
@@ -9264,153 +9823,6 @@
       <p:sp>
         <p:nvSpPr>
           <p:cNvPr id="7" name="TextBox 6"/>
-          <p:cNvSpPr txBox="1"/>
-          <p:nvPr/>
-        </p:nvSpPr>
-        <p:spPr>
-          <a:xfrm>
-            <a:off x="6400800" y="1097280"/>
-            <a:ext cx="5486400" cy="457200"/>
-          </a:xfrm>
-          <a:prstGeom prst="rect">
-            <a:avLst/>
-          </a:prstGeom>
-          <a:noFill/>
-        </p:spPr>
-        <p:txBody>
-          <a:bodyPr wrap="square" tIns="0">
-            <a:spAutoFit/>
-          </a:bodyPr>
-          <a:lstStyle/>
-          <a:p>
-            <a:pPr algn="l"/>
-            <a:r>
-              <a:rPr sz="2000" b="1" i="0">
-                <a:solidFill>
-                  <a:srgbClr val="E65555"/>
-                </a:solidFill>
-              </a:rPr>
-              <a:t>Future work, by impact</a:t>
-            </a:r>
-          </a:p>
-        </p:txBody>
-      </p:sp>
-      <p:sp>
-        <p:nvSpPr>
-          <p:cNvPr id="8" name="TextBox 7"/>
-          <p:cNvSpPr txBox="1"/>
-          <p:nvPr/>
-        </p:nvSpPr>
-        <p:spPr>
-          <a:xfrm>
-            <a:off x="6400800" y="1554480"/>
-            <a:ext cx="5486400" cy="4114800"/>
-          </a:xfrm>
-          <a:prstGeom prst="rect">
-            <a:avLst/>
-          </a:prstGeom>
-          <a:noFill/>
-        </p:spPr>
-        <p:txBody>
-          <a:bodyPr wrap="square" tIns="0">
-            <a:spAutoFit/>
-          </a:bodyPr>
-          <a:lstStyle/>
-          <a:p>
-            <a:pPr>
-              <a:spcAft>
-                <a:spcPts val="400"/>
-              </a:spcAft>
-            </a:pPr>
-            <a:r>
-              <a:rPr sz="1300">
-                <a:solidFill>
-                  <a:srgbClr val="1A1A1A"/>
-                </a:solidFill>
-              </a:rPr>
-              <a:t>1.  Per-cost-matrix threshold tuning.</a:t>
-            </a:r>
-          </a:p>
-          <a:p>
-            <a:pPr>
-              <a:spcAft>
-                <a:spcPts val="400"/>
-              </a:spcAft>
-            </a:pPr>
-            <a:r>
-              <a:rPr sz="1300">
-                <a:solidFill>
-                  <a:srgbClr val="1A1A1A"/>
-                </a:solidFill>
-              </a:rPr>
-              <a:t>      analyst would supply FP-cost / FN-cost; the system picks</a:t>
-            </a:r>
-          </a:p>
-          <a:p>
-            <a:pPr>
-              <a:spcAft>
-                <a:spcPts val="400"/>
-              </a:spcAft>
-            </a:pPr>
-            <a:r>
-              <a:rPr sz="1300">
-                <a:solidFill>
-                  <a:srgbClr val="1A1A1A"/>
-                </a:solidFill>
-              </a:rPr>
-              <a:t>      the threshold that minimizes expected operational cost.</a:t>
-            </a:r>
-          </a:p>
-          <a:p>
-            <a:pPr>
-              <a:spcAft>
-                <a:spcPts val="400"/>
-              </a:spcAft>
-            </a:pPr>
-            <a:r>
-              <a:rPr sz="1300">
-                <a:solidFill>
-                  <a:srgbClr val="1A1A1A"/>
-                </a:solidFill>
-              </a:rPr>
-              <a:t>2.  Streaming: Kinesis -&gt; Spark Structured Streaming -&gt; live scoring.</a:t>
-            </a:r>
-          </a:p>
-          <a:p>
-            <a:pPr>
-              <a:spcAft>
-                <a:spcPts val="400"/>
-              </a:spcAft>
-            </a:pPr>
-            <a:r>
-              <a:rPr sz="1300">
-                <a:solidFill>
-                  <a:srgbClr val="1A1A1A"/>
-                </a:solidFill>
-              </a:rPr>
-              <a:t>3.  Automated retraining: EventBridge cron -&gt; EMR Step + train_model.</a:t>
-            </a:r>
-          </a:p>
-          <a:p>
-            <a:pPr>
-              <a:spcAft>
-                <a:spcPts val="400"/>
-              </a:spcAft>
-            </a:pPr>
-            <a:r>
-              <a:rPr sz="1300">
-                <a:solidFill>
-                  <a:srgbClr val="1A1A1A"/>
-                </a:solidFill>
-              </a:rPr>
-              <a:t>4.  Multi-feature counterfactual paths (ensemble of interventions).</a:t>
-            </a:r>
-          </a:p>
-        </p:txBody>
-      </p:sp>
-      <p:sp>
-        <p:nvSpPr>
-          <p:cNvPr id="9" name="TextBox 8"/>
           <p:cNvSpPr txBox="1"/>
           <p:nvPr/>
         </p:nvSpPr>
@@ -9437,7 +9849,7 @@
                   <a:srgbClr val="6B7280"/>
                 </a:solidFill>
               </a:rPr>
-              <a:t>18 / 19</a:t>
+              <a:t>18 / 20</a:t>
             </a:r>
           </a:p>
         </p:txBody>
@@ -9451,7 +9863,7 @@
 </file>
 
 <file path=ppt/slides/slide19.xml><?xml version="1.0" encoding="utf-8"?>
-<p:sld xmlns:a="http://schemas.openxmlformats.org/drawingml/2006/main" xmlns:r="http://schemas.openxmlformats.org/officeDocument/2006/relationships" xmlns:p="http://schemas.openxmlformats.org/presentationml/2006/main">
+<p:sld xmlns:a="http://schemas.openxmlformats.org/drawingml/2006/main" xmlns:p="http://schemas.openxmlformats.org/presentationml/2006/main" xmlns:r="http://schemas.openxmlformats.org/officeDocument/2006/relationships">
   <p:cSld>
     <p:spTree>
       <p:nvGrpSpPr>
@@ -9459,14 +9871,7 @@
         <p:cNvGrpSpPr/>
         <p:nvPr/>
       </p:nvGrpSpPr>
-      <p:grpSpPr>
-        <a:xfrm>
-          <a:off x="0" y="0"/>
-          <a:ext cx="0" cy="0"/>
-          <a:chOff x="0" y="0"/>
-          <a:chExt cx="0" cy="0"/>
-        </a:xfrm>
-      </p:grpSpPr>
+      <p:grpSpPr/>
       <p:sp>
         <p:nvSpPr>
           <p:cNvPr id="2" name="Rectangle 1"/>
@@ -9476,7 +9881,50 @@
         <p:spPr>
           <a:xfrm>
             <a:off x="0" y="0"/>
-            <a:ext cx="12191695" cy="6858000"/>
+            <a:ext cx="182880" cy="6858000"/>
+          </a:xfrm>
+          <a:prstGeom prst="rect">
+            <a:avLst/>
+          </a:prstGeom>
+          <a:solidFill>
+            <a:srgbClr val="E65555"/>
+          </a:solidFill>
+          <a:ln>
+            <a:noFill/>
+          </a:ln>
+        </p:spPr>
+        <p:style>
+          <a:lnRef idx="1">
+            <a:schemeClr val="accent1"/>
+          </a:lnRef>
+          <a:fillRef idx="3">
+            <a:schemeClr val="accent1"/>
+          </a:fillRef>
+          <a:effectRef idx="2">
+            <a:schemeClr val="accent1"/>
+          </a:effectRef>
+          <a:fontRef idx="minor">
+            <a:schemeClr val="lt1"/>
+          </a:fontRef>
+        </p:style>
+        <p:txBody>
+          <a:bodyPr rtlCol="0" anchor="ctr"/>
+          <a:lstStyle/>
+          <a:p>
+            <a:pPr algn="ctr"/>
+          </a:p>
+        </p:txBody>
+      </p:sp>
+      <p:sp>
+        <p:nvSpPr>
+          <p:cNvPr id="3" name="Rectangle 2"/>
+          <p:cNvSpPr/>
+          <p:nvPr/>
+        </p:nvSpPr>
+        <p:spPr>
+          <a:xfrm>
+            <a:off x="0" y="0"/>
+            <a:ext cx="12191695" cy="777240"/>
           </a:xfrm>
           <a:prstGeom prst="rect">
             <a:avLst/>
@@ -9507,51 +9955,6 @@
           <a:lstStyle/>
           <a:p>
             <a:pPr algn="ctr"/>
-            <a:endParaRPr/>
-          </a:p>
-        </p:txBody>
-      </p:sp>
-      <p:sp>
-        <p:nvSpPr>
-          <p:cNvPr id="3" name="Rectangle 2"/>
-          <p:cNvSpPr/>
-          <p:nvPr/>
-        </p:nvSpPr>
-        <p:spPr>
-          <a:xfrm>
-            <a:off x="0" y="0"/>
-            <a:ext cx="228600" cy="6858000"/>
-          </a:xfrm>
-          <a:prstGeom prst="rect">
-            <a:avLst/>
-          </a:prstGeom>
-          <a:solidFill>
-            <a:srgbClr val="E65555"/>
-          </a:solidFill>
-          <a:ln>
-            <a:noFill/>
-          </a:ln>
-        </p:spPr>
-        <p:style>
-          <a:lnRef idx="1">
-            <a:schemeClr val="accent1"/>
-          </a:lnRef>
-          <a:fillRef idx="3">
-            <a:schemeClr val="accent1"/>
-          </a:fillRef>
-          <a:effectRef idx="2">
-            <a:schemeClr val="accent1"/>
-          </a:effectRef>
-          <a:fontRef idx="minor">
-            <a:schemeClr val="lt1"/>
-          </a:fontRef>
-        </p:style>
-        <p:txBody>
-          <a:bodyPr rtlCol="0" anchor="ctr"/>
-          <a:lstStyle/>
-          <a:p>
-            <a:pPr algn="ctr"/>
-            <a:endParaRPr/>
           </a:p>
         </p:txBody>
       </p:sp>
@@ -9563,8 +9966,42 @@
         </p:nvSpPr>
         <p:spPr>
           <a:xfrm>
-            <a:off x="1097280" y="1645920"/>
-            <a:ext cx="10058400" cy="1371600"/>
+            <a:off x="457200" y="118872"/>
+            <a:ext cx="11643055" cy="640080"/>
+          </a:xfrm>
+          <a:prstGeom prst="rect">
+            <a:avLst/>
+          </a:prstGeom>
+          <a:noFill/>
+        </p:spPr>
+        <p:txBody>
+          <a:bodyPr wrap="none" tIns="0" bIns="0">
+            <a:spAutoFit/>
+          </a:bodyPr>
+          <a:lstStyle/>
+          <a:p>
+            <a:pPr algn="l"/>
+            <a:r>
+              <a:rPr sz="2600" b="1">
+                <a:solidFill>
+                  <a:srgbClr val="FFFFFF"/>
+                </a:solidFill>
+              </a:rPr>
+              <a:t>Limitations &amp; future work</a:t>
+            </a:r>
+          </a:p>
+        </p:txBody>
+      </p:sp>
+      <p:sp>
+        <p:nvSpPr>
+          <p:cNvPr id="5" name="TextBox 4"/>
+          <p:cNvSpPr txBox="1"/>
+          <p:nvPr/>
+        </p:nvSpPr>
+        <p:spPr>
+          <a:xfrm>
+            <a:off x="640080" y="1097280"/>
+            <a:ext cx="5486400" cy="457200"/>
           </a:xfrm>
           <a:prstGeom prst="rect">
             <a:avLst/>
@@ -9579,26 +10016,26 @@
           <a:p>
             <a:pPr algn="l"/>
             <a:r>
-              <a:rPr sz="4800" b="1" i="0">
-                <a:solidFill>
-                  <a:srgbClr val="FFFFFF"/>
-                </a:solidFill>
-              </a:rPr>
-              <a:t>Thank you. Questions?</a:t>
-            </a:r>
-          </a:p>
-        </p:txBody>
-      </p:sp>
-      <p:sp>
-        <p:nvSpPr>
-          <p:cNvPr id="5" name="TextBox 4"/>
+              <a:rPr sz="2000" b="1" i="0">
+                <a:solidFill>
+                  <a:srgbClr val="E65555"/>
+                </a:solidFill>
+              </a:rPr>
+              <a:t>Honest caveats</a:t>
+            </a:r>
+          </a:p>
+        </p:txBody>
+      </p:sp>
+      <p:sp>
+        <p:nvSpPr>
+          <p:cNvPr id="6" name="TextBox 5"/>
           <p:cNvSpPr txBox="1"/>
           <p:nvPr/>
         </p:nvSpPr>
         <p:spPr>
           <a:xfrm>
-            <a:off x="1097280" y="3017520"/>
-            <a:ext cx="10058400" cy="548640"/>
+            <a:off x="640080" y="1554480"/>
+            <a:ext cx="5486400" cy="4114800"/>
           </a:xfrm>
           <a:prstGeom prst="rect">
             <a:avLst/>
@@ -9611,28 +10048,92 @@
           </a:bodyPr>
           <a:lstStyle/>
           <a:p>
-            <a:pPr algn="l"/>
-            <a:r>
-              <a:rPr sz="2200" b="0" i="0">
-                <a:solidFill>
-                  <a:srgbClr val="D1D5DB"/>
-                </a:solidFill>
-              </a:rPr>
-              <a:t>Live demo follows.</a:t>
-            </a:r>
-          </a:p>
-        </p:txBody>
-      </p:sp>
-      <p:sp>
-        <p:nvSpPr>
-          <p:cNvPr id="6" name="TextBox 5"/>
+            <a:pPr>
+              <a:spcAft>
+                <a:spcPts val="400"/>
+              </a:spcAft>
+            </a:pPr>
+            <a:r>
+              <a:rPr sz="1500">
+                <a:solidFill>
+                  <a:srgbClr val="1A1A1A"/>
+                </a:solidFill>
+              </a:rPr>
+              <a:t>Single dataset; generalization not validated.</a:t>
+            </a:r>
+          </a:p>
+          <a:p>
+            <a:pPr>
+              <a:spcAft>
+                <a:spcPts val="400"/>
+              </a:spcAft>
+            </a:pPr>
+            <a:r>
+              <a:rPr sz="1500">
+                <a:solidFill>
+                  <a:srgbClr val="1A1A1A"/>
+                </a:solidFill>
+              </a:rPr>
+              <a:t>Time is relative seconds; no diurnal features.</a:t>
+            </a:r>
+          </a:p>
+          <a:p>
+            <a:pPr>
+              <a:spcAft>
+                <a:spcPts val="400"/>
+              </a:spcAft>
+            </a:pPr>
+            <a:r>
+              <a:rPr sz="1500">
+                <a:solidFill>
+                  <a:srgbClr val="1A1A1A"/>
+                </a:solidFill>
+              </a:rPr>
+              <a:t>No streaming layer (offline batch only).</a:t>
+            </a:r>
+          </a:p>
+          <a:p>
+            <a:pPr>
+              <a:spcAft>
+                <a:spcPts val="400"/>
+              </a:spcAft>
+            </a:pPr>
+            <a:r>
+              <a:rPr sz="1500">
+                <a:solidFill>
+                  <a:srgbClr val="1A1A1A"/>
+                </a:solidFill>
+              </a:rPr>
+              <a:t>Red-team campaign ends mid-dataset;</a:t>
+            </a:r>
+          </a:p>
+          <a:p>
+            <a:pPr>
+              <a:spcAft>
+                <a:spcPts val="400"/>
+              </a:spcAft>
+            </a:pPr>
+            <a:r>
+              <a:rPr sz="1500">
+                <a:solidFill>
+                  <a:srgbClr val="1A1A1A"/>
+                </a:solidFill>
+              </a:rPr>
+              <a:t>    stratified random split with disclosure.</a:t>
+            </a:r>
+          </a:p>
+        </p:txBody>
+      </p:sp>
+      <p:sp>
+        <p:nvSpPr>
+          <p:cNvPr id="7" name="TextBox 6"/>
           <p:cNvSpPr txBox="1"/>
           <p:nvPr/>
         </p:nvSpPr>
         <p:spPr>
           <a:xfrm>
-            <a:off x="1097280" y="4846320"/>
-            <a:ext cx="10058400" cy="1371600"/>
+            <a:off x="6400800" y="1097280"/>
+            <a:ext cx="5486400" cy="457200"/>
           </a:xfrm>
           <a:prstGeom prst="rect">
             <a:avLst/>
@@ -9640,56 +10141,166 @@
           <a:noFill/>
         </p:spPr>
         <p:txBody>
-          <a:bodyPr wrap="square">
+          <a:bodyPr wrap="square" tIns="0">
             <a:spAutoFit/>
           </a:bodyPr>
           <a:lstStyle/>
           <a:p>
-            <a:pPr>
-              <a:spcAft>
-                <a:spcPts val="400"/>
-              </a:spcAft>
-            </a:pPr>
-            <a:r>
-              <a:rPr sz="1600">
-                <a:solidFill>
-                  <a:srgbClr val="E5E7EB"/>
-                </a:solidFill>
-                <a:latin typeface="Consolas"/>
-              </a:rPr>
-              <a:t>Live URL       https://lanlthreat.streamlit.app</a:t>
-            </a:r>
-          </a:p>
-          <a:p>
-            <a:pPr>
-              <a:spcAft>
-                <a:spcPts val="400"/>
-              </a:spcAft>
-            </a:pPr>
-            <a:r>
-              <a:rPr sz="1600">
-                <a:solidFill>
-                  <a:srgbClr val="E5E7EB"/>
-                </a:solidFill>
-                <a:latin typeface="Consolas"/>
-              </a:rPr>
-              <a:t>API            http://98.94.30.68:8000</a:t>
-            </a:r>
-          </a:p>
-          <a:p>
-            <a:pPr>
-              <a:spcAft>
-                <a:spcPts val="400"/>
-              </a:spcAft>
-            </a:pPr>
-            <a:r>
-              <a:rPr sz="1600">
-                <a:solidFill>
-                  <a:srgbClr val="E5E7EB"/>
-                </a:solidFill>
-                <a:latin typeface="Consolas"/>
-              </a:rPr>
-              <a:t>Repository     https://github.com/mcrisci24/lanl-threat-pipeline</a:t>
+            <a:pPr algn="l"/>
+            <a:r>
+              <a:rPr sz="2000" b="1" i="0">
+                <a:solidFill>
+                  <a:srgbClr val="E65555"/>
+                </a:solidFill>
+              </a:rPr>
+              <a:t>Future work, by impact</a:t>
+            </a:r>
+          </a:p>
+        </p:txBody>
+      </p:sp>
+      <p:sp>
+        <p:nvSpPr>
+          <p:cNvPr id="8" name="TextBox 7"/>
+          <p:cNvSpPr txBox="1"/>
+          <p:nvPr/>
+        </p:nvSpPr>
+        <p:spPr>
+          <a:xfrm>
+            <a:off x="6400800" y="1554480"/>
+            <a:ext cx="5486400" cy="4114800"/>
+          </a:xfrm>
+          <a:prstGeom prst="rect">
+            <a:avLst/>
+          </a:prstGeom>
+          <a:noFill/>
+        </p:spPr>
+        <p:txBody>
+          <a:bodyPr wrap="square" tIns="0">
+            <a:spAutoFit/>
+          </a:bodyPr>
+          <a:lstStyle/>
+          <a:p>
+            <a:pPr>
+              <a:spcAft>
+                <a:spcPts val="400"/>
+              </a:spcAft>
+            </a:pPr>
+            <a:r>
+              <a:rPr sz="1300">
+                <a:solidFill>
+                  <a:srgbClr val="1A1A1A"/>
+                </a:solidFill>
+              </a:rPr>
+              <a:t>1.  Per-cost-matrix threshold tuning.</a:t>
+            </a:r>
+          </a:p>
+          <a:p>
+            <a:pPr>
+              <a:spcAft>
+                <a:spcPts val="400"/>
+              </a:spcAft>
+            </a:pPr>
+            <a:r>
+              <a:rPr sz="1300">
+                <a:solidFill>
+                  <a:srgbClr val="1A1A1A"/>
+                </a:solidFill>
+              </a:rPr>
+              <a:t>      analyst would supply FP-cost / FN-cost; the system picks</a:t>
+            </a:r>
+          </a:p>
+          <a:p>
+            <a:pPr>
+              <a:spcAft>
+                <a:spcPts val="400"/>
+              </a:spcAft>
+            </a:pPr>
+            <a:r>
+              <a:rPr sz="1300">
+                <a:solidFill>
+                  <a:srgbClr val="1A1A1A"/>
+                </a:solidFill>
+              </a:rPr>
+              <a:t>      the threshold that minimizes expected operational cost.</a:t>
+            </a:r>
+          </a:p>
+          <a:p>
+            <a:pPr>
+              <a:spcAft>
+                <a:spcPts val="400"/>
+              </a:spcAft>
+            </a:pPr>
+            <a:r>
+              <a:rPr sz="1300">
+                <a:solidFill>
+                  <a:srgbClr val="1A1A1A"/>
+                </a:solidFill>
+              </a:rPr>
+              <a:t>2.  Streaming: Kinesis -&gt; Spark Structured Streaming -&gt; live scoring.</a:t>
+            </a:r>
+          </a:p>
+          <a:p>
+            <a:pPr>
+              <a:spcAft>
+                <a:spcPts val="400"/>
+              </a:spcAft>
+            </a:pPr>
+            <a:r>
+              <a:rPr sz="1300">
+                <a:solidFill>
+                  <a:srgbClr val="1A1A1A"/>
+                </a:solidFill>
+              </a:rPr>
+              <a:t>3.  Automated retraining: EventBridge cron -&gt; EMR Step + train_model.</a:t>
+            </a:r>
+          </a:p>
+          <a:p>
+            <a:pPr>
+              <a:spcAft>
+                <a:spcPts val="400"/>
+              </a:spcAft>
+            </a:pPr>
+            <a:r>
+              <a:rPr sz="1300">
+                <a:solidFill>
+                  <a:srgbClr val="1A1A1A"/>
+                </a:solidFill>
+              </a:rPr>
+              <a:t>4.  Multi-feature counterfactual paths (ensemble of interventions).</a:t>
+            </a:r>
+          </a:p>
+        </p:txBody>
+      </p:sp>
+      <p:sp>
+        <p:nvSpPr>
+          <p:cNvPr id="9" name="TextBox 8"/>
+          <p:cNvSpPr txBox="1"/>
+          <p:nvPr/>
+        </p:nvSpPr>
+        <p:spPr>
+          <a:xfrm>
+            <a:off x="10820095" y="6492240"/>
+            <a:ext cx="1188720" cy="274320"/>
+          </a:xfrm>
+          <a:prstGeom prst="rect">
+            <a:avLst/>
+          </a:prstGeom>
+          <a:noFill/>
+        </p:spPr>
+        <p:txBody>
+          <a:bodyPr wrap="none">
+            <a:spAutoFit/>
+          </a:bodyPr>
+          <a:lstStyle/>
+          <a:p>
+            <a:pPr algn="r"/>
+            <a:r>
+              <a:rPr sz="1000">
+                <a:solidFill>
+                  <a:srgbClr val="6B7280"/>
+                </a:solidFill>
+              </a:rPr>
+              <a:t>19 / 20</a:t>
             </a:r>
           </a:p>
         </p:txBody>
@@ -9703,7 +10314,7 @@
 </file>
 
 <file path=ppt/slides/slide2.xml><?xml version="1.0" encoding="utf-8"?>
-<p:sld xmlns:a="http://schemas.openxmlformats.org/drawingml/2006/main" xmlns:r="http://schemas.openxmlformats.org/officeDocument/2006/relationships" xmlns:p="http://schemas.openxmlformats.org/presentationml/2006/main">
+<p:sld xmlns:a="http://schemas.openxmlformats.org/drawingml/2006/main" xmlns:p="http://schemas.openxmlformats.org/presentationml/2006/main" xmlns:r="http://schemas.openxmlformats.org/officeDocument/2006/relationships">
   <p:cSld>
     <p:spTree>
       <p:nvGrpSpPr>
@@ -9711,14 +10322,7 @@
         <p:cNvGrpSpPr/>
         <p:nvPr/>
       </p:nvGrpSpPr>
-      <p:grpSpPr>
-        <a:xfrm>
-          <a:off x="0" y="0"/>
-          <a:ext cx="0" cy="0"/>
-          <a:chOff x="0" y="0"/>
-          <a:chExt cx="0" cy="0"/>
-        </a:xfrm>
-      </p:grpSpPr>
+      <p:grpSpPr/>
       <p:sp>
         <p:nvSpPr>
           <p:cNvPr id="2" name="Rectangle 1"/>
@@ -9759,7 +10363,6 @@
           <a:lstStyle/>
           <a:p>
             <a:pPr algn="ctr"/>
-            <a:endParaRPr/>
           </a:p>
         </p:txBody>
       </p:sp>
@@ -9803,7 +10406,6 @@
           <a:lstStyle/>
           <a:p>
             <a:pPr algn="ctr"/>
-            <a:endParaRPr/>
           </a:p>
         </p:txBody>
       </p:sp>
@@ -10028,7 +10630,250 @@
                   <a:srgbClr val="6B7280"/>
                 </a:solidFill>
               </a:rPr>
-              <a:t>2 / 19</a:t>
+              <a:t>2 / 20</a:t>
+            </a:r>
+          </a:p>
+        </p:txBody>
+      </p:sp>
+    </p:spTree>
+  </p:cSld>
+  <p:clrMapOvr>
+    <a:masterClrMapping/>
+  </p:clrMapOvr>
+</p:sld>
+</file>
+
+<file path=ppt/slides/slide20.xml><?xml version="1.0" encoding="utf-8"?>
+<p:sld xmlns:a="http://schemas.openxmlformats.org/drawingml/2006/main" xmlns:p="http://schemas.openxmlformats.org/presentationml/2006/main" xmlns:r="http://schemas.openxmlformats.org/officeDocument/2006/relationships">
+  <p:cSld>
+    <p:spTree>
+      <p:nvGrpSpPr>
+        <p:cNvPr id="1" name=""/>
+        <p:cNvGrpSpPr/>
+        <p:nvPr/>
+      </p:nvGrpSpPr>
+      <p:grpSpPr/>
+      <p:sp>
+        <p:nvSpPr>
+          <p:cNvPr id="2" name="Rectangle 1"/>
+          <p:cNvSpPr/>
+          <p:nvPr/>
+        </p:nvSpPr>
+        <p:spPr>
+          <a:xfrm>
+            <a:off x="0" y="0"/>
+            <a:ext cx="12191695" cy="6858000"/>
+          </a:xfrm>
+          <a:prstGeom prst="rect">
+            <a:avLst/>
+          </a:prstGeom>
+          <a:solidFill>
+            <a:srgbClr val="1F2A44"/>
+          </a:solidFill>
+          <a:ln>
+            <a:noFill/>
+          </a:ln>
+        </p:spPr>
+        <p:style>
+          <a:lnRef idx="1">
+            <a:schemeClr val="accent1"/>
+          </a:lnRef>
+          <a:fillRef idx="3">
+            <a:schemeClr val="accent1"/>
+          </a:fillRef>
+          <a:effectRef idx="2">
+            <a:schemeClr val="accent1"/>
+          </a:effectRef>
+          <a:fontRef idx="minor">
+            <a:schemeClr val="lt1"/>
+          </a:fontRef>
+        </p:style>
+        <p:txBody>
+          <a:bodyPr rtlCol="0" anchor="ctr"/>
+          <a:lstStyle/>
+          <a:p>
+            <a:pPr algn="ctr"/>
+          </a:p>
+        </p:txBody>
+      </p:sp>
+      <p:sp>
+        <p:nvSpPr>
+          <p:cNvPr id="3" name="Rectangle 2"/>
+          <p:cNvSpPr/>
+          <p:nvPr/>
+        </p:nvSpPr>
+        <p:spPr>
+          <a:xfrm>
+            <a:off x="0" y="0"/>
+            <a:ext cx="228600" cy="6858000"/>
+          </a:xfrm>
+          <a:prstGeom prst="rect">
+            <a:avLst/>
+          </a:prstGeom>
+          <a:solidFill>
+            <a:srgbClr val="E65555"/>
+          </a:solidFill>
+          <a:ln>
+            <a:noFill/>
+          </a:ln>
+        </p:spPr>
+        <p:style>
+          <a:lnRef idx="1">
+            <a:schemeClr val="accent1"/>
+          </a:lnRef>
+          <a:fillRef idx="3">
+            <a:schemeClr val="accent1"/>
+          </a:fillRef>
+          <a:effectRef idx="2">
+            <a:schemeClr val="accent1"/>
+          </a:effectRef>
+          <a:fontRef idx="minor">
+            <a:schemeClr val="lt1"/>
+          </a:fontRef>
+        </p:style>
+        <p:txBody>
+          <a:bodyPr rtlCol="0" anchor="ctr"/>
+          <a:lstStyle/>
+          <a:p>
+            <a:pPr algn="ctr"/>
+          </a:p>
+        </p:txBody>
+      </p:sp>
+      <p:sp>
+        <p:nvSpPr>
+          <p:cNvPr id="4" name="TextBox 3"/>
+          <p:cNvSpPr txBox="1"/>
+          <p:nvPr/>
+        </p:nvSpPr>
+        <p:spPr>
+          <a:xfrm>
+            <a:off x="1097280" y="1645920"/>
+            <a:ext cx="10058400" cy="1371600"/>
+          </a:xfrm>
+          <a:prstGeom prst="rect">
+            <a:avLst/>
+          </a:prstGeom>
+          <a:noFill/>
+        </p:spPr>
+        <p:txBody>
+          <a:bodyPr wrap="square" tIns="0">
+            <a:spAutoFit/>
+          </a:bodyPr>
+          <a:lstStyle/>
+          <a:p>
+            <a:pPr algn="l"/>
+            <a:r>
+              <a:rPr sz="4800" b="1" i="0">
+                <a:solidFill>
+                  <a:srgbClr val="FFFFFF"/>
+                </a:solidFill>
+              </a:rPr>
+              <a:t>Thank you. Questions?</a:t>
+            </a:r>
+          </a:p>
+        </p:txBody>
+      </p:sp>
+      <p:sp>
+        <p:nvSpPr>
+          <p:cNvPr id="5" name="TextBox 4"/>
+          <p:cNvSpPr txBox="1"/>
+          <p:nvPr/>
+        </p:nvSpPr>
+        <p:spPr>
+          <a:xfrm>
+            <a:off x="1097280" y="3017520"/>
+            <a:ext cx="10058400" cy="548640"/>
+          </a:xfrm>
+          <a:prstGeom prst="rect">
+            <a:avLst/>
+          </a:prstGeom>
+          <a:noFill/>
+        </p:spPr>
+        <p:txBody>
+          <a:bodyPr wrap="square" tIns="0">
+            <a:spAutoFit/>
+          </a:bodyPr>
+          <a:lstStyle/>
+          <a:p>
+            <a:pPr algn="l"/>
+            <a:r>
+              <a:rPr sz="2200" b="0" i="0">
+                <a:solidFill>
+                  <a:srgbClr val="D1D5DB"/>
+                </a:solidFill>
+              </a:rPr>
+              <a:t>Live demo follows.</a:t>
+            </a:r>
+          </a:p>
+        </p:txBody>
+      </p:sp>
+      <p:sp>
+        <p:nvSpPr>
+          <p:cNvPr id="6" name="TextBox 5"/>
+          <p:cNvSpPr txBox="1"/>
+          <p:nvPr/>
+        </p:nvSpPr>
+        <p:spPr>
+          <a:xfrm>
+            <a:off x="1097280" y="4846320"/>
+            <a:ext cx="10058400" cy="1371600"/>
+          </a:xfrm>
+          <a:prstGeom prst="rect">
+            <a:avLst/>
+          </a:prstGeom>
+          <a:noFill/>
+        </p:spPr>
+        <p:txBody>
+          <a:bodyPr wrap="square">
+            <a:spAutoFit/>
+          </a:bodyPr>
+          <a:lstStyle/>
+          <a:p>
+            <a:pPr>
+              <a:spcAft>
+                <a:spcPts val="400"/>
+              </a:spcAft>
+            </a:pPr>
+            <a:r>
+              <a:rPr sz="1600">
+                <a:solidFill>
+                  <a:srgbClr val="E5E7EB"/>
+                </a:solidFill>
+                <a:latin typeface="Consolas"/>
+              </a:rPr>
+              <a:t>Live URL       https://lanlthreat.streamlit.app</a:t>
+            </a:r>
+          </a:p>
+          <a:p>
+            <a:pPr>
+              <a:spcAft>
+                <a:spcPts val="400"/>
+              </a:spcAft>
+            </a:pPr>
+            <a:r>
+              <a:rPr sz="1600">
+                <a:solidFill>
+                  <a:srgbClr val="E5E7EB"/>
+                </a:solidFill>
+                <a:latin typeface="Consolas"/>
+              </a:rPr>
+              <a:t>API            http://98.94.30.68:8000</a:t>
+            </a:r>
+          </a:p>
+          <a:p>
+            <a:pPr>
+              <a:spcAft>
+                <a:spcPts val="400"/>
+              </a:spcAft>
+            </a:pPr>
+            <a:r>
+              <a:rPr sz="1600">
+                <a:solidFill>
+                  <a:srgbClr val="E5E7EB"/>
+                </a:solidFill>
+                <a:latin typeface="Consolas"/>
+              </a:rPr>
+              <a:t>Repository     https://github.com/mcrisci24/lanl-threat-pipeline</a:t>
             </a:r>
           </a:p>
         </p:txBody>
@@ -10042,7 +10887,7 @@
 </file>
 
 <file path=ppt/slides/slide3.xml><?xml version="1.0" encoding="utf-8"?>
-<p:sld xmlns:a="http://schemas.openxmlformats.org/drawingml/2006/main" xmlns:r="http://schemas.openxmlformats.org/officeDocument/2006/relationships" xmlns:p="http://schemas.openxmlformats.org/presentationml/2006/main">
+<p:sld xmlns:a="http://schemas.openxmlformats.org/drawingml/2006/main" xmlns:p="http://schemas.openxmlformats.org/presentationml/2006/main" xmlns:r="http://schemas.openxmlformats.org/officeDocument/2006/relationships">
   <p:cSld>
     <p:spTree>
       <p:nvGrpSpPr>
@@ -10050,14 +10895,7 @@
         <p:cNvGrpSpPr/>
         <p:nvPr/>
       </p:nvGrpSpPr>
-      <p:grpSpPr>
-        <a:xfrm>
-          <a:off x="0" y="0"/>
-          <a:ext cx="0" cy="0"/>
-          <a:chOff x="0" y="0"/>
-          <a:chExt cx="0" cy="0"/>
-        </a:xfrm>
-      </p:grpSpPr>
+      <p:grpSpPr/>
       <p:sp>
         <p:nvSpPr>
           <p:cNvPr id="2" name="Rectangle 1"/>
@@ -10098,7 +10936,6 @@
           <a:lstStyle/>
           <a:p>
             <a:pPr algn="ctr"/>
-            <a:endParaRPr/>
           </a:p>
         </p:txBody>
       </p:sp>
@@ -10142,7 +10979,6 @@
           <a:lstStyle/>
           <a:p>
             <a:pPr algn="ctr"/>
-            <a:endParaRPr/>
           </a:p>
         </p:txBody>
       </p:sp>
@@ -10405,7 +11241,7 @@
                   <a:srgbClr val="6B7280"/>
                 </a:solidFill>
               </a:rPr>
-              <a:t>3 / 19</a:t>
+              <a:t>3 / 20</a:t>
             </a:r>
           </a:p>
         </p:txBody>
@@ -10419,7 +11255,7 @@
 </file>
 
 <file path=ppt/slides/slide4.xml><?xml version="1.0" encoding="utf-8"?>
-<p:sld xmlns:a="http://schemas.openxmlformats.org/drawingml/2006/main" xmlns:r="http://schemas.openxmlformats.org/officeDocument/2006/relationships" xmlns:p="http://schemas.openxmlformats.org/presentationml/2006/main">
+<p:sld xmlns:a="http://schemas.openxmlformats.org/drawingml/2006/main" xmlns:p="http://schemas.openxmlformats.org/presentationml/2006/main" xmlns:r="http://schemas.openxmlformats.org/officeDocument/2006/relationships">
   <p:cSld>
     <p:spTree>
       <p:nvGrpSpPr>
@@ -10427,14 +11263,7 @@
         <p:cNvGrpSpPr/>
         <p:nvPr/>
       </p:nvGrpSpPr>
-      <p:grpSpPr>
-        <a:xfrm>
-          <a:off x="0" y="0"/>
-          <a:ext cx="0" cy="0"/>
-          <a:chOff x="0" y="0"/>
-          <a:chExt cx="0" cy="0"/>
-        </a:xfrm>
-      </p:grpSpPr>
+      <p:grpSpPr/>
       <p:sp>
         <p:nvSpPr>
           <p:cNvPr id="2" name="Rectangle 1"/>
@@ -10475,7 +11304,6 @@
           <a:lstStyle/>
           <a:p>
             <a:pPr algn="ctr"/>
-            <a:endParaRPr/>
           </a:p>
         </p:txBody>
       </p:sp>
@@ -10519,7 +11347,6 @@
           <a:lstStyle/>
           <a:p>
             <a:pPr algn="ctr"/>
-            <a:endParaRPr/>
           </a:p>
         </p:txBody>
       </p:sp>
@@ -10573,8 +11400,8 @@
         </p:blipFill>
         <p:spPr>
           <a:xfrm>
-            <a:off x="457200" y="1034080"/>
-            <a:ext cx="11430000" cy="5201319"/>
+            <a:off x="457200" y="1097280"/>
+            <a:ext cx="11430000" cy="5064159"/>
           </a:xfrm>
           <a:prstGeom prst="rect">
             <a:avLst/>
@@ -10589,7 +11416,7 @@
         </p:nvSpPr>
         <p:spPr>
           <a:xfrm>
-            <a:off x="640080" y="6080760"/>
+            <a:off x="640080" y="4937760"/>
             <a:ext cx="10972800" cy="1371600"/>
           </a:xfrm>
           <a:prstGeom prst="rect">
@@ -10605,7 +11432,7 @@
           <a:p>
             <a:pPr algn="l"/>
             <a:r>
-              <a:rPr sz="1700" b="0" i="0" dirty="0">
+              <a:rPr sz="1700" b="0" i="0">
                 <a:solidFill>
                   <a:srgbClr val="1F2A44"/>
                 </a:solidFill>
@@ -10644,7 +11471,7 @@
                   <a:srgbClr val="6B7280"/>
                 </a:solidFill>
               </a:rPr>
-              <a:t>4 / 19</a:t>
+              <a:t>4 / 20</a:t>
             </a:r>
           </a:p>
         </p:txBody>
@@ -10658,7 +11485,7 @@
 </file>
 
 <file path=ppt/slides/slide5.xml><?xml version="1.0" encoding="utf-8"?>
-<p:sld xmlns:a="http://schemas.openxmlformats.org/drawingml/2006/main" xmlns:r="http://schemas.openxmlformats.org/officeDocument/2006/relationships" xmlns:p="http://schemas.openxmlformats.org/presentationml/2006/main">
+<p:sld xmlns:a="http://schemas.openxmlformats.org/drawingml/2006/main" xmlns:p="http://schemas.openxmlformats.org/presentationml/2006/main" xmlns:r="http://schemas.openxmlformats.org/officeDocument/2006/relationships">
   <p:cSld>
     <p:spTree>
       <p:nvGrpSpPr>
@@ -10666,14 +11493,7 @@
         <p:cNvGrpSpPr/>
         <p:nvPr/>
       </p:nvGrpSpPr>
-      <p:grpSpPr>
-        <a:xfrm>
-          <a:off x="0" y="0"/>
-          <a:ext cx="0" cy="0"/>
-          <a:chOff x="0" y="0"/>
-          <a:chExt cx="0" cy="0"/>
-        </a:xfrm>
-      </p:grpSpPr>
+      <p:grpSpPr/>
       <p:sp>
         <p:nvSpPr>
           <p:cNvPr id="2" name="Rectangle 1"/>
@@ -10714,7 +11534,6 @@
           <a:lstStyle/>
           <a:p>
             <a:pPr algn="ctr"/>
-            <a:endParaRPr/>
           </a:p>
         </p:txBody>
       </p:sp>
@@ -10758,7 +11577,6 @@
           <a:lstStyle/>
           <a:p>
             <a:pPr algn="ctr"/>
-            <a:endParaRPr/>
           </a:p>
         </p:txBody>
       </p:sp>
@@ -10828,8 +11646,8 @@
         </p:nvSpPr>
         <p:spPr>
           <a:xfrm>
-            <a:off x="518007" y="6336792"/>
-            <a:ext cx="11155680" cy="230832"/>
+            <a:off x="640080" y="5852160"/>
+            <a:ext cx="10972800" cy="822960"/>
           </a:xfrm>
           <a:prstGeom prst="rect">
             <a:avLst/>
@@ -10844,60 +11662,12 @@
           <a:p>
             <a:pPr algn="l"/>
             <a:r>
-              <a:rPr sz="1200" b="0" i="0" dirty="0">
+              <a:rPr sz="1500" b="0" i="0">
                 <a:solidFill>
                   <a:srgbClr val="1F2A44"/>
                 </a:solidFill>
               </a:rPr>
-              <a:t>Spec requires &gt;= 2 distributed stages. This project has 3: S3 (cloud storage), EMR </a:t>
-            </a:r>
-            <a:r>
-              <a:rPr sz="1200" b="0" i="0" dirty="0" err="1">
-                <a:solidFill>
-                  <a:srgbClr val="1F2A44"/>
-                </a:solidFill>
-              </a:rPr>
-              <a:t>PySpark</a:t>
-            </a:r>
-            <a:r>
-              <a:rPr sz="1200" b="0" i="0" dirty="0">
-                <a:solidFill>
-                  <a:srgbClr val="1F2A44"/>
-                </a:solidFill>
-              </a:rPr>
-              <a:t> (distributed compute), </a:t>
-            </a:r>
-            <a:r>
-              <a:rPr sz="1200" b="0" i="0" dirty="0" err="1">
-                <a:solidFill>
-                  <a:srgbClr val="1F2A44"/>
-                </a:solidFill>
-              </a:rPr>
-              <a:t>FastAPI</a:t>
-            </a:r>
-            <a:r>
-              <a:rPr sz="1200" b="0" i="0" dirty="0">
-                <a:solidFill>
-                  <a:srgbClr val="1F2A44"/>
-                </a:solidFill>
-              </a:rPr>
-              <a:t> on EC2 + </a:t>
-            </a:r>
-            <a:r>
-              <a:rPr sz="1200" b="0" i="0" dirty="0" err="1">
-                <a:solidFill>
-                  <a:srgbClr val="1F2A44"/>
-                </a:solidFill>
-              </a:rPr>
-              <a:t>Streamlit</a:t>
-            </a:r>
-            <a:r>
-              <a:rPr sz="1200" b="0" i="0" dirty="0">
-                <a:solidFill>
-                  <a:srgbClr val="1F2A44"/>
-                </a:solidFill>
-              </a:rPr>
-              <a:t> Cloud (cloud serving).</a:t>
+              <a:t>Spec requires &gt;= 2 distributed stages. This project has 3: S3 (cloud storage), EMR PySpark (distributed compute), FastAPI on EC2 + Streamlit Cloud (cloud serving).</a:t>
             </a:r>
           </a:p>
         </p:txBody>
@@ -10931,7 +11701,7 @@
                   <a:srgbClr val="6B7280"/>
                 </a:solidFill>
               </a:rPr>
-              <a:t>5 / 19</a:t>
+              <a:t>5 / 20</a:t>
             </a:r>
           </a:p>
         </p:txBody>
@@ -10945,7 +11715,7 @@
 </file>
 
 <file path=ppt/slides/slide6.xml><?xml version="1.0" encoding="utf-8"?>
-<p:sld xmlns:a="http://schemas.openxmlformats.org/drawingml/2006/main" xmlns:r="http://schemas.openxmlformats.org/officeDocument/2006/relationships" xmlns:p="http://schemas.openxmlformats.org/presentationml/2006/main">
+<p:sld xmlns:a="http://schemas.openxmlformats.org/drawingml/2006/main" xmlns:p="http://schemas.openxmlformats.org/presentationml/2006/main" xmlns:r="http://schemas.openxmlformats.org/officeDocument/2006/relationships">
   <p:cSld>
     <p:spTree>
       <p:nvGrpSpPr>
@@ -10953,14 +11723,7 @@
         <p:cNvGrpSpPr/>
         <p:nvPr/>
       </p:nvGrpSpPr>
-      <p:grpSpPr>
-        <a:xfrm>
-          <a:off x="0" y="0"/>
-          <a:ext cx="0" cy="0"/>
-          <a:chOff x="0" y="0"/>
-          <a:chExt cx="0" cy="0"/>
-        </a:xfrm>
-      </p:grpSpPr>
+      <p:grpSpPr/>
       <p:sp>
         <p:nvSpPr>
           <p:cNvPr id="2" name="Rectangle 1"/>
@@ -11001,7 +11764,6 @@
           <a:lstStyle/>
           <a:p>
             <a:pPr algn="ctr"/>
-            <a:endParaRPr/>
           </a:p>
         </p:txBody>
       </p:sp>
@@ -11045,7 +11807,6 @@
           <a:lstStyle/>
           <a:p>
             <a:pPr algn="ctr"/>
-            <a:endParaRPr/>
           </a:p>
         </p:txBody>
       </p:sp>
@@ -11170,7 +11931,7 @@
                   <a:srgbClr val="6B7280"/>
                 </a:solidFill>
               </a:rPr>
-              <a:t>6 / 19</a:t>
+              <a:t>6 / 20</a:t>
             </a:r>
           </a:p>
         </p:txBody>
@@ -11184,7 +11945,7 @@
 </file>
 
 <file path=ppt/slides/slide7.xml><?xml version="1.0" encoding="utf-8"?>
-<p:sld xmlns:a="http://schemas.openxmlformats.org/drawingml/2006/main" xmlns:r="http://schemas.openxmlformats.org/officeDocument/2006/relationships" xmlns:p="http://schemas.openxmlformats.org/presentationml/2006/main">
+<p:sld xmlns:a="http://schemas.openxmlformats.org/drawingml/2006/main" xmlns:p="http://schemas.openxmlformats.org/presentationml/2006/main" xmlns:r="http://schemas.openxmlformats.org/officeDocument/2006/relationships">
   <p:cSld>
     <p:spTree>
       <p:nvGrpSpPr>
@@ -11192,14 +11953,7 @@
         <p:cNvGrpSpPr/>
         <p:nvPr/>
       </p:nvGrpSpPr>
-      <p:grpSpPr>
-        <a:xfrm>
-          <a:off x="0" y="0"/>
-          <a:ext cx="0" cy="0"/>
-          <a:chOff x="0" y="0"/>
-          <a:chExt cx="0" cy="0"/>
-        </a:xfrm>
-      </p:grpSpPr>
+      <p:grpSpPr/>
       <p:sp>
         <p:nvSpPr>
           <p:cNvPr id="2" name="Rectangle 1"/>
@@ -11240,7 +11994,6 @@
           <a:lstStyle/>
           <a:p>
             <a:pPr algn="ctr"/>
-            <a:endParaRPr/>
           </a:p>
         </p:txBody>
       </p:sp>
@@ -11284,7 +12037,6 @@
           <a:lstStyle/>
           <a:p>
             <a:pPr algn="ctr"/>
-            <a:endParaRPr/>
           </a:p>
         </p:txBody>
       </p:sp>
@@ -11363,7 +12115,6 @@
           <a:lstStyle/>
           <a:p>
             <a:pPr algn="ctr"/>
-            <a:endParaRPr/>
           </a:p>
         </p:txBody>
       </p:sp>
@@ -11478,7 +12229,6 @@
           <a:lstStyle/>
           <a:p>
             <a:pPr algn="ctr"/>
-            <a:endParaRPr/>
           </a:p>
         </p:txBody>
       </p:sp>
@@ -11595,7 +12345,6 @@
           <a:lstStyle/>
           <a:p>
             <a:pPr algn="ctr"/>
-            <a:endParaRPr/>
           </a:p>
         </p:txBody>
       </p:sp>
@@ -11733,7 +12482,7 @@
                   <a:srgbClr val="6B7280"/>
                 </a:solidFill>
               </a:rPr>
-              <a:t>7 / 19</a:t>
+              <a:t>7 / 20</a:t>
             </a:r>
           </a:p>
         </p:txBody>
@@ -11747,7 +12496,7 @@
 </file>
 
 <file path=ppt/slides/slide8.xml><?xml version="1.0" encoding="utf-8"?>
-<p:sld xmlns:a="http://schemas.openxmlformats.org/drawingml/2006/main" xmlns:r="http://schemas.openxmlformats.org/officeDocument/2006/relationships" xmlns:p="http://schemas.openxmlformats.org/presentationml/2006/main">
+<p:sld xmlns:a="http://schemas.openxmlformats.org/drawingml/2006/main" xmlns:p="http://schemas.openxmlformats.org/presentationml/2006/main" xmlns:r="http://schemas.openxmlformats.org/officeDocument/2006/relationships">
   <p:cSld>
     <p:spTree>
       <p:nvGrpSpPr>
@@ -11755,14 +12504,7 @@
         <p:cNvGrpSpPr/>
         <p:nvPr/>
       </p:nvGrpSpPr>
-      <p:grpSpPr>
-        <a:xfrm>
-          <a:off x="0" y="0"/>
-          <a:ext cx="0" cy="0"/>
-          <a:chOff x="0" y="0"/>
-          <a:chExt cx="0" cy="0"/>
-        </a:xfrm>
-      </p:grpSpPr>
+      <p:grpSpPr/>
       <p:sp>
         <p:nvSpPr>
           <p:cNvPr id="2" name="Rectangle 1"/>
@@ -11803,7 +12545,6 @@
           <a:lstStyle/>
           <a:p>
             <a:pPr algn="ctr"/>
-            <a:endParaRPr/>
           </a:p>
         </p:txBody>
       </p:sp>
@@ -11847,7 +12588,6 @@
           <a:lstStyle/>
           <a:p>
             <a:pPr algn="ctr"/>
-            <a:endParaRPr/>
           </a:p>
         </p:txBody>
       </p:sp>
@@ -11901,8 +12641,8 @@
         </p:blipFill>
         <p:spPr>
           <a:xfrm>
-            <a:off x="457200" y="877824"/>
-            <a:ext cx="11430000" cy="3236977"/>
+            <a:off x="457200" y="1097280"/>
+            <a:ext cx="11430000" cy="3905209"/>
           </a:xfrm>
           <a:prstGeom prst="rect">
             <a:avLst/>
@@ -11937,7 +12677,7 @@
               </a:spcAft>
             </a:pPr>
             <a:r>
-              <a:rPr sz="1500" dirty="0">
+              <a:rPr sz="1500">
                 <a:solidFill>
                   <a:srgbClr val="1A1A1A"/>
                 </a:solidFill>
@@ -11952,7 +12692,7 @@
               </a:spcAft>
             </a:pPr>
             <a:r>
-              <a:rPr sz="1500" dirty="0">
+              <a:rPr sz="1500">
                 <a:solidFill>
                   <a:srgbClr val="1A1A1A"/>
                 </a:solidFill>
@@ -11967,7 +12707,6 @@
               </a:spcAft>
             </a:pPr>
             <a:r>
-              <a:rPr dirty="0"/>
               <a:t> </a:t>
             </a:r>
           </a:p>
@@ -11978,121 +12717,57 @@
               </a:spcAft>
             </a:pPr>
             <a:r>
-              <a:rPr sz="1500" dirty="0">
+              <a:rPr sz="1500">
                 <a:solidFill>
                   <a:srgbClr val="1A1A1A"/>
                 </a:solidFill>
               </a:rPr>
-              <a:t>Surprise constraint: </a:t>
-            </a:r>
-            <a:r>
-              <a:rPr sz="1500" dirty="0" err="1">
+              <a:t>Surprise constraint: gzip-compressed CSV is NOT splittable in Spark.</a:t>
+            </a:r>
+          </a:p>
+          <a:p>
+            <a:pPr>
+              <a:spcAft>
+                <a:spcPts val="400"/>
+              </a:spcAft>
+            </a:pPr>
+            <a:r>
+              <a:rPr sz="1500">
                 <a:solidFill>
                   <a:srgbClr val="1A1A1A"/>
                 </a:solidFill>
               </a:rPr>
-              <a:t>gzip</a:t>
-            </a:r>
-            <a:r>
-              <a:rPr sz="1500" dirty="0">
+              <a:t>The 7.1 GB auth file was decompressed on ONE core. The other 11 cores</a:t>
+            </a:r>
+          </a:p>
+          <a:p>
+            <a:pPr>
+              <a:spcAft>
+                <a:spcPts val="400"/>
+              </a:spcAft>
+            </a:pPr>
+            <a:r>
+              <a:rPr sz="1500">
                 <a:solidFill>
                   <a:srgbClr val="1A1A1A"/>
                 </a:solidFill>
               </a:rPr>
-              <a:t>-compressed CSV is NOT </a:t>
-            </a:r>
-            <a:r>
-              <a:rPr sz="1500" dirty="0" err="1">
+              <a:t>sat idle through most of bronze_to_silver. In production we'd land</a:t>
+            </a:r>
+          </a:p>
+          <a:p>
+            <a:pPr>
+              <a:spcAft>
+                <a:spcPts val="400"/>
+              </a:spcAft>
+            </a:pPr>
+            <a:r>
+              <a:rPr sz="1500">
                 <a:solidFill>
                   <a:srgbClr val="1A1A1A"/>
                 </a:solidFill>
               </a:rPr>
-              <a:t>splittable</a:t>
-            </a:r>
-            <a:r>
-              <a:rPr sz="1500" dirty="0">
-                <a:solidFill>
-                  <a:srgbClr val="1A1A1A"/>
-                </a:solidFill>
-              </a:rPr>
-              <a:t> in Spark.</a:t>
-            </a:r>
-          </a:p>
-          <a:p>
-            <a:pPr>
-              <a:spcAft>
-                <a:spcPts val="400"/>
-              </a:spcAft>
-            </a:pPr>
-            <a:r>
-              <a:rPr sz="1500" dirty="0">
-                <a:solidFill>
-                  <a:srgbClr val="1A1A1A"/>
-                </a:solidFill>
-              </a:rPr>
-              <a:t>The 7.1 GB auth file was decompressed on ONE core. The other 11 cores</a:t>
-            </a:r>
-          </a:p>
-          <a:p>
-            <a:pPr>
-              <a:spcAft>
-                <a:spcPts val="400"/>
-              </a:spcAft>
-            </a:pPr>
-            <a:r>
-              <a:rPr sz="1500" dirty="0">
-                <a:solidFill>
-                  <a:srgbClr val="1A1A1A"/>
-                </a:solidFill>
-              </a:rPr>
-              <a:t>sat idle through most of </a:t>
-            </a:r>
-            <a:r>
-              <a:rPr sz="1500" dirty="0" err="1">
-                <a:solidFill>
-                  <a:srgbClr val="1A1A1A"/>
-                </a:solidFill>
-              </a:rPr>
-              <a:t>bronze_to_silver</a:t>
-            </a:r>
-            <a:r>
-              <a:rPr sz="1500" dirty="0">
-                <a:solidFill>
-                  <a:srgbClr val="1A1A1A"/>
-                </a:solidFill>
-              </a:rPr>
-              <a:t>. In production we'd land</a:t>
-            </a:r>
-          </a:p>
-          <a:p>
-            <a:pPr>
-              <a:spcAft>
-                <a:spcPts val="400"/>
-              </a:spcAft>
-            </a:pPr>
-            <a:r>
-              <a:rPr sz="1500" dirty="0">
-                <a:solidFill>
-                  <a:srgbClr val="1A1A1A"/>
-                </a:solidFill>
-              </a:rPr>
-              <a:t>raw .</a:t>
-            </a:r>
-            <a:r>
-              <a:rPr sz="1500" dirty="0" err="1">
-                <a:solidFill>
-                  <a:srgbClr val="1A1A1A"/>
-                </a:solidFill>
-              </a:rPr>
-              <a:t>gz</a:t>
-            </a:r>
-            <a:r>
-              <a:rPr sz="1500" dirty="0">
-                <a:solidFill>
-                  <a:srgbClr val="1A1A1A"/>
-                </a:solidFill>
-              </a:rPr>
-              <a:t> files as bzip2 or Snappy parquet on ingest to fix this.</a:t>
+              <a:t>raw .gz files as bzip2 or Snappy parquet on ingest to fix this.</a:t>
             </a:r>
           </a:p>
         </p:txBody>
@@ -12126,7 +12801,7 @@
                   <a:srgbClr val="6B7280"/>
                 </a:solidFill>
               </a:rPr>
-              <a:t>8 / 19</a:t>
+              <a:t>8 / 20</a:t>
             </a:r>
           </a:p>
         </p:txBody>
@@ -12140,7 +12815,7 @@
 </file>
 
 <file path=ppt/slides/slide9.xml><?xml version="1.0" encoding="utf-8"?>
-<p:sld xmlns:a="http://schemas.openxmlformats.org/drawingml/2006/main" xmlns:r="http://schemas.openxmlformats.org/officeDocument/2006/relationships" xmlns:p="http://schemas.openxmlformats.org/presentationml/2006/main">
+<p:sld xmlns:a="http://schemas.openxmlformats.org/drawingml/2006/main" xmlns:p="http://schemas.openxmlformats.org/presentationml/2006/main" xmlns:r="http://schemas.openxmlformats.org/officeDocument/2006/relationships">
   <p:cSld>
     <p:spTree>
       <p:nvGrpSpPr>
@@ -12148,14 +12823,7 @@
         <p:cNvGrpSpPr/>
         <p:nvPr/>
       </p:nvGrpSpPr>
-      <p:grpSpPr>
-        <a:xfrm>
-          <a:off x="0" y="0"/>
-          <a:ext cx="0" cy="0"/>
-          <a:chOff x="0" y="0"/>
-          <a:chExt cx="0" cy="0"/>
-        </a:xfrm>
-      </p:grpSpPr>
+      <p:grpSpPr/>
       <p:sp>
         <p:nvSpPr>
           <p:cNvPr id="2" name="Rectangle 1"/>
@@ -12196,7 +12864,6 @@
           <a:lstStyle/>
           <a:p>
             <a:pPr algn="ctr"/>
-            <a:endParaRPr/>
           </a:p>
         </p:txBody>
       </p:sp>
@@ -12240,7 +12907,6 @@
           <a:lstStyle/>
           <a:p>
             <a:pPr algn="ctr"/>
-            <a:endParaRPr/>
           </a:p>
         </p:txBody>
       </p:sp>
@@ -12505,7 +13171,7 @@
                   <a:srgbClr val="6B7280"/>
                 </a:solidFill>
               </a:rPr>
-              <a:t>9 / 19</a:t>
+              <a:t>9 / 20</a:t>
             </a:r>
           </a:p>
         </p:txBody>
@@ -12849,44 +13515,44 @@
         <a:sysClr val="window" lastClr="FFFFFF"/>
       </a:lt1>
       <a:dk2>
-        <a:srgbClr val="0E2841"/>
+        <a:srgbClr val="1F497D"/>
       </a:dk2>
       <a:lt2>
-        <a:srgbClr val="E8E8E8"/>
+        <a:srgbClr val="EEECE1"/>
       </a:lt2>
       <a:accent1>
-        <a:srgbClr val="156082"/>
+        <a:srgbClr val="4F81BD"/>
       </a:accent1>
       <a:accent2>
-        <a:srgbClr val="E97132"/>
+        <a:srgbClr val="C0504D"/>
       </a:accent2>
       <a:accent3>
-        <a:srgbClr val="196B24"/>
+        <a:srgbClr val="9BBB59"/>
       </a:accent3>
       <a:accent4>
-        <a:srgbClr val="0F9ED5"/>
+        <a:srgbClr val="8064A2"/>
       </a:accent4>
       <a:accent5>
-        <a:srgbClr val="A02B93"/>
+        <a:srgbClr val="4BACC6"/>
       </a:accent5>
       <a:accent6>
-        <a:srgbClr val="4EA72E"/>
+        <a:srgbClr val="F79646"/>
       </a:accent6>
       <a:hlink>
-        <a:srgbClr val="467886"/>
+        <a:srgbClr val="0000FF"/>
       </a:hlink>
       <a:folHlink>
-        <a:srgbClr val="96607D"/>
+        <a:srgbClr val="800080"/>
       </a:folHlink>
     </a:clrScheme>
     <a:fontScheme name="Office">
       <a:majorFont>
-        <a:latin typeface="Aptos Display" panose="02110004020202020204"/>
+        <a:latin typeface="Calibri"/>
         <a:ea typeface=""/>
         <a:cs typeface=""/>
-        <a:font script="Jpan" typeface="游ゴシック Light"/>
+        <a:font script="Jpan" typeface="ＭＳ Ｐゴシック"/>
         <a:font script="Hang" typeface="맑은 고딕"/>
-        <a:font script="Hans" typeface="等线 Light"/>
+        <a:font script="Hans" typeface="宋体"/>
         <a:font script="Hant" typeface="新細明體"/>
         <a:font script="Arab" typeface="Times New Roman"/>
         <a:font script="Hebr" typeface="Times New Roman"/>
@@ -12914,31 +13580,14 @@
         <a:font script="Viet" typeface="Times New Roman"/>
         <a:font script="Uigh" typeface="Microsoft Uighur"/>
         <a:font script="Geor" typeface="Sylfaen"/>
-        <a:font script="Armn" typeface="Arial"/>
-        <a:font script="Bugi" typeface="Leelawadee UI"/>
-        <a:font script="Bopo" typeface="Microsoft JhengHei"/>
-        <a:font script="Java" typeface="Javanese Text"/>
-        <a:font script="Lisu" typeface="Segoe UI"/>
-        <a:font script="Mymr" typeface="Myanmar Text"/>
-        <a:font script="Nkoo" typeface="Ebrima"/>
-        <a:font script="Olck" typeface="Nirmala UI"/>
-        <a:font script="Osma" typeface="Ebrima"/>
-        <a:font script="Phag" typeface="Phagspa"/>
-        <a:font script="Syrn" typeface="Estrangelo Edessa"/>
-        <a:font script="Syrj" typeface="Estrangelo Edessa"/>
-        <a:font script="Syre" typeface="Estrangelo Edessa"/>
-        <a:font script="Sora" typeface="Nirmala UI"/>
-        <a:font script="Tale" typeface="Microsoft Tai Le"/>
-        <a:font script="Talu" typeface="Microsoft New Tai Lue"/>
-        <a:font script="Tfng" typeface="Ebrima"/>
       </a:majorFont>
       <a:minorFont>
-        <a:latin typeface="Aptos" panose="02110004020202020204"/>
+        <a:latin typeface="Calibri"/>
         <a:ea typeface=""/>
         <a:cs typeface=""/>
-        <a:font script="Jpan" typeface="游ゴシック"/>
+        <a:font script="Jpan" typeface="ＭＳ Ｐゴシック"/>
         <a:font script="Hang" typeface="맑은 고딕"/>
-        <a:font script="Hans" typeface="等线"/>
+        <a:font script="Hans" typeface="宋体"/>
         <a:font script="Hant" typeface="新細明體"/>
         <a:font script="Arab" typeface="Arial"/>
         <a:font script="Hebr" typeface="Arial"/>
@@ -12966,23 +13615,6 @@
         <a:font script="Viet" typeface="Arial"/>
         <a:font script="Uigh" typeface="Microsoft Uighur"/>
         <a:font script="Geor" typeface="Sylfaen"/>
-        <a:font script="Armn" typeface="Arial"/>
-        <a:font script="Bugi" typeface="Leelawadee UI"/>
-        <a:font script="Bopo" typeface="Microsoft JhengHei"/>
-        <a:font script="Java" typeface="Javanese Text"/>
-        <a:font script="Lisu" typeface="Segoe UI"/>
-        <a:font script="Mymr" typeface="Myanmar Text"/>
-        <a:font script="Nkoo" typeface="Ebrima"/>
-        <a:font script="Olck" typeface="Nirmala UI"/>
-        <a:font script="Osma" typeface="Ebrima"/>
-        <a:font script="Phag" typeface="Phagspa"/>
-        <a:font script="Syrn" typeface="Estrangelo Edessa"/>
-        <a:font script="Syrj" typeface="Estrangelo Edessa"/>
-        <a:font script="Syre" typeface="Estrangelo Edessa"/>
-        <a:font script="Sora" typeface="Nirmala UI"/>
-        <a:font script="Tale" typeface="Microsoft Tai Le"/>
-        <a:font script="Talu" typeface="Microsoft New Tai Lue"/>
-        <a:font script="Tfng" typeface="Ebrima"/>
       </a:minorFont>
     </a:fontScheme>
     <a:fmtScheme name="Office">
@@ -12994,136 +13626,180 @@
           <a:gsLst>
             <a:gs pos="0">
               <a:schemeClr val="phClr">
-                <a:lumMod val="110000"/>
-                <a:satMod val="105000"/>
-                <a:tint val="67000"/>
+                <a:tint val="50000"/>
+                <a:satMod val="300000"/>
               </a:schemeClr>
             </a:gs>
-            <a:gs pos="50000">
+            <a:gs pos="35000">
               <a:schemeClr val="phClr">
-                <a:lumMod val="105000"/>
-                <a:satMod val="103000"/>
-                <a:tint val="73000"/>
+                <a:tint val="37000"/>
+                <a:satMod val="300000"/>
               </a:schemeClr>
             </a:gs>
             <a:gs pos="100000">
               <a:schemeClr val="phClr">
-                <a:lumMod val="105000"/>
-                <a:satMod val="109000"/>
-                <a:tint val="81000"/>
+                <a:tint val="15000"/>
+                <a:satMod val="350000"/>
               </a:schemeClr>
             </a:gs>
           </a:gsLst>
-          <a:lin ang="5400000" scaled="0"/>
+          <a:lin ang="16200000" scaled="1"/>
         </a:gradFill>
         <a:gradFill rotWithShape="1">
           <a:gsLst>
             <a:gs pos="0">
               <a:schemeClr val="phClr">
-                <a:satMod val="103000"/>
-                <a:lumMod val="102000"/>
-                <a:tint val="94000"/>
-              </a:schemeClr>
-            </a:gs>
-            <a:gs pos="50000">
-              <a:schemeClr val="phClr">
-                <a:satMod val="110000"/>
-                <a:lumMod val="100000"/>
+                <a:tint val="100000"/>
                 <a:shade val="100000"/>
+                <a:satMod val="130000"/>
               </a:schemeClr>
             </a:gs>
             <a:gs pos="100000">
               <a:schemeClr val="phClr">
-                <a:lumMod val="99000"/>
-                <a:satMod val="120000"/>
-                <a:shade val="78000"/>
+                <a:tint val="50000"/>
+                <a:shade val="100000"/>
+                <a:satMod val="350000"/>
               </a:schemeClr>
             </a:gs>
           </a:gsLst>
-          <a:lin ang="5400000" scaled="0"/>
+          <a:lin ang="16200000" scaled="0"/>
         </a:gradFill>
       </a:fillStyleLst>
       <a:lnStyleLst>
-        <a:ln w="12700" cap="flat" cmpd="sng" algn="ctr">
+        <a:ln w="9525" cap="flat" cmpd="sng" algn="ctr">
           <a:solidFill>
-            <a:schemeClr val="phClr"/>
+            <a:schemeClr val="phClr">
+              <a:shade val="95000"/>
+              <a:satMod val="105000"/>
+            </a:schemeClr>
           </a:solidFill>
           <a:prstDash val="solid"/>
-          <a:miter lim="800000"/>
-        </a:ln>
-        <a:ln w="19050" cap="flat" cmpd="sng" algn="ctr">
-          <a:solidFill>
-            <a:schemeClr val="phClr"/>
-          </a:solidFill>
-          <a:prstDash val="solid"/>
-          <a:miter lim="800000"/>
         </a:ln>
         <a:ln w="25400" cap="flat" cmpd="sng" algn="ctr">
           <a:solidFill>
             <a:schemeClr val="phClr"/>
           </a:solidFill>
           <a:prstDash val="solid"/>
-          <a:miter lim="800000"/>
+        </a:ln>
+        <a:ln w="38100" cap="flat" cmpd="sng" algn="ctr">
+          <a:solidFill>
+            <a:schemeClr val="phClr"/>
+          </a:solidFill>
+          <a:prstDash val="solid"/>
         </a:ln>
       </a:lnStyleLst>
       <a:effectStyleLst>
         <a:effectStyle>
-          <a:effectLst/>
-        </a:effectStyle>
-        <a:effectStyle>
-          <a:effectLst/>
+          <a:effectLst>
+            <a:outerShdw blurRad="40000" dist="20000" dir="5400000" rotWithShape="0">
+              <a:srgbClr val="000000">
+                <a:alpha val="38000"/>
+              </a:srgbClr>
+            </a:outerShdw>
+          </a:effectLst>
         </a:effectStyle>
         <a:effectStyle>
           <a:effectLst>
-            <a:outerShdw blurRad="57150" dist="19050" dir="5400000" algn="ctr" rotWithShape="0">
+            <a:outerShdw blurRad="40000" dist="23000" dir="5400000" rotWithShape="0">
               <a:srgbClr val="000000">
-                <a:alpha val="63000"/>
+                <a:alpha val="35000"/>
               </a:srgbClr>
             </a:outerShdw>
           </a:effectLst>
+        </a:effectStyle>
+        <a:effectStyle>
+          <a:effectLst>
+            <a:outerShdw blurRad="40000" dist="23000" dir="5400000" rotWithShape="0">
+              <a:srgbClr val="000000">
+                <a:alpha val="35000"/>
+              </a:srgbClr>
+            </a:outerShdw>
+          </a:effectLst>
+          <a:scene3d>
+            <a:camera prst="orthographicFront">
+              <a:rot lat="0" lon="0" rev="0"/>
+            </a:camera>
+            <a:lightRig rig="threePt" dir="t">
+              <a:rot lat="0" lon="0" rev="1200000"/>
+            </a:lightRig>
+          </a:scene3d>
+          <a:sp3d>
+            <a:bevelT w="63500" h="25400"/>
+          </a:sp3d>
         </a:effectStyle>
       </a:effectStyleLst>
       <a:bgFillStyleLst>
         <a:solidFill>
           <a:schemeClr val="phClr"/>
         </a:solidFill>
-        <a:solidFill>
-          <a:schemeClr val="phClr">
-            <a:tint val="95000"/>
-            <a:satMod val="170000"/>
-          </a:schemeClr>
-        </a:solidFill>
         <a:gradFill rotWithShape="1">
           <a:gsLst>
             <a:gs pos="0">
               <a:schemeClr val="phClr">
-                <a:tint val="93000"/>
-                <a:satMod val="150000"/>
-                <a:shade val="98000"/>
-                <a:lumMod val="102000"/>
+                <a:tint val="40000"/>
+                <a:satMod val="350000"/>
               </a:schemeClr>
             </a:gs>
-            <a:gs pos="50000">
+            <a:gs pos="40000">
               <a:schemeClr val="phClr">
-                <a:tint val="98000"/>
-                <a:satMod val="130000"/>
-                <a:shade val="90000"/>
-                <a:lumMod val="103000"/>
+                <a:tint val="45000"/>
+                <a:shade val="99000"/>
+                <a:satMod val="350000"/>
               </a:schemeClr>
             </a:gs>
             <a:gs pos="100000">
               <a:schemeClr val="phClr">
-                <a:shade val="63000"/>
-                <a:satMod val="120000"/>
+                <a:shade val="20000"/>
+                <a:satMod val="255000"/>
               </a:schemeClr>
             </a:gs>
           </a:gsLst>
-          <a:lin ang="5400000" scaled="0"/>
+          <a:path path="circle">
+            <a:fillToRect l="50000" t="-80000" r="50000" b="180000"/>
+          </a:path>
+        </a:gradFill>
+        <a:gradFill rotWithShape="1">
+          <a:gsLst>
+            <a:gs pos="0">
+              <a:schemeClr val="phClr">
+                <a:tint val="80000"/>
+                <a:satMod val="300000"/>
+              </a:schemeClr>
+            </a:gs>
+            <a:gs pos="100000">
+              <a:schemeClr val="phClr">
+                <a:shade val="30000"/>
+                <a:satMod val="200000"/>
+              </a:schemeClr>
+            </a:gs>
+          </a:gsLst>
+          <a:path path="circle">
+            <a:fillToRect l="50000" t="50000" r="50000" b="50000"/>
+          </a:path>
         </a:gradFill>
       </a:bgFillStyleLst>
     </a:fmtScheme>
   </a:themeElements>
   <a:objectDefaults>
+    <a:spDef>
+      <a:spPr/>
+      <a:bodyPr/>
+      <a:lstStyle/>
+      <a:style>
+        <a:lnRef idx="1">
+          <a:schemeClr val="accent1"/>
+        </a:lnRef>
+        <a:fillRef idx="3">
+          <a:schemeClr val="accent1"/>
+        </a:fillRef>
+        <a:effectRef idx="2">
+          <a:schemeClr val="accent1"/>
+        </a:effectRef>
+        <a:fontRef idx="minor">
+          <a:schemeClr val="lt1"/>
+        </a:fontRef>
+      </a:style>
+    </a:spDef>
     <a:lnDef>
       <a:spPr/>
       <a:bodyPr/>
@@ -13145,10 +13821,5 @@
     </a:lnDef>
   </a:objectDefaults>
   <a:extraClrSchemeLst/>
-  <a:extLst>
-    <a:ext uri="{05A4C25C-085E-4340-85A3-A5531E510DB2}">
-      <thm15:themeFamily xmlns:thm15="http://schemas.microsoft.com/office/thememl/2012/main" name="Office Theme" id="{2E142A2C-CD16-42D6-873A-C26D2A0506FA}" vid="{1BDDFF52-6CD6-40A5-AB3C-68EB2F1E4D0A}"/>
-    </a:ext>
-  </a:extLst>
 </a:theme>
 </file>